--- a/Introduccion a la Ingenieria/Clases/Clase 3 - Fundamentos basicos de la Ingenieria de Sistemas/Presentacion.pptx
+++ b/Introduccion a la Ingenieria/Clases/Clase 3 - Fundamentos basicos de la Ingenieria de Sistemas/Presentacion.pptx
@@ -18,6 +18,15 @@
     <p:sldId id="266" r:id="rId17"/>
     <p:sldId id="267" r:id="rId18"/>
     <p:sldId id="268" r:id="rId19"/>
+    <p:sldId id="269" r:id="rId20"/>
+    <p:sldId id="270" r:id="rId21"/>
+    <p:sldId id="271" r:id="rId22"/>
+    <p:sldId id="272" r:id="rId23"/>
+    <p:sldId id="273" r:id="rId24"/>
+    <p:sldId id="274" r:id="rId25"/>
+    <p:sldId id="275" r:id="rId26"/>
+    <p:sldId id="276" r:id="rId27"/>
+    <p:sldId id="277" r:id="rId28"/>
   </p:sldIdLst>
   <p:sldSz cx="12191695" cy="6858000" type="screen4x3"/>
   <p:notesSz cx="6858000" cy="9144000"/>
@@ -3512,7 +3521,7 @@
         <p:spPr>
           <a:xfrm>
             <a:off x="0" y="0"/>
-            <a:ext cx="12191695" cy="1170432"/>
+            <a:ext cx="12191695" cy="960120"/>
           </a:xfrm>
           <a:prstGeom prst="rect">
             <a:avLst/>
@@ -3554,7 +3563,7 @@
         </p:nvSpPr>
         <p:spPr>
           <a:xfrm>
-            <a:off x="0" y="1170432"/>
+            <a:off x="0" y="960120"/>
             <a:ext cx="12191695" cy="41148"/>
           </a:xfrm>
           <a:prstGeom prst="rect">
@@ -3598,7 +3607,7 @@
         <p:spPr>
           <a:xfrm>
             <a:off x="457200" y="164592"/>
-            <a:ext cx="11277295" cy="384048"/>
+            <a:ext cx="11277295" cy="502920"/>
           </a:xfrm>
           <a:prstGeom prst="rect">
             <a:avLst/>
@@ -3618,7 +3627,7 @@
                 </a:solidFill>
                 <a:latin typeface="Calibri"/>
               </a:rPr>
-              <a:t>Taller de hoy: Anatomía del sistema</a:t>
+              <a:t>La pregunta de entrada y por qué esos tres ejemplos</a:t>
             </a:r>
           </a:p>
         </p:txBody>
@@ -3631,8 +3640,8 @@
         </p:nvSpPr>
         <p:spPr>
           <a:xfrm>
-            <a:off x="457200" y="566928"/>
-            <a:ext cx="11277295" cy="411480"/>
+            <a:off x="457200" y="1170432"/>
+            <a:ext cx="11277295" cy="5230368"/>
           </a:xfrm>
           <a:prstGeom prst="rect">
             <a:avLst/>
@@ -3645,981 +3654,108 @@
           </a:bodyPr>
           <a:lstStyle/>
           <a:p>
-            <a:r>
-              <a:rPr sz="1400" b="0" i="0">
-                <a:solidFill>
-                  <a:srgbClr val="B8D8EE"/>
-                </a:solidFill>
-                <a:latin typeface="Calibri"/>
-              </a:rPr>
-              <a:t>17 min en equipos · cada equipo trabaja su propio problema de la sesión 1 · ficha del sistema + prompt + correcciones</a:t>
-            </a:r>
-          </a:p>
-        </p:txBody>
-      </p:sp>
-      <p:sp>
-        <p:nvSpPr>
-          <p:cNvPr id="6" name="Rounded Rectangle 5"/>
-          <p:cNvSpPr/>
-          <p:nvPr/>
-        </p:nvSpPr>
-        <p:spPr>
-          <a:xfrm>
-            <a:off x="457200" y="1472184"/>
-            <a:ext cx="11277295" cy="566928"/>
-          </a:xfrm>
-          <a:prstGeom prst="roundRect">
-            <a:avLst>
-              <a:gd name="adj" fmla="val 12000"/>
-            </a:avLst>
-          </a:prstGeom>
-          <a:solidFill>
-            <a:srgbClr val="F2F2F2"/>
-          </a:solidFill>
-          <a:ln>
-            <a:noFill/>
-          </a:ln>
-        </p:spPr>
-        <p:style>
-          <a:lnRef idx="1">
-            <a:schemeClr val="accent1"/>
-          </a:lnRef>
-          <a:fillRef idx="3">
-            <a:schemeClr val="accent1"/>
-          </a:fillRef>
-          <a:effectRef idx="2">
-            <a:schemeClr val="accent1"/>
-          </a:effectRef>
-          <a:fontRef idx="minor">
-            <a:schemeClr val="lt1"/>
-          </a:fontRef>
-        </p:style>
-        <p:txBody>
-          <a:bodyPr rtlCol="0" anchor="ctr"/>
-          <a:lstStyle/>
-          <a:p>
-            <a:pPr algn="ctr"/>
-          </a:p>
-        </p:txBody>
-      </p:sp>
-      <p:sp>
-        <p:nvSpPr>
-          <p:cNvPr id="7" name="Rectangle 6"/>
-          <p:cNvSpPr/>
-          <p:nvPr/>
-        </p:nvSpPr>
-        <p:spPr>
-          <a:xfrm>
-            <a:off x="640080" y="1618487"/>
-            <a:ext cx="274320" cy="274320"/>
-          </a:xfrm>
-          <a:prstGeom prst="rect">
-            <a:avLst/>
-          </a:prstGeom>
-          <a:solidFill>
-            <a:srgbClr val="FFFFFF"/>
-          </a:solidFill>
-          <a:ln>
-            <a:solidFill>
-              <a:srgbClr val="333333"/>
-            </a:solidFill>
-          </a:ln>
-        </p:spPr>
-        <p:style>
-          <a:lnRef idx="1">
-            <a:schemeClr val="accent1"/>
-          </a:lnRef>
-          <a:fillRef idx="3">
-            <a:schemeClr val="accent1"/>
-          </a:fillRef>
-          <a:effectRef idx="2">
-            <a:schemeClr val="accent1"/>
-          </a:effectRef>
-          <a:fontRef idx="minor">
-            <a:schemeClr val="lt1"/>
-          </a:fontRef>
-        </p:style>
-        <p:txBody>
-          <a:bodyPr rtlCol="0" anchor="ctr"/>
-          <a:lstStyle/>
-          <a:p>
-            <a:pPr algn="ctr"/>
-          </a:p>
-        </p:txBody>
-      </p:sp>
-      <p:sp>
-        <p:nvSpPr>
-          <p:cNvPr id="8" name="Rectangle 7"/>
-          <p:cNvSpPr/>
-          <p:nvPr/>
-        </p:nvSpPr>
-        <p:spPr>
-          <a:xfrm>
-            <a:off x="640080" y="1618487"/>
-            <a:ext cx="73152" cy="274320"/>
-          </a:xfrm>
-          <a:prstGeom prst="rect">
-            <a:avLst/>
-          </a:prstGeom>
-          <a:solidFill>
-            <a:srgbClr val="269CCB"/>
-          </a:solidFill>
-          <a:ln>
-            <a:noFill/>
-          </a:ln>
-        </p:spPr>
-        <p:style>
-          <a:lnRef idx="1">
-            <a:schemeClr val="accent1"/>
-          </a:lnRef>
-          <a:fillRef idx="3">
-            <a:schemeClr val="accent1"/>
-          </a:fillRef>
-          <a:effectRef idx="2">
-            <a:schemeClr val="accent1"/>
-          </a:effectRef>
-          <a:fontRef idx="minor">
-            <a:schemeClr val="lt1"/>
-          </a:fontRef>
-        </p:style>
-        <p:txBody>
-          <a:bodyPr rtlCol="0" anchor="ctr"/>
-          <a:lstStyle/>
-          <a:p>
-            <a:pPr algn="ctr"/>
-          </a:p>
-        </p:txBody>
-      </p:sp>
-      <p:sp>
-        <p:nvSpPr>
-          <p:cNvPr id="9" name="TextBox 8"/>
-          <p:cNvSpPr txBox="1"/>
-          <p:nvPr/>
-        </p:nvSpPr>
-        <p:spPr>
-          <a:xfrm>
-            <a:off x="1097280" y="1563624"/>
-            <a:ext cx="10362895" cy="402336"/>
-          </a:xfrm>
-          <a:prstGeom prst="rect">
-            <a:avLst/>
-          </a:prstGeom>
-          <a:noFill/>
-        </p:spPr>
-        <p:txBody>
-          <a:bodyPr wrap="square" anchor="ctr"/>
-          <a:lstStyle/>
-          <a:p>
-            <a:r>
-              <a:rPr sz="1500" b="1" i="0">
-                <a:solidFill>
-                  <a:srgbClr val="333333"/>
-                </a:solidFill>
-                <a:latin typeface="Calibri"/>
-              </a:rPr>
-              <a:t>PROPÓSITO Y FRONTERA</a:t>
-            </a:r>
-            <a:r>
-              <a:rPr sz="1500" b="0" i="0">
-                <a:solidFill>
-                  <a:srgbClr val="333333"/>
-                </a:solidFill>
-                <a:latin typeface="Calibri"/>
-              </a:rPr>
-              <a:t> — Para qué existe el sistema, en una frase. Y qué queda </a:t>
-            </a:r>
-            <a:r>
-              <a:rPr sz="1500" b="1" i="0">
-                <a:solidFill>
-                  <a:srgbClr val="333333"/>
-                </a:solidFill>
-                <a:latin typeface="Calibri"/>
-              </a:rPr>
-              <a:t>dentro</a:t>
-            </a:r>
-            <a:r>
-              <a:rPr sz="1500" b="0" i="0">
-                <a:solidFill>
-                  <a:srgbClr val="333333"/>
-                </a:solidFill>
-                <a:latin typeface="Calibri"/>
-              </a:rPr>
-              <a:t> y qué </a:t>
-            </a:r>
-            <a:r>
-              <a:rPr sz="1500" b="1" i="0">
-                <a:solidFill>
-                  <a:srgbClr val="333333"/>
-                </a:solidFill>
-                <a:latin typeface="Calibri"/>
-              </a:rPr>
-              <a:t>fuera</a:t>
-            </a:r>
-            <a:r>
-              <a:rPr sz="1500" b="0" i="0">
-                <a:solidFill>
-                  <a:srgbClr val="333333"/>
-                </a:solidFill>
-                <a:latin typeface="Calibri"/>
-              </a:rPr>
-              <a:t> de él, con la razón de cada exclusión importante.</a:t>
-            </a:r>
-          </a:p>
-        </p:txBody>
-      </p:sp>
-      <p:sp>
-        <p:nvSpPr>
-          <p:cNvPr id="10" name="Rounded Rectangle 9"/>
-          <p:cNvSpPr/>
-          <p:nvPr/>
-        </p:nvSpPr>
-        <p:spPr>
-          <a:xfrm>
-            <a:off x="457200" y="2148839"/>
-            <a:ext cx="11277295" cy="566928"/>
-          </a:xfrm>
-          <a:prstGeom prst="roundRect">
-            <a:avLst>
-              <a:gd name="adj" fmla="val 12000"/>
-            </a:avLst>
-          </a:prstGeom>
-          <a:solidFill>
-            <a:srgbClr val="F2F2F2"/>
-          </a:solidFill>
-          <a:ln>
-            <a:noFill/>
-          </a:ln>
-        </p:spPr>
-        <p:style>
-          <a:lnRef idx="1">
-            <a:schemeClr val="accent1"/>
-          </a:lnRef>
-          <a:fillRef idx="3">
-            <a:schemeClr val="accent1"/>
-          </a:fillRef>
-          <a:effectRef idx="2">
-            <a:schemeClr val="accent1"/>
-          </a:effectRef>
-          <a:fontRef idx="minor">
-            <a:schemeClr val="lt1"/>
-          </a:fontRef>
-        </p:style>
-        <p:txBody>
-          <a:bodyPr rtlCol="0" anchor="ctr"/>
-          <a:lstStyle/>
-          <a:p>
-            <a:pPr algn="ctr"/>
-          </a:p>
-        </p:txBody>
-      </p:sp>
-      <p:sp>
-        <p:nvSpPr>
-          <p:cNvPr id="11" name="Rectangle 10"/>
-          <p:cNvSpPr/>
-          <p:nvPr/>
-        </p:nvSpPr>
-        <p:spPr>
-          <a:xfrm>
-            <a:off x="640080" y="2295144"/>
-            <a:ext cx="274320" cy="274320"/>
-          </a:xfrm>
-          <a:prstGeom prst="rect">
-            <a:avLst/>
-          </a:prstGeom>
-          <a:solidFill>
-            <a:srgbClr val="FFFFFF"/>
-          </a:solidFill>
-          <a:ln>
-            <a:solidFill>
-              <a:srgbClr val="333333"/>
-            </a:solidFill>
-          </a:ln>
-        </p:spPr>
-        <p:style>
-          <a:lnRef idx="1">
-            <a:schemeClr val="accent1"/>
-          </a:lnRef>
-          <a:fillRef idx="3">
-            <a:schemeClr val="accent1"/>
-          </a:fillRef>
-          <a:effectRef idx="2">
-            <a:schemeClr val="accent1"/>
-          </a:effectRef>
-          <a:fontRef idx="minor">
-            <a:schemeClr val="lt1"/>
-          </a:fontRef>
-        </p:style>
-        <p:txBody>
-          <a:bodyPr rtlCol="0" anchor="ctr"/>
-          <a:lstStyle/>
-          <a:p>
-            <a:pPr algn="ctr"/>
-          </a:p>
-        </p:txBody>
-      </p:sp>
-      <p:sp>
-        <p:nvSpPr>
-          <p:cNvPr id="12" name="Rectangle 11"/>
-          <p:cNvSpPr/>
-          <p:nvPr/>
-        </p:nvSpPr>
-        <p:spPr>
-          <a:xfrm>
-            <a:off x="640080" y="2295144"/>
-            <a:ext cx="73152" cy="274320"/>
-          </a:xfrm>
-          <a:prstGeom prst="rect">
-            <a:avLst/>
-          </a:prstGeom>
-          <a:solidFill>
-            <a:srgbClr val="269CCB"/>
-          </a:solidFill>
-          <a:ln>
-            <a:noFill/>
-          </a:ln>
-        </p:spPr>
-        <p:style>
-          <a:lnRef idx="1">
-            <a:schemeClr val="accent1"/>
-          </a:lnRef>
-          <a:fillRef idx="3">
-            <a:schemeClr val="accent1"/>
-          </a:fillRef>
-          <a:effectRef idx="2">
-            <a:schemeClr val="accent1"/>
-          </a:effectRef>
-          <a:fontRef idx="minor">
-            <a:schemeClr val="lt1"/>
-          </a:fontRef>
-        </p:style>
-        <p:txBody>
-          <a:bodyPr rtlCol="0" anchor="ctr"/>
-          <a:lstStyle/>
-          <a:p>
-            <a:pPr algn="ctr"/>
-          </a:p>
-        </p:txBody>
-      </p:sp>
-      <p:sp>
-        <p:nvSpPr>
-          <p:cNvPr id="13" name="TextBox 12"/>
-          <p:cNvSpPr txBox="1"/>
-          <p:nvPr/>
-        </p:nvSpPr>
-        <p:spPr>
-          <a:xfrm>
-            <a:off x="1097280" y="2240279"/>
-            <a:ext cx="10362895" cy="402336"/>
-          </a:xfrm>
-          <a:prstGeom prst="rect">
-            <a:avLst/>
-          </a:prstGeom>
-          <a:noFill/>
-        </p:spPr>
-        <p:txBody>
-          <a:bodyPr wrap="square" anchor="ctr"/>
-          <a:lstStyle/>
-          <a:p>
-            <a:r>
-              <a:rPr sz="1500" b="1" i="0">
-                <a:solidFill>
-                  <a:srgbClr val="333333"/>
-                </a:solidFill>
-                <a:latin typeface="Calibri"/>
-              </a:rPr>
-              <a:t>ENTRADAS, PROCESO Y SALIDAS</a:t>
-            </a:r>
-            <a:r>
-              <a:rPr sz="1500" b="0" i="0">
-                <a:solidFill>
-                  <a:srgbClr val="333333"/>
-                </a:solidFill>
-                <a:latin typeface="Calibri"/>
-              </a:rPr>
-              <a:t> — Qué entra, qué se hace con eso y qué sale. Señalen </a:t>
-            </a:r>
-            <a:r>
-              <a:rPr sz="1500" b="1" i="0">
-                <a:solidFill>
-                  <a:srgbClr val="333333"/>
-                </a:solidFill>
-                <a:latin typeface="Calibri"/>
-              </a:rPr>
-              <a:t>dónde está el software</a:t>
-            </a:r>
-            <a:r>
-              <a:rPr sz="1500" b="0" i="0">
-                <a:solidFill>
-                  <a:srgbClr val="333333"/>
-                </a:solidFill>
-                <a:latin typeface="Calibri"/>
-              </a:rPr>
-              <a:t>, si hay.</a:t>
-            </a:r>
-          </a:p>
-        </p:txBody>
-      </p:sp>
-      <p:sp>
-        <p:nvSpPr>
-          <p:cNvPr id="14" name="Rounded Rectangle 13"/>
-          <p:cNvSpPr/>
-          <p:nvPr/>
-        </p:nvSpPr>
-        <p:spPr>
-          <a:xfrm>
-            <a:off x="457200" y="2825496"/>
-            <a:ext cx="11277295" cy="566928"/>
-          </a:xfrm>
-          <a:prstGeom prst="roundRect">
-            <a:avLst>
-              <a:gd name="adj" fmla="val 12000"/>
-            </a:avLst>
-          </a:prstGeom>
-          <a:solidFill>
-            <a:srgbClr val="F2F2F2"/>
-          </a:solidFill>
-          <a:ln>
-            <a:noFill/>
-          </a:ln>
-        </p:spPr>
-        <p:style>
-          <a:lnRef idx="1">
-            <a:schemeClr val="accent1"/>
-          </a:lnRef>
-          <a:fillRef idx="3">
-            <a:schemeClr val="accent1"/>
-          </a:fillRef>
-          <a:effectRef idx="2">
-            <a:schemeClr val="accent1"/>
-          </a:effectRef>
-          <a:fontRef idx="minor">
-            <a:schemeClr val="lt1"/>
-          </a:fontRef>
-        </p:style>
-        <p:txBody>
-          <a:bodyPr rtlCol="0" anchor="ctr"/>
-          <a:lstStyle/>
-          <a:p>
-            <a:pPr algn="ctr"/>
-          </a:p>
-        </p:txBody>
-      </p:sp>
-      <p:sp>
-        <p:nvSpPr>
-          <p:cNvPr id="15" name="Rectangle 14"/>
-          <p:cNvSpPr/>
-          <p:nvPr/>
-        </p:nvSpPr>
-        <p:spPr>
-          <a:xfrm>
-            <a:off x="640080" y="2971800"/>
-            <a:ext cx="274320" cy="274320"/>
-          </a:xfrm>
-          <a:prstGeom prst="rect">
-            <a:avLst/>
-          </a:prstGeom>
-          <a:solidFill>
-            <a:srgbClr val="FFFFFF"/>
-          </a:solidFill>
-          <a:ln>
-            <a:solidFill>
-              <a:srgbClr val="333333"/>
-            </a:solidFill>
-          </a:ln>
-        </p:spPr>
-        <p:style>
-          <a:lnRef idx="1">
-            <a:schemeClr val="accent1"/>
-          </a:lnRef>
-          <a:fillRef idx="3">
-            <a:schemeClr val="accent1"/>
-          </a:fillRef>
-          <a:effectRef idx="2">
-            <a:schemeClr val="accent1"/>
-          </a:effectRef>
-          <a:fontRef idx="minor">
-            <a:schemeClr val="lt1"/>
-          </a:fontRef>
-        </p:style>
-        <p:txBody>
-          <a:bodyPr rtlCol="0" anchor="ctr"/>
-          <a:lstStyle/>
-          <a:p>
-            <a:pPr algn="ctr"/>
-          </a:p>
-        </p:txBody>
-      </p:sp>
-      <p:sp>
-        <p:nvSpPr>
-          <p:cNvPr id="16" name="Rectangle 15"/>
-          <p:cNvSpPr/>
-          <p:nvPr/>
-        </p:nvSpPr>
-        <p:spPr>
-          <a:xfrm>
-            <a:off x="640080" y="2971800"/>
-            <a:ext cx="73152" cy="274320"/>
-          </a:xfrm>
-          <a:prstGeom prst="rect">
-            <a:avLst/>
-          </a:prstGeom>
-          <a:solidFill>
-            <a:srgbClr val="269CCB"/>
-          </a:solidFill>
-          <a:ln>
-            <a:noFill/>
-          </a:ln>
-        </p:spPr>
-        <p:style>
-          <a:lnRef idx="1">
-            <a:schemeClr val="accent1"/>
-          </a:lnRef>
-          <a:fillRef idx="3">
-            <a:schemeClr val="accent1"/>
-          </a:fillRef>
-          <a:effectRef idx="2">
-            <a:schemeClr val="accent1"/>
-          </a:effectRef>
-          <a:fontRef idx="minor">
-            <a:schemeClr val="lt1"/>
-          </a:fontRef>
-        </p:style>
-        <p:txBody>
-          <a:bodyPr rtlCol="0" anchor="ctr"/>
-          <a:lstStyle/>
-          <a:p>
-            <a:pPr algn="ctr"/>
-          </a:p>
-        </p:txBody>
-      </p:sp>
-      <p:sp>
-        <p:nvSpPr>
-          <p:cNvPr id="17" name="TextBox 16"/>
-          <p:cNvSpPr txBox="1"/>
-          <p:nvPr/>
-        </p:nvSpPr>
-        <p:spPr>
-          <a:xfrm>
-            <a:off x="1097280" y="2916936"/>
-            <a:ext cx="10362895" cy="402336"/>
-          </a:xfrm>
-          <a:prstGeom prst="rect">
-            <a:avLst/>
-          </a:prstGeom>
-          <a:noFill/>
-        </p:spPr>
-        <p:txBody>
-          <a:bodyPr wrap="square" anchor="ctr"/>
-          <a:lstStyle/>
-          <a:p>
-            <a:r>
-              <a:rPr sz="1500" b="1" i="0">
-                <a:solidFill>
-                  <a:srgbClr val="333333"/>
-                </a:solidFill>
-                <a:latin typeface="Calibri"/>
-              </a:rPr>
-              <a:t>LOS ACTORES</a:t>
-            </a:r>
-            <a:r>
-              <a:rPr sz="1500" b="0" i="0">
-                <a:solidFill>
-                  <a:srgbClr val="333333"/>
-                </a:solidFill>
-                <a:latin typeface="Calibri"/>
-              </a:rPr>
-              <a:t> — Todos los afectados, con su rol y qué le importa a cada uno. Incluyan </a:t>
-            </a:r>
-            <a:r>
-              <a:rPr sz="1500" b="1" i="0">
-                <a:solidFill>
-                  <a:srgbClr val="333333"/>
-                </a:solidFill>
-                <a:latin typeface="Calibri"/>
-              </a:rPr>
-              <a:t>al menos uno que no use el sistema pero sí sufra el resultado</a:t>
-            </a:r>
-            <a:r>
-              <a:rPr sz="1500" b="0" i="0">
-                <a:solidFill>
-                  <a:srgbClr val="333333"/>
-                </a:solidFill>
-                <a:latin typeface="Calibri"/>
-              </a:rPr>
-              <a:t>.</a:t>
-            </a:r>
-          </a:p>
-        </p:txBody>
-      </p:sp>
-      <p:sp>
-        <p:nvSpPr>
-          <p:cNvPr id="18" name="Rounded Rectangle 17"/>
-          <p:cNvSpPr/>
-          <p:nvPr/>
-        </p:nvSpPr>
-        <p:spPr>
-          <a:xfrm>
-            <a:off x="457200" y="3502152"/>
-            <a:ext cx="11277295" cy="566928"/>
-          </a:xfrm>
-          <a:prstGeom prst="roundRect">
-            <a:avLst>
-              <a:gd name="adj" fmla="val 12000"/>
-            </a:avLst>
-          </a:prstGeom>
-          <a:solidFill>
-            <a:srgbClr val="F2F2F2"/>
-          </a:solidFill>
-          <a:ln>
-            <a:noFill/>
-          </a:ln>
-        </p:spPr>
-        <p:style>
-          <a:lnRef idx="1">
-            <a:schemeClr val="accent1"/>
-          </a:lnRef>
-          <a:fillRef idx="3">
-            <a:schemeClr val="accent1"/>
-          </a:fillRef>
-          <a:effectRef idx="2">
-            <a:schemeClr val="accent1"/>
-          </a:effectRef>
-          <a:fontRef idx="minor">
-            <a:schemeClr val="lt1"/>
-          </a:fontRef>
-        </p:style>
-        <p:txBody>
-          <a:bodyPr rtlCol="0" anchor="ctr"/>
-          <a:lstStyle/>
-          <a:p>
-            <a:pPr algn="ctr"/>
-          </a:p>
-        </p:txBody>
-      </p:sp>
-      <p:sp>
-        <p:nvSpPr>
-          <p:cNvPr id="19" name="Rectangle 18"/>
-          <p:cNvSpPr/>
-          <p:nvPr/>
-        </p:nvSpPr>
-        <p:spPr>
-          <a:xfrm>
-            <a:off x="640080" y="3648456"/>
-            <a:ext cx="274320" cy="274320"/>
-          </a:xfrm>
-          <a:prstGeom prst="rect">
-            <a:avLst/>
-          </a:prstGeom>
-          <a:solidFill>
-            <a:srgbClr val="FFFFFF"/>
-          </a:solidFill>
-          <a:ln>
-            <a:solidFill>
-              <a:srgbClr val="333333"/>
-            </a:solidFill>
-          </a:ln>
-        </p:spPr>
-        <p:style>
-          <a:lnRef idx="1">
-            <a:schemeClr val="accent1"/>
-          </a:lnRef>
-          <a:fillRef idx="3">
-            <a:schemeClr val="accent1"/>
-          </a:fillRef>
-          <a:effectRef idx="2">
-            <a:schemeClr val="accent1"/>
-          </a:effectRef>
-          <a:fontRef idx="minor">
-            <a:schemeClr val="lt1"/>
-          </a:fontRef>
-        </p:style>
-        <p:txBody>
-          <a:bodyPr rtlCol="0" anchor="ctr"/>
-          <a:lstStyle/>
-          <a:p>
-            <a:pPr algn="ctr"/>
-          </a:p>
-        </p:txBody>
-      </p:sp>
-      <p:sp>
-        <p:nvSpPr>
-          <p:cNvPr id="20" name="Rectangle 19"/>
-          <p:cNvSpPr/>
-          <p:nvPr/>
-        </p:nvSpPr>
-        <p:spPr>
-          <a:xfrm>
-            <a:off x="640080" y="3648456"/>
-            <a:ext cx="73152" cy="274320"/>
-          </a:xfrm>
-          <a:prstGeom prst="rect">
-            <a:avLst/>
-          </a:prstGeom>
-          <a:solidFill>
-            <a:srgbClr val="269CCB"/>
-          </a:solidFill>
-          <a:ln>
-            <a:noFill/>
-          </a:ln>
-        </p:spPr>
-        <p:style>
-          <a:lnRef idx="1">
-            <a:schemeClr val="accent1"/>
-          </a:lnRef>
-          <a:fillRef idx="3">
-            <a:schemeClr val="accent1"/>
-          </a:fillRef>
-          <a:effectRef idx="2">
-            <a:schemeClr val="accent1"/>
-          </a:effectRef>
-          <a:fontRef idx="minor">
-            <a:schemeClr val="lt1"/>
-          </a:fontRef>
-        </p:style>
-        <p:txBody>
-          <a:bodyPr rtlCol="0" anchor="ctr"/>
-          <a:lstStyle/>
-          <a:p>
-            <a:pPr algn="ctr"/>
-          </a:p>
-        </p:txBody>
-      </p:sp>
-      <p:sp>
-        <p:nvSpPr>
-          <p:cNvPr id="21" name="TextBox 20"/>
-          <p:cNvSpPr txBox="1"/>
-          <p:nvPr/>
-        </p:nvSpPr>
-        <p:spPr>
-          <a:xfrm>
-            <a:off x="1097280" y="3593592"/>
-            <a:ext cx="10362895" cy="402336"/>
-          </a:xfrm>
-          <a:prstGeom prst="rect">
-            <a:avLst/>
-          </a:prstGeom>
-          <a:noFill/>
-        </p:spPr>
-        <p:txBody>
-          <a:bodyPr wrap="square" anchor="ctr"/>
-          <a:lstStyle/>
-          <a:p>
-            <a:r>
-              <a:rPr sz="1500" b="1" i="0">
-                <a:solidFill>
-                  <a:srgbClr val="333333"/>
-                </a:solidFill>
-                <a:latin typeface="Calibri"/>
-              </a:rPr>
-              <a:t>LA RETROALIMENTACIÓN</a:t>
-            </a:r>
-            <a:r>
-              <a:rPr sz="1500" b="0" i="0">
-                <a:solidFill>
-                  <a:srgbClr val="333333"/>
-                </a:solidFill>
-                <a:latin typeface="Calibri"/>
-              </a:rPr>
-              <a:t> — ¿Cómo se entera este sistema de que algo salió mal? Si no se entera, escríbanlo: es un hallazgo, no un error suyo.</a:t>
-            </a:r>
-          </a:p>
-        </p:txBody>
-      </p:sp>
-      <p:sp>
-        <p:nvSpPr>
-          <p:cNvPr id="22" name="Rounded Rectangle 21"/>
-          <p:cNvSpPr/>
-          <p:nvPr/>
-        </p:nvSpPr>
-        <p:spPr>
-          <a:xfrm>
-            <a:off x="457200" y="4178808"/>
-            <a:ext cx="11277295" cy="566928"/>
-          </a:xfrm>
-          <a:prstGeom prst="roundRect">
-            <a:avLst>
-              <a:gd name="adj" fmla="val 12000"/>
-            </a:avLst>
-          </a:prstGeom>
-          <a:solidFill>
-            <a:srgbClr val="F2F2F2"/>
-          </a:solidFill>
-          <a:ln>
-            <a:noFill/>
-          </a:ln>
-        </p:spPr>
-        <p:style>
-          <a:lnRef idx="1">
-            <a:schemeClr val="accent1"/>
-          </a:lnRef>
-          <a:fillRef idx="3">
-            <a:schemeClr val="accent1"/>
-          </a:fillRef>
-          <a:effectRef idx="2">
-            <a:schemeClr val="accent1"/>
-          </a:effectRef>
-          <a:fontRef idx="minor">
-            <a:schemeClr val="lt1"/>
-          </a:fontRef>
-        </p:style>
-        <p:txBody>
-          <a:bodyPr rtlCol="0" anchor="ctr"/>
-          <a:lstStyle/>
-          <a:p>
-            <a:pPr algn="ctr"/>
-          </a:p>
-        </p:txBody>
-      </p:sp>
-      <p:sp>
-        <p:nvSpPr>
-          <p:cNvPr id="23" name="Rectangle 22"/>
-          <p:cNvSpPr/>
-          <p:nvPr/>
-        </p:nvSpPr>
-        <p:spPr>
-          <a:xfrm>
-            <a:off x="640080" y="4325112"/>
-            <a:ext cx="274320" cy="274320"/>
-          </a:xfrm>
-          <a:prstGeom prst="rect">
-            <a:avLst/>
-          </a:prstGeom>
-          <a:solidFill>
-            <a:srgbClr val="FFFFFF"/>
-          </a:solidFill>
-          <a:ln>
-            <a:solidFill>
-              <a:srgbClr val="333333"/>
-            </a:solidFill>
-          </a:ln>
-        </p:spPr>
-        <p:style>
-          <a:lnRef idx="1">
-            <a:schemeClr val="accent1"/>
-          </a:lnRef>
-          <a:fillRef idx="3">
-            <a:schemeClr val="accent1"/>
-          </a:fillRef>
-          <a:effectRef idx="2">
-            <a:schemeClr val="accent1"/>
-          </a:effectRef>
-          <a:fontRef idx="minor">
-            <a:schemeClr val="lt1"/>
-          </a:fontRef>
-        </p:style>
-        <p:txBody>
-          <a:bodyPr rtlCol="0" anchor="ctr"/>
-          <a:lstStyle/>
-          <a:p>
-            <a:pPr algn="ctr"/>
-          </a:p>
-        </p:txBody>
-      </p:sp>
-      <p:sp>
-        <p:nvSpPr>
-          <p:cNvPr id="24" name="Rectangle 23"/>
-          <p:cNvSpPr/>
-          <p:nvPr/>
-        </p:nvSpPr>
-        <p:spPr>
-          <a:xfrm>
-            <a:off x="640080" y="4325112"/>
-            <a:ext cx="73152" cy="274320"/>
-          </a:xfrm>
-          <a:prstGeom prst="rect">
-            <a:avLst/>
-          </a:prstGeom>
-          <a:solidFill>
-            <a:srgbClr val="269CCB"/>
-          </a:solidFill>
-          <a:ln>
-            <a:noFill/>
-          </a:ln>
-        </p:spPr>
-        <p:style>
-          <a:lnRef idx="1">
-            <a:schemeClr val="accent1"/>
-          </a:lnRef>
-          <a:fillRef idx="3">
-            <a:schemeClr val="accent1"/>
-          </a:fillRef>
-          <a:effectRef idx="2">
-            <a:schemeClr val="accent1"/>
-          </a:effectRef>
-          <a:fontRef idx="minor">
-            <a:schemeClr val="lt1"/>
-          </a:fontRef>
-        </p:style>
-        <p:txBody>
-          <a:bodyPr rtlCol="0" anchor="ctr"/>
-          <a:lstStyle/>
-          <a:p>
-            <a:pPr algn="ctr"/>
-          </a:p>
-        </p:txBody>
-      </p:sp>
-      <p:sp>
-        <p:nvSpPr>
-          <p:cNvPr id="25" name="TextBox 24"/>
-          <p:cNvSpPr txBox="1"/>
-          <p:nvPr/>
-        </p:nvSpPr>
-        <p:spPr>
-          <a:xfrm>
-            <a:off x="1097280" y="4270248"/>
-            <a:ext cx="10362895" cy="402336"/>
-          </a:xfrm>
-          <a:prstGeom prst="rect">
-            <a:avLst/>
-          </a:prstGeom>
-          <a:noFill/>
-        </p:spPr>
-        <p:txBody>
-          <a:bodyPr wrap="square" anchor="ctr"/>
-          <a:lstStyle/>
-          <a:p>
-            <a:r>
-              <a:rPr sz="1500" b="1" i="0">
-                <a:solidFill>
-                  <a:srgbClr val="333333"/>
-                </a:solidFill>
-                <a:latin typeface="Calibri"/>
-              </a:rPr>
-              <a:t>LA IA: PROMPT Y CORRECCIONES</a:t>
-            </a:r>
-            <a:r>
-              <a:rPr sz="1500" b="0" i="0">
-                <a:solidFill>
-                  <a:srgbClr val="333333"/>
-                </a:solidFill>
-                <a:latin typeface="Calibri"/>
-              </a:rPr>
-              <a:t> — El prompt exacto que usaron, y una lista de </a:t>
-            </a:r>
-            <a:r>
-              <a:rPr sz="1500" b="1" i="0">
-                <a:solidFill>
-                  <a:srgbClr val="333333"/>
-                </a:solidFill>
-                <a:latin typeface="Calibri"/>
-              </a:rPr>
-              <a:t>al menos tres cosas que la IA escribió mal</a:t>
-            </a:r>
-            <a:r>
-              <a:rPr sz="1500" b="0" i="0">
-                <a:solidFill>
-                  <a:srgbClr val="333333"/>
-                </a:solidFill>
-                <a:latin typeface="Calibri"/>
-              </a:rPr>
-              <a:t> y cómo las corrigieron.</a:t>
-            </a:r>
-          </a:p>
-        </p:txBody>
-      </p:sp>
-      <p:sp>
-        <p:nvSpPr>
-          <p:cNvPr id="26" name="TextBox 25"/>
+            <a:pPr>
+              <a:spcAft>
+                <a:spcPts val="800"/>
+              </a:spcAft>
+            </a:pPr>
+            <a:r>
+              <a:rPr sz="2000" b="0" i="0">
+                <a:solidFill>
+                  <a:srgbClr val="333333"/>
+                </a:solidFill>
+                <a:latin typeface="Calibri"/>
+              </a:rPr>
+              <a:t>–   La pregunta de apertura junta un semáforo, la matrícula de la universidad y la fila de una EPS a propósito: son tres cosas que el estudiante no clasificaría junto y que comparten exactamente lo que la clase quiere mostrar.</a:t>
+            </a:r>
+          </a:p>
+          <a:p>
+            <a:pPr>
+              <a:spcAft>
+                <a:spcPts val="800"/>
+              </a:spcAft>
+            </a:pPr>
+            <a:r>
+              <a:rPr sz="2000" b="0" i="0">
+                <a:solidFill>
+                  <a:srgbClr val="333333"/>
+                </a:solidFill>
+                <a:latin typeface="Calibri"/>
+              </a:rPr>
+              <a:t>–   En los tres hay entradas, un proceso, salidas y personas afectadas; en los tres el software existe pero es la parte pequeña; y en los tres el problema real está en la coordinación entre partes, no en el código.</a:t>
+            </a:r>
+          </a:p>
+          <a:p>
+            <a:pPr>
+              <a:spcAft>
+                <a:spcPts val="800"/>
+              </a:spcAft>
+            </a:pPr>
+            <a:r>
+              <a:rPr sz="2000" b="0" i="0">
+                <a:solidFill>
+                  <a:srgbClr val="333333"/>
+                </a:solidFill>
+                <a:latin typeface="Calibri"/>
+              </a:rPr>
+              <a:t>–   El semáforo sirve para desactivar la idea de que un sistema es un programa: un semáforo mal sincronizado produce trancón aunque su temporizador funcione perfecto.</a:t>
+            </a:r>
+          </a:p>
+          <a:p>
+            <a:pPr>
+              <a:spcAft>
+                <a:spcPts val="800"/>
+              </a:spcAft>
+            </a:pPr>
+            <a:r>
+              <a:rPr sz="2000" b="0" i="0">
+                <a:solidFill>
+                  <a:srgbClr val="333333"/>
+                </a:solidFill>
+                <a:latin typeface="Calibri"/>
+              </a:rPr>
+              <a:t>–   La matrícula sirve porque la viven: el sistema de matrícula incluye la plataforma, pero también el pago en el banco, la cola de la ventanilla y la persona que revisa un documento.</a:t>
+            </a:r>
+          </a:p>
+          <a:p>
+            <a:pPr>
+              <a:spcAft>
+                <a:spcPts val="800"/>
+              </a:spcAft>
+            </a:pPr>
+            <a:r>
+              <a:rPr sz="2000" b="0" i="0">
+                <a:solidFill>
+                  <a:srgbClr val="333333"/>
+                </a:solidFill>
+                <a:latin typeface="Calibri"/>
+              </a:rPr>
+              <a:t>–   Y la fila de la EPS sirve porque es el caso donde es más visible que </a:t>
+            </a:r>
+            <a:r>
+              <a:rPr sz="2000" b="1" i="0">
+                <a:solidFill>
+                  <a:srgbClr val="333333"/>
+                </a:solidFill>
+                <a:latin typeface="Calibri"/>
+              </a:rPr>
+              <a:t>un sistema puede funcionar según su diseño y ser injusto</a:t>
+            </a:r>
+            <a:r>
+              <a:rPr sz="2000" b="0" i="0">
+                <a:solidFill>
+                  <a:srgbClr val="333333"/>
+                </a:solidFill>
+                <a:latin typeface="Calibri"/>
+              </a:rPr>
+              <a:t>: si las citas se asignan por orden de llegada física, el sistema está premiando a quien puede madrugar.</a:t>
+            </a:r>
+          </a:p>
+        </p:txBody>
+      </p:sp>
+      <p:sp>
+        <p:nvSpPr>
+          <p:cNvPr id="6" name="TextBox 5"/>
           <p:cNvSpPr txBox="1"/>
           <p:nvPr/>
         </p:nvSpPr>
@@ -4687,7 +3823,7 @@
         <p:spPr>
           <a:xfrm>
             <a:off x="0" y="0"/>
-            <a:ext cx="12191695" cy="1170432"/>
+            <a:ext cx="12191695" cy="960120"/>
           </a:xfrm>
           <a:prstGeom prst="rect">
             <a:avLst/>
@@ -4729,7 +3865,7 @@
         </p:nvSpPr>
         <p:spPr>
           <a:xfrm>
-            <a:off x="0" y="1170432"/>
+            <a:off x="0" y="960120"/>
             <a:ext cx="12191695" cy="41148"/>
           </a:xfrm>
           <a:prstGeom prst="rect">
@@ -4773,7 +3909,7 @@
         <p:spPr>
           <a:xfrm>
             <a:off x="457200" y="164592"/>
-            <a:ext cx="11277295" cy="384048"/>
+            <a:ext cx="11277295" cy="502920"/>
           </a:xfrm>
           <a:prstGeom prst="rect">
             <a:avLst/>
@@ -4793,7 +3929,7 @@
                 </a:solidFill>
                 <a:latin typeface="Calibri"/>
               </a:rPr>
-              <a:t>Cómo se expone en 3 minutos</a:t>
+              <a:t>Qué es un sistema y por qué la frontera es la decisión difícil (1/2)</a:t>
             </a:r>
           </a:p>
         </p:txBody>
@@ -4806,8 +3942,8 @@
         </p:nvSpPr>
         <p:spPr>
           <a:xfrm>
-            <a:off x="457200" y="566928"/>
-            <a:ext cx="11277295" cy="411480"/>
+            <a:off x="457200" y="1170432"/>
+            <a:ext cx="11277295" cy="5230368"/>
           </a:xfrm>
           <a:prstGeom prst="rect">
             <a:avLst/>
@@ -4820,705 +3956,124 @@
           </a:bodyPr>
           <a:lstStyle/>
           <a:p>
-            <a:r>
-              <a:rPr sz="1400" b="0" i="0">
-                <a:solidFill>
-                  <a:srgbClr val="B8D8EE"/>
-                </a:solidFill>
-                <a:latin typeface="Calibri"/>
-              </a:rPr>
-              <a:t>Habla el vocero con la pantalla ya compartida · cronómetro en pantalla · se corta al llegar a cero</a:t>
-            </a:r>
-          </a:p>
-        </p:txBody>
-      </p:sp>
-      <p:sp>
-        <p:nvSpPr>
-          <p:cNvPr id="6" name="Rounded Rectangle 5"/>
-          <p:cNvSpPr/>
-          <p:nvPr/>
-        </p:nvSpPr>
-        <p:spPr>
-          <a:xfrm>
-            <a:off x="457200" y="1659636"/>
-            <a:ext cx="11277295" cy="1051560"/>
-          </a:xfrm>
-          <a:prstGeom prst="roundRect">
-            <a:avLst>
-              <a:gd name="adj" fmla="val 12000"/>
-            </a:avLst>
-          </a:prstGeom>
-          <a:solidFill>
-            <a:srgbClr val="F2F2F2"/>
-          </a:solidFill>
-          <a:ln>
-            <a:noFill/>
-          </a:ln>
-        </p:spPr>
-        <p:style>
-          <a:lnRef idx="1">
-            <a:schemeClr val="accent1"/>
-          </a:lnRef>
-          <a:fillRef idx="3">
-            <a:schemeClr val="accent1"/>
-          </a:fillRef>
-          <a:effectRef idx="2">
-            <a:schemeClr val="accent1"/>
-          </a:effectRef>
-          <a:fontRef idx="minor">
-            <a:schemeClr val="lt1"/>
-          </a:fontRef>
-        </p:style>
-        <p:txBody>
-          <a:bodyPr rtlCol="0" anchor="ctr"/>
-          <a:lstStyle/>
-          <a:p>
-            <a:pPr algn="ctr"/>
-          </a:p>
-        </p:txBody>
-      </p:sp>
-      <p:sp>
-        <p:nvSpPr>
-          <p:cNvPr id="7" name="Rounded Rectangle 6"/>
-          <p:cNvSpPr/>
-          <p:nvPr/>
-        </p:nvSpPr>
-        <p:spPr>
-          <a:xfrm>
-            <a:off x="594360" y="1965960"/>
-            <a:ext cx="438912" cy="438912"/>
-          </a:xfrm>
-          <a:prstGeom prst="roundRect">
-            <a:avLst>
-              <a:gd name="adj" fmla="val 12000"/>
-            </a:avLst>
-          </a:prstGeom>
-          <a:solidFill>
-            <a:srgbClr val="095292"/>
-          </a:solidFill>
-          <a:ln>
-            <a:noFill/>
-          </a:ln>
-        </p:spPr>
-        <p:style>
-          <a:lnRef idx="1">
-            <a:schemeClr val="accent1"/>
-          </a:lnRef>
-          <a:fillRef idx="3">
-            <a:schemeClr val="accent1"/>
-          </a:fillRef>
-          <a:effectRef idx="2">
-            <a:schemeClr val="accent1"/>
-          </a:effectRef>
-          <a:fontRef idx="minor">
-            <a:schemeClr val="lt1"/>
-          </a:fontRef>
-        </p:style>
-        <p:txBody>
-          <a:bodyPr rtlCol="0" anchor="ctr"/>
-          <a:lstStyle/>
-          <a:p>
-            <a:pPr algn="ctr"/>
-          </a:p>
-        </p:txBody>
-      </p:sp>
-      <p:sp>
-        <p:nvSpPr>
-          <p:cNvPr id="8" name="TextBox 7"/>
-          <p:cNvSpPr txBox="1"/>
-          <p:nvPr/>
-        </p:nvSpPr>
-        <p:spPr>
-          <a:xfrm>
-            <a:off x="594360" y="1965960"/>
-            <a:ext cx="438912" cy="438912"/>
-          </a:xfrm>
-          <a:prstGeom prst="rect">
-            <a:avLst/>
-          </a:prstGeom>
-          <a:noFill/>
-        </p:spPr>
-        <p:txBody>
-          <a:bodyPr wrap="square" anchor="ctr"/>
-          <a:lstStyle/>
-          <a:p>
-            <a:pPr algn="ctr"/>
-            <a:r>
-              <a:rPr sz="1600" b="1" i="0">
-                <a:solidFill>
-                  <a:srgbClr val="FFFFFF"/>
-                </a:solidFill>
-                <a:latin typeface="Calibri"/>
-              </a:rPr>
-              <a:t>1</a:t>
-            </a:r>
-          </a:p>
-        </p:txBody>
-      </p:sp>
-      <p:sp>
-        <p:nvSpPr>
-          <p:cNvPr id="9" name="TextBox 8"/>
-          <p:cNvSpPr txBox="1"/>
-          <p:nvPr/>
-        </p:nvSpPr>
-        <p:spPr>
-          <a:xfrm>
-            <a:off x="1188720" y="1751076"/>
-            <a:ext cx="10271455" cy="886968"/>
-          </a:xfrm>
-          <a:prstGeom prst="rect">
-            <a:avLst/>
-          </a:prstGeom>
-          <a:noFill/>
-        </p:spPr>
-        <p:txBody>
-          <a:bodyPr wrap="square" anchor="ctr"/>
-          <a:lstStyle/>
-          <a:p>
-            <a:r>
-              <a:rPr sz="1500" b="1" i="0">
-                <a:solidFill>
-                  <a:srgbClr val="095292"/>
-                </a:solidFill>
-                <a:latin typeface="Calibri"/>
-              </a:rPr>
-              <a:t>30 s · El sistema y su propósito</a:t>
-            </a:r>
-          </a:p>
-          <a:p>
             <a:pPr>
-              <a:spcBef>
-                <a:spcPts val="200"/>
-              </a:spcBef>
+              <a:spcAft>
+                <a:spcPts val="800"/>
+              </a:spcAft>
             </a:pPr>
             <a:r>
-              <a:rPr sz="1300" b="0" i="0">
-                <a:solidFill>
-                  <a:srgbClr val="333333"/>
-                </a:solidFill>
-                <a:latin typeface="Calibri"/>
-              </a:rPr>
-              <a:t>Qué sistema es y para qué existe, en una frase.</a:t>
-            </a:r>
-          </a:p>
-        </p:txBody>
-      </p:sp>
-      <p:sp>
-        <p:nvSpPr>
-          <p:cNvPr id="10" name="Rounded Rectangle 9"/>
-          <p:cNvSpPr/>
-          <p:nvPr/>
-        </p:nvSpPr>
-        <p:spPr>
-          <a:xfrm>
-            <a:off x="457200" y="2802636"/>
-            <a:ext cx="11277295" cy="1051560"/>
-          </a:xfrm>
-          <a:prstGeom prst="roundRect">
-            <a:avLst>
-              <a:gd name="adj" fmla="val 12000"/>
-            </a:avLst>
-          </a:prstGeom>
-          <a:solidFill>
-            <a:srgbClr val="E8F4FA"/>
-          </a:solidFill>
-          <a:ln>
-            <a:noFill/>
-          </a:ln>
-        </p:spPr>
-        <p:style>
-          <a:lnRef idx="1">
-            <a:schemeClr val="accent1"/>
-          </a:lnRef>
-          <a:fillRef idx="3">
-            <a:schemeClr val="accent1"/>
-          </a:fillRef>
-          <a:effectRef idx="2">
-            <a:schemeClr val="accent1"/>
-          </a:effectRef>
-          <a:fontRef idx="minor">
-            <a:schemeClr val="lt1"/>
-          </a:fontRef>
-        </p:style>
-        <p:txBody>
-          <a:bodyPr rtlCol="0" anchor="ctr"/>
-          <a:lstStyle/>
-          <a:p>
-            <a:pPr algn="ctr"/>
-          </a:p>
-        </p:txBody>
-      </p:sp>
-      <p:sp>
-        <p:nvSpPr>
-          <p:cNvPr id="11" name="Rounded Rectangle 10"/>
-          <p:cNvSpPr/>
-          <p:nvPr/>
-        </p:nvSpPr>
-        <p:spPr>
-          <a:xfrm>
-            <a:off x="594360" y="3108960"/>
-            <a:ext cx="438912" cy="438912"/>
-          </a:xfrm>
-          <a:prstGeom prst="roundRect">
-            <a:avLst>
-              <a:gd name="adj" fmla="val 12000"/>
-            </a:avLst>
-          </a:prstGeom>
-          <a:solidFill>
-            <a:srgbClr val="095292"/>
-          </a:solidFill>
-          <a:ln>
-            <a:noFill/>
-          </a:ln>
-        </p:spPr>
-        <p:style>
-          <a:lnRef idx="1">
-            <a:schemeClr val="accent1"/>
-          </a:lnRef>
-          <a:fillRef idx="3">
-            <a:schemeClr val="accent1"/>
-          </a:fillRef>
-          <a:effectRef idx="2">
-            <a:schemeClr val="accent1"/>
-          </a:effectRef>
-          <a:fontRef idx="minor">
-            <a:schemeClr val="lt1"/>
-          </a:fontRef>
-        </p:style>
-        <p:txBody>
-          <a:bodyPr rtlCol="0" anchor="ctr"/>
-          <a:lstStyle/>
-          <a:p>
-            <a:pPr algn="ctr"/>
-          </a:p>
-        </p:txBody>
-      </p:sp>
-      <p:sp>
-        <p:nvSpPr>
-          <p:cNvPr id="12" name="TextBox 11"/>
-          <p:cNvSpPr txBox="1"/>
-          <p:nvPr/>
-        </p:nvSpPr>
-        <p:spPr>
-          <a:xfrm>
-            <a:off x="594360" y="3108960"/>
-            <a:ext cx="438912" cy="438912"/>
-          </a:xfrm>
-          <a:prstGeom prst="rect">
-            <a:avLst/>
-          </a:prstGeom>
-          <a:noFill/>
-        </p:spPr>
-        <p:txBody>
-          <a:bodyPr wrap="square" anchor="ctr"/>
-          <a:lstStyle/>
-          <a:p>
-            <a:pPr algn="ctr"/>
-            <a:r>
-              <a:rPr sz="1600" b="1" i="0">
-                <a:solidFill>
-                  <a:srgbClr val="FFFFFF"/>
-                </a:solidFill>
-                <a:latin typeface="Calibri"/>
-              </a:rPr>
-              <a:t>2</a:t>
-            </a:r>
-          </a:p>
-        </p:txBody>
-      </p:sp>
-      <p:sp>
-        <p:nvSpPr>
-          <p:cNvPr id="13" name="TextBox 12"/>
-          <p:cNvSpPr txBox="1"/>
-          <p:nvPr/>
-        </p:nvSpPr>
-        <p:spPr>
-          <a:xfrm>
-            <a:off x="1188720" y="2894076"/>
-            <a:ext cx="10271455" cy="886968"/>
-          </a:xfrm>
-          <a:prstGeom prst="rect">
-            <a:avLst/>
-          </a:prstGeom>
-          <a:noFill/>
-        </p:spPr>
-        <p:txBody>
-          <a:bodyPr wrap="square" anchor="ctr"/>
-          <a:lstStyle/>
-          <a:p>
-            <a:r>
-              <a:rPr sz="1500" b="1" i="0">
-                <a:solidFill>
-                  <a:srgbClr val="095292"/>
-                </a:solidFill>
-                <a:latin typeface="Calibri"/>
-              </a:rPr>
-              <a:t>45 s · La frontera</a:t>
+              <a:rPr sz="2000" b="0" i="0">
+                <a:solidFill>
+                  <a:srgbClr val="333333"/>
+                </a:solidFill>
+                <a:latin typeface="Calibri"/>
+              </a:rPr>
+              <a:t>–   La definición operativa que sirve para todo el curso es corta: un sistema es un conjunto de partes que interactúan para cumplir un propósito, de modo que si se le quita una parte deja de cumplirlo.</a:t>
             </a:r>
           </a:p>
           <a:p>
             <a:pPr>
-              <a:spcBef>
-                <a:spcPts val="200"/>
-              </a:spcBef>
+              <a:spcAft>
+                <a:spcPts val="800"/>
+              </a:spcAft>
             </a:pPr>
             <a:r>
-              <a:rPr sz="1300" b="0" i="0">
-                <a:solidFill>
-                  <a:srgbClr val="333333"/>
-                </a:solidFill>
-                <a:latin typeface="Calibri"/>
-              </a:rPr>
-              <a:t>Qué dejaron fuera y por qué. Es la decisión que se discute.</a:t>
-            </a:r>
-          </a:p>
-        </p:txBody>
-      </p:sp>
-      <p:sp>
-        <p:nvSpPr>
-          <p:cNvPr id="14" name="Rounded Rectangle 13"/>
-          <p:cNvSpPr/>
-          <p:nvPr/>
-        </p:nvSpPr>
-        <p:spPr>
-          <a:xfrm>
-            <a:off x="457200" y="3945636"/>
-            <a:ext cx="11277295" cy="1051560"/>
-          </a:xfrm>
-          <a:prstGeom prst="roundRect">
-            <a:avLst>
-              <a:gd name="adj" fmla="val 12000"/>
-            </a:avLst>
-          </a:prstGeom>
-          <a:solidFill>
-            <a:srgbClr val="F2F2F2"/>
-          </a:solidFill>
-          <a:ln>
-            <a:noFill/>
-          </a:ln>
-        </p:spPr>
-        <p:style>
-          <a:lnRef idx="1">
-            <a:schemeClr val="accent1"/>
-          </a:lnRef>
-          <a:fillRef idx="3">
-            <a:schemeClr val="accent1"/>
-          </a:fillRef>
-          <a:effectRef idx="2">
-            <a:schemeClr val="accent1"/>
-          </a:effectRef>
-          <a:fontRef idx="minor">
-            <a:schemeClr val="lt1"/>
-          </a:fontRef>
-        </p:style>
-        <p:txBody>
-          <a:bodyPr rtlCol="0" anchor="ctr"/>
-          <a:lstStyle/>
-          <a:p>
-            <a:pPr algn="ctr"/>
-          </a:p>
-        </p:txBody>
-      </p:sp>
-      <p:sp>
-        <p:nvSpPr>
-          <p:cNvPr id="15" name="Rounded Rectangle 14"/>
-          <p:cNvSpPr/>
-          <p:nvPr/>
-        </p:nvSpPr>
-        <p:spPr>
-          <a:xfrm>
-            <a:off x="594360" y="4251960"/>
-            <a:ext cx="438912" cy="438912"/>
-          </a:xfrm>
-          <a:prstGeom prst="roundRect">
-            <a:avLst>
-              <a:gd name="adj" fmla="val 12000"/>
-            </a:avLst>
-          </a:prstGeom>
-          <a:solidFill>
-            <a:srgbClr val="095292"/>
-          </a:solidFill>
-          <a:ln>
-            <a:noFill/>
-          </a:ln>
-        </p:spPr>
-        <p:style>
-          <a:lnRef idx="1">
-            <a:schemeClr val="accent1"/>
-          </a:lnRef>
-          <a:fillRef idx="3">
-            <a:schemeClr val="accent1"/>
-          </a:fillRef>
-          <a:effectRef idx="2">
-            <a:schemeClr val="accent1"/>
-          </a:effectRef>
-          <a:fontRef idx="minor">
-            <a:schemeClr val="lt1"/>
-          </a:fontRef>
-        </p:style>
-        <p:txBody>
-          <a:bodyPr rtlCol="0" anchor="ctr"/>
-          <a:lstStyle/>
-          <a:p>
-            <a:pPr algn="ctr"/>
-          </a:p>
-        </p:txBody>
-      </p:sp>
-      <p:sp>
-        <p:nvSpPr>
-          <p:cNvPr id="16" name="TextBox 15"/>
-          <p:cNvSpPr txBox="1"/>
-          <p:nvPr/>
-        </p:nvSpPr>
-        <p:spPr>
-          <a:xfrm>
-            <a:off x="594360" y="4251960"/>
-            <a:ext cx="438912" cy="438912"/>
-          </a:xfrm>
-          <a:prstGeom prst="rect">
-            <a:avLst/>
-          </a:prstGeom>
-          <a:noFill/>
-        </p:spPr>
-        <p:txBody>
-          <a:bodyPr wrap="square" anchor="ctr"/>
-          <a:lstStyle/>
-          <a:p>
-            <a:pPr algn="ctr"/>
-            <a:r>
-              <a:rPr sz="1600" b="1" i="0">
-                <a:solidFill>
-                  <a:srgbClr val="FFFFFF"/>
-                </a:solidFill>
-                <a:latin typeface="Calibri"/>
-              </a:rPr>
-              <a:t>3</a:t>
-            </a:r>
-          </a:p>
-        </p:txBody>
-      </p:sp>
-      <p:sp>
-        <p:nvSpPr>
-          <p:cNvPr id="17" name="TextBox 16"/>
-          <p:cNvSpPr txBox="1"/>
-          <p:nvPr/>
-        </p:nvSpPr>
-        <p:spPr>
-          <a:xfrm>
-            <a:off x="1188720" y="4037076"/>
-            <a:ext cx="10271455" cy="886968"/>
-          </a:xfrm>
-          <a:prstGeom prst="rect">
-            <a:avLst/>
-          </a:prstGeom>
-          <a:noFill/>
-        </p:spPr>
-        <p:txBody>
-          <a:bodyPr wrap="square" anchor="ctr"/>
-          <a:lstStyle/>
-          <a:p>
-            <a:r>
-              <a:rPr sz="1500" b="1" i="0">
-                <a:solidFill>
-                  <a:srgbClr val="095292"/>
-                </a:solidFill>
-                <a:latin typeface="Calibri"/>
-              </a:rPr>
-              <a:t>45 s · El actor olvidado</a:t>
+              <a:rPr sz="2000" b="0" i="0">
+                <a:solidFill>
+                  <a:srgbClr val="333333"/>
+                </a:solidFill>
+                <a:latin typeface="Calibri"/>
+              </a:rPr>
+              <a:t>–   Lo importante de esa definición no son las palabras sino la consecuencia: </a:t>
+            </a:r>
+            <a:r>
+              <a:rPr sz="2000" b="1" i="0">
+                <a:solidFill>
+                  <a:srgbClr val="333333"/>
+                </a:solidFill>
+                <a:latin typeface="Calibri"/>
+              </a:rPr>
+              <a:t>el propósito es lo primero que hay que poder decir</a:t>
+            </a:r>
+            <a:r>
+              <a:rPr sz="2000" b="0" i="0">
+                <a:solidFill>
+                  <a:srgbClr val="333333"/>
+                </a:solidFill>
+                <a:latin typeface="Calibri"/>
+              </a:rPr>
+              <a:t>.</a:t>
             </a:r>
           </a:p>
           <a:p>
             <a:pPr>
-              <a:spcBef>
-                <a:spcPts val="200"/>
-              </a:spcBef>
+              <a:spcAft>
+                <a:spcPts val="800"/>
+              </a:spcAft>
             </a:pPr>
             <a:r>
-              <a:rPr sz="1300" b="0" i="0">
-                <a:solidFill>
-                  <a:srgbClr val="333333"/>
-                </a:solidFill>
-                <a:latin typeface="Calibri"/>
-              </a:rPr>
-              <a:t>El afectado que no usa el sistema. Quién es y qué pierde.</a:t>
-            </a:r>
-          </a:p>
-        </p:txBody>
-      </p:sp>
-      <p:sp>
-        <p:nvSpPr>
-          <p:cNvPr id="18" name="Rounded Rectangle 17"/>
-          <p:cNvSpPr/>
-          <p:nvPr/>
-        </p:nvSpPr>
-        <p:spPr>
-          <a:xfrm>
-            <a:off x="457200" y="5088636"/>
-            <a:ext cx="11277295" cy="1051560"/>
-          </a:xfrm>
-          <a:prstGeom prst="roundRect">
-            <a:avLst>
-              <a:gd name="adj" fmla="val 12000"/>
-            </a:avLst>
-          </a:prstGeom>
-          <a:solidFill>
-            <a:srgbClr val="E8F4FA"/>
-          </a:solidFill>
-          <a:ln>
-            <a:noFill/>
-          </a:ln>
-        </p:spPr>
-        <p:style>
-          <a:lnRef idx="1">
-            <a:schemeClr val="accent1"/>
-          </a:lnRef>
-          <a:fillRef idx="3">
-            <a:schemeClr val="accent1"/>
-          </a:fillRef>
-          <a:effectRef idx="2">
-            <a:schemeClr val="accent1"/>
-          </a:effectRef>
-          <a:fontRef idx="minor">
-            <a:schemeClr val="lt1"/>
-          </a:fontRef>
-        </p:style>
-        <p:txBody>
-          <a:bodyPr rtlCol="0" anchor="ctr"/>
-          <a:lstStyle/>
-          <a:p>
-            <a:pPr algn="ctr"/>
-          </a:p>
-        </p:txBody>
-      </p:sp>
-      <p:sp>
-        <p:nvSpPr>
-          <p:cNvPr id="19" name="Rounded Rectangle 18"/>
-          <p:cNvSpPr/>
-          <p:nvPr/>
-        </p:nvSpPr>
-        <p:spPr>
-          <a:xfrm>
-            <a:off x="594360" y="5394960"/>
-            <a:ext cx="438912" cy="438912"/>
-          </a:xfrm>
-          <a:prstGeom prst="roundRect">
-            <a:avLst>
-              <a:gd name="adj" fmla="val 12000"/>
-            </a:avLst>
-          </a:prstGeom>
-          <a:solidFill>
-            <a:srgbClr val="095292"/>
-          </a:solidFill>
-          <a:ln>
-            <a:noFill/>
-          </a:ln>
-        </p:spPr>
-        <p:style>
-          <a:lnRef idx="1">
-            <a:schemeClr val="accent1"/>
-          </a:lnRef>
-          <a:fillRef idx="3">
-            <a:schemeClr val="accent1"/>
-          </a:fillRef>
-          <a:effectRef idx="2">
-            <a:schemeClr val="accent1"/>
-          </a:effectRef>
-          <a:fontRef idx="minor">
-            <a:schemeClr val="lt1"/>
-          </a:fontRef>
-        </p:style>
-        <p:txBody>
-          <a:bodyPr rtlCol="0" anchor="ctr"/>
-          <a:lstStyle/>
-          <a:p>
-            <a:pPr algn="ctr"/>
-          </a:p>
-        </p:txBody>
-      </p:sp>
-      <p:sp>
-        <p:nvSpPr>
-          <p:cNvPr id="20" name="TextBox 19"/>
-          <p:cNvSpPr txBox="1"/>
-          <p:nvPr/>
-        </p:nvSpPr>
-        <p:spPr>
-          <a:xfrm>
-            <a:off x="594360" y="5394960"/>
-            <a:ext cx="438912" cy="438912"/>
-          </a:xfrm>
-          <a:prstGeom prst="rect">
-            <a:avLst/>
-          </a:prstGeom>
-          <a:noFill/>
-        </p:spPr>
-        <p:txBody>
-          <a:bodyPr wrap="square" anchor="ctr"/>
-          <a:lstStyle/>
-          <a:p>
-            <a:pPr algn="ctr"/>
-            <a:r>
-              <a:rPr sz="1600" b="1" i="0">
-                <a:solidFill>
-                  <a:srgbClr val="FFFFFF"/>
-                </a:solidFill>
-                <a:latin typeface="Calibri"/>
-              </a:rPr>
-              <a:t>4</a:t>
-            </a:r>
-          </a:p>
-        </p:txBody>
-      </p:sp>
-      <p:sp>
-        <p:nvSpPr>
-          <p:cNvPr id="21" name="TextBox 20"/>
-          <p:cNvSpPr txBox="1"/>
-          <p:nvPr/>
-        </p:nvSpPr>
-        <p:spPr>
-          <a:xfrm>
-            <a:off x="1188720" y="5180076"/>
-            <a:ext cx="10271455" cy="886968"/>
-          </a:xfrm>
-          <a:prstGeom prst="rect">
-            <a:avLst/>
-          </a:prstGeom>
-          <a:noFill/>
-        </p:spPr>
-        <p:txBody>
-          <a:bodyPr wrap="square" anchor="ctr"/>
-          <a:lstStyle/>
-          <a:p>
-            <a:r>
-              <a:rPr sz="1500" b="1" i="0">
-                <a:solidFill>
-                  <a:srgbClr val="095292"/>
-                </a:solidFill>
-                <a:latin typeface="Calibri"/>
-              </a:rPr>
-              <a:t>60 s · Qué se inventó la IA</a:t>
+              <a:rPr sz="2000" b="0" i="0">
+                <a:solidFill>
+                  <a:srgbClr val="333333"/>
+                </a:solidFill>
+                <a:latin typeface="Calibri"/>
+              </a:rPr>
+              <a:t>–   Si un equipo no puede decir para qué existe el sistema en una frase, todavía no lo entendió, y ningún diagrama lo va a salvar.</a:t>
             </a:r>
           </a:p>
           <a:p>
             <a:pPr>
-              <a:spcBef>
-                <a:spcPts val="200"/>
-              </a:spcBef>
+              <a:spcAft>
+                <a:spcPts val="800"/>
+              </a:spcAft>
             </a:pPr>
             <a:r>
-              <a:rPr sz="1300" b="0" i="0">
-                <a:solidFill>
-                  <a:srgbClr val="333333"/>
-                </a:solidFill>
-                <a:latin typeface="Calibri"/>
-              </a:rPr>
-              <a:t>Las tres correcciones. Es el minuto obligatorio de la exposición.</a:t>
-            </a:r>
-          </a:p>
-        </p:txBody>
-      </p:sp>
-      <p:sp>
-        <p:nvSpPr>
-          <p:cNvPr id="22" name="TextBox 21"/>
+              <a:rPr sz="2000" b="0" i="0">
+                <a:solidFill>
+                  <a:srgbClr val="333333"/>
+                </a:solidFill>
+                <a:latin typeface="Calibri"/>
+              </a:rPr>
+              <a:t>–   Los cinco elementos se explican con un ejemplo concreto y de una sola pasada.</a:t>
+            </a:r>
+          </a:p>
+          <a:p>
+            <a:pPr>
+              <a:spcAft>
+                <a:spcPts val="800"/>
+              </a:spcAft>
+            </a:pPr>
+            <a:r>
+              <a:rPr sz="2000" b="0" i="0">
+                <a:solidFill>
+                  <a:srgbClr val="333333"/>
+                </a:solidFill>
+                <a:latin typeface="Calibri"/>
+              </a:rPr>
+              <a:t>–   En el sistema de citas de un consultorio: las entradas son las solicitudes de cita, la disponibilidad del médico y los datos del paciente; el proceso es asignar, confirmar y recordar</a:t>
+            </a:r>
+          </a:p>
+          <a:p>
+            <a:pPr>
+              <a:spcAft>
+                <a:spcPts val="800"/>
+              </a:spcAft>
+            </a:pPr>
+            <a:r>
+              <a:rPr sz="2000" b="0" i="0">
+                <a:solidFill>
+                  <a:srgbClr val="333333"/>
+                </a:solidFill>
+                <a:latin typeface="Calibri"/>
+              </a:rPr>
+              <a:t>–   Las salidas son la cita asignada, el paciente atendido y el registro de lo que pasó; la retroalimentación es que un paciente que no llegó libera un cupo y eso debería cambiar la asignación.</a:t>
+            </a:r>
+          </a:p>
+        </p:txBody>
+      </p:sp>
+      <p:sp>
+        <p:nvSpPr>
+          <p:cNvPr id="6" name="TextBox 5"/>
           <p:cNvSpPr txBox="1"/>
           <p:nvPr/>
         </p:nvSpPr>
@@ -5692,7 +4247,7 @@
                 </a:solidFill>
                 <a:latin typeface="Calibri"/>
               </a:rPr>
-              <a:t>Para la Clase 4</a:t>
+              <a:t>Qué es un sistema y por qué la frontera es la decisión difícil (2/2)</a:t>
             </a:r>
           </a:p>
         </p:txBody>
@@ -5731,25 +4286,7 @@
                 </a:solidFill>
                 <a:latin typeface="Calibri"/>
               </a:rPr>
-              <a:t>–   </a:t>
-            </a:r>
-            <a:r>
-              <a:rPr sz="2000" b="1" i="0">
-                <a:solidFill>
-                  <a:srgbClr val="333333"/>
-                </a:solidFill>
-                <a:latin typeface="Calibri"/>
-              </a:rPr>
-              <a:t>Trabajo dirigido:</a:t>
-            </a:r>
-            <a:r>
-              <a:rPr sz="2000" b="0" i="0">
-                <a:solidFill>
-                  <a:srgbClr val="333333"/>
-                </a:solidFill>
-                <a:latin typeface="Calibri"/>
-              </a:rPr>
-              <a:t> Análisis de caso práctico — dejen la ficha del sistema completa en la carpeta del equipo, con el prompt y las correcciones.</a:t>
+              <a:t>–   La frontera es lo que hay que discutir: ¿el transporte del paciente es parte del sistema?</a:t>
             </a:r>
           </a:p>
           <a:p>
@@ -5765,25 +4302,7 @@
                 </a:solidFill>
                 <a:latin typeface="Calibri"/>
               </a:rPr>
-              <a:t>–   </a:t>
-            </a:r>
-            <a:r>
-              <a:rPr sz="2000" b="1" i="0">
-                <a:solidFill>
-                  <a:srgbClr val="333333"/>
-                </a:solidFill>
-                <a:latin typeface="Calibri"/>
-              </a:rPr>
-              <a:t>Trabajo independiente:</a:t>
-            </a:r>
-            <a:r>
-              <a:rPr sz="2000" b="0" i="0">
-                <a:solidFill>
-                  <a:srgbClr val="333333"/>
-                </a:solidFill>
-                <a:latin typeface="Calibri"/>
-              </a:rPr>
-              <a:t> Ensayo sobre impacto social: media página sobre a quién le empeora la vida el sistema que analizaron, aunque funcione bien.</a:t>
+              <a:t>–   Si el 30 % de las citas se pierden porque la gente no logra llegar, dejar el transporte fuera de la frontera hace que el sistema funcione en el papel y falle en la vida.</a:t>
             </a:r>
           </a:p>
           <a:p>
@@ -5799,7 +4318,7 @@
                 </a:solidFill>
                 <a:latin typeface="Calibri"/>
               </a:rPr>
-              <a:t>–   </a:t>
+              <a:t>–   Ese punto —</a:t>
             </a:r>
             <a:r>
               <a:rPr sz="2000" b="1" i="0">
@@ -5808,7 +4327,7 @@
                 </a:solidFill>
                 <a:latin typeface="Calibri"/>
               </a:rPr>
-              <a:t>Clase 4 · Principios éticos en la Ingeniería</a:t>
+              <a:t>toda frontera es una decisión y hay que poder defenderla</a:t>
             </a:r>
             <a:r>
               <a:rPr sz="2000" b="0" i="0">
@@ -5817,7 +4336,7 @@
                 </a:solidFill>
                 <a:latin typeface="Calibri"/>
               </a:rPr>
-              <a:t> — los principios éticos de la profesión, con casos reales donde el software funcionó y aun así el ingeniero hizo algo mal.</a:t>
+              <a:t>— es el que hay que dejar clavado.</a:t>
             </a:r>
           </a:p>
           <a:p>
@@ -5833,43 +4352,7 @@
                 </a:solidFill>
                 <a:latin typeface="Calibri"/>
               </a:rPr>
-              <a:t>–   </a:t>
-            </a:r>
-            <a:r>
-              <a:rPr sz="2000" b="1" i="0">
-                <a:solidFill>
-                  <a:srgbClr val="333333"/>
-                </a:solidFill>
-                <a:latin typeface="Calibri"/>
-              </a:rPr>
-              <a:t>Aviso:</a:t>
-            </a:r>
-            <a:r>
-              <a:rPr sz="2000" b="0" i="0">
-                <a:solidFill>
-                  <a:srgbClr val="333333"/>
-                </a:solidFill>
-                <a:latin typeface="Calibri"/>
-              </a:rPr>
-              <a:t> Traigan identificado el </a:t>
-            </a:r>
-            <a:r>
-              <a:rPr sz="2000" b="1" i="0">
-                <a:solidFill>
-                  <a:srgbClr val="333333"/>
-                </a:solidFill>
-                <a:latin typeface="Calibri"/>
-              </a:rPr>
-              <a:t>actor no-usuario</a:t>
-            </a:r>
-            <a:r>
-              <a:rPr sz="2000" b="0" i="0">
-                <a:solidFill>
-                  <a:srgbClr val="333333"/>
-                </a:solidFill>
-                <a:latin typeface="Calibri"/>
-              </a:rPr>
-              <a:t> de su sistema. La sesión 4 arranca con esa persona y el ensayo de media página es sobre ella.</a:t>
+              <a:t>–   El estudiante de primer semestre tiende a creer que la frontera viene dada por el problema.</a:t>
             </a:r>
           </a:p>
           <a:p>
@@ -5885,17 +4368,15 @@
                 </a:solidFill>
                 <a:latin typeface="Calibri"/>
               </a:rPr>
-              <a:t>–   </a:t>
-            </a:r>
-            <a:r>
-              <a:rPr sz="2000" b="1" i="0">
-                <a:solidFill>
-                  <a:srgbClr val="333333"/>
-                </a:solidFill>
-                <a:latin typeface="Calibri"/>
-              </a:rPr>
-              <a:t>Antes de salir:</a:t>
-            </a:r>
+              <a:t>–   No viene dada: la pone el ingeniero, y de ella depende qué se puede mejorar.</a:t>
+            </a:r>
+          </a:p>
+          <a:p>
+            <a:pPr>
+              <a:spcAft>
+                <a:spcPts val="800"/>
+              </a:spcAft>
+            </a:pPr>
             <a:r>
               <a:rPr sz="2000" b="0" i="0">
                 <a:solidFill>
@@ -5903,7 +4384,23 @@
                 </a:solidFill>
                 <a:latin typeface="Calibri"/>
               </a:rPr>
-              <a:t> el enlace del documento del equipo en el chat, con permiso de lectura para el docente, y el nombre del vocero de hoy.</a:t>
+              <a:t>–   Una frontera muy estrecha produce sistemas que no sirven; una muy ancha produce proyectos que no se acaban.</a:t>
+            </a:r>
+          </a:p>
+          <a:p>
+            <a:pPr>
+              <a:spcAft>
+                <a:spcPts val="800"/>
+              </a:spcAft>
+            </a:pPr>
+            <a:r>
+              <a:rPr sz="2000" b="0" i="0">
+                <a:solidFill>
+                  <a:srgbClr val="333333"/>
+                </a:solidFill>
+                <a:latin typeface="Calibri"/>
+              </a:rPr>
+              <a:t>–   En la sesión 6, cuando cada equipo escriba el problema de su proyecto, la frontera va a ser el campo que más discusión genere, y hoy es donde se aprende a ponerla.</a:t>
             </a:r>
           </a:p>
         </p:txBody>
@@ -5978,7 +4475,2197 @@
         <p:spPr>
           <a:xfrm>
             <a:off x="0" y="0"/>
-            <a:ext cx="12191695" cy="164592"/>
+            <a:ext cx="12191695" cy="960120"/>
+          </a:xfrm>
+          <a:prstGeom prst="rect">
+            <a:avLst/>
+          </a:prstGeom>
+          <a:solidFill>
+            <a:srgbClr val="095292"/>
+          </a:solidFill>
+          <a:ln>
+            <a:noFill/>
+          </a:ln>
+        </p:spPr>
+        <p:style>
+          <a:lnRef idx="1">
+            <a:schemeClr val="accent1"/>
+          </a:lnRef>
+          <a:fillRef idx="3">
+            <a:schemeClr val="accent1"/>
+          </a:fillRef>
+          <a:effectRef idx="2">
+            <a:schemeClr val="accent1"/>
+          </a:effectRef>
+          <a:fontRef idx="minor">
+            <a:schemeClr val="lt1"/>
+          </a:fontRef>
+        </p:style>
+        <p:txBody>
+          <a:bodyPr rtlCol="0" anchor="ctr"/>
+          <a:lstStyle/>
+          <a:p>
+            <a:pPr algn="ctr"/>
+          </a:p>
+        </p:txBody>
+      </p:sp>
+      <p:sp>
+        <p:nvSpPr>
+          <p:cNvPr id="3" name="Rectangle 2"/>
+          <p:cNvSpPr/>
+          <p:nvPr/>
+        </p:nvSpPr>
+        <p:spPr>
+          <a:xfrm>
+            <a:off x="0" y="960120"/>
+            <a:ext cx="12191695" cy="41148"/>
+          </a:xfrm>
+          <a:prstGeom prst="rect">
+            <a:avLst/>
+          </a:prstGeom>
+          <a:solidFill>
+            <a:srgbClr val="FFD000"/>
+          </a:solidFill>
+          <a:ln>
+            <a:noFill/>
+          </a:ln>
+        </p:spPr>
+        <p:style>
+          <a:lnRef idx="1">
+            <a:schemeClr val="accent1"/>
+          </a:lnRef>
+          <a:fillRef idx="3">
+            <a:schemeClr val="accent1"/>
+          </a:fillRef>
+          <a:effectRef idx="2">
+            <a:schemeClr val="accent1"/>
+          </a:effectRef>
+          <a:fontRef idx="minor">
+            <a:schemeClr val="lt1"/>
+          </a:fontRef>
+        </p:style>
+        <p:txBody>
+          <a:bodyPr rtlCol="0" anchor="ctr"/>
+          <a:lstStyle/>
+          <a:p>
+            <a:pPr algn="ctr"/>
+          </a:p>
+        </p:txBody>
+      </p:sp>
+      <p:sp>
+        <p:nvSpPr>
+          <p:cNvPr id="4" name="TextBox 3"/>
+          <p:cNvSpPr txBox="1"/>
+          <p:nvPr/>
+        </p:nvSpPr>
+        <p:spPr>
+          <a:xfrm>
+            <a:off x="457200" y="164592"/>
+            <a:ext cx="11277295" cy="502920"/>
+          </a:xfrm>
+          <a:prstGeom prst="rect">
+            <a:avLst/>
+          </a:prstGeom>
+          <a:noFill/>
+        </p:spPr>
+        <p:txBody>
+          <a:bodyPr wrap="square">
+            <a:spAutoFit/>
+          </a:bodyPr>
+          <a:lstStyle/>
+          <a:p>
+            <a:r>
+              <a:rPr sz="2600" b="1" i="0">
+                <a:solidFill>
+                  <a:srgbClr val="FFFFFF"/>
+                </a:solidFill>
+                <a:latin typeface="Calibri"/>
+              </a:rPr>
+              <a:t>El sistema no es el software: la confusión que hace fracasar proyectos (1/2)</a:t>
+            </a:r>
+          </a:p>
+        </p:txBody>
+      </p:sp>
+      <p:sp>
+        <p:nvSpPr>
+          <p:cNvPr id="5" name="TextBox 4"/>
+          <p:cNvSpPr txBox="1"/>
+          <p:nvPr/>
+        </p:nvSpPr>
+        <p:spPr>
+          <a:xfrm>
+            <a:off x="457200" y="1170432"/>
+            <a:ext cx="11277295" cy="5230368"/>
+          </a:xfrm>
+          <a:prstGeom prst="rect">
+            <a:avLst/>
+          </a:prstGeom>
+          <a:noFill/>
+        </p:spPr>
+        <p:txBody>
+          <a:bodyPr wrap="square">
+            <a:spAutoFit/>
+          </a:bodyPr>
+          <a:lstStyle/>
+          <a:p>
+            <a:pPr>
+              <a:spcAft>
+                <a:spcPts val="800"/>
+              </a:spcAft>
+            </a:pPr>
+            <a:r>
+              <a:rPr sz="2000" b="0" i="0">
+                <a:solidFill>
+                  <a:srgbClr val="333333"/>
+                </a:solidFill>
+                <a:latin typeface="Calibri"/>
+              </a:rPr>
+              <a:t>–   La diapositiva del antes y después es el centro pedagógico de la sesión y conviene dictarla despacio, línea por línea, dejando que el grupo reconozca su propia forma de pensar en la columna izquierda.</a:t>
+            </a:r>
+          </a:p>
+          <a:p>
+            <a:pPr>
+              <a:spcAft>
+                <a:spcPts val="800"/>
+              </a:spcAft>
+            </a:pPr>
+            <a:r>
+              <a:rPr sz="2000" b="0" i="0">
+                <a:solidFill>
+                  <a:srgbClr val="333333"/>
+                </a:solidFill>
+                <a:latin typeface="Calibri"/>
+              </a:rPr>
+              <a:t>–   Casi todos llegan a primer semestre con la mirada de programador, y no por ignorancia: es la que el entorno premia.</a:t>
+            </a:r>
+          </a:p>
+          <a:p>
+            <a:pPr>
+              <a:spcAft>
+                <a:spcPts val="800"/>
+              </a:spcAft>
+            </a:pPr>
+            <a:r>
+              <a:rPr sz="2000" b="0" i="0">
+                <a:solidFill>
+                  <a:srgbClr val="333333"/>
+                </a:solidFill>
+                <a:latin typeface="Calibri"/>
+              </a:rPr>
+              <a:t>–   La columna derecha es la que la carrera enseña.</a:t>
+            </a:r>
+          </a:p>
+          <a:p>
+            <a:pPr>
+              <a:spcAft>
+                <a:spcPts val="800"/>
+              </a:spcAft>
+            </a:pPr>
+            <a:r>
+              <a:rPr sz="2000" b="0" i="0">
+                <a:solidFill>
+                  <a:srgbClr val="333333"/>
+                </a:solidFill>
+                <a:latin typeface="Calibri"/>
+              </a:rPr>
+              <a:t>–   El ejemplo de las citas médicas conviene desarrollarlo hasta el final porque muestra el fracaso completo.</a:t>
+            </a:r>
+          </a:p>
+          <a:p>
+            <a:pPr>
+              <a:spcAft>
+                <a:spcPts val="800"/>
+              </a:spcAft>
+            </a:pPr>
+            <a:r>
+              <a:rPr sz="2000" b="0" i="0">
+                <a:solidFill>
+                  <a:srgbClr val="333333"/>
+                </a:solidFill>
+                <a:latin typeface="Calibri"/>
+              </a:rPr>
+              <a:t>–   Un equipo con mirada de programador construye una app de citas impecable: sin errores, rápida, bonita.</a:t>
+            </a:r>
+          </a:p>
+          <a:p>
+            <a:pPr>
+              <a:spcAft>
+                <a:spcPts val="800"/>
+              </a:spcAft>
+            </a:pPr>
+            <a:r>
+              <a:rPr sz="2000" b="0" i="0">
+                <a:solidFill>
+                  <a:srgbClr val="333333"/>
+                </a:solidFill>
+                <a:latin typeface="Calibri"/>
+              </a:rPr>
+              <a:t>–   Y la fila de las cinco de la mañana no se mueve, porque las personas que hacen esa fila no tienen datos en el celular, o no confían en la app, o la secretaria sigue apuntando en el cuaderno porque el sistema nuevo le duplica el trabajo.</a:t>
+            </a:r>
+          </a:p>
+        </p:txBody>
+      </p:sp>
+      <p:sp>
+        <p:nvSpPr>
+          <p:cNvPr id="6" name="TextBox 5"/>
+          <p:cNvSpPr txBox="1"/>
+          <p:nvPr/>
+        </p:nvSpPr>
+        <p:spPr>
+          <a:xfrm>
+            <a:off x="11185855" y="6473952"/>
+            <a:ext cx="640080" cy="274320"/>
+          </a:xfrm>
+          <a:prstGeom prst="rect">
+            <a:avLst/>
+          </a:prstGeom>
+          <a:noFill/>
+        </p:spPr>
+        <p:txBody>
+          <a:bodyPr wrap="square">
+            <a:spAutoFit/>
+          </a:bodyPr>
+          <a:lstStyle/>
+          <a:p>
+            <a:pPr algn="r"/>
+            <a:r>
+              <a:rPr sz="1100" b="0" i="0">
+                <a:solidFill>
+                  <a:srgbClr val="666666"/>
+                </a:solidFill>
+                <a:latin typeface="Calibri"/>
+              </a:rPr>
+              <a:t>13</a:t>
+            </a:r>
+          </a:p>
+        </p:txBody>
+      </p:sp>
+    </p:spTree>
+  </p:cSld>
+  <p:clrMapOvr>
+    <a:masterClrMapping/>
+  </p:clrMapOvr>
+</p:sld>
+</file>
+
+<file path=ppt/slides/slide14.xml><?xml version="1.0" encoding="utf-8"?>
+<p:sld xmlns:a="http://schemas.openxmlformats.org/drawingml/2006/main" xmlns:p="http://schemas.openxmlformats.org/presentationml/2006/main" xmlns:r="http://schemas.openxmlformats.org/officeDocument/2006/relationships">
+  <p:cSld>
+    <p:bg>
+      <p:bgPr>
+        <a:solidFill>
+          <a:srgbClr val="FFFFFF"/>
+        </a:solidFill>
+        <a:effectLst/>
+      </p:bgPr>
+    </p:bg>
+    <p:spTree>
+      <p:nvGrpSpPr>
+        <p:cNvPr id="1" name=""/>
+        <p:cNvGrpSpPr/>
+        <p:nvPr/>
+      </p:nvGrpSpPr>
+      <p:grpSpPr/>
+      <p:sp>
+        <p:nvSpPr>
+          <p:cNvPr id="2" name="Rectangle 1"/>
+          <p:cNvSpPr/>
+          <p:nvPr/>
+        </p:nvSpPr>
+        <p:spPr>
+          <a:xfrm>
+            <a:off x="0" y="0"/>
+            <a:ext cx="12191695" cy="960120"/>
+          </a:xfrm>
+          <a:prstGeom prst="rect">
+            <a:avLst/>
+          </a:prstGeom>
+          <a:solidFill>
+            <a:srgbClr val="095292"/>
+          </a:solidFill>
+          <a:ln>
+            <a:noFill/>
+          </a:ln>
+        </p:spPr>
+        <p:style>
+          <a:lnRef idx="1">
+            <a:schemeClr val="accent1"/>
+          </a:lnRef>
+          <a:fillRef idx="3">
+            <a:schemeClr val="accent1"/>
+          </a:fillRef>
+          <a:effectRef idx="2">
+            <a:schemeClr val="accent1"/>
+          </a:effectRef>
+          <a:fontRef idx="minor">
+            <a:schemeClr val="lt1"/>
+          </a:fontRef>
+        </p:style>
+        <p:txBody>
+          <a:bodyPr rtlCol="0" anchor="ctr"/>
+          <a:lstStyle/>
+          <a:p>
+            <a:pPr algn="ctr"/>
+          </a:p>
+        </p:txBody>
+      </p:sp>
+      <p:sp>
+        <p:nvSpPr>
+          <p:cNvPr id="3" name="Rectangle 2"/>
+          <p:cNvSpPr/>
+          <p:nvPr/>
+        </p:nvSpPr>
+        <p:spPr>
+          <a:xfrm>
+            <a:off x="0" y="960120"/>
+            <a:ext cx="12191695" cy="41148"/>
+          </a:xfrm>
+          <a:prstGeom prst="rect">
+            <a:avLst/>
+          </a:prstGeom>
+          <a:solidFill>
+            <a:srgbClr val="FFD000"/>
+          </a:solidFill>
+          <a:ln>
+            <a:noFill/>
+          </a:ln>
+        </p:spPr>
+        <p:style>
+          <a:lnRef idx="1">
+            <a:schemeClr val="accent1"/>
+          </a:lnRef>
+          <a:fillRef idx="3">
+            <a:schemeClr val="accent1"/>
+          </a:fillRef>
+          <a:effectRef idx="2">
+            <a:schemeClr val="accent1"/>
+          </a:effectRef>
+          <a:fontRef idx="minor">
+            <a:schemeClr val="lt1"/>
+          </a:fontRef>
+        </p:style>
+        <p:txBody>
+          <a:bodyPr rtlCol="0" anchor="ctr"/>
+          <a:lstStyle/>
+          <a:p>
+            <a:pPr algn="ctr"/>
+          </a:p>
+        </p:txBody>
+      </p:sp>
+      <p:sp>
+        <p:nvSpPr>
+          <p:cNvPr id="4" name="TextBox 3"/>
+          <p:cNvSpPr txBox="1"/>
+          <p:nvPr/>
+        </p:nvSpPr>
+        <p:spPr>
+          <a:xfrm>
+            <a:off x="457200" y="164592"/>
+            <a:ext cx="11277295" cy="502920"/>
+          </a:xfrm>
+          <a:prstGeom prst="rect">
+            <a:avLst/>
+          </a:prstGeom>
+          <a:noFill/>
+        </p:spPr>
+        <p:txBody>
+          <a:bodyPr wrap="square">
+            <a:spAutoFit/>
+          </a:bodyPr>
+          <a:lstStyle/>
+          <a:p>
+            <a:r>
+              <a:rPr sz="2600" b="1" i="0">
+                <a:solidFill>
+                  <a:srgbClr val="FFFFFF"/>
+                </a:solidFill>
+                <a:latin typeface="Calibri"/>
+              </a:rPr>
+              <a:t>El sistema no es el software: la confusión que hace fracasar proyectos (2/2)</a:t>
+            </a:r>
+          </a:p>
+        </p:txBody>
+      </p:sp>
+      <p:sp>
+        <p:nvSpPr>
+          <p:cNvPr id="5" name="TextBox 4"/>
+          <p:cNvSpPr txBox="1"/>
+          <p:nvPr/>
+        </p:nvSpPr>
+        <p:spPr>
+          <a:xfrm>
+            <a:off x="457200" y="1170432"/>
+            <a:ext cx="11277295" cy="5230368"/>
+          </a:xfrm>
+          <a:prstGeom prst="rect">
+            <a:avLst/>
+          </a:prstGeom>
+          <a:noFill/>
+        </p:spPr>
+        <p:txBody>
+          <a:bodyPr wrap="square">
+            <a:spAutoFit/>
+          </a:bodyPr>
+          <a:lstStyle/>
+          <a:p>
+            <a:pPr>
+              <a:spcAft>
+                <a:spcPts val="800"/>
+              </a:spcAft>
+            </a:pPr>
+            <a:r>
+              <a:rPr sz="2000" b="0" i="0">
+                <a:solidFill>
+                  <a:srgbClr val="333333"/>
+                </a:solidFill>
+                <a:latin typeface="Calibri"/>
+              </a:rPr>
+              <a:t>–   El software funciona y el problema sigue. </a:t>
+            </a:r>
+            <a:r>
+              <a:rPr sz="2000" b="1" i="0">
+                <a:solidFill>
+                  <a:srgbClr val="333333"/>
+                </a:solidFill>
+                <a:latin typeface="Calibri"/>
+              </a:rPr>
+              <a:t>En la lógica de este curso, ese proyecto fracasó</a:t>
+            </a:r>
+            <a:r>
+              <a:rPr sz="2000" b="0" i="0">
+                <a:solidFill>
+                  <a:srgbClr val="333333"/>
+                </a:solidFill>
+                <a:latin typeface="Calibri"/>
+              </a:rPr>
+              <a:t>, y no por un error técnico.</a:t>
+            </a:r>
+          </a:p>
+          <a:p>
+            <a:pPr>
+              <a:spcAft>
+                <a:spcPts val="800"/>
+              </a:spcAft>
+            </a:pPr>
+            <a:r>
+              <a:rPr sz="2000" b="0" i="0">
+                <a:solidFill>
+                  <a:srgbClr val="333333"/>
+                </a:solidFill>
+                <a:latin typeface="Calibri"/>
+              </a:rPr>
+              <a:t>–   De ahí sale el criterio de éxito que se usa en todo el semestre y que hay que enunciar hoy con esas palabras: un proyecto de este curso se juzga por </a:t>
+            </a:r>
+            <a:r>
+              <a:rPr sz="2000" b="1" i="0">
+                <a:solidFill>
+                  <a:srgbClr val="333333"/>
+                </a:solidFill>
+                <a:latin typeface="Calibri"/>
+              </a:rPr>
+              <a:t>si el problema del entorno se redujo y se puede medir</a:t>
+            </a:r>
+            <a:r>
+              <a:rPr sz="2000" b="0" i="0">
+                <a:solidFill>
+                  <a:srgbClr val="333333"/>
+                </a:solidFill>
+                <a:latin typeface="Calibri"/>
+              </a:rPr>
+              <a:t>, no por si el prototipo funciona.</a:t>
+            </a:r>
+          </a:p>
+          <a:p>
+            <a:pPr>
+              <a:spcAft>
+                <a:spcPts val="800"/>
+              </a:spcAft>
+            </a:pPr>
+            <a:r>
+              <a:rPr sz="2000" b="0" i="0">
+                <a:solidFill>
+                  <a:srgbClr val="333333"/>
+                </a:solidFill>
+                <a:latin typeface="Calibri"/>
+              </a:rPr>
+              <a:t>–   Es la razón por la que el bloque «problema del entorno» pesó el 30 % en la sesión 1 y por la que la sesión 6 exige una línea base con una cifra.</a:t>
+            </a:r>
+          </a:p>
+        </p:txBody>
+      </p:sp>
+      <p:sp>
+        <p:nvSpPr>
+          <p:cNvPr id="6" name="TextBox 5"/>
+          <p:cNvSpPr txBox="1"/>
+          <p:nvPr/>
+        </p:nvSpPr>
+        <p:spPr>
+          <a:xfrm>
+            <a:off x="11185855" y="6473952"/>
+            <a:ext cx="640080" cy="274320"/>
+          </a:xfrm>
+          <a:prstGeom prst="rect">
+            <a:avLst/>
+          </a:prstGeom>
+          <a:noFill/>
+        </p:spPr>
+        <p:txBody>
+          <a:bodyPr wrap="square">
+            <a:spAutoFit/>
+          </a:bodyPr>
+          <a:lstStyle/>
+          <a:p>
+            <a:pPr algn="r"/>
+            <a:r>
+              <a:rPr sz="1100" b="0" i="0">
+                <a:solidFill>
+                  <a:srgbClr val="666666"/>
+                </a:solidFill>
+                <a:latin typeface="Calibri"/>
+              </a:rPr>
+              <a:t>14</a:t>
+            </a:r>
+          </a:p>
+        </p:txBody>
+      </p:sp>
+    </p:spTree>
+  </p:cSld>
+  <p:clrMapOvr>
+    <a:masterClrMapping/>
+  </p:clrMapOvr>
+</p:sld>
+</file>
+
+<file path=ppt/slides/slide15.xml><?xml version="1.0" encoding="utf-8"?>
+<p:sld xmlns:a="http://schemas.openxmlformats.org/drawingml/2006/main" xmlns:p="http://schemas.openxmlformats.org/presentationml/2006/main" xmlns:r="http://schemas.openxmlformats.org/officeDocument/2006/relationships">
+  <p:cSld>
+    <p:bg>
+      <p:bgPr>
+        <a:solidFill>
+          <a:srgbClr val="FFFFFF"/>
+        </a:solidFill>
+        <a:effectLst/>
+      </p:bgPr>
+    </p:bg>
+    <p:spTree>
+      <p:nvGrpSpPr>
+        <p:cNvPr id="1" name=""/>
+        <p:cNvGrpSpPr/>
+        <p:nvPr/>
+      </p:nvGrpSpPr>
+      <p:grpSpPr/>
+      <p:sp>
+        <p:nvSpPr>
+          <p:cNvPr id="2" name="Rectangle 1"/>
+          <p:cNvSpPr/>
+          <p:nvPr/>
+        </p:nvSpPr>
+        <p:spPr>
+          <a:xfrm>
+            <a:off x="0" y="0"/>
+            <a:ext cx="12191695" cy="960120"/>
+          </a:xfrm>
+          <a:prstGeom prst="rect">
+            <a:avLst/>
+          </a:prstGeom>
+          <a:solidFill>
+            <a:srgbClr val="095292"/>
+          </a:solidFill>
+          <a:ln>
+            <a:noFill/>
+          </a:ln>
+        </p:spPr>
+        <p:style>
+          <a:lnRef idx="1">
+            <a:schemeClr val="accent1"/>
+          </a:lnRef>
+          <a:fillRef idx="3">
+            <a:schemeClr val="accent1"/>
+          </a:fillRef>
+          <a:effectRef idx="2">
+            <a:schemeClr val="accent1"/>
+          </a:effectRef>
+          <a:fontRef idx="minor">
+            <a:schemeClr val="lt1"/>
+          </a:fontRef>
+        </p:style>
+        <p:txBody>
+          <a:bodyPr rtlCol="0" anchor="ctr"/>
+          <a:lstStyle/>
+          <a:p>
+            <a:pPr algn="ctr"/>
+          </a:p>
+        </p:txBody>
+      </p:sp>
+      <p:sp>
+        <p:nvSpPr>
+          <p:cNvPr id="3" name="Rectangle 2"/>
+          <p:cNvSpPr/>
+          <p:nvPr/>
+        </p:nvSpPr>
+        <p:spPr>
+          <a:xfrm>
+            <a:off x="0" y="960120"/>
+            <a:ext cx="12191695" cy="41148"/>
+          </a:xfrm>
+          <a:prstGeom prst="rect">
+            <a:avLst/>
+          </a:prstGeom>
+          <a:solidFill>
+            <a:srgbClr val="FFD000"/>
+          </a:solidFill>
+          <a:ln>
+            <a:noFill/>
+          </a:ln>
+        </p:spPr>
+        <p:style>
+          <a:lnRef idx="1">
+            <a:schemeClr val="accent1"/>
+          </a:lnRef>
+          <a:fillRef idx="3">
+            <a:schemeClr val="accent1"/>
+          </a:fillRef>
+          <a:effectRef idx="2">
+            <a:schemeClr val="accent1"/>
+          </a:effectRef>
+          <a:fontRef idx="minor">
+            <a:schemeClr val="lt1"/>
+          </a:fontRef>
+        </p:style>
+        <p:txBody>
+          <a:bodyPr rtlCol="0" anchor="ctr"/>
+          <a:lstStyle/>
+          <a:p>
+            <a:pPr algn="ctr"/>
+          </a:p>
+        </p:txBody>
+      </p:sp>
+      <p:sp>
+        <p:nvSpPr>
+          <p:cNvPr id="4" name="TextBox 3"/>
+          <p:cNvSpPr txBox="1"/>
+          <p:nvPr/>
+        </p:nvSpPr>
+        <p:spPr>
+          <a:xfrm>
+            <a:off x="457200" y="164592"/>
+            <a:ext cx="11277295" cy="502920"/>
+          </a:xfrm>
+          <a:prstGeom prst="rect">
+            <a:avLst/>
+          </a:prstGeom>
+          <a:noFill/>
+        </p:spPr>
+        <p:txBody>
+          <a:bodyPr wrap="square">
+            <a:spAutoFit/>
+          </a:bodyPr>
+          <a:lstStyle/>
+          <a:p>
+            <a:r>
+              <a:rPr sz="2600" b="1" i="0">
+                <a:solidFill>
+                  <a:srgbClr val="FFFFFF"/>
+                </a:solidFill>
+                <a:latin typeface="Calibri"/>
+              </a:rPr>
+              <a:t>Actores, requisitos y retroalimentación: los tres que se olvidan (1/2)</a:t>
+            </a:r>
+          </a:p>
+        </p:txBody>
+      </p:sp>
+      <p:sp>
+        <p:nvSpPr>
+          <p:cNvPr id="5" name="TextBox 4"/>
+          <p:cNvSpPr txBox="1"/>
+          <p:nvPr/>
+        </p:nvSpPr>
+        <p:spPr>
+          <a:xfrm>
+            <a:off x="457200" y="1170432"/>
+            <a:ext cx="11277295" cy="5230368"/>
+          </a:xfrm>
+          <a:prstGeom prst="rect">
+            <a:avLst/>
+          </a:prstGeom>
+          <a:noFill/>
+        </p:spPr>
+        <p:txBody>
+          <a:bodyPr wrap="square">
+            <a:spAutoFit/>
+          </a:bodyPr>
+          <a:lstStyle/>
+          <a:p>
+            <a:pPr>
+              <a:spcAft>
+                <a:spcPts val="800"/>
+              </a:spcAft>
+            </a:pPr>
+            <a:r>
+              <a:rPr sz="2000" b="0" i="0">
+                <a:solidFill>
+                  <a:srgbClr val="333333"/>
+                </a:solidFill>
+                <a:latin typeface="Calibri"/>
+              </a:rPr>
+              <a:t>–   El concepto de actor hay que estirarlo más allá del usuario, porque ahí está la falla que más cuesta.</a:t>
+            </a:r>
+          </a:p>
+          <a:p>
+            <a:pPr>
+              <a:spcAft>
+                <a:spcPts val="800"/>
+              </a:spcAft>
+            </a:pPr>
+            <a:r>
+              <a:rPr sz="2000" b="0" i="0">
+                <a:solidFill>
+                  <a:srgbClr val="333333"/>
+                </a:solidFill>
+                <a:latin typeface="Calibri"/>
+              </a:rPr>
+              <a:t>–   En el sistema de citas los actores obvios son el paciente y la secretaria.</a:t>
+            </a:r>
+          </a:p>
+          <a:p>
+            <a:pPr>
+              <a:spcAft>
+                <a:spcPts val="800"/>
+              </a:spcAft>
+            </a:pPr>
+            <a:r>
+              <a:rPr sz="2000" b="0" i="0">
+                <a:solidFill>
+                  <a:srgbClr val="333333"/>
+                </a:solidFill>
+                <a:latin typeface="Calibri"/>
+              </a:rPr>
+              <a:t>–   Los que se olvidan son el médico (cuya agenda se llena distinto), quien paga el servicio (que quiere menos cupos perdidos) y </a:t>
+            </a:r>
+            <a:r>
+              <a:rPr sz="2000" b="1" i="0">
+                <a:solidFill>
+                  <a:srgbClr val="333333"/>
+                </a:solidFill>
+                <a:latin typeface="Calibri"/>
+              </a:rPr>
+              <a:t>el vecino que antes conseguía cita madrugando y ahora no la consigue</a:t>
+            </a:r>
+            <a:r>
+              <a:rPr sz="2000" b="0" i="0">
+                <a:solidFill>
+                  <a:srgbClr val="333333"/>
+                </a:solidFill>
+                <a:latin typeface="Calibri"/>
+              </a:rPr>
+              <a:t>.</a:t>
+            </a:r>
+          </a:p>
+          <a:p>
+            <a:pPr>
+              <a:spcAft>
+                <a:spcPts val="800"/>
+              </a:spcAft>
+            </a:pPr>
+            <a:r>
+              <a:rPr sz="2000" b="0" i="0">
+                <a:solidFill>
+                  <a:srgbClr val="333333"/>
+                </a:solidFill>
+                <a:latin typeface="Calibri"/>
+              </a:rPr>
+              <a:t>–   Ese último es el más importante para el curso, porque es un actor al que el sistema le empeoró la vida sin que nadie lo consultara.</a:t>
+            </a:r>
+          </a:p>
+          <a:p>
+            <a:pPr>
+              <a:spcAft>
+                <a:spcPts val="800"/>
+              </a:spcAft>
+            </a:pPr>
+            <a:r>
+              <a:rPr sz="2000" b="0" i="0">
+                <a:solidFill>
+                  <a:srgbClr val="333333"/>
+                </a:solidFill>
+                <a:latin typeface="Calibri"/>
+              </a:rPr>
+              <a:t>–   La Clase 13, sobre impacto social, es básicamente una hora dedicada a buscar a ese actor.</a:t>
+            </a:r>
+          </a:p>
+          <a:p>
+            <a:pPr>
+              <a:spcAft>
+                <a:spcPts val="800"/>
+              </a:spcAft>
+            </a:pPr>
+            <a:r>
+              <a:rPr sz="2000" b="0" i="0">
+                <a:solidFill>
+                  <a:srgbClr val="333333"/>
+                </a:solidFill>
+                <a:latin typeface="Calibri"/>
+              </a:rPr>
+              <a:t>–   Requisito contra deseo es la distinción práctica que más van a usar.</a:t>
+            </a:r>
+          </a:p>
+          <a:p>
+            <a:pPr>
+              <a:spcAft>
+                <a:spcPts val="800"/>
+              </a:spcAft>
+            </a:pPr>
+            <a:r>
+              <a:rPr sz="2000" b="0" i="0">
+                <a:solidFill>
+                  <a:srgbClr val="333333"/>
+                </a:solidFill>
+                <a:latin typeface="Calibri"/>
+              </a:rPr>
+              <a:t>–   La regla es operativa: es requisito si sin eso el sistema no cumple su propósito; es deseo si lo mejora.</a:t>
+            </a:r>
+          </a:p>
+          <a:p>
+            <a:pPr>
+              <a:spcAft>
+                <a:spcPts val="800"/>
+              </a:spcAft>
+            </a:pPr>
+            <a:r>
+              <a:rPr sz="2000" b="0" i="0">
+                <a:solidFill>
+                  <a:srgbClr val="333333"/>
+                </a:solidFill>
+                <a:latin typeface="Calibri"/>
+              </a:rPr>
+              <a:t>–   Y hay que advertir el fenómeno social: </a:t>
+            </a:r>
+            <a:r>
+              <a:rPr sz="2000" b="1" i="0">
+                <a:solidFill>
+                  <a:srgbClr val="333333"/>
+                </a:solidFill>
+                <a:latin typeface="Calibri"/>
+              </a:rPr>
+              <a:t>todo el mundo presenta sus deseos como requisitos</a:t>
+            </a:r>
+            <a:r>
+              <a:rPr sz="2000" b="0" i="0">
+                <a:solidFill>
+                  <a:srgbClr val="333333"/>
+                </a:solidFill>
+                <a:latin typeface="Calibri"/>
+              </a:rPr>
+              <a:t>, no por mala fe, sino porque desde dentro de su trabajo todo parece indispensable.</a:t>
+            </a:r>
+          </a:p>
+        </p:txBody>
+      </p:sp>
+      <p:sp>
+        <p:nvSpPr>
+          <p:cNvPr id="6" name="TextBox 5"/>
+          <p:cNvSpPr txBox="1"/>
+          <p:nvPr/>
+        </p:nvSpPr>
+        <p:spPr>
+          <a:xfrm>
+            <a:off x="11185855" y="6473952"/>
+            <a:ext cx="640080" cy="274320"/>
+          </a:xfrm>
+          <a:prstGeom prst="rect">
+            <a:avLst/>
+          </a:prstGeom>
+          <a:noFill/>
+        </p:spPr>
+        <p:txBody>
+          <a:bodyPr wrap="square">
+            <a:spAutoFit/>
+          </a:bodyPr>
+          <a:lstStyle/>
+          <a:p>
+            <a:pPr algn="r"/>
+            <a:r>
+              <a:rPr sz="1100" b="0" i="0">
+                <a:solidFill>
+                  <a:srgbClr val="666666"/>
+                </a:solidFill>
+                <a:latin typeface="Calibri"/>
+              </a:rPr>
+              <a:t>15</a:t>
+            </a:r>
+          </a:p>
+        </p:txBody>
+      </p:sp>
+    </p:spTree>
+  </p:cSld>
+  <p:clrMapOvr>
+    <a:masterClrMapping/>
+  </p:clrMapOvr>
+</p:sld>
+</file>
+
+<file path=ppt/slides/slide16.xml><?xml version="1.0" encoding="utf-8"?>
+<p:sld xmlns:a="http://schemas.openxmlformats.org/drawingml/2006/main" xmlns:p="http://schemas.openxmlformats.org/presentationml/2006/main" xmlns:r="http://schemas.openxmlformats.org/officeDocument/2006/relationships">
+  <p:cSld>
+    <p:bg>
+      <p:bgPr>
+        <a:solidFill>
+          <a:srgbClr val="FFFFFF"/>
+        </a:solidFill>
+        <a:effectLst/>
+      </p:bgPr>
+    </p:bg>
+    <p:spTree>
+      <p:nvGrpSpPr>
+        <p:cNvPr id="1" name=""/>
+        <p:cNvGrpSpPr/>
+        <p:nvPr/>
+      </p:nvGrpSpPr>
+      <p:grpSpPr/>
+      <p:sp>
+        <p:nvSpPr>
+          <p:cNvPr id="2" name="Rectangle 1"/>
+          <p:cNvSpPr/>
+          <p:nvPr/>
+        </p:nvSpPr>
+        <p:spPr>
+          <a:xfrm>
+            <a:off x="0" y="0"/>
+            <a:ext cx="12191695" cy="960120"/>
+          </a:xfrm>
+          <a:prstGeom prst="rect">
+            <a:avLst/>
+          </a:prstGeom>
+          <a:solidFill>
+            <a:srgbClr val="095292"/>
+          </a:solidFill>
+          <a:ln>
+            <a:noFill/>
+          </a:ln>
+        </p:spPr>
+        <p:style>
+          <a:lnRef idx="1">
+            <a:schemeClr val="accent1"/>
+          </a:lnRef>
+          <a:fillRef idx="3">
+            <a:schemeClr val="accent1"/>
+          </a:fillRef>
+          <a:effectRef idx="2">
+            <a:schemeClr val="accent1"/>
+          </a:effectRef>
+          <a:fontRef idx="minor">
+            <a:schemeClr val="lt1"/>
+          </a:fontRef>
+        </p:style>
+        <p:txBody>
+          <a:bodyPr rtlCol="0" anchor="ctr"/>
+          <a:lstStyle/>
+          <a:p>
+            <a:pPr algn="ctr"/>
+          </a:p>
+        </p:txBody>
+      </p:sp>
+      <p:sp>
+        <p:nvSpPr>
+          <p:cNvPr id="3" name="Rectangle 2"/>
+          <p:cNvSpPr/>
+          <p:nvPr/>
+        </p:nvSpPr>
+        <p:spPr>
+          <a:xfrm>
+            <a:off x="0" y="960120"/>
+            <a:ext cx="12191695" cy="41148"/>
+          </a:xfrm>
+          <a:prstGeom prst="rect">
+            <a:avLst/>
+          </a:prstGeom>
+          <a:solidFill>
+            <a:srgbClr val="FFD000"/>
+          </a:solidFill>
+          <a:ln>
+            <a:noFill/>
+          </a:ln>
+        </p:spPr>
+        <p:style>
+          <a:lnRef idx="1">
+            <a:schemeClr val="accent1"/>
+          </a:lnRef>
+          <a:fillRef idx="3">
+            <a:schemeClr val="accent1"/>
+          </a:fillRef>
+          <a:effectRef idx="2">
+            <a:schemeClr val="accent1"/>
+          </a:effectRef>
+          <a:fontRef idx="minor">
+            <a:schemeClr val="lt1"/>
+          </a:fontRef>
+        </p:style>
+        <p:txBody>
+          <a:bodyPr rtlCol="0" anchor="ctr"/>
+          <a:lstStyle/>
+          <a:p>
+            <a:pPr algn="ctr"/>
+          </a:p>
+        </p:txBody>
+      </p:sp>
+      <p:sp>
+        <p:nvSpPr>
+          <p:cNvPr id="4" name="TextBox 3"/>
+          <p:cNvSpPr txBox="1"/>
+          <p:nvPr/>
+        </p:nvSpPr>
+        <p:spPr>
+          <a:xfrm>
+            <a:off x="457200" y="164592"/>
+            <a:ext cx="11277295" cy="502920"/>
+          </a:xfrm>
+          <a:prstGeom prst="rect">
+            <a:avLst/>
+          </a:prstGeom>
+          <a:noFill/>
+        </p:spPr>
+        <p:txBody>
+          <a:bodyPr wrap="square">
+            <a:spAutoFit/>
+          </a:bodyPr>
+          <a:lstStyle/>
+          <a:p>
+            <a:r>
+              <a:rPr sz="2600" b="1" i="0">
+                <a:solidFill>
+                  <a:srgbClr val="FFFFFF"/>
+                </a:solidFill>
+                <a:latin typeface="Calibri"/>
+              </a:rPr>
+              <a:t>Actores, requisitos y retroalimentación: los tres que se olvidan (2/2)</a:t>
+            </a:r>
+          </a:p>
+        </p:txBody>
+      </p:sp>
+      <p:sp>
+        <p:nvSpPr>
+          <p:cNvPr id="5" name="TextBox 4"/>
+          <p:cNvSpPr txBox="1"/>
+          <p:nvPr/>
+        </p:nvSpPr>
+        <p:spPr>
+          <a:xfrm>
+            <a:off x="457200" y="1170432"/>
+            <a:ext cx="11277295" cy="5230368"/>
+          </a:xfrm>
+          <a:prstGeom prst="rect">
+            <a:avLst/>
+          </a:prstGeom>
+          <a:noFill/>
+        </p:spPr>
+        <p:txBody>
+          <a:bodyPr wrap="square">
+            <a:spAutoFit/>
+          </a:bodyPr>
+          <a:lstStyle/>
+          <a:p>
+            <a:pPr>
+              <a:spcAft>
+                <a:spcPts val="800"/>
+              </a:spcAft>
+            </a:pPr>
+            <a:r>
+              <a:rPr sz="2000" b="0" i="0">
+                <a:solidFill>
+                  <a:srgbClr val="333333"/>
+                </a:solidFill>
+                <a:latin typeface="Calibri"/>
+              </a:rPr>
+              <a:t>–   Separarlos no es un trámite: es lo que permite entregar algo en un semestre en vez de nada en dos años.</a:t>
+            </a:r>
+          </a:p>
+          <a:p>
+            <a:pPr>
+              <a:spcAft>
+                <a:spcPts val="800"/>
+              </a:spcAft>
+            </a:pPr>
+            <a:r>
+              <a:rPr sz="2000" b="0" i="0">
+                <a:solidFill>
+                  <a:srgbClr val="333333"/>
+                </a:solidFill>
+                <a:latin typeface="Calibri"/>
+              </a:rPr>
+              <a:t>–   La retroalimentación es la más abstracta y la que más rinde cuando se aterriza con una pregunta única: </a:t>
+            </a:r>
+            <a:r>
+              <a:rPr sz="2000" b="1" i="0">
+                <a:solidFill>
+                  <a:srgbClr val="333333"/>
+                </a:solidFill>
+                <a:latin typeface="Calibri"/>
+              </a:rPr>
+              <a:t>¿cómo se entera este sistema de que le salió mal?</a:t>
+            </a:r>
+            <a:r>
+              <a:rPr sz="2000" b="0" i="0">
+                <a:solidFill>
+                  <a:srgbClr val="333333"/>
+                </a:solidFill>
+                <a:latin typeface="Calibri"/>
+              </a:rPr>
+              <a:t> En la mayoría de los sistemas del entorno que los equipos van a mirar</a:t>
+            </a:r>
+          </a:p>
+          <a:p>
+            <a:pPr>
+              <a:spcAft>
+                <a:spcPts val="800"/>
+              </a:spcAft>
+            </a:pPr>
+            <a:r>
+              <a:rPr sz="2000" b="0" i="0">
+                <a:solidFill>
+                  <a:srgbClr val="333333"/>
+                </a:solidFill>
+                <a:latin typeface="Calibri"/>
+              </a:rPr>
+              <a:t>–   La respuesta honesta es «no se entera», o «se entera cuando alguien reclama».</a:t>
+            </a:r>
+          </a:p>
+          <a:p>
+            <a:pPr>
+              <a:spcAft>
+                <a:spcPts val="800"/>
+              </a:spcAft>
+            </a:pPr>
+            <a:r>
+              <a:rPr sz="2000" b="0" i="0">
+                <a:solidFill>
+                  <a:srgbClr val="333333"/>
+                </a:solidFill>
+                <a:latin typeface="Calibri"/>
+              </a:rPr>
+              <a:t>–   Encontrar eso ya es un hallazgo de ingeniería y suele ser la mejor oportunidad de mejora del proyecto, porque casi siempre es barata: un registro, un conteo, una pregunta al final del proceso.</a:t>
+            </a:r>
+          </a:p>
+        </p:txBody>
+      </p:sp>
+      <p:sp>
+        <p:nvSpPr>
+          <p:cNvPr id="6" name="TextBox 5"/>
+          <p:cNvSpPr txBox="1"/>
+          <p:nvPr/>
+        </p:nvSpPr>
+        <p:spPr>
+          <a:xfrm>
+            <a:off x="11185855" y="6473952"/>
+            <a:ext cx="640080" cy="274320"/>
+          </a:xfrm>
+          <a:prstGeom prst="rect">
+            <a:avLst/>
+          </a:prstGeom>
+          <a:noFill/>
+        </p:spPr>
+        <p:txBody>
+          <a:bodyPr wrap="square">
+            <a:spAutoFit/>
+          </a:bodyPr>
+          <a:lstStyle/>
+          <a:p>
+            <a:pPr algn="r"/>
+            <a:r>
+              <a:rPr sz="1100" b="0" i="0">
+                <a:solidFill>
+                  <a:srgbClr val="666666"/>
+                </a:solidFill>
+                <a:latin typeface="Calibri"/>
+              </a:rPr>
+              <a:t>16</a:t>
+            </a:r>
+          </a:p>
+        </p:txBody>
+      </p:sp>
+    </p:spTree>
+  </p:cSld>
+  <p:clrMapOvr>
+    <a:masterClrMapping/>
+  </p:clrMapOvr>
+</p:sld>
+</file>
+
+<file path=ppt/slides/slide17.xml><?xml version="1.0" encoding="utf-8"?>
+<p:sld xmlns:a="http://schemas.openxmlformats.org/drawingml/2006/main" xmlns:p="http://schemas.openxmlformats.org/presentationml/2006/main" xmlns:r="http://schemas.openxmlformats.org/officeDocument/2006/relationships">
+  <p:cSld>
+    <p:bg>
+      <p:bgPr>
+        <a:solidFill>
+          <a:srgbClr val="FFFFFF"/>
+        </a:solidFill>
+        <a:effectLst/>
+      </p:bgPr>
+    </p:bg>
+    <p:spTree>
+      <p:nvGrpSpPr>
+        <p:cNvPr id="1" name=""/>
+        <p:cNvGrpSpPr/>
+        <p:nvPr/>
+      </p:nvGrpSpPr>
+      <p:grpSpPr/>
+      <p:sp>
+        <p:nvSpPr>
+          <p:cNvPr id="2" name="Rectangle 1"/>
+          <p:cNvSpPr/>
+          <p:nvPr/>
+        </p:nvSpPr>
+        <p:spPr>
+          <a:xfrm>
+            <a:off x="0" y="0"/>
+            <a:ext cx="12191695" cy="960120"/>
+          </a:xfrm>
+          <a:prstGeom prst="rect">
+            <a:avLst/>
+          </a:prstGeom>
+          <a:solidFill>
+            <a:srgbClr val="095292"/>
+          </a:solidFill>
+          <a:ln>
+            <a:noFill/>
+          </a:ln>
+        </p:spPr>
+        <p:style>
+          <a:lnRef idx="1">
+            <a:schemeClr val="accent1"/>
+          </a:lnRef>
+          <a:fillRef idx="3">
+            <a:schemeClr val="accent1"/>
+          </a:fillRef>
+          <a:effectRef idx="2">
+            <a:schemeClr val="accent1"/>
+          </a:effectRef>
+          <a:fontRef idx="minor">
+            <a:schemeClr val="lt1"/>
+          </a:fontRef>
+        </p:style>
+        <p:txBody>
+          <a:bodyPr rtlCol="0" anchor="ctr"/>
+          <a:lstStyle/>
+          <a:p>
+            <a:pPr algn="ctr"/>
+          </a:p>
+        </p:txBody>
+      </p:sp>
+      <p:sp>
+        <p:nvSpPr>
+          <p:cNvPr id="3" name="Rectangle 2"/>
+          <p:cNvSpPr/>
+          <p:nvPr/>
+        </p:nvSpPr>
+        <p:spPr>
+          <a:xfrm>
+            <a:off x="0" y="960120"/>
+            <a:ext cx="12191695" cy="41148"/>
+          </a:xfrm>
+          <a:prstGeom prst="rect">
+            <a:avLst/>
+          </a:prstGeom>
+          <a:solidFill>
+            <a:srgbClr val="FFD000"/>
+          </a:solidFill>
+          <a:ln>
+            <a:noFill/>
+          </a:ln>
+        </p:spPr>
+        <p:style>
+          <a:lnRef idx="1">
+            <a:schemeClr val="accent1"/>
+          </a:lnRef>
+          <a:fillRef idx="3">
+            <a:schemeClr val="accent1"/>
+          </a:fillRef>
+          <a:effectRef idx="2">
+            <a:schemeClr val="accent1"/>
+          </a:effectRef>
+          <a:fontRef idx="minor">
+            <a:schemeClr val="lt1"/>
+          </a:fontRef>
+        </p:style>
+        <p:txBody>
+          <a:bodyPr rtlCol="0" anchor="ctr"/>
+          <a:lstStyle/>
+          <a:p>
+            <a:pPr algn="ctr"/>
+          </a:p>
+        </p:txBody>
+      </p:sp>
+      <p:sp>
+        <p:nvSpPr>
+          <p:cNvPr id="4" name="TextBox 3"/>
+          <p:cNvSpPr txBox="1"/>
+          <p:nvPr/>
+        </p:nvSpPr>
+        <p:spPr>
+          <a:xfrm>
+            <a:off x="457200" y="164592"/>
+            <a:ext cx="11277295" cy="502920"/>
+          </a:xfrm>
+          <a:prstGeom prst="rect">
+            <a:avLst/>
+          </a:prstGeom>
+          <a:noFill/>
+        </p:spPr>
+        <p:txBody>
+          <a:bodyPr wrap="square">
+            <a:spAutoFit/>
+          </a:bodyPr>
+          <a:lstStyle/>
+          <a:p>
+            <a:r>
+              <a:rPr sz="2600" b="1" i="0">
+                <a:solidFill>
+                  <a:srgbClr val="FFFFFF"/>
+                </a:solidFill>
+                <a:latin typeface="Calibri"/>
+              </a:rPr>
+              <a:t>El asistente de IA: cómo usarlo hoy sin que haga el trabajo (1/2)</a:t>
+            </a:r>
+          </a:p>
+        </p:txBody>
+      </p:sp>
+      <p:sp>
+        <p:nvSpPr>
+          <p:cNvPr id="5" name="TextBox 4"/>
+          <p:cNvSpPr txBox="1"/>
+          <p:nvPr/>
+        </p:nvSpPr>
+        <p:spPr>
+          <a:xfrm>
+            <a:off x="457200" y="1170432"/>
+            <a:ext cx="11277295" cy="5230368"/>
+          </a:xfrm>
+          <a:prstGeom prst="rect">
+            <a:avLst/>
+          </a:prstGeom>
+          <a:noFill/>
+        </p:spPr>
+        <p:txBody>
+          <a:bodyPr wrap="square">
+            <a:spAutoFit/>
+          </a:bodyPr>
+          <a:lstStyle/>
+          <a:p>
+            <a:pPr>
+              <a:spcAft>
+                <a:spcPts val="800"/>
+              </a:spcAft>
+            </a:pPr>
+            <a:r>
+              <a:rPr sz="2000" b="0" i="0">
+                <a:solidFill>
+                  <a:srgbClr val="333333"/>
+                </a:solidFill>
+                <a:latin typeface="Calibri"/>
+              </a:rPr>
+              <a:t>–   Esta es una de las dos sesiones donde el Plan de curso autoriza IA, y conviene encuadrarla bien porque de cómo se haga hoy depende cómo la usen todo el semestre.</a:t>
+            </a:r>
+          </a:p>
+          <a:p>
+            <a:pPr>
+              <a:spcAft>
+                <a:spcPts val="800"/>
+              </a:spcAft>
+            </a:pPr>
+            <a:r>
+              <a:rPr sz="2000" b="0" i="0">
+                <a:solidFill>
+                  <a:srgbClr val="333333"/>
+                </a:solidFill>
+                <a:latin typeface="Calibri"/>
+              </a:rPr>
+              <a:t>–   La postura del curso no es prohibirla ni celebrarla: es </a:t>
+            </a:r>
+            <a:r>
+              <a:rPr sz="2000" b="1" i="0">
+                <a:solidFill>
+                  <a:srgbClr val="333333"/>
+                </a:solidFill>
+                <a:latin typeface="Calibri"/>
+              </a:rPr>
+              <a:t>usarla y verificarla</a:t>
+            </a:r>
+            <a:r>
+              <a:rPr sz="2000" b="0" i="0">
+                <a:solidFill>
+                  <a:srgbClr val="333333"/>
+                </a:solidFill>
+                <a:latin typeface="Calibri"/>
+              </a:rPr>
+              <a:t>.</a:t>
+            </a:r>
+          </a:p>
+          <a:p>
+            <a:pPr>
+              <a:spcAft>
+                <a:spcPts val="800"/>
+              </a:spcAft>
+            </a:pPr>
+            <a:r>
+              <a:rPr sz="2000" b="0" i="0">
+                <a:solidFill>
+                  <a:srgbClr val="333333"/>
+                </a:solidFill>
+                <a:latin typeface="Calibri"/>
+              </a:rPr>
+              <a:t>–   El asistente es bueno dándole estructura a algo que el equipo ya entiende, y es bueno sugiriendo actores que se pasaron por alto.</a:t>
+            </a:r>
+          </a:p>
+          <a:p>
+            <a:pPr>
+              <a:spcAft>
+                <a:spcPts val="800"/>
+              </a:spcAft>
+            </a:pPr>
+            <a:r>
+              <a:rPr sz="2000" b="0" i="0">
+                <a:solidFill>
+                  <a:srgbClr val="333333"/>
+                </a:solidFill>
+                <a:latin typeface="Calibri"/>
+              </a:rPr>
+              <a:t>–   Es malo, y de una manera peligrosa, en todo lo local y lo cuantitativo.</a:t>
+            </a:r>
+          </a:p>
+          <a:p>
+            <a:pPr>
+              <a:spcAft>
+                <a:spcPts val="800"/>
+              </a:spcAft>
+            </a:pPr>
+            <a:r>
+              <a:rPr sz="2000" b="0" i="0">
+                <a:solidFill>
+                  <a:srgbClr val="333333"/>
+                </a:solidFill>
+                <a:latin typeface="Calibri"/>
+              </a:rPr>
+              <a:t>–   El punto que hay que subrayar es el mecanismo de la falla: el asistente </a:t>
+            </a:r>
+            <a:r>
+              <a:rPr sz="2000" b="1" i="0">
+                <a:solidFill>
+                  <a:srgbClr val="333333"/>
+                </a:solidFill>
+                <a:latin typeface="Calibri"/>
+              </a:rPr>
+              <a:t>no avisa cuando está inventando</a:t>
+            </a:r>
+            <a:r>
+              <a:rPr sz="2000" b="0" i="0">
+                <a:solidFill>
+                  <a:srgbClr val="333333"/>
+                </a:solidFill>
+                <a:latin typeface="Calibri"/>
+              </a:rPr>
+              <a:t>.</a:t>
+            </a:r>
+          </a:p>
+          <a:p>
+            <a:pPr>
+              <a:spcAft>
+                <a:spcPts val="800"/>
+              </a:spcAft>
+            </a:pPr>
+            <a:r>
+              <a:rPr sz="2000" b="0" i="0">
+                <a:solidFill>
+                  <a:srgbClr val="333333"/>
+                </a:solidFill>
+                <a:latin typeface="Calibri"/>
+              </a:rPr>
+              <a:t>–   Escribe «el tiempo promedio de espera en las EPS colombianas es de 47 minutos» con el mismo tono con que escribe algo correcto.</a:t>
+            </a:r>
+          </a:p>
+          <a:p>
+            <a:pPr>
+              <a:spcAft>
+                <a:spcPts val="800"/>
+              </a:spcAft>
+            </a:pPr>
+            <a:r>
+              <a:rPr sz="2000" b="0" i="0">
+                <a:solidFill>
+                  <a:srgbClr val="333333"/>
+                </a:solidFill>
+                <a:latin typeface="Calibri"/>
+              </a:rPr>
+              <a:t>–   Va a inventar cifras, nombres de dependencias municipales y números de leyes.</a:t>
+            </a:r>
+          </a:p>
+          <a:p>
+            <a:pPr>
+              <a:spcAft>
+                <a:spcPts val="800"/>
+              </a:spcAft>
+            </a:pPr>
+            <a:r>
+              <a:rPr sz="2000" b="0" i="0">
+                <a:solidFill>
+                  <a:srgbClr val="333333"/>
+                </a:solidFill>
+                <a:latin typeface="Calibri"/>
+              </a:rPr>
+              <a:t>–   Es exactamente el tipo de dato que un estudiante de primer semestre no puede distinguir, y por eso el entregable de hoy no es el texto de la IA: es </a:t>
+            </a:r>
+            <a:r>
+              <a:rPr sz="2000" b="1" i="0">
+                <a:solidFill>
+                  <a:srgbClr val="333333"/>
+                </a:solidFill>
+                <a:latin typeface="Calibri"/>
+              </a:rPr>
+              <a:t>la lista de lo que el equipo detectó y corrigió</a:t>
+            </a:r>
+            <a:r>
+              <a:rPr sz="2000" b="0" i="0">
+                <a:solidFill>
+                  <a:srgbClr val="333333"/>
+                </a:solidFill>
+                <a:latin typeface="Calibri"/>
+              </a:rPr>
+              <a:t>.</a:t>
+            </a:r>
+          </a:p>
+        </p:txBody>
+      </p:sp>
+      <p:sp>
+        <p:nvSpPr>
+          <p:cNvPr id="6" name="TextBox 5"/>
+          <p:cNvSpPr txBox="1"/>
+          <p:nvPr/>
+        </p:nvSpPr>
+        <p:spPr>
+          <a:xfrm>
+            <a:off x="11185855" y="6473952"/>
+            <a:ext cx="640080" cy="274320"/>
+          </a:xfrm>
+          <a:prstGeom prst="rect">
+            <a:avLst/>
+          </a:prstGeom>
+          <a:noFill/>
+        </p:spPr>
+        <p:txBody>
+          <a:bodyPr wrap="square">
+            <a:spAutoFit/>
+          </a:bodyPr>
+          <a:lstStyle/>
+          <a:p>
+            <a:pPr algn="r"/>
+            <a:r>
+              <a:rPr sz="1100" b="0" i="0">
+                <a:solidFill>
+                  <a:srgbClr val="666666"/>
+                </a:solidFill>
+                <a:latin typeface="Calibri"/>
+              </a:rPr>
+              <a:t>17</a:t>
+            </a:r>
+          </a:p>
+        </p:txBody>
+      </p:sp>
+    </p:spTree>
+  </p:cSld>
+  <p:clrMapOvr>
+    <a:masterClrMapping/>
+  </p:clrMapOvr>
+</p:sld>
+</file>
+
+<file path=ppt/slides/slide18.xml><?xml version="1.0" encoding="utf-8"?>
+<p:sld xmlns:a="http://schemas.openxmlformats.org/drawingml/2006/main" xmlns:p="http://schemas.openxmlformats.org/presentationml/2006/main" xmlns:r="http://schemas.openxmlformats.org/officeDocument/2006/relationships">
+  <p:cSld>
+    <p:bg>
+      <p:bgPr>
+        <a:solidFill>
+          <a:srgbClr val="FFFFFF"/>
+        </a:solidFill>
+        <a:effectLst/>
+      </p:bgPr>
+    </p:bg>
+    <p:spTree>
+      <p:nvGrpSpPr>
+        <p:cNvPr id="1" name=""/>
+        <p:cNvGrpSpPr/>
+        <p:nvPr/>
+      </p:nvGrpSpPr>
+      <p:grpSpPr/>
+      <p:sp>
+        <p:nvSpPr>
+          <p:cNvPr id="2" name="Rectangle 1"/>
+          <p:cNvSpPr/>
+          <p:nvPr/>
+        </p:nvSpPr>
+        <p:spPr>
+          <a:xfrm>
+            <a:off x="0" y="0"/>
+            <a:ext cx="12191695" cy="960120"/>
+          </a:xfrm>
+          <a:prstGeom prst="rect">
+            <a:avLst/>
+          </a:prstGeom>
+          <a:solidFill>
+            <a:srgbClr val="095292"/>
+          </a:solidFill>
+          <a:ln>
+            <a:noFill/>
+          </a:ln>
+        </p:spPr>
+        <p:style>
+          <a:lnRef idx="1">
+            <a:schemeClr val="accent1"/>
+          </a:lnRef>
+          <a:fillRef idx="3">
+            <a:schemeClr val="accent1"/>
+          </a:fillRef>
+          <a:effectRef idx="2">
+            <a:schemeClr val="accent1"/>
+          </a:effectRef>
+          <a:fontRef idx="minor">
+            <a:schemeClr val="lt1"/>
+          </a:fontRef>
+        </p:style>
+        <p:txBody>
+          <a:bodyPr rtlCol="0" anchor="ctr"/>
+          <a:lstStyle/>
+          <a:p>
+            <a:pPr algn="ctr"/>
+          </a:p>
+        </p:txBody>
+      </p:sp>
+      <p:sp>
+        <p:nvSpPr>
+          <p:cNvPr id="3" name="Rectangle 2"/>
+          <p:cNvSpPr/>
+          <p:nvPr/>
+        </p:nvSpPr>
+        <p:spPr>
+          <a:xfrm>
+            <a:off x="0" y="960120"/>
+            <a:ext cx="12191695" cy="41148"/>
+          </a:xfrm>
+          <a:prstGeom prst="rect">
+            <a:avLst/>
+          </a:prstGeom>
+          <a:solidFill>
+            <a:srgbClr val="FFD000"/>
+          </a:solidFill>
+          <a:ln>
+            <a:noFill/>
+          </a:ln>
+        </p:spPr>
+        <p:style>
+          <a:lnRef idx="1">
+            <a:schemeClr val="accent1"/>
+          </a:lnRef>
+          <a:fillRef idx="3">
+            <a:schemeClr val="accent1"/>
+          </a:fillRef>
+          <a:effectRef idx="2">
+            <a:schemeClr val="accent1"/>
+          </a:effectRef>
+          <a:fontRef idx="minor">
+            <a:schemeClr val="lt1"/>
+          </a:fontRef>
+        </p:style>
+        <p:txBody>
+          <a:bodyPr rtlCol="0" anchor="ctr"/>
+          <a:lstStyle/>
+          <a:p>
+            <a:pPr algn="ctr"/>
+          </a:p>
+        </p:txBody>
+      </p:sp>
+      <p:sp>
+        <p:nvSpPr>
+          <p:cNvPr id="4" name="TextBox 3"/>
+          <p:cNvSpPr txBox="1"/>
+          <p:nvPr/>
+        </p:nvSpPr>
+        <p:spPr>
+          <a:xfrm>
+            <a:off x="457200" y="164592"/>
+            <a:ext cx="11277295" cy="502920"/>
+          </a:xfrm>
+          <a:prstGeom prst="rect">
+            <a:avLst/>
+          </a:prstGeom>
+          <a:noFill/>
+        </p:spPr>
+        <p:txBody>
+          <a:bodyPr wrap="square">
+            <a:spAutoFit/>
+          </a:bodyPr>
+          <a:lstStyle/>
+          <a:p>
+            <a:r>
+              <a:rPr sz="2600" b="1" i="0">
+                <a:solidFill>
+                  <a:srgbClr val="FFFFFF"/>
+                </a:solidFill>
+                <a:latin typeface="Calibri"/>
+              </a:rPr>
+              <a:t>El asistente de IA: cómo usarlo hoy sin que haga el trabajo (2/2)</a:t>
+            </a:r>
+          </a:p>
+        </p:txBody>
+      </p:sp>
+      <p:sp>
+        <p:nvSpPr>
+          <p:cNvPr id="5" name="TextBox 4"/>
+          <p:cNvSpPr txBox="1"/>
+          <p:nvPr/>
+        </p:nvSpPr>
+        <p:spPr>
+          <a:xfrm>
+            <a:off x="457200" y="1170432"/>
+            <a:ext cx="11277295" cy="5230368"/>
+          </a:xfrm>
+          <a:prstGeom prst="rect">
+            <a:avLst/>
+          </a:prstGeom>
+          <a:noFill/>
+        </p:spPr>
+        <p:txBody>
+          <a:bodyPr wrap="square">
+            <a:spAutoFit/>
+          </a:bodyPr>
+          <a:lstStyle/>
+          <a:p>
+            <a:pPr>
+              <a:spcAft>
+                <a:spcPts val="800"/>
+              </a:spcAft>
+            </a:pPr>
+            <a:r>
+              <a:rPr sz="2000" b="0" i="0">
+                <a:solidFill>
+                  <a:srgbClr val="333333"/>
+                </a:solidFill>
+                <a:latin typeface="Calibri"/>
+              </a:rPr>
+              <a:t>–   Operativamente: el equipo escribe su prompt, pega la respuesta, y luego marca en el documento cada cosa que cambió y por qué.</a:t>
+            </a:r>
+          </a:p>
+          <a:p>
+            <a:pPr>
+              <a:spcAft>
+                <a:spcPts val="800"/>
+              </a:spcAft>
+            </a:pPr>
+            <a:r>
+              <a:rPr sz="2000" b="0" i="0">
+                <a:solidFill>
+                  <a:srgbClr val="333333"/>
+                </a:solidFill>
+                <a:latin typeface="Calibri"/>
+              </a:rPr>
+              <a:t>–   Tres correcciones bien argumentadas valen más que un texto largo.</a:t>
+            </a:r>
+          </a:p>
+          <a:p>
+            <a:pPr>
+              <a:spcAft>
+                <a:spcPts val="800"/>
+              </a:spcAft>
+            </a:pPr>
+            <a:r>
+              <a:rPr sz="2000" b="0" i="0">
+                <a:solidFill>
+                  <a:srgbClr val="333333"/>
+                </a:solidFill>
+                <a:latin typeface="Calibri"/>
+              </a:rPr>
+              <a:t>–   Y hay una consecuencia útil que conviene decirles: </a:t>
+            </a:r>
+            <a:r>
+              <a:rPr sz="2000" b="1" i="0">
+                <a:solidFill>
+                  <a:srgbClr val="333333"/>
+                </a:solidFill>
+                <a:latin typeface="Calibri"/>
+              </a:rPr>
+              <a:t>la IA solo se puede verificar si uno sabe del tema</a:t>
+            </a:r>
+            <a:r>
+              <a:rPr sz="2000" b="0" i="0">
+                <a:solidFill>
+                  <a:srgbClr val="333333"/>
+                </a:solidFill>
+                <a:latin typeface="Calibri"/>
+              </a:rPr>
+              <a:t>, así que la herramienta no reemplaza aprender el contenido, lo hace más necesario.</a:t>
+            </a:r>
+          </a:p>
+          <a:p>
+            <a:pPr>
+              <a:spcAft>
+                <a:spcPts val="800"/>
+              </a:spcAft>
+            </a:pPr>
+            <a:r>
+              <a:rPr sz="2000" b="0" i="0">
+                <a:solidFill>
+                  <a:srgbClr val="333333"/>
+                </a:solidFill>
+                <a:latin typeface="Calibri"/>
+              </a:rPr>
+              <a:t>–   Ese argumento funciona mejor que una prohibición.</a:t>
+            </a:r>
+          </a:p>
+          <a:p>
+            <a:pPr>
+              <a:spcAft>
+                <a:spcPts val="800"/>
+              </a:spcAft>
+            </a:pPr>
+            <a:r>
+              <a:rPr sz="2000" b="0" i="0">
+                <a:solidFill>
+                  <a:srgbClr val="333333"/>
+                </a:solidFill>
+                <a:latin typeface="Calibri"/>
+              </a:rPr>
+              <a:t>–   El método de cinco pasos de la otra diapositiva es el orden de trabajo del taller, y el paso 4 —seguir un caso real de la entrada a la salida— es el que produce los hallazgos.</a:t>
+            </a:r>
+          </a:p>
+          <a:p>
+            <a:pPr>
+              <a:spcAft>
+                <a:spcPts val="800"/>
+              </a:spcAft>
+            </a:pPr>
+            <a:r>
+              <a:rPr sz="2000" b="0" i="0">
+                <a:solidFill>
+                  <a:srgbClr val="333333"/>
+                </a:solidFill>
+                <a:latin typeface="Calibri"/>
+              </a:rPr>
+              <a:t>–   Los huecos de un sistema no aparecen mirando el diagrama; aparecen cuando uno intenta pasar un caso concreto por él y se topa con un paso que nadie sabe quién hace.</a:t>
+            </a:r>
+          </a:p>
+        </p:txBody>
+      </p:sp>
+      <p:sp>
+        <p:nvSpPr>
+          <p:cNvPr id="6" name="TextBox 5"/>
+          <p:cNvSpPr txBox="1"/>
+          <p:nvPr/>
+        </p:nvSpPr>
+        <p:spPr>
+          <a:xfrm>
+            <a:off x="11185855" y="6473952"/>
+            <a:ext cx="640080" cy="274320"/>
+          </a:xfrm>
+          <a:prstGeom prst="rect">
+            <a:avLst/>
+          </a:prstGeom>
+          <a:noFill/>
+        </p:spPr>
+        <p:txBody>
+          <a:bodyPr wrap="square">
+            <a:spAutoFit/>
+          </a:bodyPr>
+          <a:lstStyle/>
+          <a:p>
+            <a:pPr algn="r"/>
+            <a:r>
+              <a:rPr sz="1100" b="0" i="0">
+                <a:solidFill>
+                  <a:srgbClr val="666666"/>
+                </a:solidFill>
+                <a:latin typeface="Calibri"/>
+              </a:rPr>
+              <a:t>18</a:t>
+            </a:r>
+          </a:p>
+        </p:txBody>
+      </p:sp>
+    </p:spTree>
+  </p:cSld>
+  <p:clrMapOvr>
+    <a:masterClrMapping/>
+  </p:clrMapOvr>
+</p:sld>
+</file>
+
+<file path=ppt/slides/slide19.xml><?xml version="1.0" encoding="utf-8"?>
+<p:sld xmlns:a="http://schemas.openxmlformats.org/drawingml/2006/main" xmlns:p="http://schemas.openxmlformats.org/presentationml/2006/main" xmlns:r="http://schemas.openxmlformats.org/officeDocument/2006/relationships">
+  <p:cSld>
+    <p:bg>
+      <p:bgPr>
+        <a:solidFill>
+          <a:srgbClr val="FFFFFF"/>
+        </a:solidFill>
+        <a:effectLst/>
+      </p:bgPr>
+    </p:bg>
+    <p:spTree>
+      <p:nvGrpSpPr>
+        <p:cNvPr id="1" name=""/>
+        <p:cNvGrpSpPr/>
+        <p:nvPr/>
+      </p:nvGrpSpPr>
+      <p:grpSpPr/>
+      <p:sp>
+        <p:nvSpPr>
+          <p:cNvPr id="2" name="Rectangle 1"/>
+          <p:cNvSpPr/>
+          <p:nvPr/>
+        </p:nvSpPr>
+        <p:spPr>
+          <a:xfrm>
+            <a:off x="0" y="0"/>
+            <a:ext cx="12191695" cy="1170432"/>
+          </a:xfrm>
+          <a:prstGeom prst="rect">
+            <a:avLst/>
+          </a:prstGeom>
+          <a:solidFill>
+            <a:srgbClr val="095292"/>
+          </a:solidFill>
+          <a:ln>
+            <a:noFill/>
+          </a:ln>
+        </p:spPr>
+        <p:style>
+          <a:lnRef idx="1">
+            <a:schemeClr val="accent1"/>
+          </a:lnRef>
+          <a:fillRef idx="3">
+            <a:schemeClr val="accent1"/>
+          </a:fillRef>
+          <a:effectRef idx="2">
+            <a:schemeClr val="accent1"/>
+          </a:effectRef>
+          <a:fontRef idx="minor">
+            <a:schemeClr val="lt1"/>
+          </a:fontRef>
+        </p:style>
+        <p:txBody>
+          <a:bodyPr rtlCol="0" anchor="ctr"/>
+          <a:lstStyle/>
+          <a:p>
+            <a:pPr algn="ctr"/>
+          </a:p>
+        </p:txBody>
+      </p:sp>
+      <p:sp>
+        <p:nvSpPr>
+          <p:cNvPr id="3" name="Rectangle 2"/>
+          <p:cNvSpPr/>
+          <p:nvPr/>
+        </p:nvSpPr>
+        <p:spPr>
+          <a:xfrm>
+            <a:off x="0" y="1170432"/>
+            <a:ext cx="12191695" cy="41148"/>
+          </a:xfrm>
+          <a:prstGeom prst="rect">
+            <a:avLst/>
+          </a:prstGeom>
+          <a:solidFill>
+            <a:srgbClr val="FFD000"/>
+          </a:solidFill>
+          <a:ln>
+            <a:noFill/>
+          </a:ln>
+        </p:spPr>
+        <p:style>
+          <a:lnRef idx="1">
+            <a:schemeClr val="accent1"/>
+          </a:lnRef>
+          <a:fillRef idx="3">
+            <a:schemeClr val="accent1"/>
+          </a:fillRef>
+          <a:effectRef idx="2">
+            <a:schemeClr val="accent1"/>
+          </a:effectRef>
+          <a:fontRef idx="minor">
+            <a:schemeClr val="lt1"/>
+          </a:fontRef>
+        </p:style>
+        <p:txBody>
+          <a:bodyPr rtlCol="0" anchor="ctr"/>
+          <a:lstStyle/>
+          <a:p>
+            <a:pPr algn="ctr"/>
+          </a:p>
+        </p:txBody>
+      </p:sp>
+      <p:sp>
+        <p:nvSpPr>
+          <p:cNvPr id="4" name="TextBox 3"/>
+          <p:cNvSpPr txBox="1"/>
+          <p:nvPr/>
+        </p:nvSpPr>
+        <p:spPr>
+          <a:xfrm>
+            <a:off x="457200" y="164592"/>
+            <a:ext cx="11277295" cy="384048"/>
+          </a:xfrm>
+          <a:prstGeom prst="rect">
+            <a:avLst/>
+          </a:prstGeom>
+          <a:noFill/>
+        </p:spPr>
+        <p:txBody>
+          <a:bodyPr wrap="square">
+            <a:spAutoFit/>
+          </a:bodyPr>
+          <a:lstStyle/>
+          <a:p>
+            <a:r>
+              <a:rPr sz="2600" b="1" i="0">
+                <a:solidFill>
+                  <a:srgbClr val="FFFFFF"/>
+                </a:solidFill>
+                <a:latin typeface="Calibri"/>
+              </a:rPr>
+              <a:t>Taller de hoy: Anatomía del sistema</a:t>
+            </a:r>
+          </a:p>
+        </p:txBody>
+      </p:sp>
+      <p:sp>
+        <p:nvSpPr>
+          <p:cNvPr id="5" name="TextBox 4"/>
+          <p:cNvSpPr txBox="1"/>
+          <p:nvPr/>
+        </p:nvSpPr>
+        <p:spPr>
+          <a:xfrm>
+            <a:off x="457200" y="566928"/>
+            <a:ext cx="11277295" cy="411480"/>
+          </a:xfrm>
+          <a:prstGeom prst="rect">
+            <a:avLst/>
+          </a:prstGeom>
+          <a:noFill/>
+        </p:spPr>
+        <p:txBody>
+          <a:bodyPr wrap="square">
+            <a:spAutoFit/>
+          </a:bodyPr>
+          <a:lstStyle/>
+          <a:p>
+            <a:r>
+              <a:rPr sz="1400" b="0" i="0">
+                <a:solidFill>
+                  <a:srgbClr val="B8D8EE"/>
+                </a:solidFill>
+                <a:latin typeface="Calibri"/>
+              </a:rPr>
+              <a:t>17 min en equipos · cada equipo trabaja su propio problema de la sesión 1 · ficha del sistema + prompt + correcciones</a:t>
+            </a:r>
+          </a:p>
+        </p:txBody>
+      </p:sp>
+      <p:sp>
+        <p:nvSpPr>
+          <p:cNvPr id="6" name="Rounded Rectangle 5"/>
+          <p:cNvSpPr/>
+          <p:nvPr/>
+        </p:nvSpPr>
+        <p:spPr>
+          <a:xfrm>
+            <a:off x="457200" y="1472184"/>
+            <a:ext cx="11277295" cy="566928"/>
+          </a:xfrm>
+          <a:prstGeom prst="roundRect">
+            <a:avLst>
+              <a:gd name="adj" fmla="val 12000"/>
+            </a:avLst>
+          </a:prstGeom>
+          <a:solidFill>
+            <a:srgbClr val="F2F2F2"/>
+          </a:solidFill>
+          <a:ln>
+            <a:noFill/>
+          </a:ln>
+        </p:spPr>
+        <p:style>
+          <a:lnRef idx="1">
+            <a:schemeClr val="accent1"/>
+          </a:lnRef>
+          <a:fillRef idx="3">
+            <a:schemeClr val="accent1"/>
+          </a:fillRef>
+          <a:effectRef idx="2">
+            <a:schemeClr val="accent1"/>
+          </a:effectRef>
+          <a:fontRef idx="minor">
+            <a:schemeClr val="lt1"/>
+          </a:fontRef>
+        </p:style>
+        <p:txBody>
+          <a:bodyPr rtlCol="0" anchor="ctr"/>
+          <a:lstStyle/>
+          <a:p>
+            <a:pPr algn="ctr"/>
+          </a:p>
+        </p:txBody>
+      </p:sp>
+      <p:sp>
+        <p:nvSpPr>
+          <p:cNvPr id="7" name="Rectangle 6"/>
+          <p:cNvSpPr/>
+          <p:nvPr/>
+        </p:nvSpPr>
+        <p:spPr>
+          <a:xfrm>
+            <a:off x="640080" y="1618487"/>
+            <a:ext cx="274320" cy="274320"/>
+          </a:xfrm>
+          <a:prstGeom prst="rect">
+            <a:avLst/>
+          </a:prstGeom>
+          <a:solidFill>
+            <a:srgbClr val="FFFFFF"/>
+          </a:solidFill>
+          <a:ln>
+            <a:solidFill>
+              <a:srgbClr val="333333"/>
+            </a:solidFill>
+          </a:ln>
+        </p:spPr>
+        <p:style>
+          <a:lnRef idx="1">
+            <a:schemeClr val="accent1"/>
+          </a:lnRef>
+          <a:fillRef idx="3">
+            <a:schemeClr val="accent1"/>
+          </a:fillRef>
+          <a:effectRef idx="2">
+            <a:schemeClr val="accent1"/>
+          </a:effectRef>
+          <a:fontRef idx="minor">
+            <a:schemeClr val="lt1"/>
+          </a:fontRef>
+        </p:style>
+        <p:txBody>
+          <a:bodyPr rtlCol="0" anchor="ctr"/>
+          <a:lstStyle/>
+          <a:p>
+            <a:pPr algn="ctr"/>
+          </a:p>
+        </p:txBody>
+      </p:sp>
+      <p:sp>
+        <p:nvSpPr>
+          <p:cNvPr id="8" name="Rectangle 7"/>
+          <p:cNvSpPr/>
+          <p:nvPr/>
+        </p:nvSpPr>
+        <p:spPr>
+          <a:xfrm>
+            <a:off x="640080" y="1618487"/>
+            <a:ext cx="73152" cy="274320"/>
           </a:xfrm>
           <a:prstGeom prst="rect">
             <a:avLst/>
@@ -6012,40 +6699,16 @@
           </a:p>
         </p:txBody>
       </p:sp>
-      <p:pic>
-        <p:nvPicPr>
-          <p:cNvPr id="3" name="Picture 2" descr="logo_uniajc_color.png"/>
-          <p:cNvPicPr>
-            <a:picLocks noChangeAspect="1"/>
-          </p:cNvPicPr>
-          <p:nvPr/>
-        </p:nvPicPr>
-        <p:blipFill>
-          <a:blip r:embed="rId2"/>
-          <a:stretch>
-            <a:fillRect/>
-          </a:stretch>
-        </p:blipFill>
-        <p:spPr>
-          <a:xfrm>
-            <a:off x="10271455" y="5998464"/>
-            <a:ext cx="1463040" cy="643233"/>
-          </a:xfrm>
-          <a:prstGeom prst="rect">
-            <a:avLst/>
-          </a:prstGeom>
-        </p:spPr>
-      </p:pic>
-      <p:sp>
-        <p:nvSpPr>
-          <p:cNvPr id="4" name="TextBox 3"/>
+      <p:sp>
+        <p:nvSpPr>
+          <p:cNvPr id="9" name="TextBox 8"/>
           <p:cNvSpPr txBox="1"/>
           <p:nvPr/>
         </p:nvSpPr>
         <p:spPr>
           <a:xfrm>
-            <a:off x="457200" y="1737360"/>
-            <a:ext cx="11277295" cy="1097280"/>
+            <a:off x="1097280" y="1563624"/>
+            <a:ext cx="10362895" cy="402336"/>
           </a:xfrm>
           <a:prstGeom prst="rect">
             <a:avLst/>
@@ -6056,29 +6719,823 @@
           <a:bodyPr wrap="square" anchor="ctr"/>
           <a:lstStyle/>
           <a:p>
+            <a:r>
+              <a:rPr sz="1500" b="1" i="0">
+                <a:solidFill>
+                  <a:srgbClr val="333333"/>
+                </a:solidFill>
+                <a:latin typeface="Calibri"/>
+              </a:rPr>
+              <a:t>PROPÓSITO Y FRONTERA</a:t>
+            </a:r>
+            <a:r>
+              <a:rPr sz="1500" b="0" i="0">
+                <a:solidFill>
+                  <a:srgbClr val="333333"/>
+                </a:solidFill>
+                <a:latin typeface="Calibri"/>
+              </a:rPr>
+              <a:t> — Para qué existe el sistema, en una frase. Y qué queda </a:t>
+            </a:r>
+            <a:r>
+              <a:rPr sz="1500" b="1" i="0">
+                <a:solidFill>
+                  <a:srgbClr val="333333"/>
+                </a:solidFill>
+                <a:latin typeface="Calibri"/>
+              </a:rPr>
+              <a:t>dentro</a:t>
+            </a:r>
+            <a:r>
+              <a:rPr sz="1500" b="0" i="0">
+                <a:solidFill>
+                  <a:srgbClr val="333333"/>
+                </a:solidFill>
+                <a:latin typeface="Calibri"/>
+              </a:rPr>
+              <a:t> y qué </a:t>
+            </a:r>
+            <a:r>
+              <a:rPr sz="1500" b="1" i="0">
+                <a:solidFill>
+                  <a:srgbClr val="333333"/>
+                </a:solidFill>
+                <a:latin typeface="Calibri"/>
+              </a:rPr>
+              <a:t>fuera</a:t>
+            </a:r>
+            <a:r>
+              <a:rPr sz="1500" b="0" i="0">
+                <a:solidFill>
+                  <a:srgbClr val="333333"/>
+                </a:solidFill>
+                <a:latin typeface="Calibri"/>
+              </a:rPr>
+              <a:t> de él, con la razón de cada exclusión importante.</a:t>
+            </a:r>
+          </a:p>
+        </p:txBody>
+      </p:sp>
+      <p:sp>
+        <p:nvSpPr>
+          <p:cNvPr id="10" name="Rounded Rectangle 9"/>
+          <p:cNvSpPr/>
+          <p:nvPr/>
+        </p:nvSpPr>
+        <p:spPr>
+          <a:xfrm>
+            <a:off x="457200" y="2148839"/>
+            <a:ext cx="11277295" cy="566928"/>
+          </a:xfrm>
+          <a:prstGeom prst="roundRect">
+            <a:avLst>
+              <a:gd name="adj" fmla="val 12000"/>
+            </a:avLst>
+          </a:prstGeom>
+          <a:solidFill>
+            <a:srgbClr val="F2F2F2"/>
+          </a:solidFill>
+          <a:ln>
+            <a:noFill/>
+          </a:ln>
+        </p:spPr>
+        <p:style>
+          <a:lnRef idx="1">
+            <a:schemeClr val="accent1"/>
+          </a:lnRef>
+          <a:fillRef idx="3">
+            <a:schemeClr val="accent1"/>
+          </a:fillRef>
+          <a:effectRef idx="2">
+            <a:schemeClr val="accent1"/>
+          </a:effectRef>
+          <a:fontRef idx="minor">
+            <a:schemeClr val="lt1"/>
+          </a:fontRef>
+        </p:style>
+        <p:txBody>
+          <a:bodyPr rtlCol="0" anchor="ctr"/>
+          <a:lstStyle/>
+          <a:p>
             <a:pPr algn="ctr"/>
-            <a:r>
-              <a:rPr sz="3400" b="1" i="0">
-                <a:solidFill>
-                  <a:srgbClr val="095292"/>
-                </a:solidFill>
-                <a:latin typeface="Calibri"/>
-              </a:rPr>
-              <a:t>Nos vemos en la sesión 4</a:t>
-            </a:r>
-          </a:p>
-        </p:txBody>
-      </p:sp>
-      <p:sp>
-        <p:nvSpPr>
-          <p:cNvPr id="5" name="TextBox 4"/>
+          </a:p>
+        </p:txBody>
+      </p:sp>
+      <p:sp>
+        <p:nvSpPr>
+          <p:cNvPr id="11" name="Rectangle 10"/>
+          <p:cNvSpPr/>
+          <p:nvPr/>
+        </p:nvSpPr>
+        <p:spPr>
+          <a:xfrm>
+            <a:off x="640080" y="2295144"/>
+            <a:ext cx="274320" cy="274320"/>
+          </a:xfrm>
+          <a:prstGeom prst="rect">
+            <a:avLst/>
+          </a:prstGeom>
+          <a:solidFill>
+            <a:srgbClr val="FFFFFF"/>
+          </a:solidFill>
+          <a:ln>
+            <a:solidFill>
+              <a:srgbClr val="333333"/>
+            </a:solidFill>
+          </a:ln>
+        </p:spPr>
+        <p:style>
+          <a:lnRef idx="1">
+            <a:schemeClr val="accent1"/>
+          </a:lnRef>
+          <a:fillRef idx="3">
+            <a:schemeClr val="accent1"/>
+          </a:fillRef>
+          <a:effectRef idx="2">
+            <a:schemeClr val="accent1"/>
+          </a:effectRef>
+          <a:fontRef idx="minor">
+            <a:schemeClr val="lt1"/>
+          </a:fontRef>
+        </p:style>
+        <p:txBody>
+          <a:bodyPr rtlCol="0" anchor="ctr"/>
+          <a:lstStyle/>
+          <a:p>
+            <a:pPr algn="ctr"/>
+          </a:p>
+        </p:txBody>
+      </p:sp>
+      <p:sp>
+        <p:nvSpPr>
+          <p:cNvPr id="12" name="Rectangle 11"/>
+          <p:cNvSpPr/>
+          <p:nvPr/>
+        </p:nvSpPr>
+        <p:spPr>
+          <a:xfrm>
+            <a:off x="640080" y="2295144"/>
+            <a:ext cx="73152" cy="274320"/>
+          </a:xfrm>
+          <a:prstGeom prst="rect">
+            <a:avLst/>
+          </a:prstGeom>
+          <a:solidFill>
+            <a:srgbClr val="269CCB"/>
+          </a:solidFill>
+          <a:ln>
+            <a:noFill/>
+          </a:ln>
+        </p:spPr>
+        <p:style>
+          <a:lnRef idx="1">
+            <a:schemeClr val="accent1"/>
+          </a:lnRef>
+          <a:fillRef idx="3">
+            <a:schemeClr val="accent1"/>
+          </a:fillRef>
+          <a:effectRef idx="2">
+            <a:schemeClr val="accent1"/>
+          </a:effectRef>
+          <a:fontRef idx="minor">
+            <a:schemeClr val="lt1"/>
+          </a:fontRef>
+        </p:style>
+        <p:txBody>
+          <a:bodyPr rtlCol="0" anchor="ctr"/>
+          <a:lstStyle/>
+          <a:p>
+            <a:pPr algn="ctr"/>
+          </a:p>
+        </p:txBody>
+      </p:sp>
+      <p:sp>
+        <p:nvSpPr>
+          <p:cNvPr id="13" name="TextBox 12"/>
           <p:cNvSpPr txBox="1"/>
           <p:nvPr/>
         </p:nvSpPr>
         <p:spPr>
           <a:xfrm>
-            <a:off x="457200" y="3017520"/>
-            <a:ext cx="11277295" cy="1645920"/>
+            <a:off x="1097280" y="2240279"/>
+            <a:ext cx="10362895" cy="402336"/>
+          </a:xfrm>
+          <a:prstGeom prst="rect">
+            <a:avLst/>
+          </a:prstGeom>
+          <a:noFill/>
+        </p:spPr>
+        <p:txBody>
+          <a:bodyPr wrap="square" anchor="ctr"/>
+          <a:lstStyle/>
+          <a:p>
+            <a:r>
+              <a:rPr sz="1500" b="1" i="0">
+                <a:solidFill>
+                  <a:srgbClr val="333333"/>
+                </a:solidFill>
+                <a:latin typeface="Calibri"/>
+              </a:rPr>
+              <a:t>ENTRADAS, PROCESO Y SALIDAS</a:t>
+            </a:r>
+            <a:r>
+              <a:rPr sz="1500" b="0" i="0">
+                <a:solidFill>
+                  <a:srgbClr val="333333"/>
+                </a:solidFill>
+                <a:latin typeface="Calibri"/>
+              </a:rPr>
+              <a:t> — Qué entra, qué se hace con eso y qué sale. Señalen </a:t>
+            </a:r>
+            <a:r>
+              <a:rPr sz="1500" b="1" i="0">
+                <a:solidFill>
+                  <a:srgbClr val="333333"/>
+                </a:solidFill>
+                <a:latin typeface="Calibri"/>
+              </a:rPr>
+              <a:t>dónde está el software</a:t>
+            </a:r>
+            <a:r>
+              <a:rPr sz="1500" b="0" i="0">
+                <a:solidFill>
+                  <a:srgbClr val="333333"/>
+                </a:solidFill>
+                <a:latin typeface="Calibri"/>
+              </a:rPr>
+              <a:t>, si hay.</a:t>
+            </a:r>
+          </a:p>
+        </p:txBody>
+      </p:sp>
+      <p:sp>
+        <p:nvSpPr>
+          <p:cNvPr id="14" name="Rounded Rectangle 13"/>
+          <p:cNvSpPr/>
+          <p:nvPr/>
+        </p:nvSpPr>
+        <p:spPr>
+          <a:xfrm>
+            <a:off x="457200" y="2825496"/>
+            <a:ext cx="11277295" cy="566928"/>
+          </a:xfrm>
+          <a:prstGeom prst="roundRect">
+            <a:avLst>
+              <a:gd name="adj" fmla="val 12000"/>
+            </a:avLst>
+          </a:prstGeom>
+          <a:solidFill>
+            <a:srgbClr val="F2F2F2"/>
+          </a:solidFill>
+          <a:ln>
+            <a:noFill/>
+          </a:ln>
+        </p:spPr>
+        <p:style>
+          <a:lnRef idx="1">
+            <a:schemeClr val="accent1"/>
+          </a:lnRef>
+          <a:fillRef idx="3">
+            <a:schemeClr val="accent1"/>
+          </a:fillRef>
+          <a:effectRef idx="2">
+            <a:schemeClr val="accent1"/>
+          </a:effectRef>
+          <a:fontRef idx="minor">
+            <a:schemeClr val="lt1"/>
+          </a:fontRef>
+        </p:style>
+        <p:txBody>
+          <a:bodyPr rtlCol="0" anchor="ctr"/>
+          <a:lstStyle/>
+          <a:p>
+            <a:pPr algn="ctr"/>
+          </a:p>
+        </p:txBody>
+      </p:sp>
+      <p:sp>
+        <p:nvSpPr>
+          <p:cNvPr id="15" name="Rectangle 14"/>
+          <p:cNvSpPr/>
+          <p:nvPr/>
+        </p:nvSpPr>
+        <p:spPr>
+          <a:xfrm>
+            <a:off x="640080" y="2971800"/>
+            <a:ext cx="274320" cy="274320"/>
+          </a:xfrm>
+          <a:prstGeom prst="rect">
+            <a:avLst/>
+          </a:prstGeom>
+          <a:solidFill>
+            <a:srgbClr val="FFFFFF"/>
+          </a:solidFill>
+          <a:ln>
+            <a:solidFill>
+              <a:srgbClr val="333333"/>
+            </a:solidFill>
+          </a:ln>
+        </p:spPr>
+        <p:style>
+          <a:lnRef idx="1">
+            <a:schemeClr val="accent1"/>
+          </a:lnRef>
+          <a:fillRef idx="3">
+            <a:schemeClr val="accent1"/>
+          </a:fillRef>
+          <a:effectRef idx="2">
+            <a:schemeClr val="accent1"/>
+          </a:effectRef>
+          <a:fontRef idx="minor">
+            <a:schemeClr val="lt1"/>
+          </a:fontRef>
+        </p:style>
+        <p:txBody>
+          <a:bodyPr rtlCol="0" anchor="ctr"/>
+          <a:lstStyle/>
+          <a:p>
+            <a:pPr algn="ctr"/>
+          </a:p>
+        </p:txBody>
+      </p:sp>
+      <p:sp>
+        <p:nvSpPr>
+          <p:cNvPr id="16" name="Rectangle 15"/>
+          <p:cNvSpPr/>
+          <p:nvPr/>
+        </p:nvSpPr>
+        <p:spPr>
+          <a:xfrm>
+            <a:off x="640080" y="2971800"/>
+            <a:ext cx="73152" cy="274320"/>
+          </a:xfrm>
+          <a:prstGeom prst="rect">
+            <a:avLst/>
+          </a:prstGeom>
+          <a:solidFill>
+            <a:srgbClr val="269CCB"/>
+          </a:solidFill>
+          <a:ln>
+            <a:noFill/>
+          </a:ln>
+        </p:spPr>
+        <p:style>
+          <a:lnRef idx="1">
+            <a:schemeClr val="accent1"/>
+          </a:lnRef>
+          <a:fillRef idx="3">
+            <a:schemeClr val="accent1"/>
+          </a:fillRef>
+          <a:effectRef idx="2">
+            <a:schemeClr val="accent1"/>
+          </a:effectRef>
+          <a:fontRef idx="minor">
+            <a:schemeClr val="lt1"/>
+          </a:fontRef>
+        </p:style>
+        <p:txBody>
+          <a:bodyPr rtlCol="0" anchor="ctr"/>
+          <a:lstStyle/>
+          <a:p>
+            <a:pPr algn="ctr"/>
+          </a:p>
+        </p:txBody>
+      </p:sp>
+      <p:sp>
+        <p:nvSpPr>
+          <p:cNvPr id="17" name="TextBox 16"/>
+          <p:cNvSpPr txBox="1"/>
+          <p:nvPr/>
+        </p:nvSpPr>
+        <p:spPr>
+          <a:xfrm>
+            <a:off x="1097280" y="2916936"/>
+            <a:ext cx="10362895" cy="402336"/>
+          </a:xfrm>
+          <a:prstGeom prst="rect">
+            <a:avLst/>
+          </a:prstGeom>
+          <a:noFill/>
+        </p:spPr>
+        <p:txBody>
+          <a:bodyPr wrap="square" anchor="ctr"/>
+          <a:lstStyle/>
+          <a:p>
+            <a:r>
+              <a:rPr sz="1500" b="1" i="0">
+                <a:solidFill>
+                  <a:srgbClr val="333333"/>
+                </a:solidFill>
+                <a:latin typeface="Calibri"/>
+              </a:rPr>
+              <a:t>LOS ACTORES</a:t>
+            </a:r>
+            <a:r>
+              <a:rPr sz="1500" b="0" i="0">
+                <a:solidFill>
+                  <a:srgbClr val="333333"/>
+                </a:solidFill>
+                <a:latin typeface="Calibri"/>
+              </a:rPr>
+              <a:t> — Todos los afectados, con su rol y qué le importa a cada uno. Incluyan </a:t>
+            </a:r>
+            <a:r>
+              <a:rPr sz="1500" b="1" i="0">
+                <a:solidFill>
+                  <a:srgbClr val="333333"/>
+                </a:solidFill>
+                <a:latin typeface="Calibri"/>
+              </a:rPr>
+              <a:t>al menos uno que no use el sistema pero sí sufra el resultado</a:t>
+            </a:r>
+            <a:r>
+              <a:rPr sz="1500" b="0" i="0">
+                <a:solidFill>
+                  <a:srgbClr val="333333"/>
+                </a:solidFill>
+                <a:latin typeface="Calibri"/>
+              </a:rPr>
+              <a:t>.</a:t>
+            </a:r>
+          </a:p>
+        </p:txBody>
+      </p:sp>
+      <p:sp>
+        <p:nvSpPr>
+          <p:cNvPr id="18" name="Rounded Rectangle 17"/>
+          <p:cNvSpPr/>
+          <p:nvPr/>
+        </p:nvSpPr>
+        <p:spPr>
+          <a:xfrm>
+            <a:off x="457200" y="3502152"/>
+            <a:ext cx="11277295" cy="566928"/>
+          </a:xfrm>
+          <a:prstGeom prst="roundRect">
+            <a:avLst>
+              <a:gd name="adj" fmla="val 12000"/>
+            </a:avLst>
+          </a:prstGeom>
+          <a:solidFill>
+            <a:srgbClr val="F2F2F2"/>
+          </a:solidFill>
+          <a:ln>
+            <a:noFill/>
+          </a:ln>
+        </p:spPr>
+        <p:style>
+          <a:lnRef idx="1">
+            <a:schemeClr val="accent1"/>
+          </a:lnRef>
+          <a:fillRef idx="3">
+            <a:schemeClr val="accent1"/>
+          </a:fillRef>
+          <a:effectRef idx="2">
+            <a:schemeClr val="accent1"/>
+          </a:effectRef>
+          <a:fontRef idx="minor">
+            <a:schemeClr val="lt1"/>
+          </a:fontRef>
+        </p:style>
+        <p:txBody>
+          <a:bodyPr rtlCol="0" anchor="ctr"/>
+          <a:lstStyle/>
+          <a:p>
+            <a:pPr algn="ctr"/>
+          </a:p>
+        </p:txBody>
+      </p:sp>
+      <p:sp>
+        <p:nvSpPr>
+          <p:cNvPr id="19" name="Rectangle 18"/>
+          <p:cNvSpPr/>
+          <p:nvPr/>
+        </p:nvSpPr>
+        <p:spPr>
+          <a:xfrm>
+            <a:off x="640080" y="3648456"/>
+            <a:ext cx="274320" cy="274320"/>
+          </a:xfrm>
+          <a:prstGeom prst="rect">
+            <a:avLst/>
+          </a:prstGeom>
+          <a:solidFill>
+            <a:srgbClr val="FFFFFF"/>
+          </a:solidFill>
+          <a:ln>
+            <a:solidFill>
+              <a:srgbClr val="333333"/>
+            </a:solidFill>
+          </a:ln>
+        </p:spPr>
+        <p:style>
+          <a:lnRef idx="1">
+            <a:schemeClr val="accent1"/>
+          </a:lnRef>
+          <a:fillRef idx="3">
+            <a:schemeClr val="accent1"/>
+          </a:fillRef>
+          <a:effectRef idx="2">
+            <a:schemeClr val="accent1"/>
+          </a:effectRef>
+          <a:fontRef idx="minor">
+            <a:schemeClr val="lt1"/>
+          </a:fontRef>
+        </p:style>
+        <p:txBody>
+          <a:bodyPr rtlCol="0" anchor="ctr"/>
+          <a:lstStyle/>
+          <a:p>
+            <a:pPr algn="ctr"/>
+          </a:p>
+        </p:txBody>
+      </p:sp>
+      <p:sp>
+        <p:nvSpPr>
+          <p:cNvPr id="20" name="Rectangle 19"/>
+          <p:cNvSpPr/>
+          <p:nvPr/>
+        </p:nvSpPr>
+        <p:spPr>
+          <a:xfrm>
+            <a:off x="640080" y="3648456"/>
+            <a:ext cx="73152" cy="274320"/>
+          </a:xfrm>
+          <a:prstGeom prst="rect">
+            <a:avLst/>
+          </a:prstGeom>
+          <a:solidFill>
+            <a:srgbClr val="269CCB"/>
+          </a:solidFill>
+          <a:ln>
+            <a:noFill/>
+          </a:ln>
+        </p:spPr>
+        <p:style>
+          <a:lnRef idx="1">
+            <a:schemeClr val="accent1"/>
+          </a:lnRef>
+          <a:fillRef idx="3">
+            <a:schemeClr val="accent1"/>
+          </a:fillRef>
+          <a:effectRef idx="2">
+            <a:schemeClr val="accent1"/>
+          </a:effectRef>
+          <a:fontRef idx="minor">
+            <a:schemeClr val="lt1"/>
+          </a:fontRef>
+        </p:style>
+        <p:txBody>
+          <a:bodyPr rtlCol="0" anchor="ctr"/>
+          <a:lstStyle/>
+          <a:p>
+            <a:pPr algn="ctr"/>
+          </a:p>
+        </p:txBody>
+      </p:sp>
+      <p:sp>
+        <p:nvSpPr>
+          <p:cNvPr id="21" name="TextBox 20"/>
+          <p:cNvSpPr txBox="1"/>
+          <p:nvPr/>
+        </p:nvSpPr>
+        <p:spPr>
+          <a:xfrm>
+            <a:off x="1097280" y="3593592"/>
+            <a:ext cx="10362895" cy="402336"/>
+          </a:xfrm>
+          <a:prstGeom prst="rect">
+            <a:avLst/>
+          </a:prstGeom>
+          <a:noFill/>
+        </p:spPr>
+        <p:txBody>
+          <a:bodyPr wrap="square" anchor="ctr"/>
+          <a:lstStyle/>
+          <a:p>
+            <a:r>
+              <a:rPr sz="1500" b="1" i="0">
+                <a:solidFill>
+                  <a:srgbClr val="333333"/>
+                </a:solidFill>
+                <a:latin typeface="Calibri"/>
+              </a:rPr>
+              <a:t>LA RETROALIMENTACIÓN</a:t>
+            </a:r>
+            <a:r>
+              <a:rPr sz="1500" b="0" i="0">
+                <a:solidFill>
+                  <a:srgbClr val="333333"/>
+                </a:solidFill>
+                <a:latin typeface="Calibri"/>
+              </a:rPr>
+              <a:t> — ¿Cómo se entera este sistema de que algo salió mal? Si no se entera, escríbanlo: es un hallazgo, no un error suyo.</a:t>
+            </a:r>
+          </a:p>
+        </p:txBody>
+      </p:sp>
+      <p:sp>
+        <p:nvSpPr>
+          <p:cNvPr id="22" name="Rounded Rectangle 21"/>
+          <p:cNvSpPr/>
+          <p:nvPr/>
+        </p:nvSpPr>
+        <p:spPr>
+          <a:xfrm>
+            <a:off x="457200" y="4178808"/>
+            <a:ext cx="11277295" cy="566928"/>
+          </a:xfrm>
+          <a:prstGeom prst="roundRect">
+            <a:avLst>
+              <a:gd name="adj" fmla="val 12000"/>
+            </a:avLst>
+          </a:prstGeom>
+          <a:solidFill>
+            <a:srgbClr val="F2F2F2"/>
+          </a:solidFill>
+          <a:ln>
+            <a:noFill/>
+          </a:ln>
+        </p:spPr>
+        <p:style>
+          <a:lnRef idx="1">
+            <a:schemeClr val="accent1"/>
+          </a:lnRef>
+          <a:fillRef idx="3">
+            <a:schemeClr val="accent1"/>
+          </a:fillRef>
+          <a:effectRef idx="2">
+            <a:schemeClr val="accent1"/>
+          </a:effectRef>
+          <a:fontRef idx="minor">
+            <a:schemeClr val="lt1"/>
+          </a:fontRef>
+        </p:style>
+        <p:txBody>
+          <a:bodyPr rtlCol="0" anchor="ctr"/>
+          <a:lstStyle/>
+          <a:p>
+            <a:pPr algn="ctr"/>
+          </a:p>
+        </p:txBody>
+      </p:sp>
+      <p:sp>
+        <p:nvSpPr>
+          <p:cNvPr id="23" name="Rectangle 22"/>
+          <p:cNvSpPr/>
+          <p:nvPr/>
+        </p:nvSpPr>
+        <p:spPr>
+          <a:xfrm>
+            <a:off x="640080" y="4325112"/>
+            <a:ext cx="274320" cy="274320"/>
+          </a:xfrm>
+          <a:prstGeom prst="rect">
+            <a:avLst/>
+          </a:prstGeom>
+          <a:solidFill>
+            <a:srgbClr val="FFFFFF"/>
+          </a:solidFill>
+          <a:ln>
+            <a:solidFill>
+              <a:srgbClr val="333333"/>
+            </a:solidFill>
+          </a:ln>
+        </p:spPr>
+        <p:style>
+          <a:lnRef idx="1">
+            <a:schemeClr val="accent1"/>
+          </a:lnRef>
+          <a:fillRef idx="3">
+            <a:schemeClr val="accent1"/>
+          </a:fillRef>
+          <a:effectRef idx="2">
+            <a:schemeClr val="accent1"/>
+          </a:effectRef>
+          <a:fontRef idx="minor">
+            <a:schemeClr val="lt1"/>
+          </a:fontRef>
+        </p:style>
+        <p:txBody>
+          <a:bodyPr rtlCol="0" anchor="ctr"/>
+          <a:lstStyle/>
+          <a:p>
+            <a:pPr algn="ctr"/>
+          </a:p>
+        </p:txBody>
+      </p:sp>
+      <p:sp>
+        <p:nvSpPr>
+          <p:cNvPr id="24" name="Rectangle 23"/>
+          <p:cNvSpPr/>
+          <p:nvPr/>
+        </p:nvSpPr>
+        <p:spPr>
+          <a:xfrm>
+            <a:off x="640080" y="4325112"/>
+            <a:ext cx="73152" cy="274320"/>
+          </a:xfrm>
+          <a:prstGeom prst="rect">
+            <a:avLst/>
+          </a:prstGeom>
+          <a:solidFill>
+            <a:srgbClr val="269CCB"/>
+          </a:solidFill>
+          <a:ln>
+            <a:noFill/>
+          </a:ln>
+        </p:spPr>
+        <p:style>
+          <a:lnRef idx="1">
+            <a:schemeClr val="accent1"/>
+          </a:lnRef>
+          <a:fillRef idx="3">
+            <a:schemeClr val="accent1"/>
+          </a:fillRef>
+          <a:effectRef idx="2">
+            <a:schemeClr val="accent1"/>
+          </a:effectRef>
+          <a:fontRef idx="minor">
+            <a:schemeClr val="lt1"/>
+          </a:fontRef>
+        </p:style>
+        <p:txBody>
+          <a:bodyPr rtlCol="0" anchor="ctr"/>
+          <a:lstStyle/>
+          <a:p>
+            <a:pPr algn="ctr"/>
+          </a:p>
+        </p:txBody>
+      </p:sp>
+      <p:sp>
+        <p:nvSpPr>
+          <p:cNvPr id="25" name="TextBox 24"/>
+          <p:cNvSpPr txBox="1"/>
+          <p:nvPr/>
+        </p:nvSpPr>
+        <p:spPr>
+          <a:xfrm>
+            <a:off x="1097280" y="4270248"/>
+            <a:ext cx="10362895" cy="402336"/>
+          </a:xfrm>
+          <a:prstGeom prst="rect">
+            <a:avLst/>
+          </a:prstGeom>
+          <a:noFill/>
+        </p:spPr>
+        <p:txBody>
+          <a:bodyPr wrap="square" anchor="ctr"/>
+          <a:lstStyle/>
+          <a:p>
+            <a:r>
+              <a:rPr sz="1500" b="1" i="0">
+                <a:solidFill>
+                  <a:srgbClr val="333333"/>
+                </a:solidFill>
+                <a:latin typeface="Calibri"/>
+              </a:rPr>
+              <a:t>LA IA: PROMPT Y CORRECCIONES</a:t>
+            </a:r>
+            <a:r>
+              <a:rPr sz="1500" b="0" i="0">
+                <a:solidFill>
+                  <a:srgbClr val="333333"/>
+                </a:solidFill>
+                <a:latin typeface="Calibri"/>
+              </a:rPr>
+              <a:t> — El prompt exacto que usaron, y una lista de </a:t>
+            </a:r>
+            <a:r>
+              <a:rPr sz="1500" b="1" i="0">
+                <a:solidFill>
+                  <a:srgbClr val="333333"/>
+                </a:solidFill>
+                <a:latin typeface="Calibri"/>
+              </a:rPr>
+              <a:t>al menos tres cosas que la IA escribió mal</a:t>
+            </a:r>
+            <a:r>
+              <a:rPr sz="1500" b="0" i="0">
+                <a:solidFill>
+                  <a:srgbClr val="333333"/>
+                </a:solidFill>
+                <a:latin typeface="Calibri"/>
+              </a:rPr>
+              <a:t> y cómo las corrigieron.</a:t>
+            </a:r>
+          </a:p>
+        </p:txBody>
+      </p:sp>
+      <p:sp>
+        <p:nvSpPr>
+          <p:cNvPr id="26" name="TextBox 25"/>
+          <p:cNvSpPr txBox="1"/>
+          <p:nvPr/>
+        </p:nvSpPr>
+        <p:spPr>
+          <a:xfrm>
+            <a:off x="11185855" y="6473952"/>
+            <a:ext cx="640080" cy="274320"/>
           </a:xfrm>
           <a:prstGeom prst="rect">
             <a:avLst/>
@@ -6091,70 +7548,15 @@
           </a:bodyPr>
           <a:lstStyle/>
           <a:p>
-            <a:pPr algn="ctr">
-              <a:spcAft>
-                <a:spcPts val="600"/>
-              </a:spcAft>
-            </a:pPr>
-            <a:r>
-              <a:rPr sz="1600" b="0" i="0">
-                <a:solidFill>
-                  <a:srgbClr val="333333"/>
-                </a:solidFill>
-                <a:latin typeface="Calibri"/>
-              </a:rPr>
-              <a:t>Fundamentos básicos de la Ingeniería de Sistemas · Clase 3</a:t>
-            </a:r>
-          </a:p>
-          <a:p>
-            <a:pPr algn="ctr">
-              <a:spcAft>
-                <a:spcPts val="600"/>
-              </a:spcAft>
-            </a:pPr>
-            <a:r>
-              <a:rPr sz="1600" b="0" i="0">
-                <a:solidFill>
-                  <a:srgbClr val="333333"/>
-                </a:solidFill>
-                <a:latin typeface="Calibri"/>
-              </a:rPr>
-              <a:t>FI300101 · UNIAJC · Ingeniería de Sistemas</a:t>
-            </a:r>
-          </a:p>
-        </p:txBody>
-      </p:sp>
-      <p:sp>
-        <p:nvSpPr>
-          <p:cNvPr id="6" name="TextBox 5"/>
-          <p:cNvSpPr txBox="1"/>
-          <p:nvPr/>
-        </p:nvSpPr>
-        <p:spPr>
-          <a:xfrm>
-            <a:off x="457200" y="4754880"/>
-            <a:ext cx="11277295" cy="640080"/>
-          </a:xfrm>
-          <a:prstGeom prst="rect">
-            <a:avLst/>
-          </a:prstGeom>
-          <a:noFill/>
-        </p:spPr>
-        <p:txBody>
-          <a:bodyPr wrap="square">
-            <a:spAutoFit/>
-          </a:bodyPr>
-          <a:lstStyle/>
-          <a:p>
-            <a:pPr algn="ctr"/>
-            <a:r>
-              <a:rPr sz="2000" b="1" i="0">
-                <a:solidFill>
-                  <a:srgbClr val="269CCB"/>
-                </a:solidFill>
-                <a:latin typeface="Calibri"/>
-              </a:rPr>
-              <a:t>El sistema no es el software: el software es una parte del proceso</a:t>
+            <a:pPr algn="r"/>
+            <a:r>
+              <a:rPr sz="1100" b="0" i="0">
+                <a:solidFill>
+                  <a:srgbClr val="666666"/>
+                </a:solidFill>
+                <a:latin typeface="Calibri"/>
+              </a:rPr>
+              <a:t>19</a:t>
             </a:r>
           </a:p>
         </p:txBody>
@@ -7041,6 +8443,1513 @@
                 <a:latin typeface="Calibri"/>
               </a:rPr>
               <a:t>2</a:t>
+            </a:r>
+          </a:p>
+        </p:txBody>
+      </p:sp>
+    </p:spTree>
+  </p:cSld>
+  <p:clrMapOvr>
+    <a:masterClrMapping/>
+  </p:clrMapOvr>
+</p:sld>
+</file>
+
+<file path=ppt/slides/slide20.xml><?xml version="1.0" encoding="utf-8"?>
+<p:sld xmlns:a="http://schemas.openxmlformats.org/drawingml/2006/main" xmlns:p="http://schemas.openxmlformats.org/presentationml/2006/main" xmlns:r="http://schemas.openxmlformats.org/officeDocument/2006/relationships">
+  <p:cSld>
+    <p:bg>
+      <p:bgPr>
+        <a:solidFill>
+          <a:srgbClr val="FFFFFF"/>
+        </a:solidFill>
+        <a:effectLst/>
+      </p:bgPr>
+    </p:bg>
+    <p:spTree>
+      <p:nvGrpSpPr>
+        <p:cNvPr id="1" name=""/>
+        <p:cNvGrpSpPr/>
+        <p:nvPr/>
+      </p:nvGrpSpPr>
+      <p:grpSpPr/>
+      <p:sp>
+        <p:nvSpPr>
+          <p:cNvPr id="2" name="Rectangle 1"/>
+          <p:cNvSpPr/>
+          <p:nvPr/>
+        </p:nvSpPr>
+        <p:spPr>
+          <a:xfrm>
+            <a:off x="0" y="0"/>
+            <a:ext cx="12191695" cy="1170432"/>
+          </a:xfrm>
+          <a:prstGeom prst="rect">
+            <a:avLst/>
+          </a:prstGeom>
+          <a:solidFill>
+            <a:srgbClr val="095292"/>
+          </a:solidFill>
+          <a:ln>
+            <a:noFill/>
+          </a:ln>
+        </p:spPr>
+        <p:style>
+          <a:lnRef idx="1">
+            <a:schemeClr val="accent1"/>
+          </a:lnRef>
+          <a:fillRef idx="3">
+            <a:schemeClr val="accent1"/>
+          </a:fillRef>
+          <a:effectRef idx="2">
+            <a:schemeClr val="accent1"/>
+          </a:effectRef>
+          <a:fontRef idx="minor">
+            <a:schemeClr val="lt1"/>
+          </a:fontRef>
+        </p:style>
+        <p:txBody>
+          <a:bodyPr rtlCol="0" anchor="ctr"/>
+          <a:lstStyle/>
+          <a:p>
+            <a:pPr algn="ctr"/>
+          </a:p>
+        </p:txBody>
+      </p:sp>
+      <p:sp>
+        <p:nvSpPr>
+          <p:cNvPr id="3" name="Rectangle 2"/>
+          <p:cNvSpPr/>
+          <p:nvPr/>
+        </p:nvSpPr>
+        <p:spPr>
+          <a:xfrm>
+            <a:off x="0" y="1170432"/>
+            <a:ext cx="12191695" cy="41148"/>
+          </a:xfrm>
+          <a:prstGeom prst="rect">
+            <a:avLst/>
+          </a:prstGeom>
+          <a:solidFill>
+            <a:srgbClr val="FFD000"/>
+          </a:solidFill>
+          <a:ln>
+            <a:noFill/>
+          </a:ln>
+        </p:spPr>
+        <p:style>
+          <a:lnRef idx="1">
+            <a:schemeClr val="accent1"/>
+          </a:lnRef>
+          <a:fillRef idx="3">
+            <a:schemeClr val="accent1"/>
+          </a:fillRef>
+          <a:effectRef idx="2">
+            <a:schemeClr val="accent1"/>
+          </a:effectRef>
+          <a:fontRef idx="minor">
+            <a:schemeClr val="lt1"/>
+          </a:fontRef>
+        </p:style>
+        <p:txBody>
+          <a:bodyPr rtlCol="0" anchor="ctr"/>
+          <a:lstStyle/>
+          <a:p>
+            <a:pPr algn="ctr"/>
+          </a:p>
+        </p:txBody>
+      </p:sp>
+      <p:sp>
+        <p:nvSpPr>
+          <p:cNvPr id="4" name="TextBox 3"/>
+          <p:cNvSpPr txBox="1"/>
+          <p:nvPr/>
+        </p:nvSpPr>
+        <p:spPr>
+          <a:xfrm>
+            <a:off x="457200" y="164592"/>
+            <a:ext cx="11277295" cy="384048"/>
+          </a:xfrm>
+          <a:prstGeom prst="rect">
+            <a:avLst/>
+          </a:prstGeom>
+          <a:noFill/>
+        </p:spPr>
+        <p:txBody>
+          <a:bodyPr wrap="square">
+            <a:spAutoFit/>
+          </a:bodyPr>
+          <a:lstStyle/>
+          <a:p>
+            <a:r>
+              <a:rPr sz="2600" b="1" i="0">
+                <a:solidFill>
+                  <a:srgbClr val="FFFFFF"/>
+                </a:solidFill>
+                <a:latin typeface="Calibri"/>
+              </a:rPr>
+              <a:t>Cómo se expone en 3 minutos</a:t>
+            </a:r>
+          </a:p>
+        </p:txBody>
+      </p:sp>
+      <p:sp>
+        <p:nvSpPr>
+          <p:cNvPr id="5" name="TextBox 4"/>
+          <p:cNvSpPr txBox="1"/>
+          <p:nvPr/>
+        </p:nvSpPr>
+        <p:spPr>
+          <a:xfrm>
+            <a:off x="457200" y="566928"/>
+            <a:ext cx="11277295" cy="411480"/>
+          </a:xfrm>
+          <a:prstGeom prst="rect">
+            <a:avLst/>
+          </a:prstGeom>
+          <a:noFill/>
+        </p:spPr>
+        <p:txBody>
+          <a:bodyPr wrap="square">
+            <a:spAutoFit/>
+          </a:bodyPr>
+          <a:lstStyle/>
+          <a:p>
+            <a:r>
+              <a:rPr sz="1400" b="0" i="0">
+                <a:solidFill>
+                  <a:srgbClr val="B8D8EE"/>
+                </a:solidFill>
+                <a:latin typeface="Calibri"/>
+              </a:rPr>
+              <a:t>Habla el vocero con la pantalla ya compartida · cronómetro en pantalla · se corta al llegar a cero</a:t>
+            </a:r>
+          </a:p>
+        </p:txBody>
+      </p:sp>
+      <p:sp>
+        <p:nvSpPr>
+          <p:cNvPr id="6" name="Rounded Rectangle 5"/>
+          <p:cNvSpPr/>
+          <p:nvPr/>
+        </p:nvSpPr>
+        <p:spPr>
+          <a:xfrm>
+            <a:off x="457200" y="1659636"/>
+            <a:ext cx="11277295" cy="1051560"/>
+          </a:xfrm>
+          <a:prstGeom prst="roundRect">
+            <a:avLst>
+              <a:gd name="adj" fmla="val 12000"/>
+            </a:avLst>
+          </a:prstGeom>
+          <a:solidFill>
+            <a:srgbClr val="F2F2F2"/>
+          </a:solidFill>
+          <a:ln>
+            <a:noFill/>
+          </a:ln>
+        </p:spPr>
+        <p:style>
+          <a:lnRef idx="1">
+            <a:schemeClr val="accent1"/>
+          </a:lnRef>
+          <a:fillRef idx="3">
+            <a:schemeClr val="accent1"/>
+          </a:fillRef>
+          <a:effectRef idx="2">
+            <a:schemeClr val="accent1"/>
+          </a:effectRef>
+          <a:fontRef idx="minor">
+            <a:schemeClr val="lt1"/>
+          </a:fontRef>
+        </p:style>
+        <p:txBody>
+          <a:bodyPr rtlCol="0" anchor="ctr"/>
+          <a:lstStyle/>
+          <a:p>
+            <a:pPr algn="ctr"/>
+          </a:p>
+        </p:txBody>
+      </p:sp>
+      <p:sp>
+        <p:nvSpPr>
+          <p:cNvPr id="7" name="Rounded Rectangle 6"/>
+          <p:cNvSpPr/>
+          <p:nvPr/>
+        </p:nvSpPr>
+        <p:spPr>
+          <a:xfrm>
+            <a:off x="594360" y="1965960"/>
+            <a:ext cx="438912" cy="438912"/>
+          </a:xfrm>
+          <a:prstGeom prst="roundRect">
+            <a:avLst>
+              <a:gd name="adj" fmla="val 12000"/>
+            </a:avLst>
+          </a:prstGeom>
+          <a:solidFill>
+            <a:srgbClr val="095292"/>
+          </a:solidFill>
+          <a:ln>
+            <a:noFill/>
+          </a:ln>
+        </p:spPr>
+        <p:style>
+          <a:lnRef idx="1">
+            <a:schemeClr val="accent1"/>
+          </a:lnRef>
+          <a:fillRef idx="3">
+            <a:schemeClr val="accent1"/>
+          </a:fillRef>
+          <a:effectRef idx="2">
+            <a:schemeClr val="accent1"/>
+          </a:effectRef>
+          <a:fontRef idx="minor">
+            <a:schemeClr val="lt1"/>
+          </a:fontRef>
+        </p:style>
+        <p:txBody>
+          <a:bodyPr rtlCol="0" anchor="ctr"/>
+          <a:lstStyle/>
+          <a:p>
+            <a:pPr algn="ctr"/>
+          </a:p>
+        </p:txBody>
+      </p:sp>
+      <p:sp>
+        <p:nvSpPr>
+          <p:cNvPr id="8" name="TextBox 7"/>
+          <p:cNvSpPr txBox="1"/>
+          <p:nvPr/>
+        </p:nvSpPr>
+        <p:spPr>
+          <a:xfrm>
+            <a:off x="594360" y="1965960"/>
+            <a:ext cx="438912" cy="438912"/>
+          </a:xfrm>
+          <a:prstGeom prst="rect">
+            <a:avLst/>
+          </a:prstGeom>
+          <a:noFill/>
+        </p:spPr>
+        <p:txBody>
+          <a:bodyPr wrap="square" anchor="ctr"/>
+          <a:lstStyle/>
+          <a:p>
+            <a:pPr algn="ctr"/>
+            <a:r>
+              <a:rPr sz="1600" b="1" i="0">
+                <a:solidFill>
+                  <a:srgbClr val="FFFFFF"/>
+                </a:solidFill>
+                <a:latin typeface="Calibri"/>
+              </a:rPr>
+              <a:t>1</a:t>
+            </a:r>
+          </a:p>
+        </p:txBody>
+      </p:sp>
+      <p:sp>
+        <p:nvSpPr>
+          <p:cNvPr id="9" name="TextBox 8"/>
+          <p:cNvSpPr txBox="1"/>
+          <p:nvPr/>
+        </p:nvSpPr>
+        <p:spPr>
+          <a:xfrm>
+            <a:off x="1188720" y="1751076"/>
+            <a:ext cx="10271455" cy="886968"/>
+          </a:xfrm>
+          <a:prstGeom prst="rect">
+            <a:avLst/>
+          </a:prstGeom>
+          <a:noFill/>
+        </p:spPr>
+        <p:txBody>
+          <a:bodyPr wrap="square" anchor="ctr"/>
+          <a:lstStyle/>
+          <a:p>
+            <a:r>
+              <a:rPr sz="1500" b="1" i="0">
+                <a:solidFill>
+                  <a:srgbClr val="095292"/>
+                </a:solidFill>
+                <a:latin typeface="Calibri"/>
+              </a:rPr>
+              <a:t>30 s · El sistema y su propósito</a:t>
+            </a:r>
+          </a:p>
+          <a:p>
+            <a:pPr>
+              <a:spcBef>
+                <a:spcPts val="200"/>
+              </a:spcBef>
+            </a:pPr>
+            <a:r>
+              <a:rPr sz="1300" b="0" i="0">
+                <a:solidFill>
+                  <a:srgbClr val="333333"/>
+                </a:solidFill>
+                <a:latin typeface="Calibri"/>
+              </a:rPr>
+              <a:t>Qué sistema es y para qué existe, en una frase.</a:t>
+            </a:r>
+          </a:p>
+        </p:txBody>
+      </p:sp>
+      <p:sp>
+        <p:nvSpPr>
+          <p:cNvPr id="10" name="Rounded Rectangle 9"/>
+          <p:cNvSpPr/>
+          <p:nvPr/>
+        </p:nvSpPr>
+        <p:spPr>
+          <a:xfrm>
+            <a:off x="457200" y="2802636"/>
+            <a:ext cx="11277295" cy="1051560"/>
+          </a:xfrm>
+          <a:prstGeom prst="roundRect">
+            <a:avLst>
+              <a:gd name="adj" fmla="val 12000"/>
+            </a:avLst>
+          </a:prstGeom>
+          <a:solidFill>
+            <a:srgbClr val="E8F4FA"/>
+          </a:solidFill>
+          <a:ln>
+            <a:noFill/>
+          </a:ln>
+        </p:spPr>
+        <p:style>
+          <a:lnRef idx="1">
+            <a:schemeClr val="accent1"/>
+          </a:lnRef>
+          <a:fillRef idx="3">
+            <a:schemeClr val="accent1"/>
+          </a:fillRef>
+          <a:effectRef idx="2">
+            <a:schemeClr val="accent1"/>
+          </a:effectRef>
+          <a:fontRef idx="minor">
+            <a:schemeClr val="lt1"/>
+          </a:fontRef>
+        </p:style>
+        <p:txBody>
+          <a:bodyPr rtlCol="0" anchor="ctr"/>
+          <a:lstStyle/>
+          <a:p>
+            <a:pPr algn="ctr"/>
+          </a:p>
+        </p:txBody>
+      </p:sp>
+      <p:sp>
+        <p:nvSpPr>
+          <p:cNvPr id="11" name="Rounded Rectangle 10"/>
+          <p:cNvSpPr/>
+          <p:nvPr/>
+        </p:nvSpPr>
+        <p:spPr>
+          <a:xfrm>
+            <a:off x="594360" y="3108960"/>
+            <a:ext cx="438912" cy="438912"/>
+          </a:xfrm>
+          <a:prstGeom prst="roundRect">
+            <a:avLst>
+              <a:gd name="adj" fmla="val 12000"/>
+            </a:avLst>
+          </a:prstGeom>
+          <a:solidFill>
+            <a:srgbClr val="095292"/>
+          </a:solidFill>
+          <a:ln>
+            <a:noFill/>
+          </a:ln>
+        </p:spPr>
+        <p:style>
+          <a:lnRef idx="1">
+            <a:schemeClr val="accent1"/>
+          </a:lnRef>
+          <a:fillRef idx="3">
+            <a:schemeClr val="accent1"/>
+          </a:fillRef>
+          <a:effectRef idx="2">
+            <a:schemeClr val="accent1"/>
+          </a:effectRef>
+          <a:fontRef idx="minor">
+            <a:schemeClr val="lt1"/>
+          </a:fontRef>
+        </p:style>
+        <p:txBody>
+          <a:bodyPr rtlCol="0" anchor="ctr"/>
+          <a:lstStyle/>
+          <a:p>
+            <a:pPr algn="ctr"/>
+          </a:p>
+        </p:txBody>
+      </p:sp>
+      <p:sp>
+        <p:nvSpPr>
+          <p:cNvPr id="12" name="TextBox 11"/>
+          <p:cNvSpPr txBox="1"/>
+          <p:nvPr/>
+        </p:nvSpPr>
+        <p:spPr>
+          <a:xfrm>
+            <a:off x="594360" y="3108960"/>
+            <a:ext cx="438912" cy="438912"/>
+          </a:xfrm>
+          <a:prstGeom prst="rect">
+            <a:avLst/>
+          </a:prstGeom>
+          <a:noFill/>
+        </p:spPr>
+        <p:txBody>
+          <a:bodyPr wrap="square" anchor="ctr"/>
+          <a:lstStyle/>
+          <a:p>
+            <a:pPr algn="ctr"/>
+            <a:r>
+              <a:rPr sz="1600" b="1" i="0">
+                <a:solidFill>
+                  <a:srgbClr val="FFFFFF"/>
+                </a:solidFill>
+                <a:latin typeface="Calibri"/>
+              </a:rPr>
+              <a:t>2</a:t>
+            </a:r>
+          </a:p>
+        </p:txBody>
+      </p:sp>
+      <p:sp>
+        <p:nvSpPr>
+          <p:cNvPr id="13" name="TextBox 12"/>
+          <p:cNvSpPr txBox="1"/>
+          <p:nvPr/>
+        </p:nvSpPr>
+        <p:spPr>
+          <a:xfrm>
+            <a:off x="1188720" y="2894076"/>
+            <a:ext cx="10271455" cy="886968"/>
+          </a:xfrm>
+          <a:prstGeom prst="rect">
+            <a:avLst/>
+          </a:prstGeom>
+          <a:noFill/>
+        </p:spPr>
+        <p:txBody>
+          <a:bodyPr wrap="square" anchor="ctr"/>
+          <a:lstStyle/>
+          <a:p>
+            <a:r>
+              <a:rPr sz="1500" b="1" i="0">
+                <a:solidFill>
+                  <a:srgbClr val="095292"/>
+                </a:solidFill>
+                <a:latin typeface="Calibri"/>
+              </a:rPr>
+              <a:t>45 s · La frontera</a:t>
+            </a:r>
+          </a:p>
+          <a:p>
+            <a:pPr>
+              <a:spcBef>
+                <a:spcPts val="200"/>
+              </a:spcBef>
+            </a:pPr>
+            <a:r>
+              <a:rPr sz="1300" b="0" i="0">
+                <a:solidFill>
+                  <a:srgbClr val="333333"/>
+                </a:solidFill>
+                <a:latin typeface="Calibri"/>
+              </a:rPr>
+              <a:t>Qué dejaron fuera y por qué. Es la decisión que se discute.</a:t>
+            </a:r>
+          </a:p>
+        </p:txBody>
+      </p:sp>
+      <p:sp>
+        <p:nvSpPr>
+          <p:cNvPr id="14" name="Rounded Rectangle 13"/>
+          <p:cNvSpPr/>
+          <p:nvPr/>
+        </p:nvSpPr>
+        <p:spPr>
+          <a:xfrm>
+            <a:off x="457200" y="3945636"/>
+            <a:ext cx="11277295" cy="1051560"/>
+          </a:xfrm>
+          <a:prstGeom prst="roundRect">
+            <a:avLst>
+              <a:gd name="adj" fmla="val 12000"/>
+            </a:avLst>
+          </a:prstGeom>
+          <a:solidFill>
+            <a:srgbClr val="F2F2F2"/>
+          </a:solidFill>
+          <a:ln>
+            <a:noFill/>
+          </a:ln>
+        </p:spPr>
+        <p:style>
+          <a:lnRef idx="1">
+            <a:schemeClr val="accent1"/>
+          </a:lnRef>
+          <a:fillRef idx="3">
+            <a:schemeClr val="accent1"/>
+          </a:fillRef>
+          <a:effectRef idx="2">
+            <a:schemeClr val="accent1"/>
+          </a:effectRef>
+          <a:fontRef idx="minor">
+            <a:schemeClr val="lt1"/>
+          </a:fontRef>
+        </p:style>
+        <p:txBody>
+          <a:bodyPr rtlCol="0" anchor="ctr"/>
+          <a:lstStyle/>
+          <a:p>
+            <a:pPr algn="ctr"/>
+          </a:p>
+        </p:txBody>
+      </p:sp>
+      <p:sp>
+        <p:nvSpPr>
+          <p:cNvPr id="15" name="Rounded Rectangle 14"/>
+          <p:cNvSpPr/>
+          <p:nvPr/>
+        </p:nvSpPr>
+        <p:spPr>
+          <a:xfrm>
+            <a:off x="594360" y="4251960"/>
+            <a:ext cx="438912" cy="438912"/>
+          </a:xfrm>
+          <a:prstGeom prst="roundRect">
+            <a:avLst>
+              <a:gd name="adj" fmla="val 12000"/>
+            </a:avLst>
+          </a:prstGeom>
+          <a:solidFill>
+            <a:srgbClr val="095292"/>
+          </a:solidFill>
+          <a:ln>
+            <a:noFill/>
+          </a:ln>
+        </p:spPr>
+        <p:style>
+          <a:lnRef idx="1">
+            <a:schemeClr val="accent1"/>
+          </a:lnRef>
+          <a:fillRef idx="3">
+            <a:schemeClr val="accent1"/>
+          </a:fillRef>
+          <a:effectRef idx="2">
+            <a:schemeClr val="accent1"/>
+          </a:effectRef>
+          <a:fontRef idx="minor">
+            <a:schemeClr val="lt1"/>
+          </a:fontRef>
+        </p:style>
+        <p:txBody>
+          <a:bodyPr rtlCol="0" anchor="ctr"/>
+          <a:lstStyle/>
+          <a:p>
+            <a:pPr algn="ctr"/>
+          </a:p>
+        </p:txBody>
+      </p:sp>
+      <p:sp>
+        <p:nvSpPr>
+          <p:cNvPr id="16" name="TextBox 15"/>
+          <p:cNvSpPr txBox="1"/>
+          <p:nvPr/>
+        </p:nvSpPr>
+        <p:spPr>
+          <a:xfrm>
+            <a:off x="594360" y="4251960"/>
+            <a:ext cx="438912" cy="438912"/>
+          </a:xfrm>
+          <a:prstGeom prst="rect">
+            <a:avLst/>
+          </a:prstGeom>
+          <a:noFill/>
+        </p:spPr>
+        <p:txBody>
+          <a:bodyPr wrap="square" anchor="ctr"/>
+          <a:lstStyle/>
+          <a:p>
+            <a:pPr algn="ctr"/>
+            <a:r>
+              <a:rPr sz="1600" b="1" i="0">
+                <a:solidFill>
+                  <a:srgbClr val="FFFFFF"/>
+                </a:solidFill>
+                <a:latin typeface="Calibri"/>
+              </a:rPr>
+              <a:t>3</a:t>
+            </a:r>
+          </a:p>
+        </p:txBody>
+      </p:sp>
+      <p:sp>
+        <p:nvSpPr>
+          <p:cNvPr id="17" name="TextBox 16"/>
+          <p:cNvSpPr txBox="1"/>
+          <p:nvPr/>
+        </p:nvSpPr>
+        <p:spPr>
+          <a:xfrm>
+            <a:off x="1188720" y="4037076"/>
+            <a:ext cx="10271455" cy="886968"/>
+          </a:xfrm>
+          <a:prstGeom prst="rect">
+            <a:avLst/>
+          </a:prstGeom>
+          <a:noFill/>
+        </p:spPr>
+        <p:txBody>
+          <a:bodyPr wrap="square" anchor="ctr"/>
+          <a:lstStyle/>
+          <a:p>
+            <a:r>
+              <a:rPr sz="1500" b="1" i="0">
+                <a:solidFill>
+                  <a:srgbClr val="095292"/>
+                </a:solidFill>
+                <a:latin typeface="Calibri"/>
+              </a:rPr>
+              <a:t>45 s · El actor olvidado</a:t>
+            </a:r>
+          </a:p>
+          <a:p>
+            <a:pPr>
+              <a:spcBef>
+                <a:spcPts val="200"/>
+              </a:spcBef>
+            </a:pPr>
+            <a:r>
+              <a:rPr sz="1300" b="0" i="0">
+                <a:solidFill>
+                  <a:srgbClr val="333333"/>
+                </a:solidFill>
+                <a:latin typeface="Calibri"/>
+              </a:rPr>
+              <a:t>El afectado que no usa el sistema. Quién es y qué pierde.</a:t>
+            </a:r>
+          </a:p>
+        </p:txBody>
+      </p:sp>
+      <p:sp>
+        <p:nvSpPr>
+          <p:cNvPr id="18" name="Rounded Rectangle 17"/>
+          <p:cNvSpPr/>
+          <p:nvPr/>
+        </p:nvSpPr>
+        <p:spPr>
+          <a:xfrm>
+            <a:off x="457200" y="5088636"/>
+            <a:ext cx="11277295" cy="1051560"/>
+          </a:xfrm>
+          <a:prstGeom prst="roundRect">
+            <a:avLst>
+              <a:gd name="adj" fmla="val 12000"/>
+            </a:avLst>
+          </a:prstGeom>
+          <a:solidFill>
+            <a:srgbClr val="E8F4FA"/>
+          </a:solidFill>
+          <a:ln>
+            <a:noFill/>
+          </a:ln>
+        </p:spPr>
+        <p:style>
+          <a:lnRef idx="1">
+            <a:schemeClr val="accent1"/>
+          </a:lnRef>
+          <a:fillRef idx="3">
+            <a:schemeClr val="accent1"/>
+          </a:fillRef>
+          <a:effectRef idx="2">
+            <a:schemeClr val="accent1"/>
+          </a:effectRef>
+          <a:fontRef idx="minor">
+            <a:schemeClr val="lt1"/>
+          </a:fontRef>
+        </p:style>
+        <p:txBody>
+          <a:bodyPr rtlCol="0" anchor="ctr"/>
+          <a:lstStyle/>
+          <a:p>
+            <a:pPr algn="ctr"/>
+          </a:p>
+        </p:txBody>
+      </p:sp>
+      <p:sp>
+        <p:nvSpPr>
+          <p:cNvPr id="19" name="Rounded Rectangle 18"/>
+          <p:cNvSpPr/>
+          <p:nvPr/>
+        </p:nvSpPr>
+        <p:spPr>
+          <a:xfrm>
+            <a:off x="594360" y="5394960"/>
+            <a:ext cx="438912" cy="438912"/>
+          </a:xfrm>
+          <a:prstGeom prst="roundRect">
+            <a:avLst>
+              <a:gd name="adj" fmla="val 12000"/>
+            </a:avLst>
+          </a:prstGeom>
+          <a:solidFill>
+            <a:srgbClr val="095292"/>
+          </a:solidFill>
+          <a:ln>
+            <a:noFill/>
+          </a:ln>
+        </p:spPr>
+        <p:style>
+          <a:lnRef idx="1">
+            <a:schemeClr val="accent1"/>
+          </a:lnRef>
+          <a:fillRef idx="3">
+            <a:schemeClr val="accent1"/>
+          </a:fillRef>
+          <a:effectRef idx="2">
+            <a:schemeClr val="accent1"/>
+          </a:effectRef>
+          <a:fontRef idx="minor">
+            <a:schemeClr val="lt1"/>
+          </a:fontRef>
+        </p:style>
+        <p:txBody>
+          <a:bodyPr rtlCol="0" anchor="ctr"/>
+          <a:lstStyle/>
+          <a:p>
+            <a:pPr algn="ctr"/>
+          </a:p>
+        </p:txBody>
+      </p:sp>
+      <p:sp>
+        <p:nvSpPr>
+          <p:cNvPr id="20" name="TextBox 19"/>
+          <p:cNvSpPr txBox="1"/>
+          <p:nvPr/>
+        </p:nvSpPr>
+        <p:spPr>
+          <a:xfrm>
+            <a:off x="594360" y="5394960"/>
+            <a:ext cx="438912" cy="438912"/>
+          </a:xfrm>
+          <a:prstGeom prst="rect">
+            <a:avLst/>
+          </a:prstGeom>
+          <a:noFill/>
+        </p:spPr>
+        <p:txBody>
+          <a:bodyPr wrap="square" anchor="ctr"/>
+          <a:lstStyle/>
+          <a:p>
+            <a:pPr algn="ctr"/>
+            <a:r>
+              <a:rPr sz="1600" b="1" i="0">
+                <a:solidFill>
+                  <a:srgbClr val="FFFFFF"/>
+                </a:solidFill>
+                <a:latin typeface="Calibri"/>
+              </a:rPr>
+              <a:t>4</a:t>
+            </a:r>
+          </a:p>
+        </p:txBody>
+      </p:sp>
+      <p:sp>
+        <p:nvSpPr>
+          <p:cNvPr id="21" name="TextBox 20"/>
+          <p:cNvSpPr txBox="1"/>
+          <p:nvPr/>
+        </p:nvSpPr>
+        <p:spPr>
+          <a:xfrm>
+            <a:off x="1188720" y="5180076"/>
+            <a:ext cx="10271455" cy="886968"/>
+          </a:xfrm>
+          <a:prstGeom prst="rect">
+            <a:avLst/>
+          </a:prstGeom>
+          <a:noFill/>
+        </p:spPr>
+        <p:txBody>
+          <a:bodyPr wrap="square" anchor="ctr"/>
+          <a:lstStyle/>
+          <a:p>
+            <a:r>
+              <a:rPr sz="1500" b="1" i="0">
+                <a:solidFill>
+                  <a:srgbClr val="095292"/>
+                </a:solidFill>
+                <a:latin typeface="Calibri"/>
+              </a:rPr>
+              <a:t>60 s · Qué se inventó la IA</a:t>
+            </a:r>
+          </a:p>
+          <a:p>
+            <a:pPr>
+              <a:spcBef>
+                <a:spcPts val="200"/>
+              </a:spcBef>
+            </a:pPr>
+            <a:r>
+              <a:rPr sz="1300" b="0" i="0">
+                <a:solidFill>
+                  <a:srgbClr val="333333"/>
+                </a:solidFill>
+                <a:latin typeface="Calibri"/>
+              </a:rPr>
+              <a:t>Las tres correcciones. Es el minuto obligatorio de la exposición.</a:t>
+            </a:r>
+          </a:p>
+        </p:txBody>
+      </p:sp>
+      <p:sp>
+        <p:nvSpPr>
+          <p:cNvPr id="22" name="TextBox 21"/>
+          <p:cNvSpPr txBox="1"/>
+          <p:nvPr/>
+        </p:nvSpPr>
+        <p:spPr>
+          <a:xfrm>
+            <a:off x="11185855" y="6473952"/>
+            <a:ext cx="640080" cy="274320"/>
+          </a:xfrm>
+          <a:prstGeom prst="rect">
+            <a:avLst/>
+          </a:prstGeom>
+          <a:noFill/>
+        </p:spPr>
+        <p:txBody>
+          <a:bodyPr wrap="square">
+            <a:spAutoFit/>
+          </a:bodyPr>
+          <a:lstStyle/>
+          <a:p>
+            <a:pPr algn="r"/>
+            <a:r>
+              <a:rPr sz="1100" b="0" i="0">
+                <a:solidFill>
+                  <a:srgbClr val="666666"/>
+                </a:solidFill>
+                <a:latin typeface="Calibri"/>
+              </a:rPr>
+              <a:t>20</a:t>
+            </a:r>
+          </a:p>
+        </p:txBody>
+      </p:sp>
+    </p:spTree>
+  </p:cSld>
+  <p:clrMapOvr>
+    <a:masterClrMapping/>
+  </p:clrMapOvr>
+</p:sld>
+</file>
+
+<file path=ppt/slides/slide21.xml><?xml version="1.0" encoding="utf-8"?>
+<p:sld xmlns:a="http://schemas.openxmlformats.org/drawingml/2006/main" xmlns:p="http://schemas.openxmlformats.org/presentationml/2006/main" xmlns:r="http://schemas.openxmlformats.org/officeDocument/2006/relationships">
+  <p:cSld>
+    <p:bg>
+      <p:bgPr>
+        <a:solidFill>
+          <a:srgbClr val="FFFFFF"/>
+        </a:solidFill>
+        <a:effectLst/>
+      </p:bgPr>
+    </p:bg>
+    <p:spTree>
+      <p:nvGrpSpPr>
+        <p:cNvPr id="1" name=""/>
+        <p:cNvGrpSpPr/>
+        <p:nvPr/>
+      </p:nvGrpSpPr>
+      <p:grpSpPr/>
+      <p:sp>
+        <p:nvSpPr>
+          <p:cNvPr id="2" name="Rectangle 1"/>
+          <p:cNvSpPr/>
+          <p:nvPr/>
+        </p:nvSpPr>
+        <p:spPr>
+          <a:xfrm>
+            <a:off x="0" y="0"/>
+            <a:ext cx="12191695" cy="960120"/>
+          </a:xfrm>
+          <a:prstGeom prst="rect">
+            <a:avLst/>
+          </a:prstGeom>
+          <a:solidFill>
+            <a:srgbClr val="095292"/>
+          </a:solidFill>
+          <a:ln>
+            <a:noFill/>
+          </a:ln>
+        </p:spPr>
+        <p:style>
+          <a:lnRef idx="1">
+            <a:schemeClr val="accent1"/>
+          </a:lnRef>
+          <a:fillRef idx="3">
+            <a:schemeClr val="accent1"/>
+          </a:fillRef>
+          <a:effectRef idx="2">
+            <a:schemeClr val="accent1"/>
+          </a:effectRef>
+          <a:fontRef idx="minor">
+            <a:schemeClr val="lt1"/>
+          </a:fontRef>
+        </p:style>
+        <p:txBody>
+          <a:bodyPr rtlCol="0" anchor="ctr"/>
+          <a:lstStyle/>
+          <a:p>
+            <a:pPr algn="ctr"/>
+          </a:p>
+        </p:txBody>
+      </p:sp>
+      <p:sp>
+        <p:nvSpPr>
+          <p:cNvPr id="3" name="Rectangle 2"/>
+          <p:cNvSpPr/>
+          <p:nvPr/>
+        </p:nvSpPr>
+        <p:spPr>
+          <a:xfrm>
+            <a:off x="0" y="960120"/>
+            <a:ext cx="12191695" cy="41148"/>
+          </a:xfrm>
+          <a:prstGeom prst="rect">
+            <a:avLst/>
+          </a:prstGeom>
+          <a:solidFill>
+            <a:srgbClr val="FFD000"/>
+          </a:solidFill>
+          <a:ln>
+            <a:noFill/>
+          </a:ln>
+        </p:spPr>
+        <p:style>
+          <a:lnRef idx="1">
+            <a:schemeClr val="accent1"/>
+          </a:lnRef>
+          <a:fillRef idx="3">
+            <a:schemeClr val="accent1"/>
+          </a:fillRef>
+          <a:effectRef idx="2">
+            <a:schemeClr val="accent1"/>
+          </a:effectRef>
+          <a:fontRef idx="minor">
+            <a:schemeClr val="lt1"/>
+          </a:fontRef>
+        </p:style>
+        <p:txBody>
+          <a:bodyPr rtlCol="0" anchor="ctr"/>
+          <a:lstStyle/>
+          <a:p>
+            <a:pPr algn="ctr"/>
+          </a:p>
+        </p:txBody>
+      </p:sp>
+      <p:sp>
+        <p:nvSpPr>
+          <p:cNvPr id="4" name="TextBox 3"/>
+          <p:cNvSpPr txBox="1"/>
+          <p:nvPr/>
+        </p:nvSpPr>
+        <p:spPr>
+          <a:xfrm>
+            <a:off x="457200" y="164592"/>
+            <a:ext cx="11277295" cy="502920"/>
+          </a:xfrm>
+          <a:prstGeom prst="rect">
+            <a:avLst/>
+          </a:prstGeom>
+          <a:noFill/>
+        </p:spPr>
+        <p:txBody>
+          <a:bodyPr wrap="square">
+            <a:spAutoFit/>
+          </a:bodyPr>
+          <a:lstStyle/>
+          <a:p>
+            <a:r>
+              <a:rPr sz="2600" b="1" i="0">
+                <a:solidFill>
+                  <a:srgbClr val="FFFFFF"/>
+                </a:solidFill>
+                <a:latin typeface="Calibri"/>
+              </a:rPr>
+              <a:t>Para la Clase 4</a:t>
+            </a:r>
+          </a:p>
+        </p:txBody>
+      </p:sp>
+      <p:sp>
+        <p:nvSpPr>
+          <p:cNvPr id="5" name="TextBox 4"/>
+          <p:cNvSpPr txBox="1"/>
+          <p:nvPr/>
+        </p:nvSpPr>
+        <p:spPr>
+          <a:xfrm>
+            <a:off x="457200" y="1170432"/>
+            <a:ext cx="11277295" cy="5230368"/>
+          </a:xfrm>
+          <a:prstGeom prst="rect">
+            <a:avLst/>
+          </a:prstGeom>
+          <a:noFill/>
+        </p:spPr>
+        <p:txBody>
+          <a:bodyPr wrap="square">
+            <a:spAutoFit/>
+          </a:bodyPr>
+          <a:lstStyle/>
+          <a:p>
+            <a:pPr>
+              <a:spcAft>
+                <a:spcPts val="800"/>
+              </a:spcAft>
+            </a:pPr>
+            <a:r>
+              <a:rPr sz="2000" b="0" i="0">
+                <a:solidFill>
+                  <a:srgbClr val="333333"/>
+                </a:solidFill>
+                <a:latin typeface="Calibri"/>
+              </a:rPr>
+              <a:t>–   </a:t>
+            </a:r>
+            <a:r>
+              <a:rPr sz="2000" b="1" i="0">
+                <a:solidFill>
+                  <a:srgbClr val="333333"/>
+                </a:solidFill>
+                <a:latin typeface="Calibri"/>
+              </a:rPr>
+              <a:t>Trabajo dirigido:</a:t>
+            </a:r>
+            <a:r>
+              <a:rPr sz="2000" b="0" i="0">
+                <a:solidFill>
+                  <a:srgbClr val="333333"/>
+                </a:solidFill>
+                <a:latin typeface="Calibri"/>
+              </a:rPr>
+              <a:t> Análisis de caso práctico — dejen la ficha del sistema completa en la carpeta del equipo, con el prompt y las correcciones.</a:t>
+            </a:r>
+          </a:p>
+          <a:p>
+            <a:pPr>
+              <a:spcAft>
+                <a:spcPts val="800"/>
+              </a:spcAft>
+            </a:pPr>
+            <a:r>
+              <a:rPr sz="2000" b="0" i="0">
+                <a:solidFill>
+                  <a:srgbClr val="333333"/>
+                </a:solidFill>
+                <a:latin typeface="Calibri"/>
+              </a:rPr>
+              <a:t>–   </a:t>
+            </a:r>
+            <a:r>
+              <a:rPr sz="2000" b="1" i="0">
+                <a:solidFill>
+                  <a:srgbClr val="333333"/>
+                </a:solidFill>
+                <a:latin typeface="Calibri"/>
+              </a:rPr>
+              <a:t>Trabajo independiente:</a:t>
+            </a:r>
+            <a:r>
+              <a:rPr sz="2000" b="0" i="0">
+                <a:solidFill>
+                  <a:srgbClr val="333333"/>
+                </a:solidFill>
+                <a:latin typeface="Calibri"/>
+              </a:rPr>
+              <a:t> Ensayo sobre impacto social: media página sobre a quién le empeora la vida el sistema que analizaron, aunque funcione bien.</a:t>
+            </a:r>
+          </a:p>
+          <a:p>
+            <a:pPr>
+              <a:spcAft>
+                <a:spcPts val="800"/>
+              </a:spcAft>
+            </a:pPr>
+            <a:r>
+              <a:rPr sz="2000" b="0" i="0">
+                <a:solidFill>
+                  <a:srgbClr val="333333"/>
+                </a:solidFill>
+                <a:latin typeface="Calibri"/>
+              </a:rPr>
+              <a:t>–   </a:t>
+            </a:r>
+            <a:r>
+              <a:rPr sz="2000" b="1" i="0">
+                <a:solidFill>
+                  <a:srgbClr val="333333"/>
+                </a:solidFill>
+                <a:latin typeface="Calibri"/>
+              </a:rPr>
+              <a:t>Clase 4 · Principios éticos en la Ingeniería</a:t>
+            </a:r>
+            <a:r>
+              <a:rPr sz="2000" b="0" i="0">
+                <a:solidFill>
+                  <a:srgbClr val="333333"/>
+                </a:solidFill>
+                <a:latin typeface="Calibri"/>
+              </a:rPr>
+              <a:t> — los principios éticos de la profesión, con casos reales donde el software funcionó y aun así el ingeniero hizo algo mal.</a:t>
+            </a:r>
+          </a:p>
+          <a:p>
+            <a:pPr>
+              <a:spcAft>
+                <a:spcPts val="800"/>
+              </a:spcAft>
+            </a:pPr>
+            <a:r>
+              <a:rPr sz="2000" b="0" i="0">
+                <a:solidFill>
+                  <a:srgbClr val="333333"/>
+                </a:solidFill>
+                <a:latin typeface="Calibri"/>
+              </a:rPr>
+              <a:t>–   </a:t>
+            </a:r>
+            <a:r>
+              <a:rPr sz="2000" b="1" i="0">
+                <a:solidFill>
+                  <a:srgbClr val="333333"/>
+                </a:solidFill>
+                <a:latin typeface="Calibri"/>
+              </a:rPr>
+              <a:t>Aviso:</a:t>
+            </a:r>
+            <a:r>
+              <a:rPr sz="2000" b="0" i="0">
+                <a:solidFill>
+                  <a:srgbClr val="333333"/>
+                </a:solidFill>
+                <a:latin typeface="Calibri"/>
+              </a:rPr>
+              <a:t> Traigan identificado el </a:t>
+            </a:r>
+            <a:r>
+              <a:rPr sz="2000" b="1" i="0">
+                <a:solidFill>
+                  <a:srgbClr val="333333"/>
+                </a:solidFill>
+                <a:latin typeface="Calibri"/>
+              </a:rPr>
+              <a:t>actor no-usuario</a:t>
+            </a:r>
+            <a:r>
+              <a:rPr sz="2000" b="0" i="0">
+                <a:solidFill>
+                  <a:srgbClr val="333333"/>
+                </a:solidFill>
+                <a:latin typeface="Calibri"/>
+              </a:rPr>
+              <a:t> de su sistema. La sesión 4 arranca con esa persona y el ensayo de media página es sobre ella.</a:t>
+            </a:r>
+          </a:p>
+          <a:p>
+            <a:pPr>
+              <a:spcAft>
+                <a:spcPts val="800"/>
+              </a:spcAft>
+            </a:pPr>
+            <a:r>
+              <a:rPr sz="2000" b="0" i="0">
+                <a:solidFill>
+                  <a:srgbClr val="333333"/>
+                </a:solidFill>
+                <a:latin typeface="Calibri"/>
+              </a:rPr>
+              <a:t>–   </a:t>
+            </a:r>
+            <a:r>
+              <a:rPr sz="2000" b="1" i="0">
+                <a:solidFill>
+                  <a:srgbClr val="333333"/>
+                </a:solidFill>
+                <a:latin typeface="Calibri"/>
+              </a:rPr>
+              <a:t>Antes de salir:</a:t>
+            </a:r>
+            <a:r>
+              <a:rPr sz="2000" b="0" i="0">
+                <a:solidFill>
+                  <a:srgbClr val="333333"/>
+                </a:solidFill>
+                <a:latin typeface="Calibri"/>
+              </a:rPr>
+              <a:t> el enlace del documento del equipo en el chat, con permiso de lectura para el docente, y el nombre del vocero de hoy.</a:t>
+            </a:r>
+          </a:p>
+        </p:txBody>
+      </p:sp>
+      <p:sp>
+        <p:nvSpPr>
+          <p:cNvPr id="6" name="TextBox 5"/>
+          <p:cNvSpPr txBox="1"/>
+          <p:nvPr/>
+        </p:nvSpPr>
+        <p:spPr>
+          <a:xfrm>
+            <a:off x="11185855" y="6473952"/>
+            <a:ext cx="640080" cy="274320"/>
+          </a:xfrm>
+          <a:prstGeom prst="rect">
+            <a:avLst/>
+          </a:prstGeom>
+          <a:noFill/>
+        </p:spPr>
+        <p:txBody>
+          <a:bodyPr wrap="square">
+            <a:spAutoFit/>
+          </a:bodyPr>
+          <a:lstStyle/>
+          <a:p>
+            <a:pPr algn="r"/>
+            <a:r>
+              <a:rPr sz="1100" b="0" i="0">
+                <a:solidFill>
+                  <a:srgbClr val="666666"/>
+                </a:solidFill>
+                <a:latin typeface="Calibri"/>
+              </a:rPr>
+              <a:t>21</a:t>
+            </a:r>
+          </a:p>
+        </p:txBody>
+      </p:sp>
+    </p:spTree>
+  </p:cSld>
+  <p:clrMapOvr>
+    <a:masterClrMapping/>
+  </p:clrMapOvr>
+</p:sld>
+</file>
+
+<file path=ppt/slides/slide22.xml><?xml version="1.0" encoding="utf-8"?>
+<p:sld xmlns:a="http://schemas.openxmlformats.org/drawingml/2006/main" xmlns:p="http://schemas.openxmlformats.org/presentationml/2006/main" xmlns:r="http://schemas.openxmlformats.org/officeDocument/2006/relationships">
+  <p:cSld>
+    <p:bg>
+      <p:bgPr>
+        <a:solidFill>
+          <a:srgbClr val="FFFFFF"/>
+        </a:solidFill>
+        <a:effectLst/>
+      </p:bgPr>
+    </p:bg>
+    <p:spTree>
+      <p:nvGrpSpPr>
+        <p:cNvPr id="1" name=""/>
+        <p:cNvGrpSpPr/>
+        <p:nvPr/>
+      </p:nvGrpSpPr>
+      <p:grpSpPr/>
+      <p:sp>
+        <p:nvSpPr>
+          <p:cNvPr id="2" name="Rectangle 1"/>
+          <p:cNvSpPr/>
+          <p:nvPr/>
+        </p:nvSpPr>
+        <p:spPr>
+          <a:xfrm>
+            <a:off x="0" y="0"/>
+            <a:ext cx="12191695" cy="164592"/>
+          </a:xfrm>
+          <a:prstGeom prst="rect">
+            <a:avLst/>
+          </a:prstGeom>
+          <a:solidFill>
+            <a:srgbClr val="269CCB"/>
+          </a:solidFill>
+          <a:ln>
+            <a:noFill/>
+          </a:ln>
+        </p:spPr>
+        <p:style>
+          <a:lnRef idx="1">
+            <a:schemeClr val="accent1"/>
+          </a:lnRef>
+          <a:fillRef idx="3">
+            <a:schemeClr val="accent1"/>
+          </a:fillRef>
+          <a:effectRef idx="2">
+            <a:schemeClr val="accent1"/>
+          </a:effectRef>
+          <a:fontRef idx="minor">
+            <a:schemeClr val="lt1"/>
+          </a:fontRef>
+        </p:style>
+        <p:txBody>
+          <a:bodyPr rtlCol="0" anchor="ctr"/>
+          <a:lstStyle/>
+          <a:p>
+            <a:pPr algn="ctr"/>
+          </a:p>
+        </p:txBody>
+      </p:sp>
+      <p:pic>
+        <p:nvPicPr>
+          <p:cNvPr id="3" name="Picture 2" descr="logo_uniajc_color.png"/>
+          <p:cNvPicPr>
+            <a:picLocks noChangeAspect="1"/>
+          </p:cNvPicPr>
+          <p:nvPr/>
+        </p:nvPicPr>
+        <p:blipFill>
+          <a:blip r:embed="rId2"/>
+          <a:stretch>
+            <a:fillRect/>
+          </a:stretch>
+        </p:blipFill>
+        <p:spPr>
+          <a:xfrm>
+            <a:off x="10271455" y="5998464"/>
+            <a:ext cx="1463040" cy="643233"/>
+          </a:xfrm>
+          <a:prstGeom prst="rect">
+            <a:avLst/>
+          </a:prstGeom>
+        </p:spPr>
+      </p:pic>
+      <p:sp>
+        <p:nvSpPr>
+          <p:cNvPr id="4" name="TextBox 3"/>
+          <p:cNvSpPr txBox="1"/>
+          <p:nvPr/>
+        </p:nvSpPr>
+        <p:spPr>
+          <a:xfrm>
+            <a:off x="457200" y="1737360"/>
+            <a:ext cx="11277295" cy="1097280"/>
+          </a:xfrm>
+          <a:prstGeom prst="rect">
+            <a:avLst/>
+          </a:prstGeom>
+          <a:noFill/>
+        </p:spPr>
+        <p:txBody>
+          <a:bodyPr wrap="square" anchor="ctr"/>
+          <a:lstStyle/>
+          <a:p>
+            <a:pPr algn="ctr"/>
+            <a:r>
+              <a:rPr sz="3400" b="1" i="0">
+                <a:solidFill>
+                  <a:srgbClr val="095292"/>
+                </a:solidFill>
+                <a:latin typeface="Calibri"/>
+              </a:rPr>
+              <a:t>Nos vemos en la sesión 4</a:t>
+            </a:r>
+          </a:p>
+        </p:txBody>
+      </p:sp>
+      <p:sp>
+        <p:nvSpPr>
+          <p:cNvPr id="5" name="TextBox 4"/>
+          <p:cNvSpPr txBox="1"/>
+          <p:nvPr/>
+        </p:nvSpPr>
+        <p:spPr>
+          <a:xfrm>
+            <a:off x="457200" y="3017520"/>
+            <a:ext cx="11277295" cy="1645920"/>
+          </a:xfrm>
+          <a:prstGeom prst="rect">
+            <a:avLst/>
+          </a:prstGeom>
+          <a:noFill/>
+        </p:spPr>
+        <p:txBody>
+          <a:bodyPr wrap="square">
+            <a:spAutoFit/>
+          </a:bodyPr>
+          <a:lstStyle/>
+          <a:p>
+            <a:pPr algn="ctr">
+              <a:spcAft>
+                <a:spcPts val="600"/>
+              </a:spcAft>
+            </a:pPr>
+            <a:r>
+              <a:rPr sz="1600" b="0" i="0">
+                <a:solidFill>
+                  <a:srgbClr val="333333"/>
+                </a:solidFill>
+                <a:latin typeface="Calibri"/>
+              </a:rPr>
+              <a:t>Fundamentos básicos de la Ingeniería de Sistemas · Clase 3</a:t>
+            </a:r>
+          </a:p>
+          <a:p>
+            <a:pPr algn="ctr">
+              <a:spcAft>
+                <a:spcPts val="600"/>
+              </a:spcAft>
+            </a:pPr>
+            <a:r>
+              <a:rPr sz="1600" b="0" i="0">
+                <a:solidFill>
+                  <a:srgbClr val="333333"/>
+                </a:solidFill>
+                <a:latin typeface="Calibri"/>
+              </a:rPr>
+              <a:t>FI300101 · UNIAJC · Ingeniería de Sistemas</a:t>
+            </a:r>
+          </a:p>
+        </p:txBody>
+      </p:sp>
+      <p:sp>
+        <p:nvSpPr>
+          <p:cNvPr id="6" name="TextBox 5"/>
+          <p:cNvSpPr txBox="1"/>
+          <p:nvPr/>
+        </p:nvSpPr>
+        <p:spPr>
+          <a:xfrm>
+            <a:off x="457200" y="4754880"/>
+            <a:ext cx="11277295" cy="640080"/>
+          </a:xfrm>
+          <a:prstGeom prst="rect">
+            <a:avLst/>
+          </a:prstGeom>
+          <a:noFill/>
+        </p:spPr>
+        <p:txBody>
+          <a:bodyPr wrap="square">
+            <a:spAutoFit/>
+          </a:bodyPr>
+          <a:lstStyle/>
+          <a:p>
+            <a:pPr algn="ctr"/>
+            <a:r>
+              <a:rPr sz="2000" b="1" i="0">
+                <a:solidFill>
+                  <a:srgbClr val="269CCB"/>
+                </a:solidFill>
+                <a:latin typeface="Calibri"/>
+              </a:rPr>
+              <a:t>El sistema no es el software: el software es una parte del proceso</a:t>
             </a:r>
           </a:p>
         </p:txBody>

--- a/Introduccion a la Ingenieria/Clases/Clase 3 - Fundamentos basicos de la Ingenieria de Sistemas/Presentacion.pptx
+++ b/Introduccion a la Ingenieria/Clases/Clase 3 - Fundamentos basicos de la Ingenieria de Sistemas/Presentacion.pptx
@@ -27,6 +27,7 @@
     <p:sldId id="275" r:id="rId26"/>
     <p:sldId id="276" r:id="rId27"/>
     <p:sldId id="277" r:id="rId28"/>
+    <p:sldId id="278" r:id="rId29"/>
   </p:sldIdLst>
   <p:sldSz cx="12191695" cy="6858000" type="screen4x3"/>
   <p:notesSz cx="6858000" cy="9144000"/>
@@ -3627,7 +3628,7 @@
                 </a:solidFill>
                 <a:latin typeface="Calibri"/>
               </a:rPr>
-              <a:t>La pregunta de entrada y por qué esos tres ejemplos</a:t>
+              <a:t>La pregunta de entrada y por qué esos tres ejemplos (1/2)</a:t>
             </a:r>
           </a:p>
         </p:txBody>
@@ -3699,56 +3700,6 @@
                 <a:latin typeface="Calibri"/>
               </a:rPr>
               <a:t>–   El semáforo sirve para desactivar la idea de que un sistema es un programa: un semáforo mal sincronizado produce trancón aunque su temporizador funcione perfecto.</a:t>
-            </a:r>
-          </a:p>
-          <a:p>
-            <a:pPr>
-              <a:spcAft>
-                <a:spcPts val="800"/>
-              </a:spcAft>
-            </a:pPr>
-            <a:r>
-              <a:rPr sz="2000" b="0" i="0">
-                <a:solidFill>
-                  <a:srgbClr val="333333"/>
-                </a:solidFill>
-                <a:latin typeface="Calibri"/>
-              </a:rPr>
-              <a:t>–   La matrícula sirve porque la viven: el sistema de matrícula incluye la plataforma, pero también el pago en el banco, la cola de la ventanilla y la persona que revisa un documento.</a:t>
-            </a:r>
-          </a:p>
-          <a:p>
-            <a:pPr>
-              <a:spcAft>
-                <a:spcPts val="800"/>
-              </a:spcAft>
-            </a:pPr>
-            <a:r>
-              <a:rPr sz="2000" b="0" i="0">
-                <a:solidFill>
-                  <a:srgbClr val="333333"/>
-                </a:solidFill>
-                <a:latin typeface="Calibri"/>
-              </a:rPr>
-              <a:t>–   Y la fila de la EPS sirve porque es el caso donde es más visible que </a:t>
-            </a:r>
-            <a:r>
-              <a:rPr sz="2000" b="1" i="0">
-                <a:solidFill>
-                  <a:srgbClr val="333333"/>
-                </a:solidFill>
-                <a:latin typeface="Calibri"/>
-              </a:rPr>
-              <a:t>un sistema puede funcionar según su diseño y ser injusto</a:t>
-            </a:r>
-            <a:r>
-              <a:rPr sz="2000" b="0" i="0">
-                <a:solidFill>
-                  <a:srgbClr val="333333"/>
-                </a:solidFill>
-                <a:latin typeface="Calibri"/>
-              </a:rPr>
-              <a:t>: si las citas se asignan por orden de llegada física, el sistema está premiando a quien puede madrugar.</a:t>
             </a:r>
           </a:p>
         </p:txBody>
@@ -3929,7 +3880,7 @@
                 </a:solidFill>
                 <a:latin typeface="Calibri"/>
               </a:rPr>
-              <a:t>Qué es un sistema y por qué la frontera es la decisión difícil (1/2)</a:t>
+              <a:t>La pregunta de entrada y por qué esos tres ejemplos (2/2)</a:t>
             </a:r>
           </a:p>
         </p:txBody>
@@ -3968,7 +3919,7 @@
                 </a:solidFill>
                 <a:latin typeface="Calibri"/>
               </a:rPr>
-              <a:t>–   La definición operativa que sirve para todo el curso es corta: un sistema es un conjunto de partes que interactúan para cumplir un propósito, de modo que si se le quita una parte deja de cumplirlo.</a:t>
+              <a:t>–   La matrícula sirve porque la viven: el sistema de matrícula incluye la plataforma, pero también el pago en el banco, la cola de la ventanilla y la persona que revisa un documento.</a:t>
             </a:r>
           </a:p>
           <a:p>
@@ -3984,7 +3935,7 @@
                 </a:solidFill>
                 <a:latin typeface="Calibri"/>
               </a:rPr>
-              <a:t>–   Lo importante de esa definición no son las palabras sino la consecuencia: </a:t>
+              <a:t>–   Y la fila de la EPS sirve porque es el caso donde es más visible que </a:t>
             </a:r>
             <a:r>
               <a:rPr sz="2000" b="1" i="0">
@@ -3993,7 +3944,7 @@
                 </a:solidFill>
                 <a:latin typeface="Calibri"/>
               </a:rPr>
-              <a:t>el propósito es lo primero que hay que poder decir</a:t>
+              <a:t>un sistema puede funcionar según su diseño y ser injusto</a:t>
             </a:r>
             <a:r>
               <a:rPr sz="2000" b="0" i="0">
@@ -4002,71 +3953,7 @@
                 </a:solidFill>
                 <a:latin typeface="Calibri"/>
               </a:rPr>
-              <a:t>.</a:t>
-            </a:r>
-          </a:p>
-          <a:p>
-            <a:pPr>
-              <a:spcAft>
-                <a:spcPts val="800"/>
-              </a:spcAft>
-            </a:pPr>
-            <a:r>
-              <a:rPr sz="2000" b="0" i="0">
-                <a:solidFill>
-                  <a:srgbClr val="333333"/>
-                </a:solidFill>
-                <a:latin typeface="Calibri"/>
-              </a:rPr>
-              <a:t>–   Si un equipo no puede decir para qué existe el sistema en una frase, todavía no lo entendió, y ningún diagrama lo va a salvar.</a:t>
-            </a:r>
-          </a:p>
-          <a:p>
-            <a:pPr>
-              <a:spcAft>
-                <a:spcPts val="800"/>
-              </a:spcAft>
-            </a:pPr>
-            <a:r>
-              <a:rPr sz="2000" b="0" i="0">
-                <a:solidFill>
-                  <a:srgbClr val="333333"/>
-                </a:solidFill>
-                <a:latin typeface="Calibri"/>
-              </a:rPr>
-              <a:t>–   Los cinco elementos se explican con un ejemplo concreto y de una sola pasada.</a:t>
-            </a:r>
-          </a:p>
-          <a:p>
-            <a:pPr>
-              <a:spcAft>
-                <a:spcPts val="800"/>
-              </a:spcAft>
-            </a:pPr>
-            <a:r>
-              <a:rPr sz="2000" b="0" i="0">
-                <a:solidFill>
-                  <a:srgbClr val="333333"/>
-                </a:solidFill>
-                <a:latin typeface="Calibri"/>
-              </a:rPr>
-              <a:t>–   En el sistema de citas de un consultorio: las entradas son las solicitudes de cita, la disponibilidad del médico y los datos del paciente; el proceso es asignar, confirmar y recordar</a:t>
-            </a:r>
-          </a:p>
-          <a:p>
-            <a:pPr>
-              <a:spcAft>
-                <a:spcPts val="800"/>
-              </a:spcAft>
-            </a:pPr>
-            <a:r>
-              <a:rPr sz="2000" b="0" i="0">
-                <a:solidFill>
-                  <a:srgbClr val="333333"/>
-                </a:solidFill>
-                <a:latin typeface="Calibri"/>
-              </a:rPr>
-              <a:t>–   Las salidas son la cita asignada, el paciente atendido y el registro de lo que pasó; la retroalimentación es que un paciente que no llegó libera un cupo y eso debería cambiar la asignación.</a:t>
+              <a:t>: si las citas se asignan por orden de llegada física, el sistema está premiando a quien puede madrugar.</a:t>
             </a:r>
           </a:p>
         </p:txBody>
@@ -4247,7 +4134,7 @@
                 </a:solidFill>
                 <a:latin typeface="Calibri"/>
               </a:rPr>
-              <a:t>Qué es un sistema y por qué la frontera es la decisión difícil (2/2)</a:t>
+              <a:t>Qué es un sistema y por qué la frontera es la decisión difícil (1/2)</a:t>
             </a:r>
           </a:p>
         </p:txBody>
@@ -4286,7 +4173,7 @@
                 </a:solidFill>
                 <a:latin typeface="Calibri"/>
               </a:rPr>
-              <a:t>–   La frontera es lo que hay que discutir: ¿el transporte del paciente es parte del sistema?</a:t>
+              <a:t>–   La definición operativa que sirve para todo el curso es corta: un sistema es un conjunto de partes que interactúan para cumplir un propósito, de modo que si se le quita una parte deja de cumplirlo.</a:t>
             </a:r>
           </a:p>
           <a:p>
@@ -4302,7 +4189,7 @@
                 </a:solidFill>
                 <a:latin typeface="Calibri"/>
               </a:rPr>
-              <a:t>–   Si el 30 % de las citas se pierden porque la gente no logra llegar, dejar el transporte fuera de la frontera hace que el sistema funcione en el papel y falle en la vida.</a:t>
+              <a:t>–   Si un equipo no puede decir para qué existe el sistema en una frase, todavía no lo entendió, y ningún diagrama lo va a salvar.</a:t>
             </a:r>
           </a:p>
           <a:p>
@@ -4318,25 +4205,7 @@
                 </a:solidFill>
                 <a:latin typeface="Calibri"/>
               </a:rPr>
-              <a:t>–   Ese punto —</a:t>
-            </a:r>
-            <a:r>
-              <a:rPr sz="2000" b="1" i="0">
-                <a:solidFill>
-                  <a:srgbClr val="333333"/>
-                </a:solidFill>
-                <a:latin typeface="Calibri"/>
-              </a:rPr>
-              <a:t>toda frontera es una decisión y hay que poder defenderla</a:t>
-            </a:r>
-            <a:r>
-              <a:rPr sz="2000" b="0" i="0">
-                <a:solidFill>
-                  <a:srgbClr val="333333"/>
-                </a:solidFill>
-                <a:latin typeface="Calibri"/>
-              </a:rPr>
-              <a:t>— es el que hay que dejar clavado.</a:t>
+              <a:t>–   En el sistema de citas de un consultorio: las entradas son las solicitudes de cita, la disponibilidad del médico y los datos del paciente; el proceso es asignar, confirmar y recordar</a:t>
             </a:r>
           </a:p>
           <a:p>
@@ -4352,7 +4221,7 @@
                 </a:solidFill>
                 <a:latin typeface="Calibri"/>
               </a:rPr>
-              <a:t>–   El estudiante de primer semestre tiende a creer que la frontera viene dada por el problema.</a:t>
+              <a:t>–   Las salidas son la cita asignada, el paciente atendido y el registro de lo que pasó; la retroalimentación es que un paciente que no llegó libera un cupo y eso debería cambiar la asignación.</a:t>
             </a:r>
           </a:p>
           <a:p>
@@ -4368,39 +4237,7 @@
                 </a:solidFill>
                 <a:latin typeface="Calibri"/>
               </a:rPr>
-              <a:t>–   No viene dada: la pone el ingeniero, y de ella depende qué se puede mejorar.</a:t>
-            </a:r>
-          </a:p>
-          <a:p>
-            <a:pPr>
-              <a:spcAft>
-                <a:spcPts val="800"/>
-              </a:spcAft>
-            </a:pPr>
-            <a:r>
-              <a:rPr sz="2000" b="0" i="0">
-                <a:solidFill>
-                  <a:srgbClr val="333333"/>
-                </a:solidFill>
-                <a:latin typeface="Calibri"/>
-              </a:rPr>
-              <a:t>–   Una frontera muy estrecha produce sistemas que no sirven; una muy ancha produce proyectos que no se acaban.</a:t>
-            </a:r>
-          </a:p>
-          <a:p>
-            <a:pPr>
-              <a:spcAft>
-                <a:spcPts val="800"/>
-              </a:spcAft>
-            </a:pPr>
-            <a:r>
-              <a:rPr sz="2000" b="0" i="0">
-                <a:solidFill>
-                  <a:srgbClr val="333333"/>
-                </a:solidFill>
-                <a:latin typeface="Calibri"/>
-              </a:rPr>
-              <a:t>–   En la sesión 6, cuando cada equipo escriba el problema de su proyecto, la frontera va a ser el campo que más discusión genere, y hoy es donde se aprende a ponerla.</a:t>
+              <a:t>–   La frontera es lo que hay que discutir: ¿el transporte del paciente es parte del sistema?</a:t>
             </a:r>
           </a:p>
         </p:txBody>
@@ -4581,7 +4418,7 @@
                 </a:solidFill>
                 <a:latin typeface="Calibri"/>
               </a:rPr>
-              <a:t>El sistema no es el software: la confusión que hace fracasar proyectos (1/2)</a:t>
+              <a:t>Qué es un sistema y por qué la frontera es la decisión difícil (2/2)</a:t>
             </a:r>
           </a:p>
         </p:txBody>
@@ -4620,7 +4457,7 @@
                 </a:solidFill>
                 <a:latin typeface="Calibri"/>
               </a:rPr>
-              <a:t>–   La diapositiva del antes y después es el centro pedagógico de la sesión y conviene dictarla despacio, línea por línea, dejando que el grupo reconozca su propia forma de pensar en la columna izquierda.</a:t>
+              <a:t>–   Si el 30 % de las citas se pierden porque la gente no logra llegar, dejar el transporte fuera de la frontera hace que el sistema funcione en el papel y falle en la vida.</a:t>
             </a:r>
           </a:p>
           <a:p>
@@ -4636,7 +4473,25 @@
                 </a:solidFill>
                 <a:latin typeface="Calibri"/>
               </a:rPr>
-              <a:t>–   Casi todos llegan a primer semestre con la mirada de programador, y no por ignorancia: es la que el entorno premia.</a:t>
+              <a:t>–   Ese punto —</a:t>
+            </a:r>
+            <a:r>
+              <a:rPr sz="2000" b="1" i="0">
+                <a:solidFill>
+                  <a:srgbClr val="333333"/>
+                </a:solidFill>
+                <a:latin typeface="Calibri"/>
+              </a:rPr>
+              <a:t>toda frontera es una decisión y hay que poder defenderla</a:t>
+            </a:r>
+            <a:r>
+              <a:rPr sz="2000" b="0" i="0">
+                <a:solidFill>
+                  <a:srgbClr val="333333"/>
+                </a:solidFill>
+                <a:latin typeface="Calibri"/>
+              </a:rPr>
+              <a:t>— es el que hay que dejar clavado.</a:t>
             </a:r>
           </a:p>
           <a:p>
@@ -4652,7 +4507,7 @@
                 </a:solidFill>
                 <a:latin typeface="Calibri"/>
               </a:rPr>
-              <a:t>–   La columna derecha es la que la carrera enseña.</a:t>
+              <a:t>–   No viene dada: la pone el ingeniero, y de ella depende qué se puede mejorar.</a:t>
             </a:r>
           </a:p>
           <a:p>
@@ -4668,7 +4523,7 @@
                 </a:solidFill>
                 <a:latin typeface="Calibri"/>
               </a:rPr>
-              <a:t>–   El ejemplo de las citas médicas conviene desarrollarlo hasta el final porque muestra el fracaso completo.</a:t>
+              <a:t>–   Una frontera muy estrecha produce sistemas que no sirven; una muy ancha produce proyectos que no se acaban.</a:t>
             </a:r>
           </a:p>
           <a:p>
@@ -4684,23 +4539,7 @@
                 </a:solidFill>
                 <a:latin typeface="Calibri"/>
               </a:rPr>
-              <a:t>–   Un equipo con mirada de programador construye una app de citas impecable: sin errores, rápida, bonita.</a:t>
-            </a:r>
-          </a:p>
-          <a:p>
-            <a:pPr>
-              <a:spcAft>
-                <a:spcPts val="800"/>
-              </a:spcAft>
-            </a:pPr>
-            <a:r>
-              <a:rPr sz="2000" b="0" i="0">
-                <a:solidFill>
-                  <a:srgbClr val="333333"/>
-                </a:solidFill>
-                <a:latin typeface="Calibri"/>
-              </a:rPr>
-              <a:t>–   Y la fila de las cinco de la mañana no se mueve, porque las personas que hacen esa fila no tienen datos en el celular, o no confían en la app, o la secretaria sigue apuntando en el cuaderno porque el sistema nuevo le duplica el trabajo.</a:t>
+              <a:t>–   En la sesión 6, cuando cada equipo escriba el problema de su proyecto, la frontera va a ser el campo que más discusión genere, y hoy es donde se aprende a ponerla.</a:t>
             </a:r>
           </a:p>
         </p:txBody>
@@ -4881,7 +4720,7 @@
                 </a:solidFill>
                 <a:latin typeface="Calibri"/>
               </a:rPr>
-              <a:t>El sistema no es el software: la confusión que hace fracasar proyectos (2/2)</a:t>
+              <a:t>El sistema no es el software: la confusión que hace fracasar proyectos (1/2)</a:t>
             </a:r>
           </a:p>
         </p:txBody>
@@ -4920,25 +4759,7 @@
                 </a:solidFill>
                 <a:latin typeface="Calibri"/>
               </a:rPr>
-              <a:t>–   El software funciona y el problema sigue. </a:t>
-            </a:r>
-            <a:r>
-              <a:rPr sz="2000" b="1" i="0">
-                <a:solidFill>
-                  <a:srgbClr val="333333"/>
-                </a:solidFill>
-                <a:latin typeface="Calibri"/>
-              </a:rPr>
-              <a:t>En la lógica de este curso, ese proyecto fracasó</a:t>
-            </a:r>
-            <a:r>
-              <a:rPr sz="2000" b="0" i="0">
-                <a:solidFill>
-                  <a:srgbClr val="333333"/>
-                </a:solidFill>
-                <a:latin typeface="Calibri"/>
-              </a:rPr>
-              <a:t>, y no por un error técnico.</a:t>
+              <a:t>–   La diapositiva del antes y después es el centro pedagógico de la sesión y conviene dictarla despacio, línea por línea, dejando que el grupo reconozca su propia forma de pensar en la columna izquierda.</a:t>
             </a:r>
           </a:p>
           <a:p>
@@ -4954,25 +4775,7 @@
                 </a:solidFill>
                 <a:latin typeface="Calibri"/>
               </a:rPr>
-              <a:t>–   De ahí sale el criterio de éxito que se usa en todo el semestre y que hay que enunciar hoy con esas palabras: un proyecto de este curso se juzga por </a:t>
-            </a:r>
-            <a:r>
-              <a:rPr sz="2000" b="1" i="0">
-                <a:solidFill>
-                  <a:srgbClr val="333333"/>
-                </a:solidFill>
-                <a:latin typeface="Calibri"/>
-              </a:rPr>
-              <a:t>si el problema del entorno se redujo y se puede medir</a:t>
-            </a:r>
-            <a:r>
-              <a:rPr sz="2000" b="0" i="0">
-                <a:solidFill>
-                  <a:srgbClr val="333333"/>
-                </a:solidFill>
-                <a:latin typeface="Calibri"/>
-              </a:rPr>
-              <a:t>, no por si el prototipo funciona.</a:t>
+              <a:t>–   Un equipo con mirada de programador construye una app de citas impecable: sin errores, rápida, bonita.</a:t>
             </a:r>
           </a:p>
           <a:p>
@@ -4988,7 +4791,7 @@
                 </a:solidFill>
                 <a:latin typeface="Calibri"/>
               </a:rPr>
-              <a:t>–   Es la razón por la que el bloque «problema del entorno» pesó el 30 % en la sesión 1 y por la que la sesión 6 exige una línea base con una cifra.</a:t>
+              <a:t>–   Y la fila de las cinco de la mañana no se mueve, porque las personas que hacen esa fila no tienen datos en el celular, o no confían en la app, o la secretaria sigue apuntando en el cuaderno porque el sistema nuevo le duplica el trabajo.</a:t>
             </a:r>
           </a:p>
         </p:txBody>
@@ -5169,7 +4972,7 @@
                 </a:solidFill>
                 <a:latin typeface="Calibri"/>
               </a:rPr>
-              <a:t>Actores, requisitos y retroalimentación: los tres que se olvidan (1/2)</a:t>
+              <a:t>El sistema no es el software: la confusión que hace fracasar proyectos (2/2)</a:t>
             </a:r>
           </a:p>
         </p:txBody>
@@ -5208,7 +5011,25 @@
                 </a:solidFill>
                 <a:latin typeface="Calibri"/>
               </a:rPr>
-              <a:t>–   El concepto de actor hay que estirarlo más allá del usuario, porque ahí está la falla que más cuesta.</a:t>
+              <a:t>–   De ahí sale el criterio de éxito que se usa en todo el semestre y que hay que enunciar hoy con esas palabras: un proyecto de este curso se juzga por </a:t>
+            </a:r>
+            <a:r>
+              <a:rPr sz="2000" b="1" i="0">
+                <a:solidFill>
+                  <a:srgbClr val="333333"/>
+                </a:solidFill>
+                <a:latin typeface="Calibri"/>
+              </a:rPr>
+              <a:t>si el problema del entorno se redujo y se puede medir</a:t>
+            </a:r>
+            <a:r>
+              <a:rPr sz="2000" b="0" i="0">
+                <a:solidFill>
+                  <a:srgbClr val="333333"/>
+                </a:solidFill>
+                <a:latin typeface="Calibri"/>
+              </a:rPr>
+              <a:t>, no por si el prototipo funciona.</a:t>
             </a:r>
           </a:p>
           <a:p>
@@ -5224,139 +5045,7 @@
                 </a:solidFill>
                 <a:latin typeface="Calibri"/>
               </a:rPr>
-              <a:t>–   En el sistema de citas los actores obvios son el paciente y la secretaria.</a:t>
-            </a:r>
-          </a:p>
-          <a:p>
-            <a:pPr>
-              <a:spcAft>
-                <a:spcPts val="800"/>
-              </a:spcAft>
-            </a:pPr>
-            <a:r>
-              <a:rPr sz="2000" b="0" i="0">
-                <a:solidFill>
-                  <a:srgbClr val="333333"/>
-                </a:solidFill>
-                <a:latin typeface="Calibri"/>
-              </a:rPr>
-              <a:t>–   Los que se olvidan son el médico (cuya agenda se llena distinto), quien paga el servicio (que quiere menos cupos perdidos) y </a:t>
-            </a:r>
-            <a:r>
-              <a:rPr sz="2000" b="1" i="0">
-                <a:solidFill>
-                  <a:srgbClr val="333333"/>
-                </a:solidFill>
-                <a:latin typeface="Calibri"/>
-              </a:rPr>
-              <a:t>el vecino que antes conseguía cita madrugando y ahora no la consigue</a:t>
-            </a:r>
-            <a:r>
-              <a:rPr sz="2000" b="0" i="0">
-                <a:solidFill>
-                  <a:srgbClr val="333333"/>
-                </a:solidFill>
-                <a:latin typeface="Calibri"/>
-              </a:rPr>
-              <a:t>.</a:t>
-            </a:r>
-          </a:p>
-          <a:p>
-            <a:pPr>
-              <a:spcAft>
-                <a:spcPts val="800"/>
-              </a:spcAft>
-            </a:pPr>
-            <a:r>
-              <a:rPr sz="2000" b="0" i="0">
-                <a:solidFill>
-                  <a:srgbClr val="333333"/>
-                </a:solidFill>
-                <a:latin typeface="Calibri"/>
-              </a:rPr>
-              <a:t>–   Ese último es el más importante para el curso, porque es un actor al que el sistema le empeoró la vida sin que nadie lo consultara.</a:t>
-            </a:r>
-          </a:p>
-          <a:p>
-            <a:pPr>
-              <a:spcAft>
-                <a:spcPts val="800"/>
-              </a:spcAft>
-            </a:pPr>
-            <a:r>
-              <a:rPr sz="2000" b="0" i="0">
-                <a:solidFill>
-                  <a:srgbClr val="333333"/>
-                </a:solidFill>
-                <a:latin typeface="Calibri"/>
-              </a:rPr>
-              <a:t>–   La Clase 13, sobre impacto social, es básicamente una hora dedicada a buscar a ese actor.</a:t>
-            </a:r>
-          </a:p>
-          <a:p>
-            <a:pPr>
-              <a:spcAft>
-                <a:spcPts val="800"/>
-              </a:spcAft>
-            </a:pPr>
-            <a:r>
-              <a:rPr sz="2000" b="0" i="0">
-                <a:solidFill>
-                  <a:srgbClr val="333333"/>
-                </a:solidFill>
-                <a:latin typeface="Calibri"/>
-              </a:rPr>
-              <a:t>–   Requisito contra deseo es la distinción práctica que más van a usar.</a:t>
-            </a:r>
-          </a:p>
-          <a:p>
-            <a:pPr>
-              <a:spcAft>
-                <a:spcPts val="800"/>
-              </a:spcAft>
-            </a:pPr>
-            <a:r>
-              <a:rPr sz="2000" b="0" i="0">
-                <a:solidFill>
-                  <a:srgbClr val="333333"/>
-                </a:solidFill>
-                <a:latin typeface="Calibri"/>
-              </a:rPr>
-              <a:t>–   La regla es operativa: es requisito si sin eso el sistema no cumple su propósito; es deseo si lo mejora.</a:t>
-            </a:r>
-          </a:p>
-          <a:p>
-            <a:pPr>
-              <a:spcAft>
-                <a:spcPts val="800"/>
-              </a:spcAft>
-            </a:pPr>
-            <a:r>
-              <a:rPr sz="2000" b="0" i="0">
-                <a:solidFill>
-                  <a:srgbClr val="333333"/>
-                </a:solidFill>
-                <a:latin typeface="Calibri"/>
-              </a:rPr>
-              <a:t>–   Y hay que advertir el fenómeno social: </a:t>
-            </a:r>
-            <a:r>
-              <a:rPr sz="2000" b="1" i="0">
-                <a:solidFill>
-                  <a:srgbClr val="333333"/>
-                </a:solidFill>
-                <a:latin typeface="Calibri"/>
-              </a:rPr>
-              <a:t>todo el mundo presenta sus deseos como requisitos</a:t>
-            </a:r>
-            <a:r>
-              <a:rPr sz="2000" b="0" i="0">
-                <a:solidFill>
-                  <a:srgbClr val="333333"/>
-                </a:solidFill>
-                <a:latin typeface="Calibri"/>
-              </a:rPr>
-              <a:t>, no por mala fe, sino porque desde dentro de su trabajo todo parece indispensable.</a:t>
+              <a:t>–   Es la razón por la que el bloque «problema del entorno» pesó el 30 % en la sesión 1 y por la que la sesión 6 exige una línea base con una cifra.</a:t>
             </a:r>
           </a:p>
         </p:txBody>
@@ -5537,7 +5226,7 @@
                 </a:solidFill>
                 <a:latin typeface="Calibri"/>
               </a:rPr>
-              <a:t>Actores, requisitos y retroalimentación: los tres que se olvidan (2/2)</a:t>
+              <a:t>Actores, requisitos y retroalimentación: los tres que se olvidan (1/2)</a:t>
             </a:r>
           </a:p>
         </p:txBody>
@@ -5576,7 +5265,7 @@
                 </a:solidFill>
                 <a:latin typeface="Calibri"/>
               </a:rPr>
-              <a:t>–   Separarlos no es un trámite: es lo que permite entregar algo en un semestre en vez de nada en dos años.</a:t>
+              <a:t>–   El concepto de actor hay que estirarlo más allá del usuario, porque ahí está la falla que más cuesta.</a:t>
             </a:r>
           </a:p>
           <a:p>
@@ -5592,25 +5281,7 @@
                 </a:solidFill>
                 <a:latin typeface="Calibri"/>
               </a:rPr>
-              <a:t>–   La retroalimentación es la más abstracta y la que más rinde cuando se aterriza con una pregunta única: </a:t>
-            </a:r>
-            <a:r>
-              <a:rPr sz="2000" b="1" i="0">
-                <a:solidFill>
-                  <a:srgbClr val="333333"/>
-                </a:solidFill>
-                <a:latin typeface="Calibri"/>
-              </a:rPr>
-              <a:t>¿cómo se entera este sistema de que le salió mal?</a:t>
-            </a:r>
-            <a:r>
-              <a:rPr sz="2000" b="0" i="0">
-                <a:solidFill>
-                  <a:srgbClr val="333333"/>
-                </a:solidFill>
-                <a:latin typeface="Calibri"/>
-              </a:rPr>
-              <a:t> En la mayoría de los sistemas del entorno que los equipos van a mirar</a:t>
+              <a:t>–   En el sistema de citas los actores obvios son el paciente y la secretaria.</a:t>
             </a:r>
           </a:p>
           <a:p>
@@ -5626,7 +5297,25 @@
                 </a:solidFill>
                 <a:latin typeface="Calibri"/>
               </a:rPr>
-              <a:t>–   La respuesta honesta es «no se entera», o «se entera cuando alguien reclama».</a:t>
+              <a:t>–   Los que se olvidan son el médico (cuya agenda se llena distinto), quien paga el servicio (que quiere menos cupos perdidos) y </a:t>
+            </a:r>
+            <a:r>
+              <a:rPr sz="2000" b="1" i="0">
+                <a:solidFill>
+                  <a:srgbClr val="333333"/>
+                </a:solidFill>
+                <a:latin typeface="Calibri"/>
+              </a:rPr>
+              <a:t>el vecino que antes conseguía cita madrugando y ahora no la consigue</a:t>
+            </a:r>
+            <a:r>
+              <a:rPr sz="2000" b="0" i="0">
+                <a:solidFill>
+                  <a:srgbClr val="333333"/>
+                </a:solidFill>
+                <a:latin typeface="Calibri"/>
+              </a:rPr>
+              <a:t>.</a:t>
             </a:r>
           </a:p>
           <a:p>
@@ -5642,7 +5331,39 @@
                 </a:solidFill>
                 <a:latin typeface="Calibri"/>
               </a:rPr>
-              <a:t>–   Encontrar eso ya es un hallazgo de ingeniería y suele ser la mejor oportunidad de mejora del proyecto, porque casi siempre es barata: un registro, un conteo, una pregunta al final del proceso.</a:t>
+              <a:t>–   Ese último es el más importante para el curso, porque es un actor al que el sistema le empeoró la vida sin que nadie lo consultara.</a:t>
+            </a:r>
+          </a:p>
+          <a:p>
+            <a:pPr>
+              <a:spcAft>
+                <a:spcPts val="800"/>
+              </a:spcAft>
+            </a:pPr>
+            <a:r>
+              <a:rPr sz="2000" b="0" i="0">
+                <a:solidFill>
+                  <a:srgbClr val="333333"/>
+                </a:solidFill>
+                <a:latin typeface="Calibri"/>
+              </a:rPr>
+              <a:t>–   La Clase 13, sobre impacto social, es básicamente una hora dedicada a buscar a ese actor.</a:t>
+            </a:r>
+          </a:p>
+          <a:p>
+            <a:pPr>
+              <a:spcAft>
+                <a:spcPts val="800"/>
+              </a:spcAft>
+            </a:pPr>
+            <a:r>
+              <a:rPr sz="2000" b="0" i="0">
+                <a:solidFill>
+                  <a:srgbClr val="333333"/>
+                </a:solidFill>
+                <a:latin typeface="Calibri"/>
+              </a:rPr>
+              <a:t>–   Requisito contra deseo es la distinción práctica que más van a usar.</a:t>
             </a:r>
           </a:p>
         </p:txBody>
@@ -5823,7 +5544,7 @@
                 </a:solidFill>
                 <a:latin typeface="Calibri"/>
               </a:rPr>
-              <a:t>El asistente de IA: cómo usarlo hoy sin que haga el trabajo (1/2)</a:t>
+              <a:t>Actores, requisitos y retroalimentación: los tres que se olvidan (2/2)</a:t>
             </a:r>
           </a:p>
         </p:txBody>
@@ -5862,7 +5583,7 @@
                 </a:solidFill>
                 <a:latin typeface="Calibri"/>
               </a:rPr>
-              <a:t>–   Esta es una de las dos sesiones donde el Plan de curso autoriza IA, y conviene encuadrarla bien porque de cómo se haga hoy depende cómo la usen todo el semestre.</a:t>
+              <a:t>–   La regla es operativa: es requisito si sin eso el sistema no cumple su propósito; es deseo si lo mejora.</a:t>
             </a:r>
           </a:p>
           <a:p>
@@ -5878,7 +5599,7 @@
                 </a:solidFill>
                 <a:latin typeface="Calibri"/>
               </a:rPr>
-              <a:t>–   La postura del curso no es prohibirla ni celebrarla: es </a:t>
+              <a:t>–   Y hay que advertir el fenómeno social: </a:t>
             </a:r>
             <a:r>
               <a:rPr sz="2000" b="1" i="0">
@@ -5887,7 +5608,7 @@
                 </a:solidFill>
                 <a:latin typeface="Calibri"/>
               </a:rPr>
-              <a:t>usarla y verificarla</a:t>
+              <a:t>todo el mundo presenta sus deseos como requisitos</a:t>
             </a:r>
             <a:r>
               <a:rPr sz="2000" b="0" i="0">
@@ -5896,7 +5617,7 @@
                 </a:solidFill>
                 <a:latin typeface="Calibri"/>
               </a:rPr>
-              <a:t>.</a:t>
+              <a:t>, no por mala fe, sino porque desde dentro de su trabajo todo parece indispensable.</a:t>
             </a:r>
           </a:p>
           <a:p>
@@ -5912,7 +5633,7 @@
                 </a:solidFill>
                 <a:latin typeface="Calibri"/>
               </a:rPr>
-              <a:t>–   El asistente es bueno dándole estructura a algo que el equipo ya entiende, y es bueno sugiriendo actores que se pasaron por alto.</a:t>
+              <a:t>–   Separarlos no es un trámite: es lo que permite entregar algo en un semestre en vez de nada en dos años.</a:t>
             </a:r>
           </a:p>
           <a:p>
@@ -5928,7 +5649,25 @@
                 </a:solidFill>
                 <a:latin typeface="Calibri"/>
               </a:rPr>
-              <a:t>–   Es malo, y de una manera peligrosa, en todo lo local y lo cuantitativo.</a:t>
+              <a:t>–   La retroalimentación es la más abstracta y la que más rinde cuando se aterriza con una pregunta única: </a:t>
+            </a:r>
+            <a:r>
+              <a:rPr sz="2000" b="1" i="0">
+                <a:solidFill>
+                  <a:srgbClr val="333333"/>
+                </a:solidFill>
+                <a:latin typeface="Calibri"/>
+              </a:rPr>
+              <a:t>¿cómo se entera este sistema de que le salió mal?</a:t>
+            </a:r>
+            <a:r>
+              <a:rPr sz="2000" b="0" i="0">
+                <a:solidFill>
+                  <a:srgbClr val="333333"/>
+                </a:solidFill>
+                <a:latin typeface="Calibri"/>
+              </a:rPr>
+              <a:t> En la mayoría de los sistemas del entorno que los equipos van a mirar</a:t>
             </a:r>
           </a:p>
           <a:p>
@@ -5944,25 +5683,7 @@
                 </a:solidFill>
                 <a:latin typeface="Calibri"/>
               </a:rPr>
-              <a:t>–   El punto que hay que subrayar es el mecanismo de la falla: el asistente </a:t>
-            </a:r>
-            <a:r>
-              <a:rPr sz="2000" b="1" i="0">
-                <a:solidFill>
-                  <a:srgbClr val="333333"/>
-                </a:solidFill>
-                <a:latin typeface="Calibri"/>
-              </a:rPr>
-              <a:t>no avisa cuando está inventando</a:t>
-            </a:r>
-            <a:r>
-              <a:rPr sz="2000" b="0" i="0">
-                <a:solidFill>
-                  <a:srgbClr val="333333"/>
-                </a:solidFill>
-                <a:latin typeface="Calibri"/>
-              </a:rPr>
-              <a:t>.</a:t>
+              <a:t>–   La respuesta honesta es «no se entera», o «se entera cuando alguien reclama».</a:t>
             </a:r>
           </a:p>
           <a:p>
@@ -5978,57 +5699,7 @@
                 </a:solidFill>
                 <a:latin typeface="Calibri"/>
               </a:rPr>
-              <a:t>–   Escribe «el tiempo promedio de espera en las EPS colombianas es de 47 minutos» con el mismo tono con que escribe algo correcto.</a:t>
-            </a:r>
-          </a:p>
-          <a:p>
-            <a:pPr>
-              <a:spcAft>
-                <a:spcPts val="800"/>
-              </a:spcAft>
-            </a:pPr>
-            <a:r>
-              <a:rPr sz="2000" b="0" i="0">
-                <a:solidFill>
-                  <a:srgbClr val="333333"/>
-                </a:solidFill>
-                <a:latin typeface="Calibri"/>
-              </a:rPr>
-              <a:t>–   Va a inventar cifras, nombres de dependencias municipales y números de leyes.</a:t>
-            </a:r>
-          </a:p>
-          <a:p>
-            <a:pPr>
-              <a:spcAft>
-                <a:spcPts val="800"/>
-              </a:spcAft>
-            </a:pPr>
-            <a:r>
-              <a:rPr sz="2000" b="0" i="0">
-                <a:solidFill>
-                  <a:srgbClr val="333333"/>
-                </a:solidFill>
-                <a:latin typeface="Calibri"/>
-              </a:rPr>
-              <a:t>–   Es exactamente el tipo de dato que un estudiante de primer semestre no puede distinguir, y por eso el entregable de hoy no es el texto de la IA: es </a:t>
-            </a:r>
-            <a:r>
-              <a:rPr sz="2000" b="1" i="0">
-                <a:solidFill>
-                  <a:srgbClr val="333333"/>
-                </a:solidFill>
-                <a:latin typeface="Calibri"/>
-              </a:rPr>
-              <a:t>la lista de lo que el equipo detectó y corrigió</a:t>
-            </a:r>
-            <a:r>
-              <a:rPr sz="2000" b="0" i="0">
-                <a:solidFill>
-                  <a:srgbClr val="333333"/>
-                </a:solidFill>
-                <a:latin typeface="Calibri"/>
-              </a:rPr>
-              <a:t>.</a:t>
+              <a:t>–   Encontrar eso ya es un hallazgo de ingeniería y suele ser la mejor oportunidad de mejora del proyecto, porque casi siempre es barata: un registro, un conteo, una pregunta al final del proceso.</a:t>
             </a:r>
           </a:p>
         </p:txBody>
@@ -6209,7 +5880,7 @@
                 </a:solidFill>
                 <a:latin typeface="Calibri"/>
               </a:rPr>
-              <a:t>El asistente de IA: cómo usarlo hoy sin que haga el trabajo (2/2)</a:t>
+              <a:t>El asistente de IA: cómo usarlo hoy sin que haga el trabajo (1/2)</a:t>
             </a:r>
           </a:p>
         </p:txBody>
@@ -6248,7 +5919,7 @@
                 </a:solidFill>
                 <a:latin typeface="Calibri"/>
               </a:rPr>
-              <a:t>–   Operativamente: el equipo escribe su prompt, pega la respuesta, y luego marca en el documento cada cosa que cambió y por qué.</a:t>
+              <a:t>–   Esta es una de las dos sesiones donde el Plan de curso autoriza IA, y conviene encuadrarla bien porque de cómo se haga hoy depende cómo la usen todo el semestre.</a:t>
             </a:r>
           </a:p>
           <a:p>
@@ -6264,7 +5935,25 @@
                 </a:solidFill>
                 <a:latin typeface="Calibri"/>
               </a:rPr>
-              <a:t>–   Tres correcciones bien argumentadas valen más que un texto largo.</a:t>
+              <a:t>–   La postura del curso no es prohibirla ni celebrarla: es </a:t>
+            </a:r>
+            <a:r>
+              <a:rPr sz="2000" b="1" i="0">
+                <a:solidFill>
+                  <a:srgbClr val="333333"/>
+                </a:solidFill>
+                <a:latin typeface="Calibri"/>
+              </a:rPr>
+              <a:t>usarla y verificarla</a:t>
+            </a:r>
+            <a:r>
+              <a:rPr sz="2000" b="0" i="0">
+                <a:solidFill>
+                  <a:srgbClr val="333333"/>
+                </a:solidFill>
+                <a:latin typeface="Calibri"/>
+              </a:rPr>
+              <a:t>.</a:t>
             </a:r>
           </a:p>
           <a:p>
@@ -6280,25 +5969,7 @@
                 </a:solidFill>
                 <a:latin typeface="Calibri"/>
               </a:rPr>
-              <a:t>–   Y hay una consecuencia útil que conviene decirles: </a:t>
-            </a:r>
-            <a:r>
-              <a:rPr sz="2000" b="1" i="0">
-                <a:solidFill>
-                  <a:srgbClr val="333333"/>
-                </a:solidFill>
-                <a:latin typeface="Calibri"/>
-              </a:rPr>
-              <a:t>la IA solo se puede verificar si uno sabe del tema</a:t>
-            </a:r>
-            <a:r>
-              <a:rPr sz="2000" b="0" i="0">
-                <a:solidFill>
-                  <a:srgbClr val="333333"/>
-                </a:solidFill>
-                <a:latin typeface="Calibri"/>
-              </a:rPr>
-              <a:t>, así que la herramienta no reemplaza aprender el contenido, lo hace más necesario.</a:t>
+              <a:t>–   El asistente es bueno dándole estructura a algo que el equipo ya entiende, y es bueno sugiriendo actores que se pasaron por alto.</a:t>
             </a:r>
           </a:p>
           <a:p>
@@ -6314,7 +5985,7 @@
                 </a:solidFill>
                 <a:latin typeface="Calibri"/>
               </a:rPr>
-              <a:t>–   Ese argumento funciona mejor que una prohibición.</a:t>
+              <a:t>–   Es malo, y de una manera peligrosa, en todo lo local y lo cuantitativo.</a:t>
             </a:r>
           </a:p>
           <a:p>
@@ -6330,7 +6001,25 @@
                 </a:solidFill>
                 <a:latin typeface="Calibri"/>
               </a:rPr>
-              <a:t>–   El método de cinco pasos de la otra diapositiva es el orden de trabajo del taller, y el paso 4 —seguir un caso real de la entrada a la salida— es el que produce los hallazgos.</a:t>
+              <a:t>–   El punto que hay que subrayar es el mecanismo de la falla: el asistente </a:t>
+            </a:r>
+            <a:r>
+              <a:rPr sz="2000" b="1" i="0">
+                <a:solidFill>
+                  <a:srgbClr val="333333"/>
+                </a:solidFill>
+                <a:latin typeface="Calibri"/>
+              </a:rPr>
+              <a:t>no avisa cuando está inventando</a:t>
+            </a:r>
+            <a:r>
+              <a:rPr sz="2000" b="0" i="0">
+                <a:solidFill>
+                  <a:srgbClr val="333333"/>
+                </a:solidFill>
+                <a:latin typeface="Calibri"/>
+              </a:rPr>
+              <a:t>.</a:t>
             </a:r>
           </a:p>
           <a:p>
@@ -6346,7 +6035,7 @@
                 </a:solidFill>
                 <a:latin typeface="Calibri"/>
               </a:rPr>
-              <a:t>–   Los huecos de un sistema no aparecen mirando el diagrama; aparecen cuando uno intenta pasar un caso concreto por él y se topa con un paso que nadie sabe quién hace.</a:t>
+              <a:t>–   Escribe «el tiempo promedio de espera en las EPS colombianas es de 47 minutos» con el mismo tono con que escribe algo correcto.</a:t>
             </a:r>
           </a:p>
         </p:txBody>
@@ -6421,7 +6110,7 @@
         <p:spPr>
           <a:xfrm>
             <a:off x="0" y="0"/>
-            <a:ext cx="12191695" cy="1170432"/>
+            <a:ext cx="12191695" cy="960120"/>
           </a:xfrm>
           <a:prstGeom prst="rect">
             <a:avLst/>
@@ -6463,7 +6152,7 @@
         </p:nvSpPr>
         <p:spPr>
           <a:xfrm>
-            <a:off x="0" y="1170432"/>
+            <a:off x="0" y="960120"/>
             <a:ext cx="12191695" cy="41148"/>
           </a:xfrm>
           <a:prstGeom prst="rect">
@@ -6507,7 +6196,7 @@
         <p:spPr>
           <a:xfrm>
             <a:off x="457200" y="164592"/>
-            <a:ext cx="11277295" cy="384048"/>
+            <a:ext cx="11277295" cy="502920"/>
           </a:xfrm>
           <a:prstGeom prst="rect">
             <a:avLst/>
@@ -6527,7 +6216,7 @@
                 </a:solidFill>
                 <a:latin typeface="Calibri"/>
               </a:rPr>
-              <a:t>Taller de hoy: Anatomía del sistema</a:t>
+              <a:t>El asistente de IA: cómo usarlo hoy sin que haga el trabajo (2/2)</a:t>
             </a:r>
           </a:p>
         </p:txBody>
@@ -6540,8 +6229,8 @@
         </p:nvSpPr>
         <p:spPr>
           <a:xfrm>
-            <a:off x="457200" y="566928"/>
-            <a:ext cx="11277295" cy="411480"/>
+            <a:off x="457200" y="1170432"/>
+            <a:ext cx="11277295" cy="5230368"/>
           </a:xfrm>
           <a:prstGeom prst="rect">
             <a:avLst/>
@@ -6554,602 +6243,31 @@
           </a:bodyPr>
           <a:lstStyle/>
           <a:p>
-            <a:r>
-              <a:rPr sz="1400" b="0" i="0">
-                <a:solidFill>
-                  <a:srgbClr val="B8D8EE"/>
-                </a:solidFill>
-                <a:latin typeface="Calibri"/>
-              </a:rPr>
-              <a:t>17 min en equipos · cada equipo trabaja su propio problema de la sesión 1 · ficha del sistema + prompt + correcciones</a:t>
-            </a:r>
-          </a:p>
-        </p:txBody>
-      </p:sp>
-      <p:sp>
-        <p:nvSpPr>
-          <p:cNvPr id="6" name="Rounded Rectangle 5"/>
-          <p:cNvSpPr/>
-          <p:nvPr/>
-        </p:nvSpPr>
-        <p:spPr>
-          <a:xfrm>
-            <a:off x="457200" y="1472184"/>
-            <a:ext cx="11277295" cy="566928"/>
-          </a:xfrm>
-          <a:prstGeom prst="roundRect">
-            <a:avLst>
-              <a:gd name="adj" fmla="val 12000"/>
-            </a:avLst>
-          </a:prstGeom>
-          <a:solidFill>
-            <a:srgbClr val="F2F2F2"/>
-          </a:solidFill>
-          <a:ln>
-            <a:noFill/>
-          </a:ln>
-        </p:spPr>
-        <p:style>
-          <a:lnRef idx="1">
-            <a:schemeClr val="accent1"/>
-          </a:lnRef>
-          <a:fillRef idx="3">
-            <a:schemeClr val="accent1"/>
-          </a:fillRef>
-          <a:effectRef idx="2">
-            <a:schemeClr val="accent1"/>
-          </a:effectRef>
-          <a:fontRef idx="minor">
-            <a:schemeClr val="lt1"/>
-          </a:fontRef>
-        </p:style>
-        <p:txBody>
-          <a:bodyPr rtlCol="0" anchor="ctr"/>
-          <a:lstStyle/>
-          <a:p>
-            <a:pPr algn="ctr"/>
-          </a:p>
-        </p:txBody>
-      </p:sp>
-      <p:sp>
-        <p:nvSpPr>
-          <p:cNvPr id="7" name="Rectangle 6"/>
-          <p:cNvSpPr/>
-          <p:nvPr/>
-        </p:nvSpPr>
-        <p:spPr>
-          <a:xfrm>
-            <a:off x="640080" y="1618487"/>
-            <a:ext cx="274320" cy="274320"/>
-          </a:xfrm>
-          <a:prstGeom prst="rect">
-            <a:avLst/>
-          </a:prstGeom>
-          <a:solidFill>
-            <a:srgbClr val="FFFFFF"/>
-          </a:solidFill>
-          <a:ln>
-            <a:solidFill>
-              <a:srgbClr val="333333"/>
-            </a:solidFill>
-          </a:ln>
-        </p:spPr>
-        <p:style>
-          <a:lnRef idx="1">
-            <a:schemeClr val="accent1"/>
-          </a:lnRef>
-          <a:fillRef idx="3">
-            <a:schemeClr val="accent1"/>
-          </a:fillRef>
-          <a:effectRef idx="2">
-            <a:schemeClr val="accent1"/>
-          </a:effectRef>
-          <a:fontRef idx="minor">
-            <a:schemeClr val="lt1"/>
-          </a:fontRef>
-        </p:style>
-        <p:txBody>
-          <a:bodyPr rtlCol="0" anchor="ctr"/>
-          <a:lstStyle/>
-          <a:p>
-            <a:pPr algn="ctr"/>
-          </a:p>
-        </p:txBody>
-      </p:sp>
-      <p:sp>
-        <p:nvSpPr>
-          <p:cNvPr id="8" name="Rectangle 7"/>
-          <p:cNvSpPr/>
-          <p:nvPr/>
-        </p:nvSpPr>
-        <p:spPr>
-          <a:xfrm>
-            <a:off x="640080" y="1618487"/>
-            <a:ext cx="73152" cy="274320"/>
-          </a:xfrm>
-          <a:prstGeom prst="rect">
-            <a:avLst/>
-          </a:prstGeom>
-          <a:solidFill>
-            <a:srgbClr val="269CCB"/>
-          </a:solidFill>
-          <a:ln>
-            <a:noFill/>
-          </a:ln>
-        </p:spPr>
-        <p:style>
-          <a:lnRef idx="1">
-            <a:schemeClr val="accent1"/>
-          </a:lnRef>
-          <a:fillRef idx="3">
-            <a:schemeClr val="accent1"/>
-          </a:fillRef>
-          <a:effectRef idx="2">
-            <a:schemeClr val="accent1"/>
-          </a:effectRef>
-          <a:fontRef idx="minor">
-            <a:schemeClr val="lt1"/>
-          </a:fontRef>
-        </p:style>
-        <p:txBody>
-          <a:bodyPr rtlCol="0" anchor="ctr"/>
-          <a:lstStyle/>
-          <a:p>
-            <a:pPr algn="ctr"/>
-          </a:p>
-        </p:txBody>
-      </p:sp>
-      <p:sp>
-        <p:nvSpPr>
-          <p:cNvPr id="9" name="TextBox 8"/>
-          <p:cNvSpPr txBox="1"/>
-          <p:nvPr/>
-        </p:nvSpPr>
-        <p:spPr>
-          <a:xfrm>
-            <a:off x="1097280" y="1563624"/>
-            <a:ext cx="10362895" cy="402336"/>
-          </a:xfrm>
-          <a:prstGeom prst="rect">
-            <a:avLst/>
-          </a:prstGeom>
-          <a:noFill/>
-        </p:spPr>
-        <p:txBody>
-          <a:bodyPr wrap="square" anchor="ctr"/>
-          <a:lstStyle/>
-          <a:p>
-            <a:r>
-              <a:rPr sz="1500" b="1" i="0">
-                <a:solidFill>
-                  <a:srgbClr val="333333"/>
-                </a:solidFill>
-                <a:latin typeface="Calibri"/>
-              </a:rPr>
-              <a:t>PROPÓSITO Y FRONTERA</a:t>
-            </a:r>
-            <a:r>
-              <a:rPr sz="1500" b="0" i="0">
-                <a:solidFill>
-                  <a:srgbClr val="333333"/>
-                </a:solidFill>
-                <a:latin typeface="Calibri"/>
-              </a:rPr>
-              <a:t> — Para qué existe el sistema, en una frase. Y qué queda </a:t>
-            </a:r>
-            <a:r>
-              <a:rPr sz="1500" b="1" i="0">
-                <a:solidFill>
-                  <a:srgbClr val="333333"/>
-                </a:solidFill>
-                <a:latin typeface="Calibri"/>
-              </a:rPr>
-              <a:t>dentro</a:t>
-            </a:r>
-            <a:r>
-              <a:rPr sz="1500" b="0" i="0">
-                <a:solidFill>
-                  <a:srgbClr val="333333"/>
-                </a:solidFill>
-                <a:latin typeface="Calibri"/>
-              </a:rPr>
-              <a:t> y qué </a:t>
-            </a:r>
-            <a:r>
-              <a:rPr sz="1500" b="1" i="0">
-                <a:solidFill>
-                  <a:srgbClr val="333333"/>
-                </a:solidFill>
-                <a:latin typeface="Calibri"/>
-              </a:rPr>
-              <a:t>fuera</a:t>
-            </a:r>
-            <a:r>
-              <a:rPr sz="1500" b="0" i="0">
-                <a:solidFill>
-                  <a:srgbClr val="333333"/>
-                </a:solidFill>
-                <a:latin typeface="Calibri"/>
-              </a:rPr>
-              <a:t> de él, con la razón de cada exclusión importante.</a:t>
-            </a:r>
-          </a:p>
-        </p:txBody>
-      </p:sp>
-      <p:sp>
-        <p:nvSpPr>
-          <p:cNvPr id="10" name="Rounded Rectangle 9"/>
-          <p:cNvSpPr/>
-          <p:nvPr/>
-        </p:nvSpPr>
-        <p:spPr>
-          <a:xfrm>
-            <a:off x="457200" y="2148839"/>
-            <a:ext cx="11277295" cy="566928"/>
-          </a:xfrm>
-          <a:prstGeom prst="roundRect">
-            <a:avLst>
-              <a:gd name="adj" fmla="val 12000"/>
-            </a:avLst>
-          </a:prstGeom>
-          <a:solidFill>
-            <a:srgbClr val="F2F2F2"/>
-          </a:solidFill>
-          <a:ln>
-            <a:noFill/>
-          </a:ln>
-        </p:spPr>
-        <p:style>
-          <a:lnRef idx="1">
-            <a:schemeClr val="accent1"/>
-          </a:lnRef>
-          <a:fillRef idx="3">
-            <a:schemeClr val="accent1"/>
-          </a:fillRef>
-          <a:effectRef idx="2">
-            <a:schemeClr val="accent1"/>
-          </a:effectRef>
-          <a:fontRef idx="minor">
-            <a:schemeClr val="lt1"/>
-          </a:fontRef>
-        </p:style>
-        <p:txBody>
-          <a:bodyPr rtlCol="0" anchor="ctr"/>
-          <a:lstStyle/>
-          <a:p>
-            <a:pPr algn="ctr"/>
-          </a:p>
-        </p:txBody>
-      </p:sp>
-      <p:sp>
-        <p:nvSpPr>
-          <p:cNvPr id="11" name="Rectangle 10"/>
-          <p:cNvSpPr/>
-          <p:nvPr/>
-        </p:nvSpPr>
-        <p:spPr>
-          <a:xfrm>
-            <a:off x="640080" y="2295144"/>
-            <a:ext cx="274320" cy="274320"/>
-          </a:xfrm>
-          <a:prstGeom prst="rect">
-            <a:avLst/>
-          </a:prstGeom>
-          <a:solidFill>
-            <a:srgbClr val="FFFFFF"/>
-          </a:solidFill>
-          <a:ln>
-            <a:solidFill>
-              <a:srgbClr val="333333"/>
-            </a:solidFill>
-          </a:ln>
-        </p:spPr>
-        <p:style>
-          <a:lnRef idx="1">
-            <a:schemeClr val="accent1"/>
-          </a:lnRef>
-          <a:fillRef idx="3">
-            <a:schemeClr val="accent1"/>
-          </a:fillRef>
-          <a:effectRef idx="2">
-            <a:schemeClr val="accent1"/>
-          </a:effectRef>
-          <a:fontRef idx="minor">
-            <a:schemeClr val="lt1"/>
-          </a:fontRef>
-        </p:style>
-        <p:txBody>
-          <a:bodyPr rtlCol="0" anchor="ctr"/>
-          <a:lstStyle/>
-          <a:p>
-            <a:pPr algn="ctr"/>
-          </a:p>
-        </p:txBody>
-      </p:sp>
-      <p:sp>
-        <p:nvSpPr>
-          <p:cNvPr id="12" name="Rectangle 11"/>
-          <p:cNvSpPr/>
-          <p:nvPr/>
-        </p:nvSpPr>
-        <p:spPr>
-          <a:xfrm>
-            <a:off x="640080" y="2295144"/>
-            <a:ext cx="73152" cy="274320"/>
-          </a:xfrm>
-          <a:prstGeom prst="rect">
-            <a:avLst/>
-          </a:prstGeom>
-          <a:solidFill>
-            <a:srgbClr val="269CCB"/>
-          </a:solidFill>
-          <a:ln>
-            <a:noFill/>
-          </a:ln>
-        </p:spPr>
-        <p:style>
-          <a:lnRef idx="1">
-            <a:schemeClr val="accent1"/>
-          </a:lnRef>
-          <a:fillRef idx="3">
-            <a:schemeClr val="accent1"/>
-          </a:fillRef>
-          <a:effectRef idx="2">
-            <a:schemeClr val="accent1"/>
-          </a:effectRef>
-          <a:fontRef idx="minor">
-            <a:schemeClr val="lt1"/>
-          </a:fontRef>
-        </p:style>
-        <p:txBody>
-          <a:bodyPr rtlCol="0" anchor="ctr"/>
-          <a:lstStyle/>
-          <a:p>
-            <a:pPr algn="ctr"/>
-          </a:p>
-        </p:txBody>
-      </p:sp>
-      <p:sp>
-        <p:nvSpPr>
-          <p:cNvPr id="13" name="TextBox 12"/>
-          <p:cNvSpPr txBox="1"/>
-          <p:nvPr/>
-        </p:nvSpPr>
-        <p:spPr>
-          <a:xfrm>
-            <a:off x="1097280" y="2240279"/>
-            <a:ext cx="10362895" cy="402336"/>
-          </a:xfrm>
-          <a:prstGeom prst="rect">
-            <a:avLst/>
-          </a:prstGeom>
-          <a:noFill/>
-        </p:spPr>
-        <p:txBody>
-          <a:bodyPr wrap="square" anchor="ctr"/>
-          <a:lstStyle/>
-          <a:p>
-            <a:r>
-              <a:rPr sz="1500" b="1" i="0">
-                <a:solidFill>
-                  <a:srgbClr val="333333"/>
-                </a:solidFill>
-                <a:latin typeface="Calibri"/>
-              </a:rPr>
-              <a:t>ENTRADAS, PROCESO Y SALIDAS</a:t>
-            </a:r>
-            <a:r>
-              <a:rPr sz="1500" b="0" i="0">
-                <a:solidFill>
-                  <a:srgbClr val="333333"/>
-                </a:solidFill>
-                <a:latin typeface="Calibri"/>
-              </a:rPr>
-              <a:t> — Qué entra, qué se hace con eso y qué sale. Señalen </a:t>
-            </a:r>
-            <a:r>
-              <a:rPr sz="1500" b="1" i="0">
-                <a:solidFill>
-                  <a:srgbClr val="333333"/>
-                </a:solidFill>
-                <a:latin typeface="Calibri"/>
-              </a:rPr>
-              <a:t>dónde está el software</a:t>
-            </a:r>
-            <a:r>
-              <a:rPr sz="1500" b="0" i="0">
-                <a:solidFill>
-                  <a:srgbClr val="333333"/>
-                </a:solidFill>
-                <a:latin typeface="Calibri"/>
-              </a:rPr>
-              <a:t>, si hay.</a:t>
-            </a:r>
-          </a:p>
-        </p:txBody>
-      </p:sp>
-      <p:sp>
-        <p:nvSpPr>
-          <p:cNvPr id="14" name="Rounded Rectangle 13"/>
-          <p:cNvSpPr/>
-          <p:nvPr/>
-        </p:nvSpPr>
-        <p:spPr>
-          <a:xfrm>
-            <a:off x="457200" y="2825496"/>
-            <a:ext cx="11277295" cy="566928"/>
-          </a:xfrm>
-          <a:prstGeom prst="roundRect">
-            <a:avLst>
-              <a:gd name="adj" fmla="val 12000"/>
-            </a:avLst>
-          </a:prstGeom>
-          <a:solidFill>
-            <a:srgbClr val="F2F2F2"/>
-          </a:solidFill>
-          <a:ln>
-            <a:noFill/>
-          </a:ln>
-        </p:spPr>
-        <p:style>
-          <a:lnRef idx="1">
-            <a:schemeClr val="accent1"/>
-          </a:lnRef>
-          <a:fillRef idx="3">
-            <a:schemeClr val="accent1"/>
-          </a:fillRef>
-          <a:effectRef idx="2">
-            <a:schemeClr val="accent1"/>
-          </a:effectRef>
-          <a:fontRef idx="minor">
-            <a:schemeClr val="lt1"/>
-          </a:fontRef>
-        </p:style>
-        <p:txBody>
-          <a:bodyPr rtlCol="0" anchor="ctr"/>
-          <a:lstStyle/>
-          <a:p>
-            <a:pPr algn="ctr"/>
-          </a:p>
-        </p:txBody>
-      </p:sp>
-      <p:sp>
-        <p:nvSpPr>
-          <p:cNvPr id="15" name="Rectangle 14"/>
-          <p:cNvSpPr/>
-          <p:nvPr/>
-        </p:nvSpPr>
-        <p:spPr>
-          <a:xfrm>
-            <a:off x="640080" y="2971800"/>
-            <a:ext cx="274320" cy="274320"/>
-          </a:xfrm>
-          <a:prstGeom prst="rect">
-            <a:avLst/>
-          </a:prstGeom>
-          <a:solidFill>
-            <a:srgbClr val="FFFFFF"/>
-          </a:solidFill>
-          <a:ln>
-            <a:solidFill>
-              <a:srgbClr val="333333"/>
-            </a:solidFill>
-          </a:ln>
-        </p:spPr>
-        <p:style>
-          <a:lnRef idx="1">
-            <a:schemeClr val="accent1"/>
-          </a:lnRef>
-          <a:fillRef idx="3">
-            <a:schemeClr val="accent1"/>
-          </a:fillRef>
-          <a:effectRef idx="2">
-            <a:schemeClr val="accent1"/>
-          </a:effectRef>
-          <a:fontRef idx="minor">
-            <a:schemeClr val="lt1"/>
-          </a:fontRef>
-        </p:style>
-        <p:txBody>
-          <a:bodyPr rtlCol="0" anchor="ctr"/>
-          <a:lstStyle/>
-          <a:p>
-            <a:pPr algn="ctr"/>
-          </a:p>
-        </p:txBody>
-      </p:sp>
-      <p:sp>
-        <p:nvSpPr>
-          <p:cNvPr id="16" name="Rectangle 15"/>
-          <p:cNvSpPr/>
-          <p:nvPr/>
-        </p:nvSpPr>
-        <p:spPr>
-          <a:xfrm>
-            <a:off x="640080" y="2971800"/>
-            <a:ext cx="73152" cy="274320"/>
-          </a:xfrm>
-          <a:prstGeom prst="rect">
-            <a:avLst/>
-          </a:prstGeom>
-          <a:solidFill>
-            <a:srgbClr val="269CCB"/>
-          </a:solidFill>
-          <a:ln>
-            <a:noFill/>
-          </a:ln>
-        </p:spPr>
-        <p:style>
-          <a:lnRef idx="1">
-            <a:schemeClr val="accent1"/>
-          </a:lnRef>
-          <a:fillRef idx="3">
-            <a:schemeClr val="accent1"/>
-          </a:fillRef>
-          <a:effectRef idx="2">
-            <a:schemeClr val="accent1"/>
-          </a:effectRef>
-          <a:fontRef idx="minor">
-            <a:schemeClr val="lt1"/>
-          </a:fontRef>
-        </p:style>
-        <p:txBody>
-          <a:bodyPr rtlCol="0" anchor="ctr"/>
-          <a:lstStyle/>
-          <a:p>
-            <a:pPr algn="ctr"/>
-          </a:p>
-        </p:txBody>
-      </p:sp>
-      <p:sp>
-        <p:nvSpPr>
-          <p:cNvPr id="17" name="TextBox 16"/>
-          <p:cNvSpPr txBox="1"/>
-          <p:nvPr/>
-        </p:nvSpPr>
-        <p:spPr>
-          <a:xfrm>
-            <a:off x="1097280" y="2916936"/>
-            <a:ext cx="10362895" cy="402336"/>
-          </a:xfrm>
-          <a:prstGeom prst="rect">
-            <a:avLst/>
-          </a:prstGeom>
-          <a:noFill/>
-        </p:spPr>
-        <p:txBody>
-          <a:bodyPr wrap="square" anchor="ctr"/>
-          <a:lstStyle/>
-          <a:p>
-            <a:r>
-              <a:rPr sz="1500" b="1" i="0">
-                <a:solidFill>
-                  <a:srgbClr val="333333"/>
-                </a:solidFill>
-                <a:latin typeface="Calibri"/>
-              </a:rPr>
-              <a:t>LOS ACTORES</a:t>
-            </a:r>
-            <a:r>
-              <a:rPr sz="1500" b="0" i="0">
-                <a:solidFill>
-                  <a:srgbClr val="333333"/>
-                </a:solidFill>
-                <a:latin typeface="Calibri"/>
-              </a:rPr>
-              <a:t> — Todos los afectados, con su rol y qué le importa a cada uno. Incluyan </a:t>
-            </a:r>
-            <a:r>
-              <a:rPr sz="1500" b="1" i="0">
-                <a:solidFill>
-                  <a:srgbClr val="333333"/>
-                </a:solidFill>
-                <a:latin typeface="Calibri"/>
-              </a:rPr>
-              <a:t>al menos uno que no use el sistema pero sí sufra el resultado</a:t>
-            </a:r>
-            <a:r>
-              <a:rPr sz="1500" b="0" i="0">
+            <a:pPr>
+              <a:spcAft>
+                <a:spcPts val="800"/>
+              </a:spcAft>
+            </a:pPr>
+            <a:r>
+              <a:rPr sz="2000" b="0" i="0">
+                <a:solidFill>
+                  <a:srgbClr val="333333"/>
+                </a:solidFill>
+                <a:latin typeface="Calibri"/>
+              </a:rPr>
+              <a:t>–   Es exactamente el tipo de dato que un estudiante de primer semestre no puede distinguir, y por eso el entregable de hoy no es el texto de la IA: es </a:t>
+            </a:r>
+            <a:r>
+              <a:rPr sz="2000" b="1" i="0">
+                <a:solidFill>
+                  <a:srgbClr val="333333"/>
+                </a:solidFill>
+                <a:latin typeface="Calibri"/>
+              </a:rPr>
+              <a:t>la lista de lo que el equipo detectó y corrigió</a:t>
+            </a:r>
+            <a:r>
+              <a:rPr sz="2000" b="0" i="0">
                 <a:solidFill>
                   <a:srgbClr val="333333"/>
                 </a:solidFill>
@@ -7158,377 +6276,77 @@
               <a:t>.</a:t>
             </a:r>
           </a:p>
-        </p:txBody>
-      </p:sp>
-      <p:sp>
-        <p:nvSpPr>
-          <p:cNvPr id="18" name="Rounded Rectangle 17"/>
-          <p:cNvSpPr/>
-          <p:nvPr/>
-        </p:nvSpPr>
-        <p:spPr>
-          <a:xfrm>
-            <a:off x="457200" y="3502152"/>
-            <a:ext cx="11277295" cy="566928"/>
-          </a:xfrm>
-          <a:prstGeom prst="roundRect">
-            <a:avLst>
-              <a:gd name="adj" fmla="val 12000"/>
-            </a:avLst>
-          </a:prstGeom>
-          <a:solidFill>
-            <a:srgbClr val="F2F2F2"/>
-          </a:solidFill>
-          <a:ln>
-            <a:noFill/>
-          </a:ln>
-        </p:spPr>
-        <p:style>
-          <a:lnRef idx="1">
-            <a:schemeClr val="accent1"/>
-          </a:lnRef>
-          <a:fillRef idx="3">
-            <a:schemeClr val="accent1"/>
-          </a:fillRef>
-          <a:effectRef idx="2">
-            <a:schemeClr val="accent1"/>
-          </a:effectRef>
-          <a:fontRef idx="minor">
-            <a:schemeClr val="lt1"/>
-          </a:fontRef>
-        </p:style>
-        <p:txBody>
-          <a:bodyPr rtlCol="0" anchor="ctr"/>
-          <a:lstStyle/>
-          <a:p>
-            <a:pPr algn="ctr"/>
-          </a:p>
-        </p:txBody>
-      </p:sp>
-      <p:sp>
-        <p:nvSpPr>
-          <p:cNvPr id="19" name="Rectangle 18"/>
-          <p:cNvSpPr/>
-          <p:nvPr/>
-        </p:nvSpPr>
-        <p:spPr>
-          <a:xfrm>
-            <a:off x="640080" y="3648456"/>
-            <a:ext cx="274320" cy="274320"/>
-          </a:xfrm>
-          <a:prstGeom prst="rect">
-            <a:avLst/>
-          </a:prstGeom>
-          <a:solidFill>
-            <a:srgbClr val="FFFFFF"/>
-          </a:solidFill>
-          <a:ln>
-            <a:solidFill>
-              <a:srgbClr val="333333"/>
-            </a:solidFill>
-          </a:ln>
-        </p:spPr>
-        <p:style>
-          <a:lnRef idx="1">
-            <a:schemeClr val="accent1"/>
-          </a:lnRef>
-          <a:fillRef idx="3">
-            <a:schemeClr val="accent1"/>
-          </a:fillRef>
-          <a:effectRef idx="2">
-            <a:schemeClr val="accent1"/>
-          </a:effectRef>
-          <a:fontRef idx="minor">
-            <a:schemeClr val="lt1"/>
-          </a:fontRef>
-        </p:style>
-        <p:txBody>
-          <a:bodyPr rtlCol="0" anchor="ctr"/>
-          <a:lstStyle/>
-          <a:p>
-            <a:pPr algn="ctr"/>
-          </a:p>
-        </p:txBody>
-      </p:sp>
-      <p:sp>
-        <p:nvSpPr>
-          <p:cNvPr id="20" name="Rectangle 19"/>
-          <p:cNvSpPr/>
-          <p:nvPr/>
-        </p:nvSpPr>
-        <p:spPr>
-          <a:xfrm>
-            <a:off x="640080" y="3648456"/>
-            <a:ext cx="73152" cy="274320"/>
-          </a:xfrm>
-          <a:prstGeom prst="rect">
-            <a:avLst/>
-          </a:prstGeom>
-          <a:solidFill>
-            <a:srgbClr val="269CCB"/>
-          </a:solidFill>
-          <a:ln>
-            <a:noFill/>
-          </a:ln>
-        </p:spPr>
-        <p:style>
-          <a:lnRef idx="1">
-            <a:schemeClr val="accent1"/>
-          </a:lnRef>
-          <a:fillRef idx="3">
-            <a:schemeClr val="accent1"/>
-          </a:fillRef>
-          <a:effectRef idx="2">
-            <a:schemeClr val="accent1"/>
-          </a:effectRef>
-          <a:fontRef idx="minor">
-            <a:schemeClr val="lt1"/>
-          </a:fontRef>
-        </p:style>
-        <p:txBody>
-          <a:bodyPr rtlCol="0" anchor="ctr"/>
-          <a:lstStyle/>
-          <a:p>
-            <a:pPr algn="ctr"/>
-          </a:p>
-        </p:txBody>
-      </p:sp>
-      <p:sp>
-        <p:nvSpPr>
-          <p:cNvPr id="21" name="TextBox 20"/>
-          <p:cNvSpPr txBox="1"/>
-          <p:nvPr/>
-        </p:nvSpPr>
-        <p:spPr>
-          <a:xfrm>
-            <a:off x="1097280" y="3593592"/>
-            <a:ext cx="10362895" cy="402336"/>
-          </a:xfrm>
-          <a:prstGeom prst="rect">
-            <a:avLst/>
-          </a:prstGeom>
-          <a:noFill/>
-        </p:spPr>
-        <p:txBody>
-          <a:bodyPr wrap="square" anchor="ctr"/>
-          <a:lstStyle/>
-          <a:p>
-            <a:r>
-              <a:rPr sz="1500" b="1" i="0">
-                <a:solidFill>
-                  <a:srgbClr val="333333"/>
-                </a:solidFill>
-                <a:latin typeface="Calibri"/>
-              </a:rPr>
-              <a:t>LA RETROALIMENTACIÓN</a:t>
-            </a:r>
-            <a:r>
-              <a:rPr sz="1500" b="0" i="0">
-                <a:solidFill>
-                  <a:srgbClr val="333333"/>
-                </a:solidFill>
-                <a:latin typeface="Calibri"/>
-              </a:rPr>
-              <a:t> — ¿Cómo se entera este sistema de que algo salió mal? Si no se entera, escríbanlo: es un hallazgo, no un error suyo.</a:t>
-            </a:r>
-          </a:p>
-        </p:txBody>
-      </p:sp>
-      <p:sp>
-        <p:nvSpPr>
-          <p:cNvPr id="22" name="Rounded Rectangle 21"/>
-          <p:cNvSpPr/>
-          <p:nvPr/>
-        </p:nvSpPr>
-        <p:spPr>
-          <a:xfrm>
-            <a:off x="457200" y="4178808"/>
-            <a:ext cx="11277295" cy="566928"/>
-          </a:xfrm>
-          <a:prstGeom prst="roundRect">
-            <a:avLst>
-              <a:gd name="adj" fmla="val 12000"/>
-            </a:avLst>
-          </a:prstGeom>
-          <a:solidFill>
-            <a:srgbClr val="F2F2F2"/>
-          </a:solidFill>
-          <a:ln>
-            <a:noFill/>
-          </a:ln>
-        </p:spPr>
-        <p:style>
-          <a:lnRef idx="1">
-            <a:schemeClr val="accent1"/>
-          </a:lnRef>
-          <a:fillRef idx="3">
-            <a:schemeClr val="accent1"/>
-          </a:fillRef>
-          <a:effectRef idx="2">
-            <a:schemeClr val="accent1"/>
-          </a:effectRef>
-          <a:fontRef idx="minor">
-            <a:schemeClr val="lt1"/>
-          </a:fontRef>
-        </p:style>
-        <p:txBody>
-          <a:bodyPr rtlCol="0" anchor="ctr"/>
-          <a:lstStyle/>
-          <a:p>
-            <a:pPr algn="ctr"/>
-          </a:p>
-        </p:txBody>
-      </p:sp>
-      <p:sp>
-        <p:nvSpPr>
-          <p:cNvPr id="23" name="Rectangle 22"/>
-          <p:cNvSpPr/>
-          <p:nvPr/>
-        </p:nvSpPr>
-        <p:spPr>
-          <a:xfrm>
-            <a:off x="640080" y="4325112"/>
-            <a:ext cx="274320" cy="274320"/>
-          </a:xfrm>
-          <a:prstGeom prst="rect">
-            <a:avLst/>
-          </a:prstGeom>
-          <a:solidFill>
-            <a:srgbClr val="FFFFFF"/>
-          </a:solidFill>
-          <a:ln>
-            <a:solidFill>
-              <a:srgbClr val="333333"/>
-            </a:solidFill>
-          </a:ln>
-        </p:spPr>
-        <p:style>
-          <a:lnRef idx="1">
-            <a:schemeClr val="accent1"/>
-          </a:lnRef>
-          <a:fillRef idx="3">
-            <a:schemeClr val="accent1"/>
-          </a:fillRef>
-          <a:effectRef idx="2">
-            <a:schemeClr val="accent1"/>
-          </a:effectRef>
-          <a:fontRef idx="minor">
-            <a:schemeClr val="lt1"/>
-          </a:fontRef>
-        </p:style>
-        <p:txBody>
-          <a:bodyPr rtlCol="0" anchor="ctr"/>
-          <a:lstStyle/>
-          <a:p>
-            <a:pPr algn="ctr"/>
-          </a:p>
-        </p:txBody>
-      </p:sp>
-      <p:sp>
-        <p:nvSpPr>
-          <p:cNvPr id="24" name="Rectangle 23"/>
-          <p:cNvSpPr/>
-          <p:nvPr/>
-        </p:nvSpPr>
-        <p:spPr>
-          <a:xfrm>
-            <a:off x="640080" y="4325112"/>
-            <a:ext cx="73152" cy="274320"/>
-          </a:xfrm>
-          <a:prstGeom prst="rect">
-            <a:avLst/>
-          </a:prstGeom>
-          <a:solidFill>
-            <a:srgbClr val="269CCB"/>
-          </a:solidFill>
-          <a:ln>
-            <a:noFill/>
-          </a:ln>
-        </p:spPr>
-        <p:style>
-          <a:lnRef idx="1">
-            <a:schemeClr val="accent1"/>
-          </a:lnRef>
-          <a:fillRef idx="3">
-            <a:schemeClr val="accent1"/>
-          </a:fillRef>
-          <a:effectRef idx="2">
-            <a:schemeClr val="accent1"/>
-          </a:effectRef>
-          <a:fontRef idx="minor">
-            <a:schemeClr val="lt1"/>
-          </a:fontRef>
-        </p:style>
-        <p:txBody>
-          <a:bodyPr rtlCol="0" anchor="ctr"/>
-          <a:lstStyle/>
-          <a:p>
-            <a:pPr algn="ctr"/>
-          </a:p>
-        </p:txBody>
-      </p:sp>
-      <p:sp>
-        <p:nvSpPr>
-          <p:cNvPr id="25" name="TextBox 24"/>
-          <p:cNvSpPr txBox="1"/>
-          <p:nvPr/>
-        </p:nvSpPr>
-        <p:spPr>
-          <a:xfrm>
-            <a:off x="1097280" y="4270248"/>
-            <a:ext cx="10362895" cy="402336"/>
-          </a:xfrm>
-          <a:prstGeom prst="rect">
-            <a:avLst/>
-          </a:prstGeom>
-          <a:noFill/>
-        </p:spPr>
-        <p:txBody>
-          <a:bodyPr wrap="square" anchor="ctr"/>
-          <a:lstStyle/>
-          <a:p>
-            <a:r>
-              <a:rPr sz="1500" b="1" i="0">
-                <a:solidFill>
-                  <a:srgbClr val="333333"/>
-                </a:solidFill>
-                <a:latin typeface="Calibri"/>
-              </a:rPr>
-              <a:t>LA IA: PROMPT Y CORRECCIONES</a:t>
-            </a:r>
-            <a:r>
-              <a:rPr sz="1500" b="0" i="0">
-                <a:solidFill>
-                  <a:srgbClr val="333333"/>
-                </a:solidFill>
-                <a:latin typeface="Calibri"/>
-              </a:rPr>
-              <a:t> — El prompt exacto que usaron, y una lista de </a:t>
-            </a:r>
-            <a:r>
-              <a:rPr sz="1500" b="1" i="0">
-                <a:solidFill>
-                  <a:srgbClr val="333333"/>
-                </a:solidFill>
-                <a:latin typeface="Calibri"/>
-              </a:rPr>
-              <a:t>al menos tres cosas que la IA escribió mal</a:t>
-            </a:r>
-            <a:r>
-              <a:rPr sz="1500" b="0" i="0">
-                <a:solidFill>
-                  <a:srgbClr val="333333"/>
-                </a:solidFill>
-                <a:latin typeface="Calibri"/>
-              </a:rPr>
-              <a:t> y cómo las corrigieron.</a:t>
-            </a:r>
-          </a:p>
-        </p:txBody>
-      </p:sp>
-      <p:sp>
-        <p:nvSpPr>
-          <p:cNvPr id="26" name="TextBox 25"/>
+          <a:p>
+            <a:pPr>
+              <a:spcAft>
+                <a:spcPts val="800"/>
+              </a:spcAft>
+            </a:pPr>
+            <a:r>
+              <a:rPr sz="2000" b="0" i="0">
+                <a:solidFill>
+                  <a:srgbClr val="333333"/>
+                </a:solidFill>
+                <a:latin typeface="Calibri"/>
+              </a:rPr>
+              <a:t>–   Operativamente: el equipo escribe su prompt, pega la respuesta, y luego marca en el documento cada cosa que cambió y por qué.</a:t>
+            </a:r>
+          </a:p>
+          <a:p>
+            <a:pPr>
+              <a:spcAft>
+                <a:spcPts val="800"/>
+              </a:spcAft>
+            </a:pPr>
+            <a:r>
+              <a:rPr sz="2000" b="0" i="0">
+                <a:solidFill>
+                  <a:srgbClr val="333333"/>
+                </a:solidFill>
+                <a:latin typeface="Calibri"/>
+              </a:rPr>
+              <a:t>–   Y hay una consecuencia útil que conviene decirles: </a:t>
+            </a:r>
+            <a:r>
+              <a:rPr sz="2000" b="1" i="0">
+                <a:solidFill>
+                  <a:srgbClr val="333333"/>
+                </a:solidFill>
+                <a:latin typeface="Calibri"/>
+              </a:rPr>
+              <a:t>la IA solo se puede verificar si uno sabe del tema</a:t>
+            </a:r>
+            <a:r>
+              <a:rPr sz="2000" b="0" i="0">
+                <a:solidFill>
+                  <a:srgbClr val="333333"/>
+                </a:solidFill>
+                <a:latin typeface="Calibri"/>
+              </a:rPr>
+              <a:t>, así que la herramienta no reemplaza aprender el contenido, lo hace más necesario.</a:t>
+            </a:r>
+          </a:p>
+          <a:p>
+            <a:pPr>
+              <a:spcAft>
+                <a:spcPts val="800"/>
+              </a:spcAft>
+            </a:pPr>
+            <a:r>
+              <a:rPr sz="2000" b="0" i="0">
+                <a:solidFill>
+                  <a:srgbClr val="333333"/>
+                </a:solidFill>
+                <a:latin typeface="Calibri"/>
+              </a:rPr>
+              <a:t>–   El método de cinco pasos de la otra diapositiva es el orden de trabajo del taller, y el paso 4 —seguir un caso real de la entrada a la salida— es el que produce los hallazgos.</a:t>
+            </a:r>
+          </a:p>
+        </p:txBody>
+      </p:sp>
+      <p:sp>
+        <p:nvSpPr>
+          <p:cNvPr id="6" name="TextBox 5"/>
           <p:cNvSpPr txBox="1"/>
           <p:nvPr/>
         </p:nvSpPr>
@@ -8588,7 +7406,7 @@
                 </a:solidFill>
                 <a:latin typeface="Calibri"/>
               </a:rPr>
-              <a:t>Cómo se expone en 3 minutos</a:t>
+              <a:t>Taller de hoy: Anatomía del sistema</a:t>
             </a:r>
           </a:p>
         </p:txBody>
@@ -8622,7 +7440,7 @@
                 </a:solidFill>
                 <a:latin typeface="Calibri"/>
               </a:rPr>
-              <a:t>Habla el vocero con la pantalla ya compartida · cronómetro en pantalla · se corta al llegar a cero</a:t>
+              <a:t>17 min en equipos · cada equipo trabaja su propio problema de la sesión 1 · ficha del sistema + prompt + correcciones</a:t>
             </a:r>
           </a:p>
         </p:txBody>
@@ -8635,8 +7453,8 @@
         </p:nvSpPr>
         <p:spPr>
           <a:xfrm>
-            <a:off x="457200" y="1659636"/>
-            <a:ext cx="11277295" cy="1051560"/>
+            <a:off x="457200" y="1472184"/>
+            <a:ext cx="11277295" cy="566928"/>
           </a:xfrm>
           <a:prstGeom prst="roundRect">
             <a:avLst>
@@ -8674,25 +7492,25 @@
       </p:sp>
       <p:sp>
         <p:nvSpPr>
-          <p:cNvPr id="7" name="Rounded Rectangle 6"/>
+          <p:cNvPr id="7" name="Rectangle 6"/>
           <p:cNvSpPr/>
           <p:nvPr/>
         </p:nvSpPr>
         <p:spPr>
           <a:xfrm>
-            <a:off x="594360" y="1965960"/>
-            <a:ext cx="438912" cy="438912"/>
-          </a:xfrm>
-          <a:prstGeom prst="roundRect">
-            <a:avLst>
-              <a:gd name="adj" fmla="val 12000"/>
-            </a:avLst>
+            <a:off x="640080" y="1618487"/>
+            <a:ext cx="274320" cy="274320"/>
+          </a:xfrm>
+          <a:prstGeom prst="rect">
+            <a:avLst/>
           </a:prstGeom>
           <a:solidFill>
-            <a:srgbClr val="095292"/>
+            <a:srgbClr val="FFFFFF"/>
           </a:solidFill>
           <a:ln>
-            <a:noFill/>
+            <a:solidFill>
+              <a:srgbClr val="333333"/>
+            </a:solidFill>
           </a:ln>
         </p:spPr>
         <p:style>
@@ -8719,103 +7537,20 @@
       </p:sp>
       <p:sp>
         <p:nvSpPr>
-          <p:cNvPr id="8" name="TextBox 7"/>
-          <p:cNvSpPr txBox="1"/>
-          <p:nvPr/>
-        </p:nvSpPr>
-        <p:spPr>
-          <a:xfrm>
-            <a:off x="594360" y="1965960"/>
-            <a:ext cx="438912" cy="438912"/>
-          </a:xfrm>
-          <a:prstGeom prst="rect">
-            <a:avLst/>
-          </a:prstGeom>
-          <a:noFill/>
-        </p:spPr>
-        <p:txBody>
-          <a:bodyPr wrap="square" anchor="ctr"/>
-          <a:lstStyle/>
-          <a:p>
-            <a:pPr algn="ctr"/>
-            <a:r>
-              <a:rPr sz="1600" b="1" i="0">
-                <a:solidFill>
-                  <a:srgbClr val="FFFFFF"/>
-                </a:solidFill>
-                <a:latin typeface="Calibri"/>
-              </a:rPr>
-              <a:t>1</a:t>
-            </a:r>
-          </a:p>
-        </p:txBody>
-      </p:sp>
-      <p:sp>
-        <p:nvSpPr>
-          <p:cNvPr id="9" name="TextBox 8"/>
-          <p:cNvSpPr txBox="1"/>
-          <p:nvPr/>
-        </p:nvSpPr>
-        <p:spPr>
-          <a:xfrm>
-            <a:off x="1188720" y="1751076"/>
-            <a:ext cx="10271455" cy="886968"/>
-          </a:xfrm>
-          <a:prstGeom prst="rect">
-            <a:avLst/>
-          </a:prstGeom>
-          <a:noFill/>
-        </p:spPr>
-        <p:txBody>
-          <a:bodyPr wrap="square" anchor="ctr"/>
-          <a:lstStyle/>
-          <a:p>
-            <a:r>
-              <a:rPr sz="1500" b="1" i="0">
-                <a:solidFill>
-                  <a:srgbClr val="095292"/>
-                </a:solidFill>
-                <a:latin typeface="Calibri"/>
-              </a:rPr>
-              <a:t>30 s · El sistema y su propósito</a:t>
-            </a:r>
-          </a:p>
-          <a:p>
-            <a:pPr>
-              <a:spcBef>
-                <a:spcPts val="200"/>
-              </a:spcBef>
-            </a:pPr>
-            <a:r>
-              <a:rPr sz="1300" b="0" i="0">
-                <a:solidFill>
-                  <a:srgbClr val="333333"/>
-                </a:solidFill>
-                <a:latin typeface="Calibri"/>
-              </a:rPr>
-              <a:t>Qué sistema es y para qué existe, en una frase.</a:t>
-            </a:r>
-          </a:p>
-        </p:txBody>
-      </p:sp>
-      <p:sp>
-        <p:nvSpPr>
-          <p:cNvPr id="10" name="Rounded Rectangle 9"/>
+          <p:cNvPr id="8" name="Rectangle 7"/>
           <p:cNvSpPr/>
           <p:nvPr/>
         </p:nvSpPr>
         <p:spPr>
           <a:xfrm>
-            <a:off x="457200" y="2802636"/>
-            <a:ext cx="11277295" cy="1051560"/>
-          </a:xfrm>
-          <a:prstGeom prst="roundRect">
-            <a:avLst>
-              <a:gd name="adj" fmla="val 12000"/>
-            </a:avLst>
+            <a:off x="640080" y="1618487"/>
+            <a:ext cx="73152" cy="274320"/>
+          </a:xfrm>
+          <a:prstGeom prst="rect">
+            <a:avLst/>
           </a:prstGeom>
           <a:solidFill>
-            <a:srgbClr val="E8F4FA"/>
+            <a:srgbClr val="269CCB"/>
           </a:solidFill>
           <a:ln>
             <a:noFill/>
@@ -8845,140 +7580,91 @@
       </p:sp>
       <p:sp>
         <p:nvSpPr>
-          <p:cNvPr id="11" name="Rounded Rectangle 10"/>
+          <p:cNvPr id="9" name="TextBox 8"/>
+          <p:cNvSpPr txBox="1"/>
+          <p:nvPr/>
+        </p:nvSpPr>
+        <p:spPr>
+          <a:xfrm>
+            <a:off x="1097280" y="1563624"/>
+            <a:ext cx="10362895" cy="402336"/>
+          </a:xfrm>
+          <a:prstGeom prst="rect">
+            <a:avLst/>
+          </a:prstGeom>
+          <a:noFill/>
+        </p:spPr>
+        <p:txBody>
+          <a:bodyPr wrap="square" anchor="ctr"/>
+          <a:lstStyle/>
+          <a:p>
+            <a:r>
+              <a:rPr sz="1500" b="1" i="0">
+                <a:solidFill>
+                  <a:srgbClr val="333333"/>
+                </a:solidFill>
+                <a:latin typeface="Calibri"/>
+              </a:rPr>
+              <a:t>PROPÓSITO Y FRONTERA</a:t>
+            </a:r>
+            <a:r>
+              <a:rPr sz="1500" b="0" i="0">
+                <a:solidFill>
+                  <a:srgbClr val="333333"/>
+                </a:solidFill>
+                <a:latin typeface="Calibri"/>
+              </a:rPr>
+              <a:t> — Para qué existe el sistema, en una frase. Y qué queda </a:t>
+            </a:r>
+            <a:r>
+              <a:rPr sz="1500" b="1" i="0">
+                <a:solidFill>
+                  <a:srgbClr val="333333"/>
+                </a:solidFill>
+                <a:latin typeface="Calibri"/>
+              </a:rPr>
+              <a:t>dentro</a:t>
+            </a:r>
+            <a:r>
+              <a:rPr sz="1500" b="0" i="0">
+                <a:solidFill>
+                  <a:srgbClr val="333333"/>
+                </a:solidFill>
+                <a:latin typeface="Calibri"/>
+              </a:rPr>
+              <a:t> y qué </a:t>
+            </a:r>
+            <a:r>
+              <a:rPr sz="1500" b="1" i="0">
+                <a:solidFill>
+                  <a:srgbClr val="333333"/>
+                </a:solidFill>
+                <a:latin typeface="Calibri"/>
+              </a:rPr>
+              <a:t>fuera</a:t>
+            </a:r>
+            <a:r>
+              <a:rPr sz="1500" b="0" i="0">
+                <a:solidFill>
+                  <a:srgbClr val="333333"/>
+                </a:solidFill>
+                <a:latin typeface="Calibri"/>
+              </a:rPr>
+              <a:t> de él, con la razón de cada exclusión importante.</a:t>
+            </a:r>
+          </a:p>
+        </p:txBody>
+      </p:sp>
+      <p:sp>
+        <p:nvSpPr>
+          <p:cNvPr id="10" name="Rounded Rectangle 9"/>
           <p:cNvSpPr/>
           <p:nvPr/>
         </p:nvSpPr>
         <p:spPr>
           <a:xfrm>
-            <a:off x="594360" y="3108960"/>
-            <a:ext cx="438912" cy="438912"/>
-          </a:xfrm>
-          <a:prstGeom prst="roundRect">
-            <a:avLst>
-              <a:gd name="adj" fmla="val 12000"/>
-            </a:avLst>
-          </a:prstGeom>
-          <a:solidFill>
-            <a:srgbClr val="095292"/>
-          </a:solidFill>
-          <a:ln>
-            <a:noFill/>
-          </a:ln>
-        </p:spPr>
-        <p:style>
-          <a:lnRef idx="1">
-            <a:schemeClr val="accent1"/>
-          </a:lnRef>
-          <a:fillRef idx="3">
-            <a:schemeClr val="accent1"/>
-          </a:fillRef>
-          <a:effectRef idx="2">
-            <a:schemeClr val="accent1"/>
-          </a:effectRef>
-          <a:fontRef idx="minor">
-            <a:schemeClr val="lt1"/>
-          </a:fontRef>
-        </p:style>
-        <p:txBody>
-          <a:bodyPr rtlCol="0" anchor="ctr"/>
-          <a:lstStyle/>
-          <a:p>
-            <a:pPr algn="ctr"/>
-          </a:p>
-        </p:txBody>
-      </p:sp>
-      <p:sp>
-        <p:nvSpPr>
-          <p:cNvPr id="12" name="TextBox 11"/>
-          <p:cNvSpPr txBox="1"/>
-          <p:nvPr/>
-        </p:nvSpPr>
-        <p:spPr>
-          <a:xfrm>
-            <a:off x="594360" y="3108960"/>
-            <a:ext cx="438912" cy="438912"/>
-          </a:xfrm>
-          <a:prstGeom prst="rect">
-            <a:avLst/>
-          </a:prstGeom>
-          <a:noFill/>
-        </p:spPr>
-        <p:txBody>
-          <a:bodyPr wrap="square" anchor="ctr"/>
-          <a:lstStyle/>
-          <a:p>
-            <a:pPr algn="ctr"/>
-            <a:r>
-              <a:rPr sz="1600" b="1" i="0">
-                <a:solidFill>
-                  <a:srgbClr val="FFFFFF"/>
-                </a:solidFill>
-                <a:latin typeface="Calibri"/>
-              </a:rPr>
-              <a:t>2</a:t>
-            </a:r>
-          </a:p>
-        </p:txBody>
-      </p:sp>
-      <p:sp>
-        <p:nvSpPr>
-          <p:cNvPr id="13" name="TextBox 12"/>
-          <p:cNvSpPr txBox="1"/>
-          <p:nvPr/>
-        </p:nvSpPr>
-        <p:spPr>
-          <a:xfrm>
-            <a:off x="1188720" y="2894076"/>
-            <a:ext cx="10271455" cy="886968"/>
-          </a:xfrm>
-          <a:prstGeom prst="rect">
-            <a:avLst/>
-          </a:prstGeom>
-          <a:noFill/>
-        </p:spPr>
-        <p:txBody>
-          <a:bodyPr wrap="square" anchor="ctr"/>
-          <a:lstStyle/>
-          <a:p>
-            <a:r>
-              <a:rPr sz="1500" b="1" i="0">
-                <a:solidFill>
-                  <a:srgbClr val="095292"/>
-                </a:solidFill>
-                <a:latin typeface="Calibri"/>
-              </a:rPr>
-              <a:t>45 s · La frontera</a:t>
-            </a:r>
-          </a:p>
-          <a:p>
-            <a:pPr>
-              <a:spcBef>
-                <a:spcPts val="200"/>
-              </a:spcBef>
-            </a:pPr>
-            <a:r>
-              <a:rPr sz="1300" b="0" i="0">
-                <a:solidFill>
-                  <a:srgbClr val="333333"/>
-                </a:solidFill>
-                <a:latin typeface="Calibri"/>
-              </a:rPr>
-              <a:t>Qué dejaron fuera y por qué. Es la decisión que se discute.</a:t>
-            </a:r>
-          </a:p>
-        </p:txBody>
-      </p:sp>
-      <p:sp>
-        <p:nvSpPr>
-          <p:cNvPr id="14" name="Rounded Rectangle 13"/>
-          <p:cNvSpPr/>
-          <p:nvPr/>
-        </p:nvSpPr>
-        <p:spPr>
-          <a:xfrm>
-            <a:off x="457200" y="3945636"/>
-            <a:ext cx="11277295" cy="1051560"/>
+            <a:off x="457200" y="2148839"/>
+            <a:ext cx="11277295" cy="566928"/>
           </a:xfrm>
           <a:prstGeom prst="roundRect">
             <a:avLst>
@@ -9016,25 +7702,25 @@
       </p:sp>
       <p:sp>
         <p:nvSpPr>
-          <p:cNvPr id="15" name="Rounded Rectangle 14"/>
+          <p:cNvPr id="11" name="Rectangle 10"/>
           <p:cNvSpPr/>
           <p:nvPr/>
         </p:nvSpPr>
         <p:spPr>
           <a:xfrm>
-            <a:off x="594360" y="4251960"/>
-            <a:ext cx="438912" cy="438912"/>
-          </a:xfrm>
-          <a:prstGeom prst="roundRect">
-            <a:avLst>
-              <a:gd name="adj" fmla="val 12000"/>
-            </a:avLst>
+            <a:off x="640080" y="2295144"/>
+            <a:ext cx="274320" cy="274320"/>
+          </a:xfrm>
+          <a:prstGeom prst="rect">
+            <a:avLst/>
           </a:prstGeom>
           <a:solidFill>
-            <a:srgbClr val="095292"/>
+            <a:srgbClr val="FFFFFF"/>
           </a:solidFill>
           <a:ln>
-            <a:noFill/>
+            <a:solidFill>
+              <a:srgbClr val="333333"/>
+            </a:solidFill>
           </a:ln>
         </p:spPr>
         <p:style>
@@ -9061,103 +7747,20 @@
       </p:sp>
       <p:sp>
         <p:nvSpPr>
-          <p:cNvPr id="16" name="TextBox 15"/>
-          <p:cNvSpPr txBox="1"/>
-          <p:nvPr/>
-        </p:nvSpPr>
-        <p:spPr>
-          <a:xfrm>
-            <a:off x="594360" y="4251960"/>
-            <a:ext cx="438912" cy="438912"/>
-          </a:xfrm>
-          <a:prstGeom prst="rect">
-            <a:avLst/>
-          </a:prstGeom>
-          <a:noFill/>
-        </p:spPr>
-        <p:txBody>
-          <a:bodyPr wrap="square" anchor="ctr"/>
-          <a:lstStyle/>
-          <a:p>
-            <a:pPr algn="ctr"/>
-            <a:r>
-              <a:rPr sz="1600" b="1" i="0">
-                <a:solidFill>
-                  <a:srgbClr val="FFFFFF"/>
-                </a:solidFill>
-                <a:latin typeface="Calibri"/>
-              </a:rPr>
-              <a:t>3</a:t>
-            </a:r>
-          </a:p>
-        </p:txBody>
-      </p:sp>
-      <p:sp>
-        <p:nvSpPr>
-          <p:cNvPr id="17" name="TextBox 16"/>
-          <p:cNvSpPr txBox="1"/>
-          <p:nvPr/>
-        </p:nvSpPr>
-        <p:spPr>
-          <a:xfrm>
-            <a:off x="1188720" y="4037076"/>
-            <a:ext cx="10271455" cy="886968"/>
-          </a:xfrm>
-          <a:prstGeom prst="rect">
-            <a:avLst/>
-          </a:prstGeom>
-          <a:noFill/>
-        </p:spPr>
-        <p:txBody>
-          <a:bodyPr wrap="square" anchor="ctr"/>
-          <a:lstStyle/>
-          <a:p>
-            <a:r>
-              <a:rPr sz="1500" b="1" i="0">
-                <a:solidFill>
-                  <a:srgbClr val="095292"/>
-                </a:solidFill>
-                <a:latin typeface="Calibri"/>
-              </a:rPr>
-              <a:t>45 s · El actor olvidado</a:t>
-            </a:r>
-          </a:p>
-          <a:p>
-            <a:pPr>
-              <a:spcBef>
-                <a:spcPts val="200"/>
-              </a:spcBef>
-            </a:pPr>
-            <a:r>
-              <a:rPr sz="1300" b="0" i="0">
-                <a:solidFill>
-                  <a:srgbClr val="333333"/>
-                </a:solidFill>
-                <a:latin typeface="Calibri"/>
-              </a:rPr>
-              <a:t>El afectado que no usa el sistema. Quién es y qué pierde.</a:t>
-            </a:r>
-          </a:p>
-        </p:txBody>
-      </p:sp>
-      <p:sp>
-        <p:nvSpPr>
-          <p:cNvPr id="18" name="Rounded Rectangle 17"/>
+          <p:cNvPr id="12" name="Rectangle 11"/>
           <p:cNvSpPr/>
           <p:nvPr/>
         </p:nvSpPr>
         <p:spPr>
           <a:xfrm>
-            <a:off x="457200" y="5088636"/>
-            <a:ext cx="11277295" cy="1051560"/>
-          </a:xfrm>
-          <a:prstGeom prst="roundRect">
-            <a:avLst>
-              <a:gd name="adj" fmla="val 12000"/>
-            </a:avLst>
+            <a:off x="640080" y="2295144"/>
+            <a:ext cx="73152" cy="274320"/>
+          </a:xfrm>
+          <a:prstGeom prst="rect">
+            <a:avLst/>
           </a:prstGeom>
           <a:solidFill>
-            <a:srgbClr val="E8F4FA"/>
+            <a:srgbClr val="269CCB"/>
           </a:solidFill>
           <a:ln>
             <a:noFill/>
@@ -9187,14 +7790,73 @@
       </p:sp>
       <p:sp>
         <p:nvSpPr>
-          <p:cNvPr id="19" name="Rounded Rectangle 18"/>
+          <p:cNvPr id="13" name="TextBox 12"/>
+          <p:cNvSpPr txBox="1"/>
+          <p:nvPr/>
+        </p:nvSpPr>
+        <p:spPr>
+          <a:xfrm>
+            <a:off x="1097280" y="2240279"/>
+            <a:ext cx="10362895" cy="402336"/>
+          </a:xfrm>
+          <a:prstGeom prst="rect">
+            <a:avLst/>
+          </a:prstGeom>
+          <a:noFill/>
+        </p:spPr>
+        <p:txBody>
+          <a:bodyPr wrap="square" anchor="ctr"/>
+          <a:lstStyle/>
+          <a:p>
+            <a:r>
+              <a:rPr sz="1500" b="1" i="0">
+                <a:solidFill>
+                  <a:srgbClr val="333333"/>
+                </a:solidFill>
+                <a:latin typeface="Calibri"/>
+              </a:rPr>
+              <a:t>ENTRADAS, PROCESO Y SALIDAS</a:t>
+            </a:r>
+            <a:r>
+              <a:rPr sz="1500" b="0" i="0">
+                <a:solidFill>
+                  <a:srgbClr val="333333"/>
+                </a:solidFill>
+                <a:latin typeface="Calibri"/>
+              </a:rPr>
+              <a:t> — Qué entra, qué se hace con eso y qué sale. Señalen </a:t>
+            </a:r>
+            <a:r>
+              <a:rPr sz="1500" b="1" i="0">
+                <a:solidFill>
+                  <a:srgbClr val="333333"/>
+                </a:solidFill>
+                <a:latin typeface="Calibri"/>
+              </a:rPr>
+              <a:t>dónde está el software</a:t>
+            </a:r>
+            <a:r>
+              <a:rPr sz="1500" b="0" i="0">
+                <a:solidFill>
+                  <a:srgbClr val="333333"/>
+                </a:solidFill>
+                <a:latin typeface="Calibri"/>
+              </a:rPr>
+              <a:t>, si hay.</a:t>
+            </a:r>
+          </a:p>
+        </p:txBody>
+      </p:sp>
+      <p:sp>
+        <p:nvSpPr>
+          <p:cNvPr id="14" name="Rounded Rectangle 13"/>
           <p:cNvSpPr/>
           <p:nvPr/>
         </p:nvSpPr>
         <p:spPr>
           <a:xfrm>
-            <a:off x="594360" y="5394960"/>
-            <a:ext cx="438912" cy="438912"/>
+            <a:off x="457200" y="2825496"/>
+            <a:ext cx="11277295" cy="566928"/>
           </a:xfrm>
           <a:prstGeom prst="roundRect">
             <a:avLst>
@@ -9202,7 +7864,7 @@
             </a:avLst>
           </a:prstGeom>
           <a:solidFill>
-            <a:srgbClr val="095292"/>
+            <a:srgbClr val="F2F2F2"/>
           </a:solidFill>
           <a:ln>
             <a:noFill/>
@@ -9232,14 +7894,102 @@
       </p:sp>
       <p:sp>
         <p:nvSpPr>
-          <p:cNvPr id="20" name="TextBox 19"/>
+          <p:cNvPr id="15" name="Rectangle 14"/>
+          <p:cNvSpPr/>
+          <p:nvPr/>
+        </p:nvSpPr>
+        <p:spPr>
+          <a:xfrm>
+            <a:off x="640080" y="2971800"/>
+            <a:ext cx="274320" cy="274320"/>
+          </a:xfrm>
+          <a:prstGeom prst="rect">
+            <a:avLst/>
+          </a:prstGeom>
+          <a:solidFill>
+            <a:srgbClr val="FFFFFF"/>
+          </a:solidFill>
+          <a:ln>
+            <a:solidFill>
+              <a:srgbClr val="333333"/>
+            </a:solidFill>
+          </a:ln>
+        </p:spPr>
+        <p:style>
+          <a:lnRef idx="1">
+            <a:schemeClr val="accent1"/>
+          </a:lnRef>
+          <a:fillRef idx="3">
+            <a:schemeClr val="accent1"/>
+          </a:fillRef>
+          <a:effectRef idx="2">
+            <a:schemeClr val="accent1"/>
+          </a:effectRef>
+          <a:fontRef idx="minor">
+            <a:schemeClr val="lt1"/>
+          </a:fontRef>
+        </p:style>
+        <p:txBody>
+          <a:bodyPr rtlCol="0" anchor="ctr"/>
+          <a:lstStyle/>
+          <a:p>
+            <a:pPr algn="ctr"/>
+          </a:p>
+        </p:txBody>
+      </p:sp>
+      <p:sp>
+        <p:nvSpPr>
+          <p:cNvPr id="16" name="Rectangle 15"/>
+          <p:cNvSpPr/>
+          <p:nvPr/>
+        </p:nvSpPr>
+        <p:spPr>
+          <a:xfrm>
+            <a:off x="640080" y="2971800"/>
+            <a:ext cx="73152" cy="274320"/>
+          </a:xfrm>
+          <a:prstGeom prst="rect">
+            <a:avLst/>
+          </a:prstGeom>
+          <a:solidFill>
+            <a:srgbClr val="269CCB"/>
+          </a:solidFill>
+          <a:ln>
+            <a:noFill/>
+          </a:ln>
+        </p:spPr>
+        <p:style>
+          <a:lnRef idx="1">
+            <a:schemeClr val="accent1"/>
+          </a:lnRef>
+          <a:fillRef idx="3">
+            <a:schemeClr val="accent1"/>
+          </a:fillRef>
+          <a:effectRef idx="2">
+            <a:schemeClr val="accent1"/>
+          </a:effectRef>
+          <a:fontRef idx="minor">
+            <a:schemeClr val="lt1"/>
+          </a:fontRef>
+        </p:style>
+        <p:txBody>
+          <a:bodyPr rtlCol="0" anchor="ctr"/>
+          <a:lstStyle/>
+          <a:p>
+            <a:pPr algn="ctr"/>
+          </a:p>
+        </p:txBody>
+      </p:sp>
+      <p:sp>
+        <p:nvSpPr>
+          <p:cNvPr id="17" name="TextBox 16"/>
           <p:cNvSpPr txBox="1"/>
           <p:nvPr/>
         </p:nvSpPr>
         <p:spPr>
           <a:xfrm>
-            <a:off x="594360" y="5394960"/>
-            <a:ext cx="438912" cy="438912"/>
+            <a:off x="1097280" y="2916936"/>
+            <a:ext cx="10362895" cy="402336"/>
           </a:xfrm>
           <a:prstGeom prst="rect">
             <a:avLst/>
@@ -9250,16 +8000,175 @@
           <a:bodyPr wrap="square" anchor="ctr"/>
           <a:lstStyle/>
           <a:p>
+            <a:r>
+              <a:rPr sz="1500" b="1" i="0">
+                <a:solidFill>
+                  <a:srgbClr val="333333"/>
+                </a:solidFill>
+                <a:latin typeface="Calibri"/>
+              </a:rPr>
+              <a:t>LOS ACTORES</a:t>
+            </a:r>
+            <a:r>
+              <a:rPr sz="1500" b="0" i="0">
+                <a:solidFill>
+                  <a:srgbClr val="333333"/>
+                </a:solidFill>
+                <a:latin typeface="Calibri"/>
+              </a:rPr>
+              <a:t> — Todos los afectados, con su rol y qué le importa a cada uno. Incluyan </a:t>
+            </a:r>
+            <a:r>
+              <a:rPr sz="1500" b="1" i="0">
+                <a:solidFill>
+                  <a:srgbClr val="333333"/>
+                </a:solidFill>
+                <a:latin typeface="Calibri"/>
+              </a:rPr>
+              <a:t>al menos uno que no use el sistema pero sí sufra el resultado</a:t>
+            </a:r>
+            <a:r>
+              <a:rPr sz="1500" b="0" i="0">
+                <a:solidFill>
+                  <a:srgbClr val="333333"/>
+                </a:solidFill>
+                <a:latin typeface="Calibri"/>
+              </a:rPr>
+              <a:t>.</a:t>
+            </a:r>
+          </a:p>
+        </p:txBody>
+      </p:sp>
+      <p:sp>
+        <p:nvSpPr>
+          <p:cNvPr id="18" name="Rounded Rectangle 17"/>
+          <p:cNvSpPr/>
+          <p:nvPr/>
+        </p:nvSpPr>
+        <p:spPr>
+          <a:xfrm>
+            <a:off x="457200" y="3502152"/>
+            <a:ext cx="11277295" cy="566928"/>
+          </a:xfrm>
+          <a:prstGeom prst="roundRect">
+            <a:avLst>
+              <a:gd name="adj" fmla="val 12000"/>
+            </a:avLst>
+          </a:prstGeom>
+          <a:solidFill>
+            <a:srgbClr val="F2F2F2"/>
+          </a:solidFill>
+          <a:ln>
+            <a:noFill/>
+          </a:ln>
+        </p:spPr>
+        <p:style>
+          <a:lnRef idx="1">
+            <a:schemeClr val="accent1"/>
+          </a:lnRef>
+          <a:fillRef idx="3">
+            <a:schemeClr val="accent1"/>
+          </a:fillRef>
+          <a:effectRef idx="2">
+            <a:schemeClr val="accent1"/>
+          </a:effectRef>
+          <a:fontRef idx="minor">
+            <a:schemeClr val="lt1"/>
+          </a:fontRef>
+        </p:style>
+        <p:txBody>
+          <a:bodyPr rtlCol="0" anchor="ctr"/>
+          <a:lstStyle/>
+          <a:p>
             <a:pPr algn="ctr"/>
-            <a:r>
-              <a:rPr sz="1600" b="1" i="0">
-                <a:solidFill>
-                  <a:srgbClr val="FFFFFF"/>
-                </a:solidFill>
-                <a:latin typeface="Calibri"/>
-              </a:rPr>
-              <a:t>4</a:t>
-            </a:r>
+          </a:p>
+        </p:txBody>
+      </p:sp>
+      <p:sp>
+        <p:nvSpPr>
+          <p:cNvPr id="19" name="Rectangle 18"/>
+          <p:cNvSpPr/>
+          <p:nvPr/>
+        </p:nvSpPr>
+        <p:spPr>
+          <a:xfrm>
+            <a:off x="640080" y="3648456"/>
+            <a:ext cx="274320" cy="274320"/>
+          </a:xfrm>
+          <a:prstGeom prst="rect">
+            <a:avLst/>
+          </a:prstGeom>
+          <a:solidFill>
+            <a:srgbClr val="FFFFFF"/>
+          </a:solidFill>
+          <a:ln>
+            <a:solidFill>
+              <a:srgbClr val="333333"/>
+            </a:solidFill>
+          </a:ln>
+        </p:spPr>
+        <p:style>
+          <a:lnRef idx="1">
+            <a:schemeClr val="accent1"/>
+          </a:lnRef>
+          <a:fillRef idx="3">
+            <a:schemeClr val="accent1"/>
+          </a:fillRef>
+          <a:effectRef idx="2">
+            <a:schemeClr val="accent1"/>
+          </a:effectRef>
+          <a:fontRef idx="minor">
+            <a:schemeClr val="lt1"/>
+          </a:fontRef>
+        </p:style>
+        <p:txBody>
+          <a:bodyPr rtlCol="0" anchor="ctr"/>
+          <a:lstStyle/>
+          <a:p>
+            <a:pPr algn="ctr"/>
+          </a:p>
+        </p:txBody>
+      </p:sp>
+      <p:sp>
+        <p:nvSpPr>
+          <p:cNvPr id="20" name="Rectangle 19"/>
+          <p:cNvSpPr/>
+          <p:nvPr/>
+        </p:nvSpPr>
+        <p:spPr>
+          <a:xfrm>
+            <a:off x="640080" y="3648456"/>
+            <a:ext cx="73152" cy="274320"/>
+          </a:xfrm>
+          <a:prstGeom prst="rect">
+            <a:avLst/>
+          </a:prstGeom>
+          <a:solidFill>
+            <a:srgbClr val="269CCB"/>
+          </a:solidFill>
+          <a:ln>
+            <a:noFill/>
+          </a:ln>
+        </p:spPr>
+        <p:style>
+          <a:lnRef idx="1">
+            <a:schemeClr val="accent1"/>
+          </a:lnRef>
+          <a:fillRef idx="3">
+            <a:schemeClr val="accent1"/>
+          </a:fillRef>
+          <a:effectRef idx="2">
+            <a:schemeClr val="accent1"/>
+          </a:effectRef>
+          <a:fontRef idx="minor">
+            <a:schemeClr val="lt1"/>
+          </a:fontRef>
+        </p:style>
+        <p:txBody>
+          <a:bodyPr rtlCol="0" anchor="ctr"/>
+          <a:lstStyle/>
+          <a:p>
+            <a:pPr algn="ctr"/>
           </a:p>
         </p:txBody>
       </p:sp>
@@ -9271,8 +8180,8 @@
         </p:nvSpPr>
         <p:spPr>
           <a:xfrm>
-            <a:off x="1188720" y="5180076"/>
-            <a:ext cx="10271455" cy="886968"/>
+            <a:off x="1097280" y="3593592"/>
+            <a:ext cx="10362895" cy="402336"/>
           </a:xfrm>
           <a:prstGeom prst="rect">
             <a:avLst/>
@@ -9286,34 +8195,219 @@
             <a:r>
               <a:rPr sz="1500" b="1" i="0">
                 <a:solidFill>
-                  <a:srgbClr val="095292"/>
-                </a:solidFill>
-                <a:latin typeface="Calibri"/>
-              </a:rPr>
-              <a:t>60 s · Qué se inventó la IA</a:t>
-            </a:r>
-          </a:p>
-          <a:p>
-            <a:pPr>
-              <a:spcBef>
-                <a:spcPts val="200"/>
-              </a:spcBef>
-            </a:pPr>
-            <a:r>
-              <a:rPr sz="1300" b="0" i="0">
-                <a:solidFill>
-                  <a:srgbClr val="333333"/>
-                </a:solidFill>
-                <a:latin typeface="Calibri"/>
-              </a:rPr>
-              <a:t>Las tres correcciones. Es el minuto obligatorio de la exposición.</a:t>
-            </a:r>
-          </a:p>
-        </p:txBody>
-      </p:sp>
-      <p:sp>
-        <p:nvSpPr>
-          <p:cNvPr id="22" name="TextBox 21"/>
+                  <a:srgbClr val="333333"/>
+                </a:solidFill>
+                <a:latin typeface="Calibri"/>
+              </a:rPr>
+              <a:t>LA RETROALIMENTACIÓN</a:t>
+            </a:r>
+            <a:r>
+              <a:rPr sz="1500" b="0" i="0">
+                <a:solidFill>
+                  <a:srgbClr val="333333"/>
+                </a:solidFill>
+                <a:latin typeface="Calibri"/>
+              </a:rPr>
+              <a:t> — ¿Cómo se entera este sistema de que algo salió mal? Si no se entera, escríbanlo: es un hallazgo, no un error suyo.</a:t>
+            </a:r>
+          </a:p>
+        </p:txBody>
+      </p:sp>
+      <p:sp>
+        <p:nvSpPr>
+          <p:cNvPr id="22" name="Rounded Rectangle 21"/>
+          <p:cNvSpPr/>
+          <p:nvPr/>
+        </p:nvSpPr>
+        <p:spPr>
+          <a:xfrm>
+            <a:off x="457200" y="4178808"/>
+            <a:ext cx="11277295" cy="566928"/>
+          </a:xfrm>
+          <a:prstGeom prst="roundRect">
+            <a:avLst>
+              <a:gd name="adj" fmla="val 12000"/>
+            </a:avLst>
+          </a:prstGeom>
+          <a:solidFill>
+            <a:srgbClr val="F2F2F2"/>
+          </a:solidFill>
+          <a:ln>
+            <a:noFill/>
+          </a:ln>
+        </p:spPr>
+        <p:style>
+          <a:lnRef idx="1">
+            <a:schemeClr val="accent1"/>
+          </a:lnRef>
+          <a:fillRef idx="3">
+            <a:schemeClr val="accent1"/>
+          </a:fillRef>
+          <a:effectRef idx="2">
+            <a:schemeClr val="accent1"/>
+          </a:effectRef>
+          <a:fontRef idx="minor">
+            <a:schemeClr val="lt1"/>
+          </a:fontRef>
+        </p:style>
+        <p:txBody>
+          <a:bodyPr rtlCol="0" anchor="ctr"/>
+          <a:lstStyle/>
+          <a:p>
+            <a:pPr algn="ctr"/>
+          </a:p>
+        </p:txBody>
+      </p:sp>
+      <p:sp>
+        <p:nvSpPr>
+          <p:cNvPr id="23" name="Rectangle 22"/>
+          <p:cNvSpPr/>
+          <p:nvPr/>
+        </p:nvSpPr>
+        <p:spPr>
+          <a:xfrm>
+            <a:off x="640080" y="4325112"/>
+            <a:ext cx="274320" cy="274320"/>
+          </a:xfrm>
+          <a:prstGeom prst="rect">
+            <a:avLst/>
+          </a:prstGeom>
+          <a:solidFill>
+            <a:srgbClr val="FFFFFF"/>
+          </a:solidFill>
+          <a:ln>
+            <a:solidFill>
+              <a:srgbClr val="333333"/>
+            </a:solidFill>
+          </a:ln>
+        </p:spPr>
+        <p:style>
+          <a:lnRef idx="1">
+            <a:schemeClr val="accent1"/>
+          </a:lnRef>
+          <a:fillRef idx="3">
+            <a:schemeClr val="accent1"/>
+          </a:fillRef>
+          <a:effectRef idx="2">
+            <a:schemeClr val="accent1"/>
+          </a:effectRef>
+          <a:fontRef idx="minor">
+            <a:schemeClr val="lt1"/>
+          </a:fontRef>
+        </p:style>
+        <p:txBody>
+          <a:bodyPr rtlCol="0" anchor="ctr"/>
+          <a:lstStyle/>
+          <a:p>
+            <a:pPr algn="ctr"/>
+          </a:p>
+        </p:txBody>
+      </p:sp>
+      <p:sp>
+        <p:nvSpPr>
+          <p:cNvPr id="24" name="Rectangle 23"/>
+          <p:cNvSpPr/>
+          <p:nvPr/>
+        </p:nvSpPr>
+        <p:spPr>
+          <a:xfrm>
+            <a:off x="640080" y="4325112"/>
+            <a:ext cx="73152" cy="274320"/>
+          </a:xfrm>
+          <a:prstGeom prst="rect">
+            <a:avLst/>
+          </a:prstGeom>
+          <a:solidFill>
+            <a:srgbClr val="269CCB"/>
+          </a:solidFill>
+          <a:ln>
+            <a:noFill/>
+          </a:ln>
+        </p:spPr>
+        <p:style>
+          <a:lnRef idx="1">
+            <a:schemeClr val="accent1"/>
+          </a:lnRef>
+          <a:fillRef idx="3">
+            <a:schemeClr val="accent1"/>
+          </a:fillRef>
+          <a:effectRef idx="2">
+            <a:schemeClr val="accent1"/>
+          </a:effectRef>
+          <a:fontRef idx="minor">
+            <a:schemeClr val="lt1"/>
+          </a:fontRef>
+        </p:style>
+        <p:txBody>
+          <a:bodyPr rtlCol="0" anchor="ctr"/>
+          <a:lstStyle/>
+          <a:p>
+            <a:pPr algn="ctr"/>
+          </a:p>
+        </p:txBody>
+      </p:sp>
+      <p:sp>
+        <p:nvSpPr>
+          <p:cNvPr id="25" name="TextBox 24"/>
+          <p:cNvSpPr txBox="1"/>
+          <p:nvPr/>
+        </p:nvSpPr>
+        <p:spPr>
+          <a:xfrm>
+            <a:off x="1097280" y="4270248"/>
+            <a:ext cx="10362895" cy="402336"/>
+          </a:xfrm>
+          <a:prstGeom prst="rect">
+            <a:avLst/>
+          </a:prstGeom>
+          <a:noFill/>
+        </p:spPr>
+        <p:txBody>
+          <a:bodyPr wrap="square" anchor="ctr"/>
+          <a:lstStyle/>
+          <a:p>
+            <a:r>
+              <a:rPr sz="1500" b="1" i="0">
+                <a:solidFill>
+                  <a:srgbClr val="333333"/>
+                </a:solidFill>
+                <a:latin typeface="Calibri"/>
+              </a:rPr>
+              <a:t>LA IA: PROMPT Y CORRECCIONES</a:t>
+            </a:r>
+            <a:r>
+              <a:rPr sz="1500" b="0" i="0">
+                <a:solidFill>
+                  <a:srgbClr val="333333"/>
+                </a:solidFill>
+                <a:latin typeface="Calibri"/>
+              </a:rPr>
+              <a:t> — El prompt exacto que usaron, y una lista de </a:t>
+            </a:r>
+            <a:r>
+              <a:rPr sz="1500" b="1" i="0">
+                <a:solidFill>
+                  <a:srgbClr val="333333"/>
+                </a:solidFill>
+                <a:latin typeface="Calibri"/>
+              </a:rPr>
+              <a:t>al menos tres cosas que la IA escribió mal</a:t>
+            </a:r>
+            <a:r>
+              <a:rPr sz="1500" b="0" i="0">
+                <a:solidFill>
+                  <a:srgbClr val="333333"/>
+                </a:solidFill>
+                <a:latin typeface="Calibri"/>
+              </a:rPr>
+              <a:t> y cómo las corrigieron.</a:t>
+            </a:r>
+          </a:p>
+        </p:txBody>
+      </p:sp>
+      <p:sp>
+        <p:nvSpPr>
+          <p:cNvPr id="26" name="TextBox 25"/>
           <p:cNvSpPr txBox="1"/>
           <p:nvPr/>
         </p:nvSpPr>
@@ -9381,7 +8475,7 @@
         <p:spPr>
           <a:xfrm>
             <a:off x="0" y="0"/>
-            <a:ext cx="12191695" cy="960120"/>
+            <a:ext cx="12191695" cy="1170432"/>
           </a:xfrm>
           <a:prstGeom prst="rect">
             <a:avLst/>
@@ -9423,7 +8517,7 @@
         </p:nvSpPr>
         <p:spPr>
           <a:xfrm>
-            <a:off x="0" y="960120"/>
+            <a:off x="0" y="1170432"/>
             <a:ext cx="12191695" cy="41148"/>
           </a:xfrm>
           <a:prstGeom prst="rect">
@@ -9467,7 +8561,7 @@
         <p:spPr>
           <a:xfrm>
             <a:off x="457200" y="164592"/>
-            <a:ext cx="11277295" cy="502920"/>
+            <a:ext cx="11277295" cy="384048"/>
           </a:xfrm>
           <a:prstGeom prst="rect">
             <a:avLst/>
@@ -9487,7 +8581,7 @@
                 </a:solidFill>
                 <a:latin typeface="Calibri"/>
               </a:rPr>
-              <a:t>Para la Clase 4</a:t>
+              <a:t>Cómo se expone en 3 minutos</a:t>
             </a:r>
           </a:p>
         </p:txBody>
@@ -9500,8 +8594,8 @@
         </p:nvSpPr>
         <p:spPr>
           <a:xfrm>
-            <a:off x="457200" y="1170432"/>
-            <a:ext cx="11277295" cy="5230368"/>
+            <a:off x="457200" y="566928"/>
+            <a:ext cx="11277295" cy="411480"/>
           </a:xfrm>
           <a:prstGeom prst="rect">
             <a:avLst/>
@@ -9514,198 +8608,705 @@
           </a:bodyPr>
           <a:lstStyle/>
           <a:p>
+            <a:r>
+              <a:rPr sz="1400" b="0" i="0">
+                <a:solidFill>
+                  <a:srgbClr val="B8D8EE"/>
+                </a:solidFill>
+                <a:latin typeface="Calibri"/>
+              </a:rPr>
+              <a:t>Habla el vocero con la pantalla ya compartida · cronómetro en pantalla · se corta al llegar a cero</a:t>
+            </a:r>
+          </a:p>
+        </p:txBody>
+      </p:sp>
+      <p:sp>
+        <p:nvSpPr>
+          <p:cNvPr id="6" name="Rounded Rectangle 5"/>
+          <p:cNvSpPr/>
+          <p:nvPr/>
+        </p:nvSpPr>
+        <p:spPr>
+          <a:xfrm>
+            <a:off x="457200" y="1659636"/>
+            <a:ext cx="11277295" cy="1051560"/>
+          </a:xfrm>
+          <a:prstGeom prst="roundRect">
+            <a:avLst>
+              <a:gd name="adj" fmla="val 12000"/>
+            </a:avLst>
+          </a:prstGeom>
+          <a:solidFill>
+            <a:srgbClr val="F2F2F2"/>
+          </a:solidFill>
+          <a:ln>
+            <a:noFill/>
+          </a:ln>
+        </p:spPr>
+        <p:style>
+          <a:lnRef idx="1">
+            <a:schemeClr val="accent1"/>
+          </a:lnRef>
+          <a:fillRef idx="3">
+            <a:schemeClr val="accent1"/>
+          </a:fillRef>
+          <a:effectRef idx="2">
+            <a:schemeClr val="accent1"/>
+          </a:effectRef>
+          <a:fontRef idx="minor">
+            <a:schemeClr val="lt1"/>
+          </a:fontRef>
+        </p:style>
+        <p:txBody>
+          <a:bodyPr rtlCol="0" anchor="ctr"/>
+          <a:lstStyle/>
+          <a:p>
+            <a:pPr algn="ctr"/>
+          </a:p>
+        </p:txBody>
+      </p:sp>
+      <p:sp>
+        <p:nvSpPr>
+          <p:cNvPr id="7" name="Rounded Rectangle 6"/>
+          <p:cNvSpPr/>
+          <p:nvPr/>
+        </p:nvSpPr>
+        <p:spPr>
+          <a:xfrm>
+            <a:off x="594360" y="1965960"/>
+            <a:ext cx="438912" cy="438912"/>
+          </a:xfrm>
+          <a:prstGeom prst="roundRect">
+            <a:avLst>
+              <a:gd name="adj" fmla="val 12000"/>
+            </a:avLst>
+          </a:prstGeom>
+          <a:solidFill>
+            <a:srgbClr val="095292"/>
+          </a:solidFill>
+          <a:ln>
+            <a:noFill/>
+          </a:ln>
+        </p:spPr>
+        <p:style>
+          <a:lnRef idx="1">
+            <a:schemeClr val="accent1"/>
+          </a:lnRef>
+          <a:fillRef idx="3">
+            <a:schemeClr val="accent1"/>
+          </a:fillRef>
+          <a:effectRef idx="2">
+            <a:schemeClr val="accent1"/>
+          </a:effectRef>
+          <a:fontRef idx="minor">
+            <a:schemeClr val="lt1"/>
+          </a:fontRef>
+        </p:style>
+        <p:txBody>
+          <a:bodyPr rtlCol="0" anchor="ctr"/>
+          <a:lstStyle/>
+          <a:p>
+            <a:pPr algn="ctr"/>
+          </a:p>
+        </p:txBody>
+      </p:sp>
+      <p:sp>
+        <p:nvSpPr>
+          <p:cNvPr id="8" name="TextBox 7"/>
+          <p:cNvSpPr txBox="1"/>
+          <p:nvPr/>
+        </p:nvSpPr>
+        <p:spPr>
+          <a:xfrm>
+            <a:off x="594360" y="1965960"/>
+            <a:ext cx="438912" cy="438912"/>
+          </a:xfrm>
+          <a:prstGeom prst="rect">
+            <a:avLst/>
+          </a:prstGeom>
+          <a:noFill/>
+        </p:spPr>
+        <p:txBody>
+          <a:bodyPr wrap="square" anchor="ctr"/>
+          <a:lstStyle/>
+          <a:p>
+            <a:pPr algn="ctr"/>
+            <a:r>
+              <a:rPr sz="1600" b="1" i="0">
+                <a:solidFill>
+                  <a:srgbClr val="FFFFFF"/>
+                </a:solidFill>
+                <a:latin typeface="Calibri"/>
+              </a:rPr>
+              <a:t>1</a:t>
+            </a:r>
+          </a:p>
+        </p:txBody>
+      </p:sp>
+      <p:sp>
+        <p:nvSpPr>
+          <p:cNvPr id="9" name="TextBox 8"/>
+          <p:cNvSpPr txBox="1"/>
+          <p:nvPr/>
+        </p:nvSpPr>
+        <p:spPr>
+          <a:xfrm>
+            <a:off x="1188720" y="1751076"/>
+            <a:ext cx="10271455" cy="886968"/>
+          </a:xfrm>
+          <a:prstGeom prst="rect">
+            <a:avLst/>
+          </a:prstGeom>
+          <a:noFill/>
+        </p:spPr>
+        <p:txBody>
+          <a:bodyPr wrap="square" anchor="ctr"/>
+          <a:lstStyle/>
+          <a:p>
+            <a:r>
+              <a:rPr sz="1500" b="1" i="0">
+                <a:solidFill>
+                  <a:srgbClr val="095292"/>
+                </a:solidFill>
+                <a:latin typeface="Calibri"/>
+              </a:rPr>
+              <a:t>30 s · El sistema y su propósito</a:t>
+            </a:r>
+          </a:p>
+          <a:p>
             <a:pPr>
-              <a:spcAft>
-                <a:spcPts val="800"/>
-              </a:spcAft>
+              <a:spcBef>
+                <a:spcPts val="200"/>
+              </a:spcBef>
             </a:pPr>
             <a:r>
-              <a:rPr sz="2000" b="0" i="0">
-                <a:solidFill>
-                  <a:srgbClr val="333333"/>
-                </a:solidFill>
-                <a:latin typeface="Calibri"/>
-              </a:rPr>
-              <a:t>–   </a:t>
-            </a:r>
-            <a:r>
-              <a:rPr sz="2000" b="1" i="0">
-                <a:solidFill>
-                  <a:srgbClr val="333333"/>
-                </a:solidFill>
-                <a:latin typeface="Calibri"/>
-              </a:rPr>
-              <a:t>Trabajo dirigido:</a:t>
-            </a:r>
-            <a:r>
-              <a:rPr sz="2000" b="0" i="0">
-                <a:solidFill>
-                  <a:srgbClr val="333333"/>
-                </a:solidFill>
-                <a:latin typeface="Calibri"/>
-              </a:rPr>
-              <a:t> Análisis de caso práctico — dejen la ficha del sistema completa en la carpeta del equipo, con el prompt y las correcciones.</a:t>
+              <a:rPr sz="1300" b="0" i="0">
+                <a:solidFill>
+                  <a:srgbClr val="333333"/>
+                </a:solidFill>
+                <a:latin typeface="Calibri"/>
+              </a:rPr>
+              <a:t>Qué sistema es y para qué existe, en una frase.</a:t>
+            </a:r>
+          </a:p>
+        </p:txBody>
+      </p:sp>
+      <p:sp>
+        <p:nvSpPr>
+          <p:cNvPr id="10" name="Rounded Rectangle 9"/>
+          <p:cNvSpPr/>
+          <p:nvPr/>
+        </p:nvSpPr>
+        <p:spPr>
+          <a:xfrm>
+            <a:off x="457200" y="2802636"/>
+            <a:ext cx="11277295" cy="1051560"/>
+          </a:xfrm>
+          <a:prstGeom prst="roundRect">
+            <a:avLst>
+              <a:gd name="adj" fmla="val 12000"/>
+            </a:avLst>
+          </a:prstGeom>
+          <a:solidFill>
+            <a:srgbClr val="E8F4FA"/>
+          </a:solidFill>
+          <a:ln>
+            <a:noFill/>
+          </a:ln>
+        </p:spPr>
+        <p:style>
+          <a:lnRef idx="1">
+            <a:schemeClr val="accent1"/>
+          </a:lnRef>
+          <a:fillRef idx="3">
+            <a:schemeClr val="accent1"/>
+          </a:fillRef>
+          <a:effectRef idx="2">
+            <a:schemeClr val="accent1"/>
+          </a:effectRef>
+          <a:fontRef idx="minor">
+            <a:schemeClr val="lt1"/>
+          </a:fontRef>
+        </p:style>
+        <p:txBody>
+          <a:bodyPr rtlCol="0" anchor="ctr"/>
+          <a:lstStyle/>
+          <a:p>
+            <a:pPr algn="ctr"/>
+          </a:p>
+        </p:txBody>
+      </p:sp>
+      <p:sp>
+        <p:nvSpPr>
+          <p:cNvPr id="11" name="Rounded Rectangle 10"/>
+          <p:cNvSpPr/>
+          <p:nvPr/>
+        </p:nvSpPr>
+        <p:spPr>
+          <a:xfrm>
+            <a:off x="594360" y="3108960"/>
+            <a:ext cx="438912" cy="438912"/>
+          </a:xfrm>
+          <a:prstGeom prst="roundRect">
+            <a:avLst>
+              <a:gd name="adj" fmla="val 12000"/>
+            </a:avLst>
+          </a:prstGeom>
+          <a:solidFill>
+            <a:srgbClr val="095292"/>
+          </a:solidFill>
+          <a:ln>
+            <a:noFill/>
+          </a:ln>
+        </p:spPr>
+        <p:style>
+          <a:lnRef idx="1">
+            <a:schemeClr val="accent1"/>
+          </a:lnRef>
+          <a:fillRef idx="3">
+            <a:schemeClr val="accent1"/>
+          </a:fillRef>
+          <a:effectRef idx="2">
+            <a:schemeClr val="accent1"/>
+          </a:effectRef>
+          <a:fontRef idx="minor">
+            <a:schemeClr val="lt1"/>
+          </a:fontRef>
+        </p:style>
+        <p:txBody>
+          <a:bodyPr rtlCol="0" anchor="ctr"/>
+          <a:lstStyle/>
+          <a:p>
+            <a:pPr algn="ctr"/>
+          </a:p>
+        </p:txBody>
+      </p:sp>
+      <p:sp>
+        <p:nvSpPr>
+          <p:cNvPr id="12" name="TextBox 11"/>
+          <p:cNvSpPr txBox="1"/>
+          <p:nvPr/>
+        </p:nvSpPr>
+        <p:spPr>
+          <a:xfrm>
+            <a:off x="594360" y="3108960"/>
+            <a:ext cx="438912" cy="438912"/>
+          </a:xfrm>
+          <a:prstGeom prst="rect">
+            <a:avLst/>
+          </a:prstGeom>
+          <a:noFill/>
+        </p:spPr>
+        <p:txBody>
+          <a:bodyPr wrap="square" anchor="ctr"/>
+          <a:lstStyle/>
+          <a:p>
+            <a:pPr algn="ctr"/>
+            <a:r>
+              <a:rPr sz="1600" b="1" i="0">
+                <a:solidFill>
+                  <a:srgbClr val="FFFFFF"/>
+                </a:solidFill>
+                <a:latin typeface="Calibri"/>
+              </a:rPr>
+              <a:t>2</a:t>
+            </a:r>
+          </a:p>
+        </p:txBody>
+      </p:sp>
+      <p:sp>
+        <p:nvSpPr>
+          <p:cNvPr id="13" name="TextBox 12"/>
+          <p:cNvSpPr txBox="1"/>
+          <p:nvPr/>
+        </p:nvSpPr>
+        <p:spPr>
+          <a:xfrm>
+            <a:off x="1188720" y="2894076"/>
+            <a:ext cx="10271455" cy="886968"/>
+          </a:xfrm>
+          <a:prstGeom prst="rect">
+            <a:avLst/>
+          </a:prstGeom>
+          <a:noFill/>
+        </p:spPr>
+        <p:txBody>
+          <a:bodyPr wrap="square" anchor="ctr"/>
+          <a:lstStyle/>
+          <a:p>
+            <a:r>
+              <a:rPr sz="1500" b="1" i="0">
+                <a:solidFill>
+                  <a:srgbClr val="095292"/>
+                </a:solidFill>
+                <a:latin typeface="Calibri"/>
+              </a:rPr>
+              <a:t>45 s · La frontera</a:t>
             </a:r>
           </a:p>
           <a:p>
             <a:pPr>
-              <a:spcAft>
-                <a:spcPts val="800"/>
-              </a:spcAft>
+              <a:spcBef>
+                <a:spcPts val="200"/>
+              </a:spcBef>
             </a:pPr>
             <a:r>
-              <a:rPr sz="2000" b="0" i="0">
-                <a:solidFill>
-                  <a:srgbClr val="333333"/>
-                </a:solidFill>
-                <a:latin typeface="Calibri"/>
-              </a:rPr>
-              <a:t>–   </a:t>
-            </a:r>
-            <a:r>
-              <a:rPr sz="2000" b="1" i="0">
-                <a:solidFill>
-                  <a:srgbClr val="333333"/>
-                </a:solidFill>
-                <a:latin typeface="Calibri"/>
-              </a:rPr>
-              <a:t>Trabajo independiente:</a:t>
-            </a:r>
-            <a:r>
-              <a:rPr sz="2000" b="0" i="0">
-                <a:solidFill>
-                  <a:srgbClr val="333333"/>
-                </a:solidFill>
-                <a:latin typeface="Calibri"/>
-              </a:rPr>
-              <a:t> Ensayo sobre impacto social: media página sobre a quién le empeora la vida el sistema que analizaron, aunque funcione bien.</a:t>
+              <a:rPr sz="1300" b="0" i="0">
+                <a:solidFill>
+                  <a:srgbClr val="333333"/>
+                </a:solidFill>
+                <a:latin typeface="Calibri"/>
+              </a:rPr>
+              <a:t>Qué dejaron fuera y por qué. Es la decisión que se discute.</a:t>
+            </a:r>
+          </a:p>
+        </p:txBody>
+      </p:sp>
+      <p:sp>
+        <p:nvSpPr>
+          <p:cNvPr id="14" name="Rounded Rectangle 13"/>
+          <p:cNvSpPr/>
+          <p:nvPr/>
+        </p:nvSpPr>
+        <p:spPr>
+          <a:xfrm>
+            <a:off x="457200" y="3945636"/>
+            <a:ext cx="11277295" cy="1051560"/>
+          </a:xfrm>
+          <a:prstGeom prst="roundRect">
+            <a:avLst>
+              <a:gd name="adj" fmla="val 12000"/>
+            </a:avLst>
+          </a:prstGeom>
+          <a:solidFill>
+            <a:srgbClr val="F2F2F2"/>
+          </a:solidFill>
+          <a:ln>
+            <a:noFill/>
+          </a:ln>
+        </p:spPr>
+        <p:style>
+          <a:lnRef idx="1">
+            <a:schemeClr val="accent1"/>
+          </a:lnRef>
+          <a:fillRef idx="3">
+            <a:schemeClr val="accent1"/>
+          </a:fillRef>
+          <a:effectRef idx="2">
+            <a:schemeClr val="accent1"/>
+          </a:effectRef>
+          <a:fontRef idx="minor">
+            <a:schemeClr val="lt1"/>
+          </a:fontRef>
+        </p:style>
+        <p:txBody>
+          <a:bodyPr rtlCol="0" anchor="ctr"/>
+          <a:lstStyle/>
+          <a:p>
+            <a:pPr algn="ctr"/>
+          </a:p>
+        </p:txBody>
+      </p:sp>
+      <p:sp>
+        <p:nvSpPr>
+          <p:cNvPr id="15" name="Rounded Rectangle 14"/>
+          <p:cNvSpPr/>
+          <p:nvPr/>
+        </p:nvSpPr>
+        <p:spPr>
+          <a:xfrm>
+            <a:off x="594360" y="4251960"/>
+            <a:ext cx="438912" cy="438912"/>
+          </a:xfrm>
+          <a:prstGeom prst="roundRect">
+            <a:avLst>
+              <a:gd name="adj" fmla="val 12000"/>
+            </a:avLst>
+          </a:prstGeom>
+          <a:solidFill>
+            <a:srgbClr val="095292"/>
+          </a:solidFill>
+          <a:ln>
+            <a:noFill/>
+          </a:ln>
+        </p:spPr>
+        <p:style>
+          <a:lnRef idx="1">
+            <a:schemeClr val="accent1"/>
+          </a:lnRef>
+          <a:fillRef idx="3">
+            <a:schemeClr val="accent1"/>
+          </a:fillRef>
+          <a:effectRef idx="2">
+            <a:schemeClr val="accent1"/>
+          </a:effectRef>
+          <a:fontRef idx="minor">
+            <a:schemeClr val="lt1"/>
+          </a:fontRef>
+        </p:style>
+        <p:txBody>
+          <a:bodyPr rtlCol="0" anchor="ctr"/>
+          <a:lstStyle/>
+          <a:p>
+            <a:pPr algn="ctr"/>
+          </a:p>
+        </p:txBody>
+      </p:sp>
+      <p:sp>
+        <p:nvSpPr>
+          <p:cNvPr id="16" name="TextBox 15"/>
+          <p:cNvSpPr txBox="1"/>
+          <p:nvPr/>
+        </p:nvSpPr>
+        <p:spPr>
+          <a:xfrm>
+            <a:off x="594360" y="4251960"/>
+            <a:ext cx="438912" cy="438912"/>
+          </a:xfrm>
+          <a:prstGeom prst="rect">
+            <a:avLst/>
+          </a:prstGeom>
+          <a:noFill/>
+        </p:spPr>
+        <p:txBody>
+          <a:bodyPr wrap="square" anchor="ctr"/>
+          <a:lstStyle/>
+          <a:p>
+            <a:pPr algn="ctr"/>
+            <a:r>
+              <a:rPr sz="1600" b="1" i="0">
+                <a:solidFill>
+                  <a:srgbClr val="FFFFFF"/>
+                </a:solidFill>
+                <a:latin typeface="Calibri"/>
+              </a:rPr>
+              <a:t>3</a:t>
+            </a:r>
+          </a:p>
+        </p:txBody>
+      </p:sp>
+      <p:sp>
+        <p:nvSpPr>
+          <p:cNvPr id="17" name="TextBox 16"/>
+          <p:cNvSpPr txBox="1"/>
+          <p:nvPr/>
+        </p:nvSpPr>
+        <p:spPr>
+          <a:xfrm>
+            <a:off x="1188720" y="4037076"/>
+            <a:ext cx="10271455" cy="886968"/>
+          </a:xfrm>
+          <a:prstGeom prst="rect">
+            <a:avLst/>
+          </a:prstGeom>
+          <a:noFill/>
+        </p:spPr>
+        <p:txBody>
+          <a:bodyPr wrap="square" anchor="ctr"/>
+          <a:lstStyle/>
+          <a:p>
+            <a:r>
+              <a:rPr sz="1500" b="1" i="0">
+                <a:solidFill>
+                  <a:srgbClr val="095292"/>
+                </a:solidFill>
+                <a:latin typeface="Calibri"/>
+              </a:rPr>
+              <a:t>45 s · El actor olvidado</a:t>
             </a:r>
           </a:p>
           <a:p>
             <a:pPr>
-              <a:spcAft>
-                <a:spcPts val="800"/>
-              </a:spcAft>
+              <a:spcBef>
+                <a:spcPts val="200"/>
+              </a:spcBef>
             </a:pPr>
             <a:r>
-              <a:rPr sz="2000" b="0" i="0">
-                <a:solidFill>
-                  <a:srgbClr val="333333"/>
-                </a:solidFill>
-                <a:latin typeface="Calibri"/>
-              </a:rPr>
-              <a:t>–   </a:t>
-            </a:r>
-            <a:r>
-              <a:rPr sz="2000" b="1" i="0">
-                <a:solidFill>
-                  <a:srgbClr val="333333"/>
-                </a:solidFill>
-                <a:latin typeface="Calibri"/>
-              </a:rPr>
-              <a:t>Clase 4 · Principios éticos en la Ingeniería</a:t>
-            </a:r>
-            <a:r>
-              <a:rPr sz="2000" b="0" i="0">
-                <a:solidFill>
-                  <a:srgbClr val="333333"/>
-                </a:solidFill>
-                <a:latin typeface="Calibri"/>
-              </a:rPr>
-              <a:t> — los principios éticos de la profesión, con casos reales donde el software funcionó y aun así el ingeniero hizo algo mal.</a:t>
+              <a:rPr sz="1300" b="0" i="0">
+                <a:solidFill>
+                  <a:srgbClr val="333333"/>
+                </a:solidFill>
+                <a:latin typeface="Calibri"/>
+              </a:rPr>
+              <a:t>El afectado que no usa el sistema. Quién es y qué pierde.</a:t>
+            </a:r>
+          </a:p>
+        </p:txBody>
+      </p:sp>
+      <p:sp>
+        <p:nvSpPr>
+          <p:cNvPr id="18" name="Rounded Rectangle 17"/>
+          <p:cNvSpPr/>
+          <p:nvPr/>
+        </p:nvSpPr>
+        <p:spPr>
+          <a:xfrm>
+            <a:off x="457200" y="5088636"/>
+            <a:ext cx="11277295" cy="1051560"/>
+          </a:xfrm>
+          <a:prstGeom prst="roundRect">
+            <a:avLst>
+              <a:gd name="adj" fmla="val 12000"/>
+            </a:avLst>
+          </a:prstGeom>
+          <a:solidFill>
+            <a:srgbClr val="E8F4FA"/>
+          </a:solidFill>
+          <a:ln>
+            <a:noFill/>
+          </a:ln>
+        </p:spPr>
+        <p:style>
+          <a:lnRef idx="1">
+            <a:schemeClr val="accent1"/>
+          </a:lnRef>
+          <a:fillRef idx="3">
+            <a:schemeClr val="accent1"/>
+          </a:fillRef>
+          <a:effectRef idx="2">
+            <a:schemeClr val="accent1"/>
+          </a:effectRef>
+          <a:fontRef idx="minor">
+            <a:schemeClr val="lt1"/>
+          </a:fontRef>
+        </p:style>
+        <p:txBody>
+          <a:bodyPr rtlCol="0" anchor="ctr"/>
+          <a:lstStyle/>
+          <a:p>
+            <a:pPr algn="ctr"/>
+          </a:p>
+        </p:txBody>
+      </p:sp>
+      <p:sp>
+        <p:nvSpPr>
+          <p:cNvPr id="19" name="Rounded Rectangle 18"/>
+          <p:cNvSpPr/>
+          <p:nvPr/>
+        </p:nvSpPr>
+        <p:spPr>
+          <a:xfrm>
+            <a:off x="594360" y="5394960"/>
+            <a:ext cx="438912" cy="438912"/>
+          </a:xfrm>
+          <a:prstGeom prst="roundRect">
+            <a:avLst>
+              <a:gd name="adj" fmla="val 12000"/>
+            </a:avLst>
+          </a:prstGeom>
+          <a:solidFill>
+            <a:srgbClr val="095292"/>
+          </a:solidFill>
+          <a:ln>
+            <a:noFill/>
+          </a:ln>
+        </p:spPr>
+        <p:style>
+          <a:lnRef idx="1">
+            <a:schemeClr val="accent1"/>
+          </a:lnRef>
+          <a:fillRef idx="3">
+            <a:schemeClr val="accent1"/>
+          </a:fillRef>
+          <a:effectRef idx="2">
+            <a:schemeClr val="accent1"/>
+          </a:effectRef>
+          <a:fontRef idx="minor">
+            <a:schemeClr val="lt1"/>
+          </a:fontRef>
+        </p:style>
+        <p:txBody>
+          <a:bodyPr rtlCol="0" anchor="ctr"/>
+          <a:lstStyle/>
+          <a:p>
+            <a:pPr algn="ctr"/>
+          </a:p>
+        </p:txBody>
+      </p:sp>
+      <p:sp>
+        <p:nvSpPr>
+          <p:cNvPr id="20" name="TextBox 19"/>
+          <p:cNvSpPr txBox="1"/>
+          <p:nvPr/>
+        </p:nvSpPr>
+        <p:spPr>
+          <a:xfrm>
+            <a:off x="594360" y="5394960"/>
+            <a:ext cx="438912" cy="438912"/>
+          </a:xfrm>
+          <a:prstGeom prst="rect">
+            <a:avLst/>
+          </a:prstGeom>
+          <a:noFill/>
+        </p:spPr>
+        <p:txBody>
+          <a:bodyPr wrap="square" anchor="ctr"/>
+          <a:lstStyle/>
+          <a:p>
+            <a:pPr algn="ctr"/>
+            <a:r>
+              <a:rPr sz="1600" b="1" i="0">
+                <a:solidFill>
+                  <a:srgbClr val="FFFFFF"/>
+                </a:solidFill>
+                <a:latin typeface="Calibri"/>
+              </a:rPr>
+              <a:t>4</a:t>
+            </a:r>
+          </a:p>
+        </p:txBody>
+      </p:sp>
+      <p:sp>
+        <p:nvSpPr>
+          <p:cNvPr id="21" name="TextBox 20"/>
+          <p:cNvSpPr txBox="1"/>
+          <p:nvPr/>
+        </p:nvSpPr>
+        <p:spPr>
+          <a:xfrm>
+            <a:off x="1188720" y="5180076"/>
+            <a:ext cx="10271455" cy="886968"/>
+          </a:xfrm>
+          <a:prstGeom prst="rect">
+            <a:avLst/>
+          </a:prstGeom>
+          <a:noFill/>
+        </p:spPr>
+        <p:txBody>
+          <a:bodyPr wrap="square" anchor="ctr"/>
+          <a:lstStyle/>
+          <a:p>
+            <a:r>
+              <a:rPr sz="1500" b="1" i="0">
+                <a:solidFill>
+                  <a:srgbClr val="095292"/>
+                </a:solidFill>
+                <a:latin typeface="Calibri"/>
+              </a:rPr>
+              <a:t>60 s · Qué se inventó la IA</a:t>
             </a:r>
           </a:p>
           <a:p>
             <a:pPr>
-              <a:spcAft>
-                <a:spcPts val="800"/>
-              </a:spcAft>
+              <a:spcBef>
+                <a:spcPts val="200"/>
+              </a:spcBef>
             </a:pPr>
             <a:r>
-              <a:rPr sz="2000" b="0" i="0">
-                <a:solidFill>
-                  <a:srgbClr val="333333"/>
-                </a:solidFill>
-                <a:latin typeface="Calibri"/>
-              </a:rPr>
-              <a:t>–   </a:t>
-            </a:r>
-            <a:r>
-              <a:rPr sz="2000" b="1" i="0">
-                <a:solidFill>
-                  <a:srgbClr val="333333"/>
-                </a:solidFill>
-                <a:latin typeface="Calibri"/>
-              </a:rPr>
-              <a:t>Aviso:</a:t>
-            </a:r>
-            <a:r>
-              <a:rPr sz="2000" b="0" i="0">
-                <a:solidFill>
-                  <a:srgbClr val="333333"/>
-                </a:solidFill>
-                <a:latin typeface="Calibri"/>
-              </a:rPr>
-              <a:t> Traigan identificado el </a:t>
-            </a:r>
-            <a:r>
-              <a:rPr sz="2000" b="1" i="0">
-                <a:solidFill>
-                  <a:srgbClr val="333333"/>
-                </a:solidFill>
-                <a:latin typeface="Calibri"/>
-              </a:rPr>
-              <a:t>actor no-usuario</a:t>
-            </a:r>
-            <a:r>
-              <a:rPr sz="2000" b="0" i="0">
-                <a:solidFill>
-                  <a:srgbClr val="333333"/>
-                </a:solidFill>
-                <a:latin typeface="Calibri"/>
-              </a:rPr>
-              <a:t> de su sistema. La sesión 4 arranca con esa persona y el ensayo de media página es sobre ella.</a:t>
-            </a:r>
-          </a:p>
-          <a:p>
-            <a:pPr>
-              <a:spcAft>
-                <a:spcPts val="800"/>
-              </a:spcAft>
-            </a:pPr>
-            <a:r>
-              <a:rPr sz="2000" b="0" i="0">
-                <a:solidFill>
-                  <a:srgbClr val="333333"/>
-                </a:solidFill>
-                <a:latin typeface="Calibri"/>
-              </a:rPr>
-              <a:t>–   </a:t>
-            </a:r>
-            <a:r>
-              <a:rPr sz="2000" b="1" i="0">
-                <a:solidFill>
-                  <a:srgbClr val="333333"/>
-                </a:solidFill>
-                <a:latin typeface="Calibri"/>
-              </a:rPr>
-              <a:t>Antes de salir:</a:t>
-            </a:r>
-            <a:r>
-              <a:rPr sz="2000" b="0" i="0">
-                <a:solidFill>
-                  <a:srgbClr val="333333"/>
-                </a:solidFill>
-                <a:latin typeface="Calibri"/>
-              </a:rPr>
-              <a:t> el enlace del documento del equipo en el chat, con permiso de lectura para el docente, y el nombre del vocero de hoy.</a:t>
-            </a:r>
-          </a:p>
-        </p:txBody>
-      </p:sp>
-      <p:sp>
-        <p:nvSpPr>
-          <p:cNvPr id="6" name="TextBox 5"/>
+              <a:rPr sz="1300" b="0" i="0">
+                <a:solidFill>
+                  <a:srgbClr val="333333"/>
+                </a:solidFill>
+                <a:latin typeface="Calibri"/>
+              </a:rPr>
+              <a:t>Las tres correcciones. Es el minuto obligatorio de la exposición.</a:t>
+            </a:r>
+          </a:p>
+        </p:txBody>
+      </p:sp>
+      <p:sp>
+        <p:nvSpPr>
+          <p:cNvPr id="22" name="TextBox 21"/>
           <p:cNvSpPr txBox="1"/>
           <p:nvPr/>
         </p:nvSpPr>
@@ -9747,6 +9348,398 @@
 </file>
 
 <file path=ppt/slides/slide22.xml><?xml version="1.0" encoding="utf-8"?>
+<p:sld xmlns:a="http://schemas.openxmlformats.org/drawingml/2006/main" xmlns:p="http://schemas.openxmlformats.org/presentationml/2006/main" xmlns:r="http://schemas.openxmlformats.org/officeDocument/2006/relationships">
+  <p:cSld>
+    <p:bg>
+      <p:bgPr>
+        <a:solidFill>
+          <a:srgbClr val="FFFFFF"/>
+        </a:solidFill>
+        <a:effectLst/>
+      </p:bgPr>
+    </p:bg>
+    <p:spTree>
+      <p:nvGrpSpPr>
+        <p:cNvPr id="1" name=""/>
+        <p:cNvGrpSpPr/>
+        <p:nvPr/>
+      </p:nvGrpSpPr>
+      <p:grpSpPr/>
+      <p:sp>
+        <p:nvSpPr>
+          <p:cNvPr id="2" name="Rectangle 1"/>
+          <p:cNvSpPr/>
+          <p:nvPr/>
+        </p:nvSpPr>
+        <p:spPr>
+          <a:xfrm>
+            <a:off x="0" y="0"/>
+            <a:ext cx="12191695" cy="960120"/>
+          </a:xfrm>
+          <a:prstGeom prst="rect">
+            <a:avLst/>
+          </a:prstGeom>
+          <a:solidFill>
+            <a:srgbClr val="095292"/>
+          </a:solidFill>
+          <a:ln>
+            <a:noFill/>
+          </a:ln>
+        </p:spPr>
+        <p:style>
+          <a:lnRef idx="1">
+            <a:schemeClr val="accent1"/>
+          </a:lnRef>
+          <a:fillRef idx="3">
+            <a:schemeClr val="accent1"/>
+          </a:fillRef>
+          <a:effectRef idx="2">
+            <a:schemeClr val="accent1"/>
+          </a:effectRef>
+          <a:fontRef idx="minor">
+            <a:schemeClr val="lt1"/>
+          </a:fontRef>
+        </p:style>
+        <p:txBody>
+          <a:bodyPr rtlCol="0" anchor="ctr"/>
+          <a:lstStyle/>
+          <a:p>
+            <a:pPr algn="ctr"/>
+          </a:p>
+        </p:txBody>
+      </p:sp>
+      <p:sp>
+        <p:nvSpPr>
+          <p:cNvPr id="3" name="Rectangle 2"/>
+          <p:cNvSpPr/>
+          <p:nvPr/>
+        </p:nvSpPr>
+        <p:spPr>
+          <a:xfrm>
+            <a:off x="0" y="960120"/>
+            <a:ext cx="12191695" cy="41148"/>
+          </a:xfrm>
+          <a:prstGeom prst="rect">
+            <a:avLst/>
+          </a:prstGeom>
+          <a:solidFill>
+            <a:srgbClr val="FFD000"/>
+          </a:solidFill>
+          <a:ln>
+            <a:noFill/>
+          </a:ln>
+        </p:spPr>
+        <p:style>
+          <a:lnRef idx="1">
+            <a:schemeClr val="accent1"/>
+          </a:lnRef>
+          <a:fillRef idx="3">
+            <a:schemeClr val="accent1"/>
+          </a:fillRef>
+          <a:effectRef idx="2">
+            <a:schemeClr val="accent1"/>
+          </a:effectRef>
+          <a:fontRef idx="minor">
+            <a:schemeClr val="lt1"/>
+          </a:fontRef>
+        </p:style>
+        <p:txBody>
+          <a:bodyPr rtlCol="0" anchor="ctr"/>
+          <a:lstStyle/>
+          <a:p>
+            <a:pPr algn="ctr"/>
+          </a:p>
+        </p:txBody>
+      </p:sp>
+      <p:sp>
+        <p:nvSpPr>
+          <p:cNvPr id="4" name="TextBox 3"/>
+          <p:cNvSpPr txBox="1"/>
+          <p:nvPr/>
+        </p:nvSpPr>
+        <p:spPr>
+          <a:xfrm>
+            <a:off x="457200" y="164592"/>
+            <a:ext cx="11277295" cy="502920"/>
+          </a:xfrm>
+          <a:prstGeom prst="rect">
+            <a:avLst/>
+          </a:prstGeom>
+          <a:noFill/>
+        </p:spPr>
+        <p:txBody>
+          <a:bodyPr wrap="square">
+            <a:spAutoFit/>
+          </a:bodyPr>
+          <a:lstStyle/>
+          <a:p>
+            <a:r>
+              <a:rPr sz="2600" b="1" i="0">
+                <a:solidFill>
+                  <a:srgbClr val="FFFFFF"/>
+                </a:solidFill>
+                <a:latin typeface="Calibri"/>
+              </a:rPr>
+              <a:t>Para la Clase 4</a:t>
+            </a:r>
+          </a:p>
+        </p:txBody>
+      </p:sp>
+      <p:sp>
+        <p:nvSpPr>
+          <p:cNvPr id="5" name="TextBox 4"/>
+          <p:cNvSpPr txBox="1"/>
+          <p:nvPr/>
+        </p:nvSpPr>
+        <p:spPr>
+          <a:xfrm>
+            <a:off x="457200" y="1170432"/>
+            <a:ext cx="11277295" cy="5230368"/>
+          </a:xfrm>
+          <a:prstGeom prst="rect">
+            <a:avLst/>
+          </a:prstGeom>
+          <a:noFill/>
+        </p:spPr>
+        <p:txBody>
+          <a:bodyPr wrap="square">
+            <a:spAutoFit/>
+          </a:bodyPr>
+          <a:lstStyle/>
+          <a:p>
+            <a:pPr>
+              <a:spcAft>
+                <a:spcPts val="800"/>
+              </a:spcAft>
+            </a:pPr>
+            <a:r>
+              <a:rPr sz="2000" b="0" i="0">
+                <a:solidFill>
+                  <a:srgbClr val="333333"/>
+                </a:solidFill>
+                <a:latin typeface="Calibri"/>
+              </a:rPr>
+              <a:t>–   </a:t>
+            </a:r>
+            <a:r>
+              <a:rPr sz="2000" b="1" i="0">
+                <a:solidFill>
+                  <a:srgbClr val="333333"/>
+                </a:solidFill>
+                <a:latin typeface="Calibri"/>
+              </a:rPr>
+              <a:t>Trabajo dirigido:</a:t>
+            </a:r>
+            <a:r>
+              <a:rPr sz="2000" b="0" i="0">
+                <a:solidFill>
+                  <a:srgbClr val="333333"/>
+                </a:solidFill>
+                <a:latin typeface="Calibri"/>
+              </a:rPr>
+              <a:t> Análisis de caso práctico — dejen la ficha del sistema completa en la carpeta del equipo, con el prompt y las correcciones.</a:t>
+            </a:r>
+          </a:p>
+          <a:p>
+            <a:pPr>
+              <a:spcAft>
+                <a:spcPts val="800"/>
+              </a:spcAft>
+            </a:pPr>
+            <a:r>
+              <a:rPr sz="2000" b="0" i="0">
+                <a:solidFill>
+                  <a:srgbClr val="333333"/>
+                </a:solidFill>
+                <a:latin typeface="Calibri"/>
+              </a:rPr>
+              <a:t>–   </a:t>
+            </a:r>
+            <a:r>
+              <a:rPr sz="2000" b="1" i="0">
+                <a:solidFill>
+                  <a:srgbClr val="333333"/>
+                </a:solidFill>
+                <a:latin typeface="Calibri"/>
+              </a:rPr>
+              <a:t>Trabajo independiente:</a:t>
+            </a:r>
+            <a:r>
+              <a:rPr sz="2000" b="0" i="0">
+                <a:solidFill>
+                  <a:srgbClr val="333333"/>
+                </a:solidFill>
+                <a:latin typeface="Calibri"/>
+              </a:rPr>
+              <a:t> Ensayo sobre impacto social: media página sobre a quién le empeora la vida el sistema que analizaron, aunque funcione bien.</a:t>
+            </a:r>
+          </a:p>
+          <a:p>
+            <a:pPr>
+              <a:spcAft>
+                <a:spcPts val="800"/>
+              </a:spcAft>
+            </a:pPr>
+            <a:r>
+              <a:rPr sz="2000" b="0" i="0">
+                <a:solidFill>
+                  <a:srgbClr val="333333"/>
+                </a:solidFill>
+                <a:latin typeface="Calibri"/>
+              </a:rPr>
+              <a:t>–   </a:t>
+            </a:r>
+            <a:r>
+              <a:rPr sz="2000" b="1" i="0">
+                <a:solidFill>
+                  <a:srgbClr val="333333"/>
+                </a:solidFill>
+                <a:latin typeface="Calibri"/>
+              </a:rPr>
+              <a:t>Clase 4 · Principios éticos en la Ingeniería</a:t>
+            </a:r>
+            <a:r>
+              <a:rPr sz="2000" b="0" i="0">
+                <a:solidFill>
+                  <a:srgbClr val="333333"/>
+                </a:solidFill>
+                <a:latin typeface="Calibri"/>
+              </a:rPr>
+              <a:t> — los principios éticos de la profesión, con casos reales donde el software funcionó y aun así el ingeniero hizo algo mal.</a:t>
+            </a:r>
+          </a:p>
+          <a:p>
+            <a:pPr>
+              <a:spcAft>
+                <a:spcPts val="800"/>
+              </a:spcAft>
+            </a:pPr>
+            <a:r>
+              <a:rPr sz="2000" b="0" i="0">
+                <a:solidFill>
+                  <a:srgbClr val="333333"/>
+                </a:solidFill>
+                <a:latin typeface="Calibri"/>
+              </a:rPr>
+              <a:t>–   </a:t>
+            </a:r>
+            <a:r>
+              <a:rPr sz="2000" b="1" i="0">
+                <a:solidFill>
+                  <a:srgbClr val="333333"/>
+                </a:solidFill>
+                <a:latin typeface="Calibri"/>
+              </a:rPr>
+              <a:t>Aviso:</a:t>
+            </a:r>
+            <a:r>
+              <a:rPr sz="2000" b="0" i="0">
+                <a:solidFill>
+                  <a:srgbClr val="333333"/>
+                </a:solidFill>
+                <a:latin typeface="Calibri"/>
+              </a:rPr>
+              <a:t> Traigan identificado el </a:t>
+            </a:r>
+            <a:r>
+              <a:rPr sz="2000" b="1" i="0">
+                <a:solidFill>
+                  <a:srgbClr val="333333"/>
+                </a:solidFill>
+                <a:latin typeface="Calibri"/>
+              </a:rPr>
+              <a:t>actor no-usuario</a:t>
+            </a:r>
+            <a:r>
+              <a:rPr sz="2000" b="0" i="0">
+                <a:solidFill>
+                  <a:srgbClr val="333333"/>
+                </a:solidFill>
+                <a:latin typeface="Calibri"/>
+              </a:rPr>
+              <a:t> de su sistema. La sesión 4 arranca con esa persona y el ensayo de media página es sobre ella.</a:t>
+            </a:r>
+          </a:p>
+          <a:p>
+            <a:pPr>
+              <a:spcAft>
+                <a:spcPts val="800"/>
+              </a:spcAft>
+            </a:pPr>
+            <a:r>
+              <a:rPr sz="2000" b="0" i="0">
+                <a:solidFill>
+                  <a:srgbClr val="333333"/>
+                </a:solidFill>
+                <a:latin typeface="Calibri"/>
+              </a:rPr>
+              <a:t>–   </a:t>
+            </a:r>
+            <a:r>
+              <a:rPr sz="2000" b="1" i="0">
+                <a:solidFill>
+                  <a:srgbClr val="333333"/>
+                </a:solidFill>
+                <a:latin typeface="Calibri"/>
+              </a:rPr>
+              <a:t>Antes de salir:</a:t>
+            </a:r>
+            <a:r>
+              <a:rPr sz="2000" b="0" i="0">
+                <a:solidFill>
+                  <a:srgbClr val="333333"/>
+                </a:solidFill>
+                <a:latin typeface="Calibri"/>
+              </a:rPr>
+              <a:t> el enlace del documento del equipo en el chat, con permiso de lectura para el docente, y el nombre del vocero de hoy.</a:t>
+            </a:r>
+          </a:p>
+        </p:txBody>
+      </p:sp>
+      <p:sp>
+        <p:nvSpPr>
+          <p:cNvPr id="6" name="TextBox 5"/>
+          <p:cNvSpPr txBox="1"/>
+          <p:nvPr/>
+        </p:nvSpPr>
+        <p:spPr>
+          <a:xfrm>
+            <a:off x="11185855" y="6473952"/>
+            <a:ext cx="640080" cy="274320"/>
+          </a:xfrm>
+          <a:prstGeom prst="rect">
+            <a:avLst/>
+          </a:prstGeom>
+          <a:noFill/>
+        </p:spPr>
+        <p:txBody>
+          <a:bodyPr wrap="square">
+            <a:spAutoFit/>
+          </a:bodyPr>
+          <a:lstStyle/>
+          <a:p>
+            <a:pPr algn="r"/>
+            <a:r>
+              <a:rPr sz="1100" b="0" i="0">
+                <a:solidFill>
+                  <a:srgbClr val="666666"/>
+                </a:solidFill>
+                <a:latin typeface="Calibri"/>
+              </a:rPr>
+              <a:t>22</a:t>
+            </a:r>
+          </a:p>
+        </p:txBody>
+      </p:sp>
+    </p:spTree>
+  </p:cSld>
+  <p:clrMapOvr>
+    <a:masterClrMapping/>
+  </p:clrMapOvr>
+</p:sld>
+</file>
+
+<file path=ppt/slides/slide23.xml><?xml version="1.0" encoding="utf-8"?>
 <p:sld xmlns:a="http://schemas.openxmlformats.org/drawingml/2006/main" xmlns:p="http://schemas.openxmlformats.org/presentationml/2006/main" xmlns:r="http://schemas.openxmlformats.org/officeDocument/2006/relationships">
   <p:cSld>
     <p:bg>

--- a/Introduccion a la Ingenieria/Clases/Clase 3 - Fundamentos basicos de la Ingenieria de Sistemas/Presentacion.pptx
+++ b/Introduccion a la Ingenieria/Clases/Clase 3 - Fundamentos basicos de la Ingenieria de Sistemas/Presentacion.pptx
@@ -28,6 +28,8 @@
     <p:sldId id="276" r:id="rId27"/>
     <p:sldId id="277" r:id="rId28"/>
     <p:sldId id="278" r:id="rId29"/>
+    <p:sldId id="279" r:id="rId30"/>
+    <p:sldId id="280" r:id="rId31"/>
   </p:sldIdLst>
   <p:sldSz cx="12191695" cy="6858000" type="screen4x3"/>
   <p:notesSz cx="6858000" cy="9144000"/>
@@ -7300,7 +7302,7 @@
         <p:spPr>
           <a:xfrm>
             <a:off x="0" y="0"/>
-            <a:ext cx="12191695" cy="1170432"/>
+            <a:ext cx="12191695" cy="960120"/>
           </a:xfrm>
           <a:prstGeom prst="rect">
             <a:avLst/>
@@ -7342,7 +7344,7 @@
         </p:nvSpPr>
         <p:spPr>
           <a:xfrm>
-            <a:off x="0" y="1170432"/>
+            <a:off x="0" y="960120"/>
             <a:ext cx="12191695" cy="41148"/>
           </a:xfrm>
           <a:prstGeom prst="rect">
@@ -7386,7 +7388,7 @@
         <p:spPr>
           <a:xfrm>
             <a:off x="457200" y="164592"/>
-            <a:ext cx="11277295" cy="384048"/>
+            <a:ext cx="11277295" cy="502920"/>
           </a:xfrm>
           <a:prstGeom prst="rect">
             <a:avLst/>
@@ -7406,55 +7408,21 @@
                 </a:solidFill>
                 <a:latin typeface="Calibri"/>
               </a:rPr>
-              <a:t>Taller de hoy: Anatomía del sistema</a:t>
-            </a:r>
-          </a:p>
-        </p:txBody>
-      </p:sp>
-      <p:sp>
-        <p:nvSpPr>
-          <p:cNvPr id="5" name="TextBox 4"/>
-          <p:cNvSpPr txBox="1"/>
-          <p:nvPr/>
-        </p:nvSpPr>
-        <p:spPr>
-          <a:xfrm>
-            <a:off x="457200" y="566928"/>
-            <a:ext cx="11277295" cy="411480"/>
-          </a:xfrm>
-          <a:prstGeom prst="rect">
-            <a:avLst/>
-          </a:prstGeom>
-          <a:noFill/>
-        </p:spPr>
-        <p:txBody>
-          <a:bodyPr wrap="square">
-            <a:spAutoFit/>
-          </a:bodyPr>
-          <a:lstStyle/>
-          <a:p>
-            <a:r>
-              <a:rPr sz="1400" b="0" i="0">
-                <a:solidFill>
-                  <a:srgbClr val="B8D8EE"/>
-                </a:solidFill>
-                <a:latin typeface="Calibri"/>
-              </a:rPr>
-              <a:t>17 min en equipos · cada equipo trabaja su propio problema de la sesión 1 · ficha del sistema + prompt + correcciones</a:t>
-            </a:r>
-          </a:p>
-        </p:txBody>
-      </p:sp>
-      <p:sp>
-        <p:nvSpPr>
-          <p:cNvPr id="6" name="Rounded Rectangle 5"/>
+              <a:t>Plantilla del entregable: los 5 bloques</a:t>
+            </a:r>
+          </a:p>
+        </p:txBody>
+      </p:sp>
+      <p:sp>
+        <p:nvSpPr>
+          <p:cNvPr id="5" name="Rounded Rectangle 4"/>
           <p:cNvSpPr/>
           <p:nvPr/>
         </p:nvSpPr>
         <p:spPr>
           <a:xfrm>
-            <a:off x="457200" y="1472184"/>
-            <a:ext cx="11277295" cy="566928"/>
+            <a:off x="457200" y="1261872"/>
+            <a:ext cx="11277295" cy="5093208"/>
           </a:xfrm>
           <a:prstGeom prst="roundRect">
             <a:avLst>
@@ -7462,7 +7430,7 @@
             </a:avLst>
           </a:prstGeom>
           <a:solidFill>
-            <a:srgbClr val="F2F2F2"/>
+            <a:srgbClr val="1E2A38"/>
           </a:solidFill>
           <a:ln>
             <a:noFill/>
@@ -7492,25 +7460,23 @@
       </p:sp>
       <p:sp>
         <p:nvSpPr>
-          <p:cNvPr id="7" name="Rectangle 6"/>
+          <p:cNvPr id="6" name="Rectangle 5"/>
           <p:cNvSpPr/>
           <p:nvPr/>
         </p:nvSpPr>
         <p:spPr>
           <a:xfrm>
-            <a:off x="640080" y="1618487"/>
-            <a:ext cx="274320" cy="274320"/>
+            <a:off x="457200" y="1261872"/>
+            <a:ext cx="11277295" cy="320040"/>
           </a:xfrm>
           <a:prstGeom prst="rect">
             <a:avLst/>
           </a:prstGeom>
           <a:solidFill>
-            <a:srgbClr val="FFFFFF"/>
+            <a:srgbClr val="095292"/>
           </a:solidFill>
           <a:ln>
-            <a:solidFill>
-              <a:srgbClr val="333333"/>
-            </a:solidFill>
+            <a:noFill/>
           </a:ln>
         </p:spPr>
         <p:style>
@@ -7537,877 +7503,222 @@
       </p:sp>
       <p:sp>
         <p:nvSpPr>
-          <p:cNvPr id="8" name="Rectangle 7"/>
-          <p:cNvSpPr/>
-          <p:nvPr/>
-        </p:nvSpPr>
-        <p:spPr>
-          <a:xfrm>
-            <a:off x="640080" y="1618487"/>
-            <a:ext cx="73152" cy="274320"/>
-          </a:xfrm>
-          <a:prstGeom prst="rect">
-            <a:avLst/>
-          </a:prstGeom>
-          <a:solidFill>
-            <a:srgbClr val="269CCB"/>
-          </a:solidFill>
-          <a:ln>
-            <a:noFill/>
-          </a:ln>
-        </p:spPr>
-        <p:style>
-          <a:lnRef idx="1">
-            <a:schemeClr val="accent1"/>
-          </a:lnRef>
-          <a:fillRef idx="3">
-            <a:schemeClr val="accent1"/>
-          </a:fillRef>
-          <a:effectRef idx="2">
-            <a:schemeClr val="accent1"/>
-          </a:effectRef>
-          <a:fontRef idx="minor">
-            <a:schemeClr val="lt1"/>
-          </a:fontRef>
-        </p:style>
-        <p:txBody>
-          <a:bodyPr rtlCol="0" anchor="ctr"/>
-          <a:lstStyle/>
-          <a:p>
-            <a:pPr algn="ctr"/>
+          <p:cNvPr id="7" name="TextBox 6"/>
+          <p:cNvSpPr txBox="1"/>
+          <p:nvPr/>
+        </p:nvSpPr>
+        <p:spPr>
+          <a:xfrm>
+            <a:off x="685800" y="1307592"/>
+            <a:ext cx="10820095" cy="256032"/>
+          </a:xfrm>
+          <a:prstGeom prst="rect">
+            <a:avLst/>
+          </a:prstGeom>
+          <a:noFill/>
+        </p:spPr>
+        <p:txBody>
+          <a:bodyPr wrap="square" anchor="ctr"/>
+          <a:lstStyle/>
+          <a:p>
+            <a:r>
+              <a:rPr sz="1000" b="1" i="0">
+                <a:solidFill>
+                  <a:srgbClr val="269CCB"/>
+                </a:solidFill>
+                <a:latin typeface="Calibri"/>
+              </a:rPr>
+              <a:t>● ● ●</a:t>
+            </a:r>
+          </a:p>
+        </p:txBody>
+      </p:sp>
+      <p:sp>
+        <p:nvSpPr>
+          <p:cNvPr id="8" name="TextBox 7"/>
+          <p:cNvSpPr txBox="1"/>
+          <p:nvPr/>
+        </p:nvSpPr>
+        <p:spPr>
+          <a:xfrm>
+            <a:off x="777240" y="1719072"/>
+            <a:ext cx="10637215" cy="4453128"/>
+          </a:xfrm>
+          <a:prstGeom prst="rect">
+            <a:avLst/>
+          </a:prstGeom>
+          <a:noFill/>
+        </p:spPr>
+        <p:txBody>
+          <a:bodyPr wrap="square">
+            <a:spAutoFit/>
+          </a:bodyPr>
+          <a:lstStyle/>
+          <a:p>
+            <a:pPr>
+              <a:spcAft>
+                <a:spcPts val="400"/>
+              </a:spcAft>
+            </a:pPr>
+            <a:r>
+              <a:rPr sz="1400" b="0" i="0">
+                <a:solidFill>
+                  <a:srgbClr val="FFFFFF"/>
+                </a:solidFill>
+                <a:latin typeface="Calibri"/>
+              </a:rPr>
+              <a:t># Anatomía del sistema</a:t>
+            </a:r>
+          </a:p>
+          <a:p>
+            <a:pPr>
+              <a:spcAft>
+                <a:spcPts val="400"/>
+              </a:spcAft>
+            </a:pPr>
+            <a:r>
+              <a:rPr sz="1400" b="0" i="0">
+                <a:solidFill>
+                  <a:srgbClr val="FFFFFF"/>
+                </a:solidFill>
+                <a:latin typeface="Calibri"/>
+              </a:rPr>
+              <a:t># Documento del equipo · un bloque por titulo, sin cambiar los nombres</a:t>
+            </a:r>
+          </a:p>
+          <a:p>
+            <a:pPr>
+              <a:spcAft>
+                <a:spcPts val="400"/>
+              </a:spcAft>
+            </a:pPr>
+            <a:r>
+              <a:rPr sz="1400" b="0" i="0">
+                <a:solidFill>
+                  <a:srgbClr val="FFFFFF"/>
+                </a:solidFill>
+                <a:latin typeface="Calibri"/>
+              </a:rPr>
+              <a:t/>
+            </a:r>
+          </a:p>
+          <a:p>
+            <a:pPr>
+              <a:spcAft>
+                <a:spcPts val="400"/>
+              </a:spcAft>
+            </a:pPr>
+            <a:r>
+              <a:rPr sz="1400" b="0" i="0">
+                <a:solidFill>
+                  <a:srgbClr val="FFFFFF"/>
+                </a:solidFill>
+                <a:latin typeface="Calibri"/>
+              </a:rPr>
+              <a:t>## 1. PROPÓSITO Y FRONTERA</a:t>
+            </a:r>
+          </a:p>
+          <a:p>
+            <a:pPr>
+              <a:spcAft>
+                <a:spcPts val="400"/>
+              </a:spcAft>
+            </a:pPr>
+            <a:r>
+              <a:rPr sz="1400" b="0" i="0">
+                <a:solidFill>
+                  <a:srgbClr val="FFFFFF"/>
+                </a:solidFill>
+                <a:latin typeface="Calibri"/>
+              </a:rPr>
+              <a:t>## 2. ENTRADAS, PROCESO Y SALIDAS</a:t>
+            </a:r>
+          </a:p>
+          <a:p>
+            <a:pPr>
+              <a:spcAft>
+                <a:spcPts val="400"/>
+              </a:spcAft>
+            </a:pPr>
+            <a:r>
+              <a:rPr sz="1400" b="0" i="0">
+                <a:solidFill>
+                  <a:srgbClr val="FFFFFF"/>
+                </a:solidFill>
+                <a:latin typeface="Calibri"/>
+              </a:rPr>
+              <a:t>## 3. LOS ACTORES</a:t>
+            </a:r>
+          </a:p>
+          <a:p>
+            <a:pPr>
+              <a:spcAft>
+                <a:spcPts val="400"/>
+              </a:spcAft>
+            </a:pPr>
+            <a:r>
+              <a:rPr sz="1400" b="0" i="0">
+                <a:solidFill>
+                  <a:srgbClr val="FFFFFF"/>
+                </a:solidFill>
+                <a:latin typeface="Calibri"/>
+              </a:rPr>
+              <a:t>## 4. LA RETROALIMENTACIÓN</a:t>
+            </a:r>
+          </a:p>
+          <a:p>
+            <a:pPr>
+              <a:spcAft>
+                <a:spcPts val="400"/>
+              </a:spcAft>
+            </a:pPr>
+            <a:r>
+              <a:rPr sz="1400" b="0" i="0">
+                <a:solidFill>
+                  <a:srgbClr val="FFFFFF"/>
+                </a:solidFill>
+                <a:latin typeface="Calibri"/>
+              </a:rPr>
+              <a:t>## 5. LA IA: PROMPT Y CORRECCIONES</a:t>
+            </a:r>
+          </a:p>
+          <a:p>
+            <a:pPr>
+              <a:spcAft>
+                <a:spcPts val="400"/>
+              </a:spcAft>
+            </a:pPr>
+            <a:r>
+              <a:rPr sz="1400" b="0" i="0">
+                <a:solidFill>
+                  <a:srgbClr val="FFFFFF"/>
+                </a:solidFill>
+                <a:latin typeface="Calibri"/>
+              </a:rPr>
+              <a:t/>
+            </a:r>
+          </a:p>
+          <a:p>
+            <a:pPr>
+              <a:spcAft>
+                <a:spcPts val="400"/>
+              </a:spcAft>
+            </a:pPr>
+            <a:r>
+              <a:rPr sz="1400" b="0" i="0">
+                <a:solidFill>
+                  <a:srgbClr val="FFFFFF"/>
+                </a:solidFill>
+                <a:latin typeface="Calibri"/>
+              </a:rPr>
+              <a:t># Los titulos van TAL CUAL: son con los que se califica.</a:t>
+            </a:r>
           </a:p>
         </p:txBody>
       </p:sp>
       <p:sp>
         <p:nvSpPr>
           <p:cNvPr id="9" name="TextBox 8"/>
-          <p:cNvSpPr txBox="1"/>
-          <p:nvPr/>
-        </p:nvSpPr>
-        <p:spPr>
-          <a:xfrm>
-            <a:off x="1097280" y="1563624"/>
-            <a:ext cx="10362895" cy="402336"/>
-          </a:xfrm>
-          <a:prstGeom prst="rect">
-            <a:avLst/>
-          </a:prstGeom>
-          <a:noFill/>
-        </p:spPr>
-        <p:txBody>
-          <a:bodyPr wrap="square" anchor="ctr"/>
-          <a:lstStyle/>
-          <a:p>
-            <a:r>
-              <a:rPr sz="1500" b="1" i="0">
-                <a:solidFill>
-                  <a:srgbClr val="333333"/>
-                </a:solidFill>
-                <a:latin typeface="Calibri"/>
-              </a:rPr>
-              <a:t>PROPÓSITO Y FRONTERA</a:t>
-            </a:r>
-            <a:r>
-              <a:rPr sz="1500" b="0" i="0">
-                <a:solidFill>
-                  <a:srgbClr val="333333"/>
-                </a:solidFill>
-                <a:latin typeface="Calibri"/>
-              </a:rPr>
-              <a:t> — Para qué existe el sistema, en una frase. Y qué queda </a:t>
-            </a:r>
-            <a:r>
-              <a:rPr sz="1500" b="1" i="0">
-                <a:solidFill>
-                  <a:srgbClr val="333333"/>
-                </a:solidFill>
-                <a:latin typeface="Calibri"/>
-              </a:rPr>
-              <a:t>dentro</a:t>
-            </a:r>
-            <a:r>
-              <a:rPr sz="1500" b="0" i="0">
-                <a:solidFill>
-                  <a:srgbClr val="333333"/>
-                </a:solidFill>
-                <a:latin typeface="Calibri"/>
-              </a:rPr>
-              <a:t> y qué </a:t>
-            </a:r>
-            <a:r>
-              <a:rPr sz="1500" b="1" i="0">
-                <a:solidFill>
-                  <a:srgbClr val="333333"/>
-                </a:solidFill>
-                <a:latin typeface="Calibri"/>
-              </a:rPr>
-              <a:t>fuera</a:t>
-            </a:r>
-            <a:r>
-              <a:rPr sz="1500" b="0" i="0">
-                <a:solidFill>
-                  <a:srgbClr val="333333"/>
-                </a:solidFill>
-                <a:latin typeface="Calibri"/>
-              </a:rPr>
-              <a:t> de él, con la razón de cada exclusión importante.</a:t>
-            </a:r>
-          </a:p>
-        </p:txBody>
-      </p:sp>
-      <p:sp>
-        <p:nvSpPr>
-          <p:cNvPr id="10" name="Rounded Rectangle 9"/>
-          <p:cNvSpPr/>
-          <p:nvPr/>
-        </p:nvSpPr>
-        <p:spPr>
-          <a:xfrm>
-            <a:off x="457200" y="2148839"/>
-            <a:ext cx="11277295" cy="566928"/>
-          </a:xfrm>
-          <a:prstGeom prst="roundRect">
-            <a:avLst>
-              <a:gd name="adj" fmla="val 12000"/>
-            </a:avLst>
-          </a:prstGeom>
-          <a:solidFill>
-            <a:srgbClr val="F2F2F2"/>
-          </a:solidFill>
-          <a:ln>
-            <a:noFill/>
-          </a:ln>
-        </p:spPr>
-        <p:style>
-          <a:lnRef idx="1">
-            <a:schemeClr val="accent1"/>
-          </a:lnRef>
-          <a:fillRef idx="3">
-            <a:schemeClr val="accent1"/>
-          </a:fillRef>
-          <a:effectRef idx="2">
-            <a:schemeClr val="accent1"/>
-          </a:effectRef>
-          <a:fontRef idx="minor">
-            <a:schemeClr val="lt1"/>
-          </a:fontRef>
-        </p:style>
-        <p:txBody>
-          <a:bodyPr rtlCol="0" anchor="ctr"/>
-          <a:lstStyle/>
-          <a:p>
-            <a:pPr algn="ctr"/>
-          </a:p>
-        </p:txBody>
-      </p:sp>
-      <p:sp>
-        <p:nvSpPr>
-          <p:cNvPr id="11" name="Rectangle 10"/>
-          <p:cNvSpPr/>
-          <p:nvPr/>
-        </p:nvSpPr>
-        <p:spPr>
-          <a:xfrm>
-            <a:off x="640080" y="2295144"/>
-            <a:ext cx="274320" cy="274320"/>
-          </a:xfrm>
-          <a:prstGeom prst="rect">
-            <a:avLst/>
-          </a:prstGeom>
-          <a:solidFill>
-            <a:srgbClr val="FFFFFF"/>
-          </a:solidFill>
-          <a:ln>
-            <a:solidFill>
-              <a:srgbClr val="333333"/>
-            </a:solidFill>
-          </a:ln>
-        </p:spPr>
-        <p:style>
-          <a:lnRef idx="1">
-            <a:schemeClr val="accent1"/>
-          </a:lnRef>
-          <a:fillRef idx="3">
-            <a:schemeClr val="accent1"/>
-          </a:fillRef>
-          <a:effectRef idx="2">
-            <a:schemeClr val="accent1"/>
-          </a:effectRef>
-          <a:fontRef idx="minor">
-            <a:schemeClr val="lt1"/>
-          </a:fontRef>
-        </p:style>
-        <p:txBody>
-          <a:bodyPr rtlCol="0" anchor="ctr"/>
-          <a:lstStyle/>
-          <a:p>
-            <a:pPr algn="ctr"/>
-          </a:p>
-        </p:txBody>
-      </p:sp>
-      <p:sp>
-        <p:nvSpPr>
-          <p:cNvPr id="12" name="Rectangle 11"/>
-          <p:cNvSpPr/>
-          <p:nvPr/>
-        </p:nvSpPr>
-        <p:spPr>
-          <a:xfrm>
-            <a:off x="640080" y="2295144"/>
-            <a:ext cx="73152" cy="274320"/>
-          </a:xfrm>
-          <a:prstGeom prst="rect">
-            <a:avLst/>
-          </a:prstGeom>
-          <a:solidFill>
-            <a:srgbClr val="269CCB"/>
-          </a:solidFill>
-          <a:ln>
-            <a:noFill/>
-          </a:ln>
-        </p:spPr>
-        <p:style>
-          <a:lnRef idx="1">
-            <a:schemeClr val="accent1"/>
-          </a:lnRef>
-          <a:fillRef idx="3">
-            <a:schemeClr val="accent1"/>
-          </a:fillRef>
-          <a:effectRef idx="2">
-            <a:schemeClr val="accent1"/>
-          </a:effectRef>
-          <a:fontRef idx="minor">
-            <a:schemeClr val="lt1"/>
-          </a:fontRef>
-        </p:style>
-        <p:txBody>
-          <a:bodyPr rtlCol="0" anchor="ctr"/>
-          <a:lstStyle/>
-          <a:p>
-            <a:pPr algn="ctr"/>
-          </a:p>
-        </p:txBody>
-      </p:sp>
-      <p:sp>
-        <p:nvSpPr>
-          <p:cNvPr id="13" name="TextBox 12"/>
-          <p:cNvSpPr txBox="1"/>
-          <p:nvPr/>
-        </p:nvSpPr>
-        <p:spPr>
-          <a:xfrm>
-            <a:off x="1097280" y="2240279"/>
-            <a:ext cx="10362895" cy="402336"/>
-          </a:xfrm>
-          <a:prstGeom prst="rect">
-            <a:avLst/>
-          </a:prstGeom>
-          <a:noFill/>
-        </p:spPr>
-        <p:txBody>
-          <a:bodyPr wrap="square" anchor="ctr"/>
-          <a:lstStyle/>
-          <a:p>
-            <a:r>
-              <a:rPr sz="1500" b="1" i="0">
-                <a:solidFill>
-                  <a:srgbClr val="333333"/>
-                </a:solidFill>
-                <a:latin typeface="Calibri"/>
-              </a:rPr>
-              <a:t>ENTRADAS, PROCESO Y SALIDAS</a:t>
-            </a:r>
-            <a:r>
-              <a:rPr sz="1500" b="0" i="0">
-                <a:solidFill>
-                  <a:srgbClr val="333333"/>
-                </a:solidFill>
-                <a:latin typeface="Calibri"/>
-              </a:rPr>
-              <a:t> — Qué entra, qué se hace con eso y qué sale. Señalen </a:t>
-            </a:r>
-            <a:r>
-              <a:rPr sz="1500" b="1" i="0">
-                <a:solidFill>
-                  <a:srgbClr val="333333"/>
-                </a:solidFill>
-                <a:latin typeface="Calibri"/>
-              </a:rPr>
-              <a:t>dónde está el software</a:t>
-            </a:r>
-            <a:r>
-              <a:rPr sz="1500" b="0" i="0">
-                <a:solidFill>
-                  <a:srgbClr val="333333"/>
-                </a:solidFill>
-                <a:latin typeface="Calibri"/>
-              </a:rPr>
-              <a:t>, si hay.</a:t>
-            </a:r>
-          </a:p>
-        </p:txBody>
-      </p:sp>
-      <p:sp>
-        <p:nvSpPr>
-          <p:cNvPr id="14" name="Rounded Rectangle 13"/>
-          <p:cNvSpPr/>
-          <p:nvPr/>
-        </p:nvSpPr>
-        <p:spPr>
-          <a:xfrm>
-            <a:off x="457200" y="2825496"/>
-            <a:ext cx="11277295" cy="566928"/>
-          </a:xfrm>
-          <a:prstGeom prst="roundRect">
-            <a:avLst>
-              <a:gd name="adj" fmla="val 12000"/>
-            </a:avLst>
-          </a:prstGeom>
-          <a:solidFill>
-            <a:srgbClr val="F2F2F2"/>
-          </a:solidFill>
-          <a:ln>
-            <a:noFill/>
-          </a:ln>
-        </p:spPr>
-        <p:style>
-          <a:lnRef idx="1">
-            <a:schemeClr val="accent1"/>
-          </a:lnRef>
-          <a:fillRef idx="3">
-            <a:schemeClr val="accent1"/>
-          </a:fillRef>
-          <a:effectRef idx="2">
-            <a:schemeClr val="accent1"/>
-          </a:effectRef>
-          <a:fontRef idx="minor">
-            <a:schemeClr val="lt1"/>
-          </a:fontRef>
-        </p:style>
-        <p:txBody>
-          <a:bodyPr rtlCol="0" anchor="ctr"/>
-          <a:lstStyle/>
-          <a:p>
-            <a:pPr algn="ctr"/>
-          </a:p>
-        </p:txBody>
-      </p:sp>
-      <p:sp>
-        <p:nvSpPr>
-          <p:cNvPr id="15" name="Rectangle 14"/>
-          <p:cNvSpPr/>
-          <p:nvPr/>
-        </p:nvSpPr>
-        <p:spPr>
-          <a:xfrm>
-            <a:off x="640080" y="2971800"/>
-            <a:ext cx="274320" cy="274320"/>
-          </a:xfrm>
-          <a:prstGeom prst="rect">
-            <a:avLst/>
-          </a:prstGeom>
-          <a:solidFill>
-            <a:srgbClr val="FFFFFF"/>
-          </a:solidFill>
-          <a:ln>
-            <a:solidFill>
-              <a:srgbClr val="333333"/>
-            </a:solidFill>
-          </a:ln>
-        </p:spPr>
-        <p:style>
-          <a:lnRef idx="1">
-            <a:schemeClr val="accent1"/>
-          </a:lnRef>
-          <a:fillRef idx="3">
-            <a:schemeClr val="accent1"/>
-          </a:fillRef>
-          <a:effectRef idx="2">
-            <a:schemeClr val="accent1"/>
-          </a:effectRef>
-          <a:fontRef idx="minor">
-            <a:schemeClr val="lt1"/>
-          </a:fontRef>
-        </p:style>
-        <p:txBody>
-          <a:bodyPr rtlCol="0" anchor="ctr"/>
-          <a:lstStyle/>
-          <a:p>
-            <a:pPr algn="ctr"/>
-          </a:p>
-        </p:txBody>
-      </p:sp>
-      <p:sp>
-        <p:nvSpPr>
-          <p:cNvPr id="16" name="Rectangle 15"/>
-          <p:cNvSpPr/>
-          <p:nvPr/>
-        </p:nvSpPr>
-        <p:spPr>
-          <a:xfrm>
-            <a:off x="640080" y="2971800"/>
-            <a:ext cx="73152" cy="274320"/>
-          </a:xfrm>
-          <a:prstGeom prst="rect">
-            <a:avLst/>
-          </a:prstGeom>
-          <a:solidFill>
-            <a:srgbClr val="269CCB"/>
-          </a:solidFill>
-          <a:ln>
-            <a:noFill/>
-          </a:ln>
-        </p:spPr>
-        <p:style>
-          <a:lnRef idx="1">
-            <a:schemeClr val="accent1"/>
-          </a:lnRef>
-          <a:fillRef idx="3">
-            <a:schemeClr val="accent1"/>
-          </a:fillRef>
-          <a:effectRef idx="2">
-            <a:schemeClr val="accent1"/>
-          </a:effectRef>
-          <a:fontRef idx="minor">
-            <a:schemeClr val="lt1"/>
-          </a:fontRef>
-        </p:style>
-        <p:txBody>
-          <a:bodyPr rtlCol="0" anchor="ctr"/>
-          <a:lstStyle/>
-          <a:p>
-            <a:pPr algn="ctr"/>
-          </a:p>
-        </p:txBody>
-      </p:sp>
-      <p:sp>
-        <p:nvSpPr>
-          <p:cNvPr id="17" name="TextBox 16"/>
-          <p:cNvSpPr txBox="1"/>
-          <p:nvPr/>
-        </p:nvSpPr>
-        <p:spPr>
-          <a:xfrm>
-            <a:off x="1097280" y="2916936"/>
-            <a:ext cx="10362895" cy="402336"/>
-          </a:xfrm>
-          <a:prstGeom prst="rect">
-            <a:avLst/>
-          </a:prstGeom>
-          <a:noFill/>
-        </p:spPr>
-        <p:txBody>
-          <a:bodyPr wrap="square" anchor="ctr"/>
-          <a:lstStyle/>
-          <a:p>
-            <a:r>
-              <a:rPr sz="1500" b="1" i="0">
-                <a:solidFill>
-                  <a:srgbClr val="333333"/>
-                </a:solidFill>
-                <a:latin typeface="Calibri"/>
-              </a:rPr>
-              <a:t>LOS ACTORES</a:t>
-            </a:r>
-            <a:r>
-              <a:rPr sz="1500" b="0" i="0">
-                <a:solidFill>
-                  <a:srgbClr val="333333"/>
-                </a:solidFill>
-                <a:latin typeface="Calibri"/>
-              </a:rPr>
-              <a:t> — Todos los afectados, con su rol y qué le importa a cada uno. Incluyan </a:t>
-            </a:r>
-            <a:r>
-              <a:rPr sz="1500" b="1" i="0">
-                <a:solidFill>
-                  <a:srgbClr val="333333"/>
-                </a:solidFill>
-                <a:latin typeface="Calibri"/>
-              </a:rPr>
-              <a:t>al menos uno que no use el sistema pero sí sufra el resultado</a:t>
-            </a:r>
-            <a:r>
-              <a:rPr sz="1500" b="0" i="0">
-                <a:solidFill>
-                  <a:srgbClr val="333333"/>
-                </a:solidFill>
-                <a:latin typeface="Calibri"/>
-              </a:rPr>
-              <a:t>.</a:t>
-            </a:r>
-          </a:p>
-        </p:txBody>
-      </p:sp>
-      <p:sp>
-        <p:nvSpPr>
-          <p:cNvPr id="18" name="Rounded Rectangle 17"/>
-          <p:cNvSpPr/>
-          <p:nvPr/>
-        </p:nvSpPr>
-        <p:spPr>
-          <a:xfrm>
-            <a:off x="457200" y="3502152"/>
-            <a:ext cx="11277295" cy="566928"/>
-          </a:xfrm>
-          <a:prstGeom prst="roundRect">
-            <a:avLst>
-              <a:gd name="adj" fmla="val 12000"/>
-            </a:avLst>
-          </a:prstGeom>
-          <a:solidFill>
-            <a:srgbClr val="F2F2F2"/>
-          </a:solidFill>
-          <a:ln>
-            <a:noFill/>
-          </a:ln>
-        </p:spPr>
-        <p:style>
-          <a:lnRef idx="1">
-            <a:schemeClr val="accent1"/>
-          </a:lnRef>
-          <a:fillRef idx="3">
-            <a:schemeClr val="accent1"/>
-          </a:fillRef>
-          <a:effectRef idx="2">
-            <a:schemeClr val="accent1"/>
-          </a:effectRef>
-          <a:fontRef idx="minor">
-            <a:schemeClr val="lt1"/>
-          </a:fontRef>
-        </p:style>
-        <p:txBody>
-          <a:bodyPr rtlCol="0" anchor="ctr"/>
-          <a:lstStyle/>
-          <a:p>
-            <a:pPr algn="ctr"/>
-          </a:p>
-        </p:txBody>
-      </p:sp>
-      <p:sp>
-        <p:nvSpPr>
-          <p:cNvPr id="19" name="Rectangle 18"/>
-          <p:cNvSpPr/>
-          <p:nvPr/>
-        </p:nvSpPr>
-        <p:spPr>
-          <a:xfrm>
-            <a:off x="640080" y="3648456"/>
-            <a:ext cx="274320" cy="274320"/>
-          </a:xfrm>
-          <a:prstGeom prst="rect">
-            <a:avLst/>
-          </a:prstGeom>
-          <a:solidFill>
-            <a:srgbClr val="FFFFFF"/>
-          </a:solidFill>
-          <a:ln>
-            <a:solidFill>
-              <a:srgbClr val="333333"/>
-            </a:solidFill>
-          </a:ln>
-        </p:spPr>
-        <p:style>
-          <a:lnRef idx="1">
-            <a:schemeClr val="accent1"/>
-          </a:lnRef>
-          <a:fillRef idx="3">
-            <a:schemeClr val="accent1"/>
-          </a:fillRef>
-          <a:effectRef idx="2">
-            <a:schemeClr val="accent1"/>
-          </a:effectRef>
-          <a:fontRef idx="minor">
-            <a:schemeClr val="lt1"/>
-          </a:fontRef>
-        </p:style>
-        <p:txBody>
-          <a:bodyPr rtlCol="0" anchor="ctr"/>
-          <a:lstStyle/>
-          <a:p>
-            <a:pPr algn="ctr"/>
-          </a:p>
-        </p:txBody>
-      </p:sp>
-      <p:sp>
-        <p:nvSpPr>
-          <p:cNvPr id="20" name="Rectangle 19"/>
-          <p:cNvSpPr/>
-          <p:nvPr/>
-        </p:nvSpPr>
-        <p:spPr>
-          <a:xfrm>
-            <a:off x="640080" y="3648456"/>
-            <a:ext cx="73152" cy="274320"/>
-          </a:xfrm>
-          <a:prstGeom prst="rect">
-            <a:avLst/>
-          </a:prstGeom>
-          <a:solidFill>
-            <a:srgbClr val="269CCB"/>
-          </a:solidFill>
-          <a:ln>
-            <a:noFill/>
-          </a:ln>
-        </p:spPr>
-        <p:style>
-          <a:lnRef idx="1">
-            <a:schemeClr val="accent1"/>
-          </a:lnRef>
-          <a:fillRef idx="3">
-            <a:schemeClr val="accent1"/>
-          </a:fillRef>
-          <a:effectRef idx="2">
-            <a:schemeClr val="accent1"/>
-          </a:effectRef>
-          <a:fontRef idx="minor">
-            <a:schemeClr val="lt1"/>
-          </a:fontRef>
-        </p:style>
-        <p:txBody>
-          <a:bodyPr rtlCol="0" anchor="ctr"/>
-          <a:lstStyle/>
-          <a:p>
-            <a:pPr algn="ctr"/>
-          </a:p>
-        </p:txBody>
-      </p:sp>
-      <p:sp>
-        <p:nvSpPr>
-          <p:cNvPr id="21" name="TextBox 20"/>
-          <p:cNvSpPr txBox="1"/>
-          <p:nvPr/>
-        </p:nvSpPr>
-        <p:spPr>
-          <a:xfrm>
-            <a:off x="1097280" y="3593592"/>
-            <a:ext cx="10362895" cy="402336"/>
-          </a:xfrm>
-          <a:prstGeom prst="rect">
-            <a:avLst/>
-          </a:prstGeom>
-          <a:noFill/>
-        </p:spPr>
-        <p:txBody>
-          <a:bodyPr wrap="square" anchor="ctr"/>
-          <a:lstStyle/>
-          <a:p>
-            <a:r>
-              <a:rPr sz="1500" b="1" i="0">
-                <a:solidFill>
-                  <a:srgbClr val="333333"/>
-                </a:solidFill>
-                <a:latin typeface="Calibri"/>
-              </a:rPr>
-              <a:t>LA RETROALIMENTACIÓN</a:t>
-            </a:r>
-            <a:r>
-              <a:rPr sz="1500" b="0" i="0">
-                <a:solidFill>
-                  <a:srgbClr val="333333"/>
-                </a:solidFill>
-                <a:latin typeface="Calibri"/>
-              </a:rPr>
-              <a:t> — ¿Cómo se entera este sistema de que algo salió mal? Si no se entera, escríbanlo: es un hallazgo, no un error suyo.</a:t>
-            </a:r>
-          </a:p>
-        </p:txBody>
-      </p:sp>
-      <p:sp>
-        <p:nvSpPr>
-          <p:cNvPr id="22" name="Rounded Rectangle 21"/>
-          <p:cNvSpPr/>
-          <p:nvPr/>
-        </p:nvSpPr>
-        <p:spPr>
-          <a:xfrm>
-            <a:off x="457200" y="4178808"/>
-            <a:ext cx="11277295" cy="566928"/>
-          </a:xfrm>
-          <a:prstGeom prst="roundRect">
-            <a:avLst>
-              <a:gd name="adj" fmla="val 12000"/>
-            </a:avLst>
-          </a:prstGeom>
-          <a:solidFill>
-            <a:srgbClr val="F2F2F2"/>
-          </a:solidFill>
-          <a:ln>
-            <a:noFill/>
-          </a:ln>
-        </p:spPr>
-        <p:style>
-          <a:lnRef idx="1">
-            <a:schemeClr val="accent1"/>
-          </a:lnRef>
-          <a:fillRef idx="3">
-            <a:schemeClr val="accent1"/>
-          </a:fillRef>
-          <a:effectRef idx="2">
-            <a:schemeClr val="accent1"/>
-          </a:effectRef>
-          <a:fontRef idx="minor">
-            <a:schemeClr val="lt1"/>
-          </a:fontRef>
-        </p:style>
-        <p:txBody>
-          <a:bodyPr rtlCol="0" anchor="ctr"/>
-          <a:lstStyle/>
-          <a:p>
-            <a:pPr algn="ctr"/>
-          </a:p>
-        </p:txBody>
-      </p:sp>
-      <p:sp>
-        <p:nvSpPr>
-          <p:cNvPr id="23" name="Rectangle 22"/>
-          <p:cNvSpPr/>
-          <p:nvPr/>
-        </p:nvSpPr>
-        <p:spPr>
-          <a:xfrm>
-            <a:off x="640080" y="4325112"/>
-            <a:ext cx="274320" cy="274320"/>
-          </a:xfrm>
-          <a:prstGeom prst="rect">
-            <a:avLst/>
-          </a:prstGeom>
-          <a:solidFill>
-            <a:srgbClr val="FFFFFF"/>
-          </a:solidFill>
-          <a:ln>
-            <a:solidFill>
-              <a:srgbClr val="333333"/>
-            </a:solidFill>
-          </a:ln>
-        </p:spPr>
-        <p:style>
-          <a:lnRef idx="1">
-            <a:schemeClr val="accent1"/>
-          </a:lnRef>
-          <a:fillRef idx="3">
-            <a:schemeClr val="accent1"/>
-          </a:fillRef>
-          <a:effectRef idx="2">
-            <a:schemeClr val="accent1"/>
-          </a:effectRef>
-          <a:fontRef idx="minor">
-            <a:schemeClr val="lt1"/>
-          </a:fontRef>
-        </p:style>
-        <p:txBody>
-          <a:bodyPr rtlCol="0" anchor="ctr"/>
-          <a:lstStyle/>
-          <a:p>
-            <a:pPr algn="ctr"/>
-          </a:p>
-        </p:txBody>
-      </p:sp>
-      <p:sp>
-        <p:nvSpPr>
-          <p:cNvPr id="24" name="Rectangle 23"/>
-          <p:cNvSpPr/>
-          <p:nvPr/>
-        </p:nvSpPr>
-        <p:spPr>
-          <a:xfrm>
-            <a:off x="640080" y="4325112"/>
-            <a:ext cx="73152" cy="274320"/>
-          </a:xfrm>
-          <a:prstGeom prst="rect">
-            <a:avLst/>
-          </a:prstGeom>
-          <a:solidFill>
-            <a:srgbClr val="269CCB"/>
-          </a:solidFill>
-          <a:ln>
-            <a:noFill/>
-          </a:ln>
-        </p:spPr>
-        <p:style>
-          <a:lnRef idx="1">
-            <a:schemeClr val="accent1"/>
-          </a:lnRef>
-          <a:fillRef idx="3">
-            <a:schemeClr val="accent1"/>
-          </a:fillRef>
-          <a:effectRef idx="2">
-            <a:schemeClr val="accent1"/>
-          </a:effectRef>
-          <a:fontRef idx="minor">
-            <a:schemeClr val="lt1"/>
-          </a:fontRef>
-        </p:style>
-        <p:txBody>
-          <a:bodyPr rtlCol="0" anchor="ctr"/>
-          <a:lstStyle/>
-          <a:p>
-            <a:pPr algn="ctr"/>
-          </a:p>
-        </p:txBody>
-      </p:sp>
-      <p:sp>
-        <p:nvSpPr>
-          <p:cNvPr id="25" name="TextBox 24"/>
-          <p:cNvSpPr txBox="1"/>
-          <p:nvPr/>
-        </p:nvSpPr>
-        <p:spPr>
-          <a:xfrm>
-            <a:off x="1097280" y="4270248"/>
-            <a:ext cx="10362895" cy="402336"/>
-          </a:xfrm>
-          <a:prstGeom prst="rect">
-            <a:avLst/>
-          </a:prstGeom>
-          <a:noFill/>
-        </p:spPr>
-        <p:txBody>
-          <a:bodyPr wrap="square" anchor="ctr"/>
-          <a:lstStyle/>
-          <a:p>
-            <a:r>
-              <a:rPr sz="1500" b="1" i="0">
-                <a:solidFill>
-                  <a:srgbClr val="333333"/>
-                </a:solidFill>
-                <a:latin typeface="Calibri"/>
-              </a:rPr>
-              <a:t>LA IA: PROMPT Y CORRECCIONES</a:t>
-            </a:r>
-            <a:r>
-              <a:rPr sz="1500" b="0" i="0">
-                <a:solidFill>
-                  <a:srgbClr val="333333"/>
-                </a:solidFill>
-                <a:latin typeface="Calibri"/>
-              </a:rPr>
-              <a:t> — El prompt exacto que usaron, y una lista de </a:t>
-            </a:r>
-            <a:r>
-              <a:rPr sz="1500" b="1" i="0">
-                <a:solidFill>
-                  <a:srgbClr val="333333"/>
-                </a:solidFill>
-                <a:latin typeface="Calibri"/>
-              </a:rPr>
-              <a:t>al menos tres cosas que la IA escribió mal</a:t>
-            </a:r>
-            <a:r>
-              <a:rPr sz="1500" b="0" i="0">
-                <a:solidFill>
-                  <a:srgbClr val="333333"/>
-                </a:solidFill>
-                <a:latin typeface="Calibri"/>
-              </a:rPr>
-              <a:t> y cómo las corrigieron.</a:t>
-            </a:r>
-          </a:p>
-        </p:txBody>
-      </p:sp>
-      <p:sp>
-        <p:nvSpPr>
-          <p:cNvPr id="26" name="TextBox 25"/>
           <p:cNvSpPr txBox="1"/>
           <p:nvPr/>
         </p:nvSpPr>
@@ -8475,7 +7786,7 @@
         <p:spPr>
           <a:xfrm>
             <a:off x="0" y="0"/>
-            <a:ext cx="12191695" cy="1170432"/>
+            <a:ext cx="12191695" cy="960120"/>
           </a:xfrm>
           <a:prstGeom prst="rect">
             <a:avLst/>
@@ -8517,7 +7828,7 @@
         </p:nvSpPr>
         <p:spPr>
           <a:xfrm>
-            <a:off x="0" y="1170432"/>
+            <a:off x="0" y="960120"/>
             <a:ext cx="12191695" cy="41148"/>
           </a:xfrm>
           <a:prstGeom prst="rect">
@@ -8561,7 +7872,7 @@
         <p:spPr>
           <a:xfrm>
             <a:off x="457200" y="164592"/>
-            <a:ext cx="11277295" cy="384048"/>
+            <a:ext cx="11277295" cy="502920"/>
           </a:xfrm>
           <a:prstGeom prst="rect">
             <a:avLst/>
@@ -8581,55 +7892,21 @@
                 </a:solidFill>
                 <a:latin typeface="Calibri"/>
               </a:rPr>
-              <a:t>Cómo se expone en 3 minutos</a:t>
-            </a:r>
-          </a:p>
-        </p:txBody>
-      </p:sp>
-      <p:sp>
-        <p:nvSpPr>
-          <p:cNvPr id="5" name="TextBox 4"/>
-          <p:cNvSpPr txBox="1"/>
-          <p:nvPr/>
-        </p:nvSpPr>
-        <p:spPr>
-          <a:xfrm>
-            <a:off x="457200" y="566928"/>
-            <a:ext cx="11277295" cy="411480"/>
-          </a:xfrm>
-          <a:prstGeom prst="rect">
-            <a:avLst/>
-          </a:prstGeom>
-          <a:noFill/>
-        </p:spPr>
-        <p:txBody>
-          <a:bodyPr wrap="square">
-            <a:spAutoFit/>
-          </a:bodyPr>
-          <a:lstStyle/>
-          <a:p>
-            <a:r>
-              <a:rPr sz="1400" b="0" i="0">
-                <a:solidFill>
-                  <a:srgbClr val="B8D8EE"/>
-                </a:solidFill>
-                <a:latin typeface="Calibri"/>
-              </a:rPr>
-              <a:t>Habla el vocero con la pantalla ya compartida · cronómetro en pantalla · se corta al llegar a cero</a:t>
-            </a:r>
-          </a:p>
-        </p:txBody>
-      </p:sp>
-      <p:sp>
-        <p:nvSpPr>
-          <p:cNvPr id="6" name="Rounded Rectangle 5"/>
+              <a:t>Guion de la exposicion, con tiempos</a:t>
+            </a:r>
+          </a:p>
+        </p:txBody>
+      </p:sp>
+      <p:sp>
+        <p:nvSpPr>
+          <p:cNvPr id="5" name="Rounded Rectangle 4"/>
           <p:cNvSpPr/>
           <p:nvPr/>
         </p:nvSpPr>
         <p:spPr>
           <a:xfrm>
-            <a:off x="457200" y="1659636"/>
-            <a:ext cx="11277295" cy="1051560"/>
+            <a:off x="457200" y="1261872"/>
+            <a:ext cx="11277295" cy="5093208"/>
           </a:xfrm>
           <a:prstGeom prst="roundRect">
             <a:avLst>
@@ -8637,7 +7914,7 @@
             </a:avLst>
           </a:prstGeom>
           <a:solidFill>
-            <a:srgbClr val="F2F2F2"/>
+            <a:srgbClr val="1E2A38"/>
           </a:solidFill>
           <a:ln>
             <a:noFill/>
@@ -8667,19 +7944,17 @@
       </p:sp>
       <p:sp>
         <p:nvSpPr>
-          <p:cNvPr id="7" name="Rounded Rectangle 6"/>
+          <p:cNvPr id="6" name="Rectangle 5"/>
           <p:cNvSpPr/>
           <p:nvPr/>
         </p:nvSpPr>
         <p:spPr>
           <a:xfrm>
-            <a:off x="594360" y="1965960"/>
-            <a:ext cx="438912" cy="438912"/>
-          </a:xfrm>
-          <a:prstGeom prst="roundRect">
-            <a:avLst>
-              <a:gd name="adj" fmla="val 12000"/>
-            </a:avLst>
+            <a:off x="457200" y="1261872"/>
+            <a:ext cx="11277295" cy="320040"/>
+          </a:xfrm>
+          <a:prstGeom prst="rect">
+            <a:avLst/>
           </a:prstGeom>
           <a:solidFill>
             <a:srgbClr val="095292"/>
@@ -8712,14 +7987,46 @@
       </p:sp>
       <p:sp>
         <p:nvSpPr>
+          <p:cNvPr id="7" name="TextBox 6"/>
+          <p:cNvSpPr txBox="1"/>
+          <p:nvPr/>
+        </p:nvSpPr>
+        <p:spPr>
+          <a:xfrm>
+            <a:off x="685800" y="1307592"/>
+            <a:ext cx="10820095" cy="256032"/>
+          </a:xfrm>
+          <a:prstGeom prst="rect">
+            <a:avLst/>
+          </a:prstGeom>
+          <a:noFill/>
+        </p:spPr>
+        <p:txBody>
+          <a:bodyPr wrap="square" anchor="ctr"/>
+          <a:lstStyle/>
+          <a:p>
+            <a:r>
+              <a:rPr sz="1000" b="1" i="0">
+                <a:solidFill>
+                  <a:srgbClr val="269CCB"/>
+                </a:solidFill>
+                <a:latin typeface="Calibri"/>
+              </a:rPr>
+              <a:t>● ● ●</a:t>
+            </a:r>
+          </a:p>
+        </p:txBody>
+      </p:sp>
+      <p:sp>
+        <p:nvSpPr>
           <p:cNvPr id="8" name="TextBox 7"/>
           <p:cNvSpPr txBox="1"/>
           <p:nvPr/>
         </p:nvSpPr>
         <p:spPr>
           <a:xfrm>
-            <a:off x="594360" y="1965960"/>
-            <a:ext cx="438912" cy="438912"/>
+            <a:off x="777240" y="1719072"/>
+            <a:ext cx="10637215" cy="4453128"/>
           </a:xfrm>
           <a:prstGeom prst="rect">
             <a:avLst/>
@@ -8727,18 +8034,152 @@
           <a:noFill/>
         </p:spPr>
         <p:txBody>
-          <a:bodyPr wrap="square" anchor="ctr"/>
-          <a:lstStyle/>
-          <a:p>
-            <a:pPr algn="ctr"/>
-            <a:r>
-              <a:rPr sz="1600" b="1" i="0">
+          <a:bodyPr wrap="square">
+            <a:spAutoFit/>
+          </a:bodyPr>
+          <a:lstStyle/>
+          <a:p>
+            <a:pPr>
+              <a:spcAft>
+                <a:spcPts val="400"/>
+              </a:spcAft>
+            </a:pPr>
+            <a:r>
+              <a:rPr sz="1400" b="0" i="0">
                 <a:solidFill>
                   <a:srgbClr val="FFFFFF"/>
                 </a:solidFill>
                 <a:latin typeface="Calibri"/>
               </a:rPr>
-              <a:t>1</a:t>
+              <a:t># Exposicion de hoy · lo que se califica es el reparto, no el total</a:t>
+            </a:r>
+          </a:p>
+          <a:p>
+            <a:pPr>
+              <a:spcAft>
+                <a:spcPts val="400"/>
+              </a:spcAft>
+            </a:pPr>
+            <a:r>
+              <a:rPr sz="1400" b="0" i="0">
+                <a:solidFill>
+                  <a:srgbClr val="FFFFFF"/>
+                </a:solidFill>
+                <a:latin typeface="Calibri"/>
+              </a:rPr>
+              <a:t/>
+            </a:r>
+          </a:p>
+          <a:p>
+            <a:pPr>
+              <a:spcAft>
+                <a:spcPts val="400"/>
+              </a:spcAft>
+            </a:pPr>
+            <a:r>
+              <a:rPr sz="1400" b="0" i="0">
+                <a:solidFill>
+                  <a:srgbClr val="FFFFFF"/>
+                </a:solidFill>
+                <a:latin typeface="Calibri"/>
+              </a:rPr>
+              <a:t>30 s · El sistema y su propósito   Qué sistema es y para qué existe, en una fra</a:t>
+            </a:r>
+          </a:p>
+          <a:p>
+            <a:pPr>
+              <a:spcAft>
+                <a:spcPts val="400"/>
+              </a:spcAft>
+            </a:pPr>
+            <a:r>
+              <a:rPr sz="1400" b="0" i="0">
+                <a:solidFill>
+                  <a:srgbClr val="FFFFFF"/>
+                </a:solidFill>
+                <a:latin typeface="Calibri"/>
+              </a:rPr>
+              <a:t>45 s · La frontera                 Qué dejaron fuera y por qué. Es la decisión </a:t>
+            </a:r>
+          </a:p>
+          <a:p>
+            <a:pPr>
+              <a:spcAft>
+                <a:spcPts val="400"/>
+              </a:spcAft>
+            </a:pPr>
+            <a:r>
+              <a:rPr sz="1400" b="0" i="0">
+                <a:solidFill>
+                  <a:srgbClr val="FFFFFF"/>
+                </a:solidFill>
+                <a:latin typeface="Calibri"/>
+              </a:rPr>
+              <a:t>45 s · El actor olvidado           El afectado que no usa el sistema. Quién es </a:t>
+            </a:r>
+          </a:p>
+          <a:p>
+            <a:pPr>
+              <a:spcAft>
+                <a:spcPts val="400"/>
+              </a:spcAft>
+            </a:pPr>
+            <a:r>
+              <a:rPr sz="1400" b="0" i="0">
+                <a:solidFill>
+                  <a:srgbClr val="FFFFFF"/>
+                </a:solidFill>
+                <a:latin typeface="Calibri"/>
+              </a:rPr>
+              <a:t>60 s · Qué se inventó la IA        Las tres correcciones. Es el minuto obligato</a:t>
+            </a:r>
+          </a:p>
+          <a:p>
+            <a:pPr>
+              <a:spcAft>
+                <a:spcPts val="400"/>
+              </a:spcAft>
+            </a:pPr>
+            <a:r>
+              <a:rPr sz="1400" b="0" i="0">
+                <a:solidFill>
+                  <a:srgbClr val="FFFFFF"/>
+                </a:solidFill>
+                <a:latin typeface="Calibri"/>
+              </a:rPr>
+              <a:t/>
+            </a:r>
+          </a:p>
+          <a:p>
+            <a:pPr>
+              <a:spcAft>
+                <a:spcPts val="400"/>
+              </a:spcAft>
+            </a:pPr>
+            <a:r>
+              <a:rPr sz="1400" b="0" i="0">
+                <a:solidFill>
+                  <a:srgbClr val="FFFFFF"/>
+                </a:solidFill>
+                <a:latin typeface="Calibri"/>
+              </a:rPr>
+              <a:t># El tramo marcado como obligatorio es el que el jurado califica:</a:t>
+            </a:r>
+          </a:p>
+          <a:p>
+            <a:pPr>
+              <a:spcAft>
+                <a:spcPts val="400"/>
+              </a:spcAft>
+            </a:pPr>
+            <a:r>
+              <a:rPr sz="1400" b="0" i="0">
+                <a:solidFill>
+                  <a:srgbClr val="FFFFFF"/>
+                </a:solidFill>
+                <a:latin typeface="Calibri"/>
+              </a:rPr>
+              <a:t># si el guion no esta cronometrado, es el que se queda sin tiempo.</a:t>
             </a:r>
           </a:p>
         </p:txBody>
@@ -8746,567 +8187,6 @@
       <p:sp>
         <p:nvSpPr>
           <p:cNvPr id="9" name="TextBox 8"/>
-          <p:cNvSpPr txBox="1"/>
-          <p:nvPr/>
-        </p:nvSpPr>
-        <p:spPr>
-          <a:xfrm>
-            <a:off x="1188720" y="1751076"/>
-            <a:ext cx="10271455" cy="886968"/>
-          </a:xfrm>
-          <a:prstGeom prst="rect">
-            <a:avLst/>
-          </a:prstGeom>
-          <a:noFill/>
-        </p:spPr>
-        <p:txBody>
-          <a:bodyPr wrap="square" anchor="ctr"/>
-          <a:lstStyle/>
-          <a:p>
-            <a:r>
-              <a:rPr sz="1500" b="1" i="0">
-                <a:solidFill>
-                  <a:srgbClr val="095292"/>
-                </a:solidFill>
-                <a:latin typeface="Calibri"/>
-              </a:rPr>
-              <a:t>30 s · El sistema y su propósito</a:t>
-            </a:r>
-          </a:p>
-          <a:p>
-            <a:pPr>
-              <a:spcBef>
-                <a:spcPts val="200"/>
-              </a:spcBef>
-            </a:pPr>
-            <a:r>
-              <a:rPr sz="1300" b="0" i="0">
-                <a:solidFill>
-                  <a:srgbClr val="333333"/>
-                </a:solidFill>
-                <a:latin typeface="Calibri"/>
-              </a:rPr>
-              <a:t>Qué sistema es y para qué existe, en una frase.</a:t>
-            </a:r>
-          </a:p>
-        </p:txBody>
-      </p:sp>
-      <p:sp>
-        <p:nvSpPr>
-          <p:cNvPr id="10" name="Rounded Rectangle 9"/>
-          <p:cNvSpPr/>
-          <p:nvPr/>
-        </p:nvSpPr>
-        <p:spPr>
-          <a:xfrm>
-            <a:off x="457200" y="2802636"/>
-            <a:ext cx="11277295" cy="1051560"/>
-          </a:xfrm>
-          <a:prstGeom prst="roundRect">
-            <a:avLst>
-              <a:gd name="adj" fmla="val 12000"/>
-            </a:avLst>
-          </a:prstGeom>
-          <a:solidFill>
-            <a:srgbClr val="E8F4FA"/>
-          </a:solidFill>
-          <a:ln>
-            <a:noFill/>
-          </a:ln>
-        </p:spPr>
-        <p:style>
-          <a:lnRef idx="1">
-            <a:schemeClr val="accent1"/>
-          </a:lnRef>
-          <a:fillRef idx="3">
-            <a:schemeClr val="accent1"/>
-          </a:fillRef>
-          <a:effectRef idx="2">
-            <a:schemeClr val="accent1"/>
-          </a:effectRef>
-          <a:fontRef idx="minor">
-            <a:schemeClr val="lt1"/>
-          </a:fontRef>
-        </p:style>
-        <p:txBody>
-          <a:bodyPr rtlCol="0" anchor="ctr"/>
-          <a:lstStyle/>
-          <a:p>
-            <a:pPr algn="ctr"/>
-          </a:p>
-        </p:txBody>
-      </p:sp>
-      <p:sp>
-        <p:nvSpPr>
-          <p:cNvPr id="11" name="Rounded Rectangle 10"/>
-          <p:cNvSpPr/>
-          <p:nvPr/>
-        </p:nvSpPr>
-        <p:spPr>
-          <a:xfrm>
-            <a:off x="594360" y="3108960"/>
-            <a:ext cx="438912" cy="438912"/>
-          </a:xfrm>
-          <a:prstGeom prst="roundRect">
-            <a:avLst>
-              <a:gd name="adj" fmla="val 12000"/>
-            </a:avLst>
-          </a:prstGeom>
-          <a:solidFill>
-            <a:srgbClr val="095292"/>
-          </a:solidFill>
-          <a:ln>
-            <a:noFill/>
-          </a:ln>
-        </p:spPr>
-        <p:style>
-          <a:lnRef idx="1">
-            <a:schemeClr val="accent1"/>
-          </a:lnRef>
-          <a:fillRef idx="3">
-            <a:schemeClr val="accent1"/>
-          </a:fillRef>
-          <a:effectRef idx="2">
-            <a:schemeClr val="accent1"/>
-          </a:effectRef>
-          <a:fontRef idx="minor">
-            <a:schemeClr val="lt1"/>
-          </a:fontRef>
-        </p:style>
-        <p:txBody>
-          <a:bodyPr rtlCol="0" anchor="ctr"/>
-          <a:lstStyle/>
-          <a:p>
-            <a:pPr algn="ctr"/>
-          </a:p>
-        </p:txBody>
-      </p:sp>
-      <p:sp>
-        <p:nvSpPr>
-          <p:cNvPr id="12" name="TextBox 11"/>
-          <p:cNvSpPr txBox="1"/>
-          <p:nvPr/>
-        </p:nvSpPr>
-        <p:spPr>
-          <a:xfrm>
-            <a:off x="594360" y="3108960"/>
-            <a:ext cx="438912" cy="438912"/>
-          </a:xfrm>
-          <a:prstGeom prst="rect">
-            <a:avLst/>
-          </a:prstGeom>
-          <a:noFill/>
-        </p:spPr>
-        <p:txBody>
-          <a:bodyPr wrap="square" anchor="ctr"/>
-          <a:lstStyle/>
-          <a:p>
-            <a:pPr algn="ctr"/>
-            <a:r>
-              <a:rPr sz="1600" b="1" i="0">
-                <a:solidFill>
-                  <a:srgbClr val="FFFFFF"/>
-                </a:solidFill>
-                <a:latin typeface="Calibri"/>
-              </a:rPr>
-              <a:t>2</a:t>
-            </a:r>
-          </a:p>
-        </p:txBody>
-      </p:sp>
-      <p:sp>
-        <p:nvSpPr>
-          <p:cNvPr id="13" name="TextBox 12"/>
-          <p:cNvSpPr txBox="1"/>
-          <p:nvPr/>
-        </p:nvSpPr>
-        <p:spPr>
-          <a:xfrm>
-            <a:off x="1188720" y="2894076"/>
-            <a:ext cx="10271455" cy="886968"/>
-          </a:xfrm>
-          <a:prstGeom prst="rect">
-            <a:avLst/>
-          </a:prstGeom>
-          <a:noFill/>
-        </p:spPr>
-        <p:txBody>
-          <a:bodyPr wrap="square" anchor="ctr"/>
-          <a:lstStyle/>
-          <a:p>
-            <a:r>
-              <a:rPr sz="1500" b="1" i="0">
-                <a:solidFill>
-                  <a:srgbClr val="095292"/>
-                </a:solidFill>
-                <a:latin typeface="Calibri"/>
-              </a:rPr>
-              <a:t>45 s · La frontera</a:t>
-            </a:r>
-          </a:p>
-          <a:p>
-            <a:pPr>
-              <a:spcBef>
-                <a:spcPts val="200"/>
-              </a:spcBef>
-            </a:pPr>
-            <a:r>
-              <a:rPr sz="1300" b="0" i="0">
-                <a:solidFill>
-                  <a:srgbClr val="333333"/>
-                </a:solidFill>
-                <a:latin typeface="Calibri"/>
-              </a:rPr>
-              <a:t>Qué dejaron fuera y por qué. Es la decisión que se discute.</a:t>
-            </a:r>
-          </a:p>
-        </p:txBody>
-      </p:sp>
-      <p:sp>
-        <p:nvSpPr>
-          <p:cNvPr id="14" name="Rounded Rectangle 13"/>
-          <p:cNvSpPr/>
-          <p:nvPr/>
-        </p:nvSpPr>
-        <p:spPr>
-          <a:xfrm>
-            <a:off x="457200" y="3945636"/>
-            <a:ext cx="11277295" cy="1051560"/>
-          </a:xfrm>
-          <a:prstGeom prst="roundRect">
-            <a:avLst>
-              <a:gd name="adj" fmla="val 12000"/>
-            </a:avLst>
-          </a:prstGeom>
-          <a:solidFill>
-            <a:srgbClr val="F2F2F2"/>
-          </a:solidFill>
-          <a:ln>
-            <a:noFill/>
-          </a:ln>
-        </p:spPr>
-        <p:style>
-          <a:lnRef idx="1">
-            <a:schemeClr val="accent1"/>
-          </a:lnRef>
-          <a:fillRef idx="3">
-            <a:schemeClr val="accent1"/>
-          </a:fillRef>
-          <a:effectRef idx="2">
-            <a:schemeClr val="accent1"/>
-          </a:effectRef>
-          <a:fontRef idx="minor">
-            <a:schemeClr val="lt1"/>
-          </a:fontRef>
-        </p:style>
-        <p:txBody>
-          <a:bodyPr rtlCol="0" anchor="ctr"/>
-          <a:lstStyle/>
-          <a:p>
-            <a:pPr algn="ctr"/>
-          </a:p>
-        </p:txBody>
-      </p:sp>
-      <p:sp>
-        <p:nvSpPr>
-          <p:cNvPr id="15" name="Rounded Rectangle 14"/>
-          <p:cNvSpPr/>
-          <p:nvPr/>
-        </p:nvSpPr>
-        <p:spPr>
-          <a:xfrm>
-            <a:off x="594360" y="4251960"/>
-            <a:ext cx="438912" cy="438912"/>
-          </a:xfrm>
-          <a:prstGeom prst="roundRect">
-            <a:avLst>
-              <a:gd name="adj" fmla="val 12000"/>
-            </a:avLst>
-          </a:prstGeom>
-          <a:solidFill>
-            <a:srgbClr val="095292"/>
-          </a:solidFill>
-          <a:ln>
-            <a:noFill/>
-          </a:ln>
-        </p:spPr>
-        <p:style>
-          <a:lnRef idx="1">
-            <a:schemeClr val="accent1"/>
-          </a:lnRef>
-          <a:fillRef idx="3">
-            <a:schemeClr val="accent1"/>
-          </a:fillRef>
-          <a:effectRef idx="2">
-            <a:schemeClr val="accent1"/>
-          </a:effectRef>
-          <a:fontRef idx="minor">
-            <a:schemeClr val="lt1"/>
-          </a:fontRef>
-        </p:style>
-        <p:txBody>
-          <a:bodyPr rtlCol="0" anchor="ctr"/>
-          <a:lstStyle/>
-          <a:p>
-            <a:pPr algn="ctr"/>
-          </a:p>
-        </p:txBody>
-      </p:sp>
-      <p:sp>
-        <p:nvSpPr>
-          <p:cNvPr id="16" name="TextBox 15"/>
-          <p:cNvSpPr txBox="1"/>
-          <p:nvPr/>
-        </p:nvSpPr>
-        <p:spPr>
-          <a:xfrm>
-            <a:off x="594360" y="4251960"/>
-            <a:ext cx="438912" cy="438912"/>
-          </a:xfrm>
-          <a:prstGeom prst="rect">
-            <a:avLst/>
-          </a:prstGeom>
-          <a:noFill/>
-        </p:spPr>
-        <p:txBody>
-          <a:bodyPr wrap="square" anchor="ctr"/>
-          <a:lstStyle/>
-          <a:p>
-            <a:pPr algn="ctr"/>
-            <a:r>
-              <a:rPr sz="1600" b="1" i="0">
-                <a:solidFill>
-                  <a:srgbClr val="FFFFFF"/>
-                </a:solidFill>
-                <a:latin typeface="Calibri"/>
-              </a:rPr>
-              <a:t>3</a:t>
-            </a:r>
-          </a:p>
-        </p:txBody>
-      </p:sp>
-      <p:sp>
-        <p:nvSpPr>
-          <p:cNvPr id="17" name="TextBox 16"/>
-          <p:cNvSpPr txBox="1"/>
-          <p:nvPr/>
-        </p:nvSpPr>
-        <p:spPr>
-          <a:xfrm>
-            <a:off x="1188720" y="4037076"/>
-            <a:ext cx="10271455" cy="886968"/>
-          </a:xfrm>
-          <a:prstGeom prst="rect">
-            <a:avLst/>
-          </a:prstGeom>
-          <a:noFill/>
-        </p:spPr>
-        <p:txBody>
-          <a:bodyPr wrap="square" anchor="ctr"/>
-          <a:lstStyle/>
-          <a:p>
-            <a:r>
-              <a:rPr sz="1500" b="1" i="0">
-                <a:solidFill>
-                  <a:srgbClr val="095292"/>
-                </a:solidFill>
-                <a:latin typeface="Calibri"/>
-              </a:rPr>
-              <a:t>45 s · El actor olvidado</a:t>
-            </a:r>
-          </a:p>
-          <a:p>
-            <a:pPr>
-              <a:spcBef>
-                <a:spcPts val="200"/>
-              </a:spcBef>
-            </a:pPr>
-            <a:r>
-              <a:rPr sz="1300" b="0" i="0">
-                <a:solidFill>
-                  <a:srgbClr val="333333"/>
-                </a:solidFill>
-                <a:latin typeface="Calibri"/>
-              </a:rPr>
-              <a:t>El afectado que no usa el sistema. Quién es y qué pierde.</a:t>
-            </a:r>
-          </a:p>
-        </p:txBody>
-      </p:sp>
-      <p:sp>
-        <p:nvSpPr>
-          <p:cNvPr id="18" name="Rounded Rectangle 17"/>
-          <p:cNvSpPr/>
-          <p:nvPr/>
-        </p:nvSpPr>
-        <p:spPr>
-          <a:xfrm>
-            <a:off x="457200" y="5088636"/>
-            <a:ext cx="11277295" cy="1051560"/>
-          </a:xfrm>
-          <a:prstGeom prst="roundRect">
-            <a:avLst>
-              <a:gd name="adj" fmla="val 12000"/>
-            </a:avLst>
-          </a:prstGeom>
-          <a:solidFill>
-            <a:srgbClr val="E8F4FA"/>
-          </a:solidFill>
-          <a:ln>
-            <a:noFill/>
-          </a:ln>
-        </p:spPr>
-        <p:style>
-          <a:lnRef idx="1">
-            <a:schemeClr val="accent1"/>
-          </a:lnRef>
-          <a:fillRef idx="3">
-            <a:schemeClr val="accent1"/>
-          </a:fillRef>
-          <a:effectRef idx="2">
-            <a:schemeClr val="accent1"/>
-          </a:effectRef>
-          <a:fontRef idx="minor">
-            <a:schemeClr val="lt1"/>
-          </a:fontRef>
-        </p:style>
-        <p:txBody>
-          <a:bodyPr rtlCol="0" anchor="ctr"/>
-          <a:lstStyle/>
-          <a:p>
-            <a:pPr algn="ctr"/>
-          </a:p>
-        </p:txBody>
-      </p:sp>
-      <p:sp>
-        <p:nvSpPr>
-          <p:cNvPr id="19" name="Rounded Rectangle 18"/>
-          <p:cNvSpPr/>
-          <p:nvPr/>
-        </p:nvSpPr>
-        <p:spPr>
-          <a:xfrm>
-            <a:off x="594360" y="5394960"/>
-            <a:ext cx="438912" cy="438912"/>
-          </a:xfrm>
-          <a:prstGeom prst="roundRect">
-            <a:avLst>
-              <a:gd name="adj" fmla="val 12000"/>
-            </a:avLst>
-          </a:prstGeom>
-          <a:solidFill>
-            <a:srgbClr val="095292"/>
-          </a:solidFill>
-          <a:ln>
-            <a:noFill/>
-          </a:ln>
-        </p:spPr>
-        <p:style>
-          <a:lnRef idx="1">
-            <a:schemeClr val="accent1"/>
-          </a:lnRef>
-          <a:fillRef idx="3">
-            <a:schemeClr val="accent1"/>
-          </a:fillRef>
-          <a:effectRef idx="2">
-            <a:schemeClr val="accent1"/>
-          </a:effectRef>
-          <a:fontRef idx="minor">
-            <a:schemeClr val="lt1"/>
-          </a:fontRef>
-        </p:style>
-        <p:txBody>
-          <a:bodyPr rtlCol="0" anchor="ctr"/>
-          <a:lstStyle/>
-          <a:p>
-            <a:pPr algn="ctr"/>
-          </a:p>
-        </p:txBody>
-      </p:sp>
-      <p:sp>
-        <p:nvSpPr>
-          <p:cNvPr id="20" name="TextBox 19"/>
-          <p:cNvSpPr txBox="1"/>
-          <p:nvPr/>
-        </p:nvSpPr>
-        <p:spPr>
-          <a:xfrm>
-            <a:off x="594360" y="5394960"/>
-            <a:ext cx="438912" cy="438912"/>
-          </a:xfrm>
-          <a:prstGeom prst="rect">
-            <a:avLst/>
-          </a:prstGeom>
-          <a:noFill/>
-        </p:spPr>
-        <p:txBody>
-          <a:bodyPr wrap="square" anchor="ctr"/>
-          <a:lstStyle/>
-          <a:p>
-            <a:pPr algn="ctr"/>
-            <a:r>
-              <a:rPr sz="1600" b="1" i="0">
-                <a:solidFill>
-                  <a:srgbClr val="FFFFFF"/>
-                </a:solidFill>
-                <a:latin typeface="Calibri"/>
-              </a:rPr>
-              <a:t>4</a:t>
-            </a:r>
-          </a:p>
-        </p:txBody>
-      </p:sp>
-      <p:sp>
-        <p:nvSpPr>
-          <p:cNvPr id="21" name="TextBox 20"/>
-          <p:cNvSpPr txBox="1"/>
-          <p:nvPr/>
-        </p:nvSpPr>
-        <p:spPr>
-          <a:xfrm>
-            <a:off x="1188720" y="5180076"/>
-            <a:ext cx="10271455" cy="886968"/>
-          </a:xfrm>
-          <a:prstGeom prst="rect">
-            <a:avLst/>
-          </a:prstGeom>
-          <a:noFill/>
-        </p:spPr>
-        <p:txBody>
-          <a:bodyPr wrap="square" anchor="ctr"/>
-          <a:lstStyle/>
-          <a:p>
-            <a:r>
-              <a:rPr sz="1500" b="1" i="0">
-                <a:solidFill>
-                  <a:srgbClr val="095292"/>
-                </a:solidFill>
-                <a:latin typeface="Calibri"/>
-              </a:rPr>
-              <a:t>60 s · Qué se inventó la IA</a:t>
-            </a:r>
-          </a:p>
-          <a:p>
-            <a:pPr>
-              <a:spcBef>
-                <a:spcPts val="200"/>
-              </a:spcBef>
-            </a:pPr>
-            <a:r>
-              <a:rPr sz="1300" b="0" i="0">
-                <a:solidFill>
-                  <a:srgbClr val="333333"/>
-                </a:solidFill>
-                <a:latin typeface="Calibri"/>
-              </a:rPr>
-              <a:t>Las tres correcciones. Es el minuto obligatorio de la exposición.</a:t>
-            </a:r>
-          </a:p>
-        </p:txBody>
-      </p:sp>
-      <p:sp>
-        <p:nvSpPr>
-          <p:cNvPr id="22" name="TextBox 21"/>
           <p:cNvSpPr txBox="1"/>
           <p:nvPr/>
         </p:nvSpPr>
@@ -9374,7 +8254,7 @@
         <p:spPr>
           <a:xfrm>
             <a:off x="0" y="0"/>
-            <a:ext cx="12191695" cy="960120"/>
+            <a:ext cx="12191695" cy="1170432"/>
           </a:xfrm>
           <a:prstGeom prst="rect">
             <a:avLst/>
@@ -9416,7 +8296,7 @@
         </p:nvSpPr>
         <p:spPr>
           <a:xfrm>
-            <a:off x="0" y="960120"/>
+            <a:off x="0" y="1170432"/>
             <a:ext cx="12191695" cy="41148"/>
           </a:xfrm>
           <a:prstGeom prst="rect">
@@ -9460,7 +8340,7 @@
         <p:spPr>
           <a:xfrm>
             <a:off x="457200" y="164592"/>
-            <a:ext cx="11277295" cy="502920"/>
+            <a:ext cx="11277295" cy="384048"/>
           </a:xfrm>
           <a:prstGeom prst="rect">
             <a:avLst/>
@@ -9480,7 +8360,7 @@
                 </a:solidFill>
                 <a:latin typeface="Calibri"/>
               </a:rPr>
-              <a:t>Para la Clase 4</a:t>
+              <a:t>Taller de hoy: Anatomía del sistema</a:t>
             </a:r>
           </a:p>
         </p:txBody>
@@ -9493,8 +8373,8 @@
         </p:nvSpPr>
         <p:spPr>
           <a:xfrm>
-            <a:off x="457200" y="1170432"/>
-            <a:ext cx="11277295" cy="5230368"/>
+            <a:off x="457200" y="566928"/>
+            <a:ext cx="11277295" cy="411480"/>
           </a:xfrm>
           <a:prstGeom prst="rect">
             <a:avLst/>
@@ -9507,198 +8387,981 @@
           </a:bodyPr>
           <a:lstStyle/>
           <a:p>
-            <a:pPr>
-              <a:spcAft>
-                <a:spcPts val="800"/>
-              </a:spcAft>
-            </a:pPr>
-            <a:r>
-              <a:rPr sz="2000" b="0" i="0">
-                <a:solidFill>
-                  <a:srgbClr val="333333"/>
-                </a:solidFill>
-                <a:latin typeface="Calibri"/>
-              </a:rPr>
-              <a:t>–   </a:t>
-            </a:r>
-            <a:r>
-              <a:rPr sz="2000" b="1" i="0">
-                <a:solidFill>
-                  <a:srgbClr val="333333"/>
-                </a:solidFill>
-                <a:latin typeface="Calibri"/>
-              </a:rPr>
-              <a:t>Trabajo dirigido:</a:t>
-            </a:r>
-            <a:r>
-              <a:rPr sz="2000" b="0" i="0">
-                <a:solidFill>
-                  <a:srgbClr val="333333"/>
-                </a:solidFill>
-                <a:latin typeface="Calibri"/>
-              </a:rPr>
-              <a:t> Análisis de caso práctico — dejen la ficha del sistema completa en la carpeta del equipo, con el prompt y las correcciones.</a:t>
-            </a:r>
-          </a:p>
-          <a:p>
-            <a:pPr>
-              <a:spcAft>
-                <a:spcPts val="800"/>
-              </a:spcAft>
-            </a:pPr>
-            <a:r>
-              <a:rPr sz="2000" b="0" i="0">
-                <a:solidFill>
-                  <a:srgbClr val="333333"/>
-                </a:solidFill>
-                <a:latin typeface="Calibri"/>
-              </a:rPr>
-              <a:t>–   </a:t>
-            </a:r>
-            <a:r>
-              <a:rPr sz="2000" b="1" i="0">
-                <a:solidFill>
-                  <a:srgbClr val="333333"/>
-                </a:solidFill>
-                <a:latin typeface="Calibri"/>
-              </a:rPr>
-              <a:t>Trabajo independiente:</a:t>
-            </a:r>
-            <a:r>
-              <a:rPr sz="2000" b="0" i="0">
-                <a:solidFill>
-                  <a:srgbClr val="333333"/>
-                </a:solidFill>
-                <a:latin typeface="Calibri"/>
-              </a:rPr>
-              <a:t> Ensayo sobre impacto social: media página sobre a quién le empeora la vida el sistema que analizaron, aunque funcione bien.</a:t>
-            </a:r>
-          </a:p>
-          <a:p>
-            <a:pPr>
-              <a:spcAft>
-                <a:spcPts val="800"/>
-              </a:spcAft>
-            </a:pPr>
-            <a:r>
-              <a:rPr sz="2000" b="0" i="0">
-                <a:solidFill>
-                  <a:srgbClr val="333333"/>
-                </a:solidFill>
-                <a:latin typeface="Calibri"/>
-              </a:rPr>
-              <a:t>–   </a:t>
-            </a:r>
-            <a:r>
-              <a:rPr sz="2000" b="1" i="0">
-                <a:solidFill>
-                  <a:srgbClr val="333333"/>
-                </a:solidFill>
-                <a:latin typeface="Calibri"/>
-              </a:rPr>
-              <a:t>Clase 4 · Principios éticos en la Ingeniería</a:t>
-            </a:r>
-            <a:r>
-              <a:rPr sz="2000" b="0" i="0">
-                <a:solidFill>
-                  <a:srgbClr val="333333"/>
-                </a:solidFill>
-                <a:latin typeface="Calibri"/>
-              </a:rPr>
-              <a:t> — los principios éticos de la profesión, con casos reales donde el software funcionó y aun así el ingeniero hizo algo mal.</a:t>
-            </a:r>
-          </a:p>
-          <a:p>
-            <a:pPr>
-              <a:spcAft>
-                <a:spcPts val="800"/>
-              </a:spcAft>
-            </a:pPr>
-            <a:r>
-              <a:rPr sz="2000" b="0" i="0">
-                <a:solidFill>
-                  <a:srgbClr val="333333"/>
-                </a:solidFill>
-                <a:latin typeface="Calibri"/>
-              </a:rPr>
-              <a:t>–   </a:t>
-            </a:r>
-            <a:r>
-              <a:rPr sz="2000" b="1" i="0">
-                <a:solidFill>
-                  <a:srgbClr val="333333"/>
-                </a:solidFill>
-                <a:latin typeface="Calibri"/>
-              </a:rPr>
-              <a:t>Aviso:</a:t>
-            </a:r>
-            <a:r>
-              <a:rPr sz="2000" b="0" i="0">
-                <a:solidFill>
-                  <a:srgbClr val="333333"/>
-                </a:solidFill>
-                <a:latin typeface="Calibri"/>
-              </a:rPr>
-              <a:t> Traigan identificado el </a:t>
-            </a:r>
-            <a:r>
-              <a:rPr sz="2000" b="1" i="0">
-                <a:solidFill>
-                  <a:srgbClr val="333333"/>
-                </a:solidFill>
-                <a:latin typeface="Calibri"/>
-              </a:rPr>
-              <a:t>actor no-usuario</a:t>
-            </a:r>
-            <a:r>
-              <a:rPr sz="2000" b="0" i="0">
-                <a:solidFill>
-                  <a:srgbClr val="333333"/>
-                </a:solidFill>
-                <a:latin typeface="Calibri"/>
-              </a:rPr>
-              <a:t> de su sistema. La sesión 4 arranca con esa persona y el ensayo de media página es sobre ella.</a:t>
-            </a:r>
-          </a:p>
-          <a:p>
-            <a:pPr>
-              <a:spcAft>
-                <a:spcPts val="800"/>
-              </a:spcAft>
-            </a:pPr>
-            <a:r>
-              <a:rPr sz="2000" b="0" i="0">
-                <a:solidFill>
-                  <a:srgbClr val="333333"/>
-                </a:solidFill>
-                <a:latin typeface="Calibri"/>
-              </a:rPr>
-              <a:t>–   </a:t>
-            </a:r>
-            <a:r>
-              <a:rPr sz="2000" b="1" i="0">
-                <a:solidFill>
-                  <a:srgbClr val="333333"/>
-                </a:solidFill>
-                <a:latin typeface="Calibri"/>
-              </a:rPr>
-              <a:t>Antes de salir:</a:t>
-            </a:r>
-            <a:r>
-              <a:rPr sz="2000" b="0" i="0">
-                <a:solidFill>
-                  <a:srgbClr val="333333"/>
-                </a:solidFill>
-                <a:latin typeface="Calibri"/>
-              </a:rPr>
-              <a:t> el enlace del documento del equipo en el chat, con permiso de lectura para el docente, y el nombre del vocero de hoy.</a:t>
-            </a:r>
-          </a:p>
-        </p:txBody>
-      </p:sp>
-      <p:sp>
-        <p:nvSpPr>
-          <p:cNvPr id="6" name="TextBox 5"/>
+            <a:r>
+              <a:rPr sz="1400" b="0" i="0">
+                <a:solidFill>
+                  <a:srgbClr val="B8D8EE"/>
+                </a:solidFill>
+                <a:latin typeface="Calibri"/>
+              </a:rPr>
+              <a:t>17 min en equipos · cada equipo trabaja su propio problema de la sesión 1 · ficha del sistema + prompt + correcciones</a:t>
+            </a:r>
+          </a:p>
+        </p:txBody>
+      </p:sp>
+      <p:sp>
+        <p:nvSpPr>
+          <p:cNvPr id="6" name="Rounded Rectangle 5"/>
+          <p:cNvSpPr/>
+          <p:nvPr/>
+        </p:nvSpPr>
+        <p:spPr>
+          <a:xfrm>
+            <a:off x="457200" y="1472184"/>
+            <a:ext cx="11277295" cy="566928"/>
+          </a:xfrm>
+          <a:prstGeom prst="roundRect">
+            <a:avLst>
+              <a:gd name="adj" fmla="val 12000"/>
+            </a:avLst>
+          </a:prstGeom>
+          <a:solidFill>
+            <a:srgbClr val="F2F2F2"/>
+          </a:solidFill>
+          <a:ln>
+            <a:noFill/>
+          </a:ln>
+        </p:spPr>
+        <p:style>
+          <a:lnRef idx="1">
+            <a:schemeClr val="accent1"/>
+          </a:lnRef>
+          <a:fillRef idx="3">
+            <a:schemeClr val="accent1"/>
+          </a:fillRef>
+          <a:effectRef idx="2">
+            <a:schemeClr val="accent1"/>
+          </a:effectRef>
+          <a:fontRef idx="minor">
+            <a:schemeClr val="lt1"/>
+          </a:fontRef>
+        </p:style>
+        <p:txBody>
+          <a:bodyPr rtlCol="0" anchor="ctr"/>
+          <a:lstStyle/>
+          <a:p>
+            <a:pPr algn="ctr"/>
+          </a:p>
+        </p:txBody>
+      </p:sp>
+      <p:sp>
+        <p:nvSpPr>
+          <p:cNvPr id="7" name="Rectangle 6"/>
+          <p:cNvSpPr/>
+          <p:nvPr/>
+        </p:nvSpPr>
+        <p:spPr>
+          <a:xfrm>
+            <a:off x="640080" y="1618487"/>
+            <a:ext cx="274320" cy="274320"/>
+          </a:xfrm>
+          <a:prstGeom prst="rect">
+            <a:avLst/>
+          </a:prstGeom>
+          <a:solidFill>
+            <a:srgbClr val="FFFFFF"/>
+          </a:solidFill>
+          <a:ln>
+            <a:solidFill>
+              <a:srgbClr val="333333"/>
+            </a:solidFill>
+          </a:ln>
+        </p:spPr>
+        <p:style>
+          <a:lnRef idx="1">
+            <a:schemeClr val="accent1"/>
+          </a:lnRef>
+          <a:fillRef idx="3">
+            <a:schemeClr val="accent1"/>
+          </a:fillRef>
+          <a:effectRef idx="2">
+            <a:schemeClr val="accent1"/>
+          </a:effectRef>
+          <a:fontRef idx="minor">
+            <a:schemeClr val="lt1"/>
+          </a:fontRef>
+        </p:style>
+        <p:txBody>
+          <a:bodyPr rtlCol="0" anchor="ctr"/>
+          <a:lstStyle/>
+          <a:p>
+            <a:pPr algn="ctr"/>
+          </a:p>
+        </p:txBody>
+      </p:sp>
+      <p:sp>
+        <p:nvSpPr>
+          <p:cNvPr id="8" name="Rectangle 7"/>
+          <p:cNvSpPr/>
+          <p:nvPr/>
+        </p:nvSpPr>
+        <p:spPr>
+          <a:xfrm>
+            <a:off x="640080" y="1618487"/>
+            <a:ext cx="73152" cy="274320"/>
+          </a:xfrm>
+          <a:prstGeom prst="rect">
+            <a:avLst/>
+          </a:prstGeom>
+          <a:solidFill>
+            <a:srgbClr val="269CCB"/>
+          </a:solidFill>
+          <a:ln>
+            <a:noFill/>
+          </a:ln>
+        </p:spPr>
+        <p:style>
+          <a:lnRef idx="1">
+            <a:schemeClr val="accent1"/>
+          </a:lnRef>
+          <a:fillRef idx="3">
+            <a:schemeClr val="accent1"/>
+          </a:fillRef>
+          <a:effectRef idx="2">
+            <a:schemeClr val="accent1"/>
+          </a:effectRef>
+          <a:fontRef idx="minor">
+            <a:schemeClr val="lt1"/>
+          </a:fontRef>
+        </p:style>
+        <p:txBody>
+          <a:bodyPr rtlCol="0" anchor="ctr"/>
+          <a:lstStyle/>
+          <a:p>
+            <a:pPr algn="ctr"/>
+          </a:p>
+        </p:txBody>
+      </p:sp>
+      <p:sp>
+        <p:nvSpPr>
+          <p:cNvPr id="9" name="TextBox 8"/>
+          <p:cNvSpPr txBox="1"/>
+          <p:nvPr/>
+        </p:nvSpPr>
+        <p:spPr>
+          <a:xfrm>
+            <a:off x="1097280" y="1563624"/>
+            <a:ext cx="10362895" cy="402336"/>
+          </a:xfrm>
+          <a:prstGeom prst="rect">
+            <a:avLst/>
+          </a:prstGeom>
+          <a:noFill/>
+        </p:spPr>
+        <p:txBody>
+          <a:bodyPr wrap="square" anchor="ctr"/>
+          <a:lstStyle/>
+          <a:p>
+            <a:r>
+              <a:rPr sz="1500" b="1" i="0">
+                <a:solidFill>
+                  <a:srgbClr val="333333"/>
+                </a:solidFill>
+                <a:latin typeface="Calibri"/>
+              </a:rPr>
+              <a:t>PROPÓSITO Y FRONTERA</a:t>
+            </a:r>
+            <a:r>
+              <a:rPr sz="1500" b="0" i="0">
+                <a:solidFill>
+                  <a:srgbClr val="333333"/>
+                </a:solidFill>
+                <a:latin typeface="Calibri"/>
+              </a:rPr>
+              <a:t> — Para qué existe el sistema, en una frase. Y qué queda </a:t>
+            </a:r>
+            <a:r>
+              <a:rPr sz="1500" b="1" i="0">
+                <a:solidFill>
+                  <a:srgbClr val="333333"/>
+                </a:solidFill>
+                <a:latin typeface="Calibri"/>
+              </a:rPr>
+              <a:t>dentro</a:t>
+            </a:r>
+            <a:r>
+              <a:rPr sz="1500" b="0" i="0">
+                <a:solidFill>
+                  <a:srgbClr val="333333"/>
+                </a:solidFill>
+                <a:latin typeface="Calibri"/>
+              </a:rPr>
+              <a:t> y qué </a:t>
+            </a:r>
+            <a:r>
+              <a:rPr sz="1500" b="1" i="0">
+                <a:solidFill>
+                  <a:srgbClr val="333333"/>
+                </a:solidFill>
+                <a:latin typeface="Calibri"/>
+              </a:rPr>
+              <a:t>fuera</a:t>
+            </a:r>
+            <a:r>
+              <a:rPr sz="1500" b="0" i="0">
+                <a:solidFill>
+                  <a:srgbClr val="333333"/>
+                </a:solidFill>
+                <a:latin typeface="Calibri"/>
+              </a:rPr>
+              <a:t> de él, con la razón de cada exclusión importante.</a:t>
+            </a:r>
+          </a:p>
+        </p:txBody>
+      </p:sp>
+      <p:sp>
+        <p:nvSpPr>
+          <p:cNvPr id="10" name="Rounded Rectangle 9"/>
+          <p:cNvSpPr/>
+          <p:nvPr/>
+        </p:nvSpPr>
+        <p:spPr>
+          <a:xfrm>
+            <a:off x="457200" y="2148839"/>
+            <a:ext cx="11277295" cy="566928"/>
+          </a:xfrm>
+          <a:prstGeom prst="roundRect">
+            <a:avLst>
+              <a:gd name="adj" fmla="val 12000"/>
+            </a:avLst>
+          </a:prstGeom>
+          <a:solidFill>
+            <a:srgbClr val="F2F2F2"/>
+          </a:solidFill>
+          <a:ln>
+            <a:noFill/>
+          </a:ln>
+        </p:spPr>
+        <p:style>
+          <a:lnRef idx="1">
+            <a:schemeClr val="accent1"/>
+          </a:lnRef>
+          <a:fillRef idx="3">
+            <a:schemeClr val="accent1"/>
+          </a:fillRef>
+          <a:effectRef idx="2">
+            <a:schemeClr val="accent1"/>
+          </a:effectRef>
+          <a:fontRef idx="minor">
+            <a:schemeClr val="lt1"/>
+          </a:fontRef>
+        </p:style>
+        <p:txBody>
+          <a:bodyPr rtlCol="0" anchor="ctr"/>
+          <a:lstStyle/>
+          <a:p>
+            <a:pPr algn="ctr"/>
+          </a:p>
+        </p:txBody>
+      </p:sp>
+      <p:sp>
+        <p:nvSpPr>
+          <p:cNvPr id="11" name="Rectangle 10"/>
+          <p:cNvSpPr/>
+          <p:nvPr/>
+        </p:nvSpPr>
+        <p:spPr>
+          <a:xfrm>
+            <a:off x="640080" y="2295144"/>
+            <a:ext cx="274320" cy="274320"/>
+          </a:xfrm>
+          <a:prstGeom prst="rect">
+            <a:avLst/>
+          </a:prstGeom>
+          <a:solidFill>
+            <a:srgbClr val="FFFFFF"/>
+          </a:solidFill>
+          <a:ln>
+            <a:solidFill>
+              <a:srgbClr val="333333"/>
+            </a:solidFill>
+          </a:ln>
+        </p:spPr>
+        <p:style>
+          <a:lnRef idx="1">
+            <a:schemeClr val="accent1"/>
+          </a:lnRef>
+          <a:fillRef idx="3">
+            <a:schemeClr val="accent1"/>
+          </a:fillRef>
+          <a:effectRef idx="2">
+            <a:schemeClr val="accent1"/>
+          </a:effectRef>
+          <a:fontRef idx="minor">
+            <a:schemeClr val="lt1"/>
+          </a:fontRef>
+        </p:style>
+        <p:txBody>
+          <a:bodyPr rtlCol="0" anchor="ctr"/>
+          <a:lstStyle/>
+          <a:p>
+            <a:pPr algn="ctr"/>
+          </a:p>
+        </p:txBody>
+      </p:sp>
+      <p:sp>
+        <p:nvSpPr>
+          <p:cNvPr id="12" name="Rectangle 11"/>
+          <p:cNvSpPr/>
+          <p:nvPr/>
+        </p:nvSpPr>
+        <p:spPr>
+          <a:xfrm>
+            <a:off x="640080" y="2295144"/>
+            <a:ext cx="73152" cy="274320"/>
+          </a:xfrm>
+          <a:prstGeom prst="rect">
+            <a:avLst/>
+          </a:prstGeom>
+          <a:solidFill>
+            <a:srgbClr val="269CCB"/>
+          </a:solidFill>
+          <a:ln>
+            <a:noFill/>
+          </a:ln>
+        </p:spPr>
+        <p:style>
+          <a:lnRef idx="1">
+            <a:schemeClr val="accent1"/>
+          </a:lnRef>
+          <a:fillRef idx="3">
+            <a:schemeClr val="accent1"/>
+          </a:fillRef>
+          <a:effectRef idx="2">
+            <a:schemeClr val="accent1"/>
+          </a:effectRef>
+          <a:fontRef idx="minor">
+            <a:schemeClr val="lt1"/>
+          </a:fontRef>
+        </p:style>
+        <p:txBody>
+          <a:bodyPr rtlCol="0" anchor="ctr"/>
+          <a:lstStyle/>
+          <a:p>
+            <a:pPr algn="ctr"/>
+          </a:p>
+        </p:txBody>
+      </p:sp>
+      <p:sp>
+        <p:nvSpPr>
+          <p:cNvPr id="13" name="TextBox 12"/>
+          <p:cNvSpPr txBox="1"/>
+          <p:nvPr/>
+        </p:nvSpPr>
+        <p:spPr>
+          <a:xfrm>
+            <a:off x="1097280" y="2240279"/>
+            <a:ext cx="10362895" cy="402336"/>
+          </a:xfrm>
+          <a:prstGeom prst="rect">
+            <a:avLst/>
+          </a:prstGeom>
+          <a:noFill/>
+        </p:spPr>
+        <p:txBody>
+          <a:bodyPr wrap="square" anchor="ctr"/>
+          <a:lstStyle/>
+          <a:p>
+            <a:r>
+              <a:rPr sz="1500" b="1" i="0">
+                <a:solidFill>
+                  <a:srgbClr val="333333"/>
+                </a:solidFill>
+                <a:latin typeface="Calibri"/>
+              </a:rPr>
+              <a:t>ENTRADAS, PROCESO Y SALIDAS</a:t>
+            </a:r>
+            <a:r>
+              <a:rPr sz="1500" b="0" i="0">
+                <a:solidFill>
+                  <a:srgbClr val="333333"/>
+                </a:solidFill>
+                <a:latin typeface="Calibri"/>
+              </a:rPr>
+              <a:t> — Qué entra, qué se hace con eso y qué sale. Señalen </a:t>
+            </a:r>
+            <a:r>
+              <a:rPr sz="1500" b="1" i="0">
+                <a:solidFill>
+                  <a:srgbClr val="333333"/>
+                </a:solidFill>
+                <a:latin typeface="Calibri"/>
+              </a:rPr>
+              <a:t>dónde está el software</a:t>
+            </a:r>
+            <a:r>
+              <a:rPr sz="1500" b="0" i="0">
+                <a:solidFill>
+                  <a:srgbClr val="333333"/>
+                </a:solidFill>
+                <a:latin typeface="Calibri"/>
+              </a:rPr>
+              <a:t>, si hay.</a:t>
+            </a:r>
+          </a:p>
+        </p:txBody>
+      </p:sp>
+      <p:sp>
+        <p:nvSpPr>
+          <p:cNvPr id="14" name="Rounded Rectangle 13"/>
+          <p:cNvSpPr/>
+          <p:nvPr/>
+        </p:nvSpPr>
+        <p:spPr>
+          <a:xfrm>
+            <a:off x="457200" y="2825496"/>
+            <a:ext cx="11277295" cy="566928"/>
+          </a:xfrm>
+          <a:prstGeom prst="roundRect">
+            <a:avLst>
+              <a:gd name="adj" fmla="val 12000"/>
+            </a:avLst>
+          </a:prstGeom>
+          <a:solidFill>
+            <a:srgbClr val="F2F2F2"/>
+          </a:solidFill>
+          <a:ln>
+            <a:noFill/>
+          </a:ln>
+        </p:spPr>
+        <p:style>
+          <a:lnRef idx="1">
+            <a:schemeClr val="accent1"/>
+          </a:lnRef>
+          <a:fillRef idx="3">
+            <a:schemeClr val="accent1"/>
+          </a:fillRef>
+          <a:effectRef idx="2">
+            <a:schemeClr val="accent1"/>
+          </a:effectRef>
+          <a:fontRef idx="minor">
+            <a:schemeClr val="lt1"/>
+          </a:fontRef>
+        </p:style>
+        <p:txBody>
+          <a:bodyPr rtlCol="0" anchor="ctr"/>
+          <a:lstStyle/>
+          <a:p>
+            <a:pPr algn="ctr"/>
+          </a:p>
+        </p:txBody>
+      </p:sp>
+      <p:sp>
+        <p:nvSpPr>
+          <p:cNvPr id="15" name="Rectangle 14"/>
+          <p:cNvSpPr/>
+          <p:nvPr/>
+        </p:nvSpPr>
+        <p:spPr>
+          <a:xfrm>
+            <a:off x="640080" y="2971800"/>
+            <a:ext cx="274320" cy="274320"/>
+          </a:xfrm>
+          <a:prstGeom prst="rect">
+            <a:avLst/>
+          </a:prstGeom>
+          <a:solidFill>
+            <a:srgbClr val="FFFFFF"/>
+          </a:solidFill>
+          <a:ln>
+            <a:solidFill>
+              <a:srgbClr val="333333"/>
+            </a:solidFill>
+          </a:ln>
+        </p:spPr>
+        <p:style>
+          <a:lnRef idx="1">
+            <a:schemeClr val="accent1"/>
+          </a:lnRef>
+          <a:fillRef idx="3">
+            <a:schemeClr val="accent1"/>
+          </a:fillRef>
+          <a:effectRef idx="2">
+            <a:schemeClr val="accent1"/>
+          </a:effectRef>
+          <a:fontRef idx="minor">
+            <a:schemeClr val="lt1"/>
+          </a:fontRef>
+        </p:style>
+        <p:txBody>
+          <a:bodyPr rtlCol="0" anchor="ctr"/>
+          <a:lstStyle/>
+          <a:p>
+            <a:pPr algn="ctr"/>
+          </a:p>
+        </p:txBody>
+      </p:sp>
+      <p:sp>
+        <p:nvSpPr>
+          <p:cNvPr id="16" name="Rectangle 15"/>
+          <p:cNvSpPr/>
+          <p:nvPr/>
+        </p:nvSpPr>
+        <p:spPr>
+          <a:xfrm>
+            <a:off x="640080" y="2971800"/>
+            <a:ext cx="73152" cy="274320"/>
+          </a:xfrm>
+          <a:prstGeom prst="rect">
+            <a:avLst/>
+          </a:prstGeom>
+          <a:solidFill>
+            <a:srgbClr val="269CCB"/>
+          </a:solidFill>
+          <a:ln>
+            <a:noFill/>
+          </a:ln>
+        </p:spPr>
+        <p:style>
+          <a:lnRef idx="1">
+            <a:schemeClr val="accent1"/>
+          </a:lnRef>
+          <a:fillRef idx="3">
+            <a:schemeClr val="accent1"/>
+          </a:fillRef>
+          <a:effectRef idx="2">
+            <a:schemeClr val="accent1"/>
+          </a:effectRef>
+          <a:fontRef idx="minor">
+            <a:schemeClr val="lt1"/>
+          </a:fontRef>
+        </p:style>
+        <p:txBody>
+          <a:bodyPr rtlCol="0" anchor="ctr"/>
+          <a:lstStyle/>
+          <a:p>
+            <a:pPr algn="ctr"/>
+          </a:p>
+        </p:txBody>
+      </p:sp>
+      <p:sp>
+        <p:nvSpPr>
+          <p:cNvPr id="17" name="TextBox 16"/>
+          <p:cNvSpPr txBox="1"/>
+          <p:nvPr/>
+        </p:nvSpPr>
+        <p:spPr>
+          <a:xfrm>
+            <a:off x="1097280" y="2916936"/>
+            <a:ext cx="10362895" cy="402336"/>
+          </a:xfrm>
+          <a:prstGeom prst="rect">
+            <a:avLst/>
+          </a:prstGeom>
+          <a:noFill/>
+        </p:spPr>
+        <p:txBody>
+          <a:bodyPr wrap="square" anchor="ctr"/>
+          <a:lstStyle/>
+          <a:p>
+            <a:r>
+              <a:rPr sz="1500" b="1" i="0">
+                <a:solidFill>
+                  <a:srgbClr val="333333"/>
+                </a:solidFill>
+                <a:latin typeface="Calibri"/>
+              </a:rPr>
+              <a:t>LOS ACTORES</a:t>
+            </a:r>
+            <a:r>
+              <a:rPr sz="1500" b="0" i="0">
+                <a:solidFill>
+                  <a:srgbClr val="333333"/>
+                </a:solidFill>
+                <a:latin typeface="Calibri"/>
+              </a:rPr>
+              <a:t> — Todos los afectados, con su rol y qué le importa a cada uno. Incluyan </a:t>
+            </a:r>
+            <a:r>
+              <a:rPr sz="1500" b="1" i="0">
+                <a:solidFill>
+                  <a:srgbClr val="333333"/>
+                </a:solidFill>
+                <a:latin typeface="Calibri"/>
+              </a:rPr>
+              <a:t>al menos uno que no use el sistema pero sí sufra el resultado</a:t>
+            </a:r>
+            <a:r>
+              <a:rPr sz="1500" b="0" i="0">
+                <a:solidFill>
+                  <a:srgbClr val="333333"/>
+                </a:solidFill>
+                <a:latin typeface="Calibri"/>
+              </a:rPr>
+              <a:t>.</a:t>
+            </a:r>
+          </a:p>
+        </p:txBody>
+      </p:sp>
+      <p:sp>
+        <p:nvSpPr>
+          <p:cNvPr id="18" name="Rounded Rectangle 17"/>
+          <p:cNvSpPr/>
+          <p:nvPr/>
+        </p:nvSpPr>
+        <p:spPr>
+          <a:xfrm>
+            <a:off x="457200" y="3502152"/>
+            <a:ext cx="11277295" cy="566928"/>
+          </a:xfrm>
+          <a:prstGeom prst="roundRect">
+            <a:avLst>
+              <a:gd name="adj" fmla="val 12000"/>
+            </a:avLst>
+          </a:prstGeom>
+          <a:solidFill>
+            <a:srgbClr val="F2F2F2"/>
+          </a:solidFill>
+          <a:ln>
+            <a:noFill/>
+          </a:ln>
+        </p:spPr>
+        <p:style>
+          <a:lnRef idx="1">
+            <a:schemeClr val="accent1"/>
+          </a:lnRef>
+          <a:fillRef idx="3">
+            <a:schemeClr val="accent1"/>
+          </a:fillRef>
+          <a:effectRef idx="2">
+            <a:schemeClr val="accent1"/>
+          </a:effectRef>
+          <a:fontRef idx="minor">
+            <a:schemeClr val="lt1"/>
+          </a:fontRef>
+        </p:style>
+        <p:txBody>
+          <a:bodyPr rtlCol="0" anchor="ctr"/>
+          <a:lstStyle/>
+          <a:p>
+            <a:pPr algn="ctr"/>
+          </a:p>
+        </p:txBody>
+      </p:sp>
+      <p:sp>
+        <p:nvSpPr>
+          <p:cNvPr id="19" name="Rectangle 18"/>
+          <p:cNvSpPr/>
+          <p:nvPr/>
+        </p:nvSpPr>
+        <p:spPr>
+          <a:xfrm>
+            <a:off x="640080" y="3648456"/>
+            <a:ext cx="274320" cy="274320"/>
+          </a:xfrm>
+          <a:prstGeom prst="rect">
+            <a:avLst/>
+          </a:prstGeom>
+          <a:solidFill>
+            <a:srgbClr val="FFFFFF"/>
+          </a:solidFill>
+          <a:ln>
+            <a:solidFill>
+              <a:srgbClr val="333333"/>
+            </a:solidFill>
+          </a:ln>
+        </p:spPr>
+        <p:style>
+          <a:lnRef idx="1">
+            <a:schemeClr val="accent1"/>
+          </a:lnRef>
+          <a:fillRef idx="3">
+            <a:schemeClr val="accent1"/>
+          </a:fillRef>
+          <a:effectRef idx="2">
+            <a:schemeClr val="accent1"/>
+          </a:effectRef>
+          <a:fontRef idx="minor">
+            <a:schemeClr val="lt1"/>
+          </a:fontRef>
+        </p:style>
+        <p:txBody>
+          <a:bodyPr rtlCol="0" anchor="ctr"/>
+          <a:lstStyle/>
+          <a:p>
+            <a:pPr algn="ctr"/>
+          </a:p>
+        </p:txBody>
+      </p:sp>
+      <p:sp>
+        <p:nvSpPr>
+          <p:cNvPr id="20" name="Rectangle 19"/>
+          <p:cNvSpPr/>
+          <p:nvPr/>
+        </p:nvSpPr>
+        <p:spPr>
+          <a:xfrm>
+            <a:off x="640080" y="3648456"/>
+            <a:ext cx="73152" cy="274320"/>
+          </a:xfrm>
+          <a:prstGeom prst="rect">
+            <a:avLst/>
+          </a:prstGeom>
+          <a:solidFill>
+            <a:srgbClr val="269CCB"/>
+          </a:solidFill>
+          <a:ln>
+            <a:noFill/>
+          </a:ln>
+        </p:spPr>
+        <p:style>
+          <a:lnRef idx="1">
+            <a:schemeClr val="accent1"/>
+          </a:lnRef>
+          <a:fillRef idx="3">
+            <a:schemeClr val="accent1"/>
+          </a:fillRef>
+          <a:effectRef idx="2">
+            <a:schemeClr val="accent1"/>
+          </a:effectRef>
+          <a:fontRef idx="minor">
+            <a:schemeClr val="lt1"/>
+          </a:fontRef>
+        </p:style>
+        <p:txBody>
+          <a:bodyPr rtlCol="0" anchor="ctr"/>
+          <a:lstStyle/>
+          <a:p>
+            <a:pPr algn="ctr"/>
+          </a:p>
+        </p:txBody>
+      </p:sp>
+      <p:sp>
+        <p:nvSpPr>
+          <p:cNvPr id="21" name="TextBox 20"/>
+          <p:cNvSpPr txBox="1"/>
+          <p:nvPr/>
+        </p:nvSpPr>
+        <p:spPr>
+          <a:xfrm>
+            <a:off x="1097280" y="3593592"/>
+            <a:ext cx="10362895" cy="402336"/>
+          </a:xfrm>
+          <a:prstGeom prst="rect">
+            <a:avLst/>
+          </a:prstGeom>
+          <a:noFill/>
+        </p:spPr>
+        <p:txBody>
+          <a:bodyPr wrap="square" anchor="ctr"/>
+          <a:lstStyle/>
+          <a:p>
+            <a:r>
+              <a:rPr sz="1500" b="1" i="0">
+                <a:solidFill>
+                  <a:srgbClr val="333333"/>
+                </a:solidFill>
+                <a:latin typeface="Calibri"/>
+              </a:rPr>
+              <a:t>LA RETROALIMENTACIÓN</a:t>
+            </a:r>
+            <a:r>
+              <a:rPr sz="1500" b="0" i="0">
+                <a:solidFill>
+                  <a:srgbClr val="333333"/>
+                </a:solidFill>
+                <a:latin typeface="Calibri"/>
+              </a:rPr>
+              <a:t> — ¿Cómo se entera este sistema de que algo salió mal? Si no se entera, escríbanlo: es un hallazgo, no un error suyo.</a:t>
+            </a:r>
+          </a:p>
+        </p:txBody>
+      </p:sp>
+      <p:sp>
+        <p:nvSpPr>
+          <p:cNvPr id="22" name="Rounded Rectangle 21"/>
+          <p:cNvSpPr/>
+          <p:nvPr/>
+        </p:nvSpPr>
+        <p:spPr>
+          <a:xfrm>
+            <a:off x="457200" y="4178808"/>
+            <a:ext cx="11277295" cy="566928"/>
+          </a:xfrm>
+          <a:prstGeom prst="roundRect">
+            <a:avLst>
+              <a:gd name="adj" fmla="val 12000"/>
+            </a:avLst>
+          </a:prstGeom>
+          <a:solidFill>
+            <a:srgbClr val="F2F2F2"/>
+          </a:solidFill>
+          <a:ln>
+            <a:noFill/>
+          </a:ln>
+        </p:spPr>
+        <p:style>
+          <a:lnRef idx="1">
+            <a:schemeClr val="accent1"/>
+          </a:lnRef>
+          <a:fillRef idx="3">
+            <a:schemeClr val="accent1"/>
+          </a:fillRef>
+          <a:effectRef idx="2">
+            <a:schemeClr val="accent1"/>
+          </a:effectRef>
+          <a:fontRef idx="minor">
+            <a:schemeClr val="lt1"/>
+          </a:fontRef>
+        </p:style>
+        <p:txBody>
+          <a:bodyPr rtlCol="0" anchor="ctr"/>
+          <a:lstStyle/>
+          <a:p>
+            <a:pPr algn="ctr"/>
+          </a:p>
+        </p:txBody>
+      </p:sp>
+      <p:sp>
+        <p:nvSpPr>
+          <p:cNvPr id="23" name="Rectangle 22"/>
+          <p:cNvSpPr/>
+          <p:nvPr/>
+        </p:nvSpPr>
+        <p:spPr>
+          <a:xfrm>
+            <a:off x="640080" y="4325112"/>
+            <a:ext cx="274320" cy="274320"/>
+          </a:xfrm>
+          <a:prstGeom prst="rect">
+            <a:avLst/>
+          </a:prstGeom>
+          <a:solidFill>
+            <a:srgbClr val="FFFFFF"/>
+          </a:solidFill>
+          <a:ln>
+            <a:solidFill>
+              <a:srgbClr val="333333"/>
+            </a:solidFill>
+          </a:ln>
+        </p:spPr>
+        <p:style>
+          <a:lnRef idx="1">
+            <a:schemeClr val="accent1"/>
+          </a:lnRef>
+          <a:fillRef idx="3">
+            <a:schemeClr val="accent1"/>
+          </a:fillRef>
+          <a:effectRef idx="2">
+            <a:schemeClr val="accent1"/>
+          </a:effectRef>
+          <a:fontRef idx="minor">
+            <a:schemeClr val="lt1"/>
+          </a:fontRef>
+        </p:style>
+        <p:txBody>
+          <a:bodyPr rtlCol="0" anchor="ctr"/>
+          <a:lstStyle/>
+          <a:p>
+            <a:pPr algn="ctr"/>
+          </a:p>
+        </p:txBody>
+      </p:sp>
+      <p:sp>
+        <p:nvSpPr>
+          <p:cNvPr id="24" name="Rectangle 23"/>
+          <p:cNvSpPr/>
+          <p:nvPr/>
+        </p:nvSpPr>
+        <p:spPr>
+          <a:xfrm>
+            <a:off x="640080" y="4325112"/>
+            <a:ext cx="73152" cy="274320"/>
+          </a:xfrm>
+          <a:prstGeom prst="rect">
+            <a:avLst/>
+          </a:prstGeom>
+          <a:solidFill>
+            <a:srgbClr val="269CCB"/>
+          </a:solidFill>
+          <a:ln>
+            <a:noFill/>
+          </a:ln>
+        </p:spPr>
+        <p:style>
+          <a:lnRef idx="1">
+            <a:schemeClr val="accent1"/>
+          </a:lnRef>
+          <a:fillRef idx="3">
+            <a:schemeClr val="accent1"/>
+          </a:fillRef>
+          <a:effectRef idx="2">
+            <a:schemeClr val="accent1"/>
+          </a:effectRef>
+          <a:fontRef idx="minor">
+            <a:schemeClr val="lt1"/>
+          </a:fontRef>
+        </p:style>
+        <p:txBody>
+          <a:bodyPr rtlCol="0" anchor="ctr"/>
+          <a:lstStyle/>
+          <a:p>
+            <a:pPr algn="ctr"/>
+          </a:p>
+        </p:txBody>
+      </p:sp>
+      <p:sp>
+        <p:nvSpPr>
+          <p:cNvPr id="25" name="TextBox 24"/>
+          <p:cNvSpPr txBox="1"/>
+          <p:nvPr/>
+        </p:nvSpPr>
+        <p:spPr>
+          <a:xfrm>
+            <a:off x="1097280" y="4270248"/>
+            <a:ext cx="10362895" cy="402336"/>
+          </a:xfrm>
+          <a:prstGeom prst="rect">
+            <a:avLst/>
+          </a:prstGeom>
+          <a:noFill/>
+        </p:spPr>
+        <p:txBody>
+          <a:bodyPr wrap="square" anchor="ctr"/>
+          <a:lstStyle/>
+          <a:p>
+            <a:r>
+              <a:rPr sz="1500" b="1" i="0">
+                <a:solidFill>
+                  <a:srgbClr val="333333"/>
+                </a:solidFill>
+                <a:latin typeface="Calibri"/>
+              </a:rPr>
+              <a:t>LA IA: PROMPT Y CORRECCIONES</a:t>
+            </a:r>
+            <a:r>
+              <a:rPr sz="1500" b="0" i="0">
+                <a:solidFill>
+                  <a:srgbClr val="333333"/>
+                </a:solidFill>
+                <a:latin typeface="Calibri"/>
+              </a:rPr>
+              <a:t> — El prompt exacto que usaron, y una lista de </a:t>
+            </a:r>
+            <a:r>
+              <a:rPr sz="1500" b="1" i="0">
+                <a:solidFill>
+                  <a:srgbClr val="333333"/>
+                </a:solidFill>
+                <a:latin typeface="Calibri"/>
+              </a:rPr>
+              <a:t>al menos tres cosas que la IA escribió mal</a:t>
+            </a:r>
+            <a:r>
+              <a:rPr sz="1500" b="0" i="0">
+                <a:solidFill>
+                  <a:srgbClr val="333333"/>
+                </a:solidFill>
+                <a:latin typeface="Calibri"/>
+              </a:rPr>
+              <a:t> y cómo las corrigieron.</a:t>
+            </a:r>
+          </a:p>
+        </p:txBody>
+      </p:sp>
+      <p:sp>
+        <p:nvSpPr>
+          <p:cNvPr id="26" name="TextBox 25"/>
           <p:cNvSpPr txBox="1"/>
           <p:nvPr/>
         </p:nvSpPr>
@@ -9740,6 +9403,1297 @@
 </file>
 
 <file path=ppt/slides/slide23.xml><?xml version="1.0" encoding="utf-8"?>
+<p:sld xmlns:a="http://schemas.openxmlformats.org/drawingml/2006/main" xmlns:p="http://schemas.openxmlformats.org/presentationml/2006/main" xmlns:r="http://schemas.openxmlformats.org/officeDocument/2006/relationships">
+  <p:cSld>
+    <p:bg>
+      <p:bgPr>
+        <a:solidFill>
+          <a:srgbClr val="FFFFFF"/>
+        </a:solidFill>
+        <a:effectLst/>
+      </p:bgPr>
+    </p:bg>
+    <p:spTree>
+      <p:nvGrpSpPr>
+        <p:cNvPr id="1" name=""/>
+        <p:cNvGrpSpPr/>
+        <p:nvPr/>
+      </p:nvGrpSpPr>
+      <p:grpSpPr/>
+      <p:sp>
+        <p:nvSpPr>
+          <p:cNvPr id="2" name="Rectangle 1"/>
+          <p:cNvSpPr/>
+          <p:nvPr/>
+        </p:nvSpPr>
+        <p:spPr>
+          <a:xfrm>
+            <a:off x="0" y="0"/>
+            <a:ext cx="12191695" cy="1170432"/>
+          </a:xfrm>
+          <a:prstGeom prst="rect">
+            <a:avLst/>
+          </a:prstGeom>
+          <a:solidFill>
+            <a:srgbClr val="095292"/>
+          </a:solidFill>
+          <a:ln>
+            <a:noFill/>
+          </a:ln>
+        </p:spPr>
+        <p:style>
+          <a:lnRef idx="1">
+            <a:schemeClr val="accent1"/>
+          </a:lnRef>
+          <a:fillRef idx="3">
+            <a:schemeClr val="accent1"/>
+          </a:fillRef>
+          <a:effectRef idx="2">
+            <a:schemeClr val="accent1"/>
+          </a:effectRef>
+          <a:fontRef idx="minor">
+            <a:schemeClr val="lt1"/>
+          </a:fontRef>
+        </p:style>
+        <p:txBody>
+          <a:bodyPr rtlCol="0" anchor="ctr"/>
+          <a:lstStyle/>
+          <a:p>
+            <a:pPr algn="ctr"/>
+          </a:p>
+        </p:txBody>
+      </p:sp>
+      <p:sp>
+        <p:nvSpPr>
+          <p:cNvPr id="3" name="Rectangle 2"/>
+          <p:cNvSpPr/>
+          <p:nvPr/>
+        </p:nvSpPr>
+        <p:spPr>
+          <a:xfrm>
+            <a:off x="0" y="1170432"/>
+            <a:ext cx="12191695" cy="41148"/>
+          </a:xfrm>
+          <a:prstGeom prst="rect">
+            <a:avLst/>
+          </a:prstGeom>
+          <a:solidFill>
+            <a:srgbClr val="FFD000"/>
+          </a:solidFill>
+          <a:ln>
+            <a:noFill/>
+          </a:ln>
+        </p:spPr>
+        <p:style>
+          <a:lnRef idx="1">
+            <a:schemeClr val="accent1"/>
+          </a:lnRef>
+          <a:fillRef idx="3">
+            <a:schemeClr val="accent1"/>
+          </a:fillRef>
+          <a:effectRef idx="2">
+            <a:schemeClr val="accent1"/>
+          </a:effectRef>
+          <a:fontRef idx="minor">
+            <a:schemeClr val="lt1"/>
+          </a:fontRef>
+        </p:style>
+        <p:txBody>
+          <a:bodyPr rtlCol="0" anchor="ctr"/>
+          <a:lstStyle/>
+          <a:p>
+            <a:pPr algn="ctr"/>
+          </a:p>
+        </p:txBody>
+      </p:sp>
+      <p:sp>
+        <p:nvSpPr>
+          <p:cNvPr id="4" name="TextBox 3"/>
+          <p:cNvSpPr txBox="1"/>
+          <p:nvPr/>
+        </p:nvSpPr>
+        <p:spPr>
+          <a:xfrm>
+            <a:off x="457200" y="164592"/>
+            <a:ext cx="11277295" cy="384048"/>
+          </a:xfrm>
+          <a:prstGeom prst="rect">
+            <a:avLst/>
+          </a:prstGeom>
+          <a:noFill/>
+        </p:spPr>
+        <p:txBody>
+          <a:bodyPr wrap="square">
+            <a:spAutoFit/>
+          </a:bodyPr>
+          <a:lstStyle/>
+          <a:p>
+            <a:r>
+              <a:rPr sz="2600" b="1" i="0">
+                <a:solidFill>
+                  <a:srgbClr val="FFFFFF"/>
+                </a:solidFill>
+                <a:latin typeface="Calibri"/>
+              </a:rPr>
+              <a:t>Cómo se expone en 3 minutos</a:t>
+            </a:r>
+          </a:p>
+        </p:txBody>
+      </p:sp>
+      <p:sp>
+        <p:nvSpPr>
+          <p:cNvPr id="5" name="TextBox 4"/>
+          <p:cNvSpPr txBox="1"/>
+          <p:nvPr/>
+        </p:nvSpPr>
+        <p:spPr>
+          <a:xfrm>
+            <a:off x="457200" y="566928"/>
+            <a:ext cx="11277295" cy="411480"/>
+          </a:xfrm>
+          <a:prstGeom prst="rect">
+            <a:avLst/>
+          </a:prstGeom>
+          <a:noFill/>
+        </p:spPr>
+        <p:txBody>
+          <a:bodyPr wrap="square">
+            <a:spAutoFit/>
+          </a:bodyPr>
+          <a:lstStyle/>
+          <a:p>
+            <a:r>
+              <a:rPr sz="1400" b="0" i="0">
+                <a:solidFill>
+                  <a:srgbClr val="B8D8EE"/>
+                </a:solidFill>
+                <a:latin typeface="Calibri"/>
+              </a:rPr>
+              <a:t>Habla el vocero con la pantalla ya compartida · cronómetro en pantalla · se corta al llegar a cero</a:t>
+            </a:r>
+          </a:p>
+        </p:txBody>
+      </p:sp>
+      <p:sp>
+        <p:nvSpPr>
+          <p:cNvPr id="6" name="Rounded Rectangle 5"/>
+          <p:cNvSpPr/>
+          <p:nvPr/>
+        </p:nvSpPr>
+        <p:spPr>
+          <a:xfrm>
+            <a:off x="457200" y="1659636"/>
+            <a:ext cx="11277295" cy="1051560"/>
+          </a:xfrm>
+          <a:prstGeom prst="roundRect">
+            <a:avLst>
+              <a:gd name="adj" fmla="val 12000"/>
+            </a:avLst>
+          </a:prstGeom>
+          <a:solidFill>
+            <a:srgbClr val="F2F2F2"/>
+          </a:solidFill>
+          <a:ln>
+            <a:noFill/>
+          </a:ln>
+        </p:spPr>
+        <p:style>
+          <a:lnRef idx="1">
+            <a:schemeClr val="accent1"/>
+          </a:lnRef>
+          <a:fillRef idx="3">
+            <a:schemeClr val="accent1"/>
+          </a:fillRef>
+          <a:effectRef idx="2">
+            <a:schemeClr val="accent1"/>
+          </a:effectRef>
+          <a:fontRef idx="minor">
+            <a:schemeClr val="lt1"/>
+          </a:fontRef>
+        </p:style>
+        <p:txBody>
+          <a:bodyPr rtlCol="0" anchor="ctr"/>
+          <a:lstStyle/>
+          <a:p>
+            <a:pPr algn="ctr"/>
+          </a:p>
+        </p:txBody>
+      </p:sp>
+      <p:sp>
+        <p:nvSpPr>
+          <p:cNvPr id="7" name="Rounded Rectangle 6"/>
+          <p:cNvSpPr/>
+          <p:nvPr/>
+        </p:nvSpPr>
+        <p:spPr>
+          <a:xfrm>
+            <a:off x="594360" y="1965960"/>
+            <a:ext cx="438912" cy="438912"/>
+          </a:xfrm>
+          <a:prstGeom prst="roundRect">
+            <a:avLst>
+              <a:gd name="adj" fmla="val 12000"/>
+            </a:avLst>
+          </a:prstGeom>
+          <a:solidFill>
+            <a:srgbClr val="095292"/>
+          </a:solidFill>
+          <a:ln>
+            <a:noFill/>
+          </a:ln>
+        </p:spPr>
+        <p:style>
+          <a:lnRef idx="1">
+            <a:schemeClr val="accent1"/>
+          </a:lnRef>
+          <a:fillRef idx="3">
+            <a:schemeClr val="accent1"/>
+          </a:fillRef>
+          <a:effectRef idx="2">
+            <a:schemeClr val="accent1"/>
+          </a:effectRef>
+          <a:fontRef idx="minor">
+            <a:schemeClr val="lt1"/>
+          </a:fontRef>
+        </p:style>
+        <p:txBody>
+          <a:bodyPr rtlCol="0" anchor="ctr"/>
+          <a:lstStyle/>
+          <a:p>
+            <a:pPr algn="ctr"/>
+          </a:p>
+        </p:txBody>
+      </p:sp>
+      <p:sp>
+        <p:nvSpPr>
+          <p:cNvPr id="8" name="TextBox 7"/>
+          <p:cNvSpPr txBox="1"/>
+          <p:nvPr/>
+        </p:nvSpPr>
+        <p:spPr>
+          <a:xfrm>
+            <a:off x="594360" y="1965960"/>
+            <a:ext cx="438912" cy="438912"/>
+          </a:xfrm>
+          <a:prstGeom prst="rect">
+            <a:avLst/>
+          </a:prstGeom>
+          <a:noFill/>
+        </p:spPr>
+        <p:txBody>
+          <a:bodyPr wrap="square" anchor="ctr"/>
+          <a:lstStyle/>
+          <a:p>
+            <a:pPr algn="ctr"/>
+            <a:r>
+              <a:rPr sz="1600" b="1" i="0">
+                <a:solidFill>
+                  <a:srgbClr val="FFFFFF"/>
+                </a:solidFill>
+                <a:latin typeface="Calibri"/>
+              </a:rPr>
+              <a:t>1</a:t>
+            </a:r>
+          </a:p>
+        </p:txBody>
+      </p:sp>
+      <p:sp>
+        <p:nvSpPr>
+          <p:cNvPr id="9" name="TextBox 8"/>
+          <p:cNvSpPr txBox="1"/>
+          <p:nvPr/>
+        </p:nvSpPr>
+        <p:spPr>
+          <a:xfrm>
+            <a:off x="1188720" y="1751076"/>
+            <a:ext cx="10271455" cy="886968"/>
+          </a:xfrm>
+          <a:prstGeom prst="rect">
+            <a:avLst/>
+          </a:prstGeom>
+          <a:noFill/>
+        </p:spPr>
+        <p:txBody>
+          <a:bodyPr wrap="square" anchor="ctr"/>
+          <a:lstStyle/>
+          <a:p>
+            <a:r>
+              <a:rPr sz="1500" b="1" i="0">
+                <a:solidFill>
+                  <a:srgbClr val="095292"/>
+                </a:solidFill>
+                <a:latin typeface="Calibri"/>
+              </a:rPr>
+              <a:t>30 s · El sistema y su propósito</a:t>
+            </a:r>
+          </a:p>
+          <a:p>
+            <a:pPr>
+              <a:spcBef>
+                <a:spcPts val="200"/>
+              </a:spcBef>
+            </a:pPr>
+            <a:r>
+              <a:rPr sz="1300" b="0" i="0">
+                <a:solidFill>
+                  <a:srgbClr val="333333"/>
+                </a:solidFill>
+                <a:latin typeface="Calibri"/>
+              </a:rPr>
+              <a:t>Qué sistema es y para qué existe, en una frase.</a:t>
+            </a:r>
+          </a:p>
+        </p:txBody>
+      </p:sp>
+      <p:sp>
+        <p:nvSpPr>
+          <p:cNvPr id="10" name="Rounded Rectangle 9"/>
+          <p:cNvSpPr/>
+          <p:nvPr/>
+        </p:nvSpPr>
+        <p:spPr>
+          <a:xfrm>
+            <a:off x="457200" y="2802636"/>
+            <a:ext cx="11277295" cy="1051560"/>
+          </a:xfrm>
+          <a:prstGeom prst="roundRect">
+            <a:avLst>
+              <a:gd name="adj" fmla="val 12000"/>
+            </a:avLst>
+          </a:prstGeom>
+          <a:solidFill>
+            <a:srgbClr val="E8F4FA"/>
+          </a:solidFill>
+          <a:ln>
+            <a:noFill/>
+          </a:ln>
+        </p:spPr>
+        <p:style>
+          <a:lnRef idx="1">
+            <a:schemeClr val="accent1"/>
+          </a:lnRef>
+          <a:fillRef idx="3">
+            <a:schemeClr val="accent1"/>
+          </a:fillRef>
+          <a:effectRef idx="2">
+            <a:schemeClr val="accent1"/>
+          </a:effectRef>
+          <a:fontRef idx="minor">
+            <a:schemeClr val="lt1"/>
+          </a:fontRef>
+        </p:style>
+        <p:txBody>
+          <a:bodyPr rtlCol="0" anchor="ctr"/>
+          <a:lstStyle/>
+          <a:p>
+            <a:pPr algn="ctr"/>
+          </a:p>
+        </p:txBody>
+      </p:sp>
+      <p:sp>
+        <p:nvSpPr>
+          <p:cNvPr id="11" name="Rounded Rectangle 10"/>
+          <p:cNvSpPr/>
+          <p:nvPr/>
+        </p:nvSpPr>
+        <p:spPr>
+          <a:xfrm>
+            <a:off x="594360" y="3108960"/>
+            <a:ext cx="438912" cy="438912"/>
+          </a:xfrm>
+          <a:prstGeom prst="roundRect">
+            <a:avLst>
+              <a:gd name="adj" fmla="val 12000"/>
+            </a:avLst>
+          </a:prstGeom>
+          <a:solidFill>
+            <a:srgbClr val="095292"/>
+          </a:solidFill>
+          <a:ln>
+            <a:noFill/>
+          </a:ln>
+        </p:spPr>
+        <p:style>
+          <a:lnRef idx="1">
+            <a:schemeClr val="accent1"/>
+          </a:lnRef>
+          <a:fillRef idx="3">
+            <a:schemeClr val="accent1"/>
+          </a:fillRef>
+          <a:effectRef idx="2">
+            <a:schemeClr val="accent1"/>
+          </a:effectRef>
+          <a:fontRef idx="minor">
+            <a:schemeClr val="lt1"/>
+          </a:fontRef>
+        </p:style>
+        <p:txBody>
+          <a:bodyPr rtlCol="0" anchor="ctr"/>
+          <a:lstStyle/>
+          <a:p>
+            <a:pPr algn="ctr"/>
+          </a:p>
+        </p:txBody>
+      </p:sp>
+      <p:sp>
+        <p:nvSpPr>
+          <p:cNvPr id="12" name="TextBox 11"/>
+          <p:cNvSpPr txBox="1"/>
+          <p:nvPr/>
+        </p:nvSpPr>
+        <p:spPr>
+          <a:xfrm>
+            <a:off x="594360" y="3108960"/>
+            <a:ext cx="438912" cy="438912"/>
+          </a:xfrm>
+          <a:prstGeom prst="rect">
+            <a:avLst/>
+          </a:prstGeom>
+          <a:noFill/>
+        </p:spPr>
+        <p:txBody>
+          <a:bodyPr wrap="square" anchor="ctr"/>
+          <a:lstStyle/>
+          <a:p>
+            <a:pPr algn="ctr"/>
+            <a:r>
+              <a:rPr sz="1600" b="1" i="0">
+                <a:solidFill>
+                  <a:srgbClr val="FFFFFF"/>
+                </a:solidFill>
+                <a:latin typeface="Calibri"/>
+              </a:rPr>
+              <a:t>2</a:t>
+            </a:r>
+          </a:p>
+        </p:txBody>
+      </p:sp>
+      <p:sp>
+        <p:nvSpPr>
+          <p:cNvPr id="13" name="TextBox 12"/>
+          <p:cNvSpPr txBox="1"/>
+          <p:nvPr/>
+        </p:nvSpPr>
+        <p:spPr>
+          <a:xfrm>
+            <a:off x="1188720" y="2894076"/>
+            <a:ext cx="10271455" cy="886968"/>
+          </a:xfrm>
+          <a:prstGeom prst="rect">
+            <a:avLst/>
+          </a:prstGeom>
+          <a:noFill/>
+        </p:spPr>
+        <p:txBody>
+          <a:bodyPr wrap="square" anchor="ctr"/>
+          <a:lstStyle/>
+          <a:p>
+            <a:r>
+              <a:rPr sz="1500" b="1" i="0">
+                <a:solidFill>
+                  <a:srgbClr val="095292"/>
+                </a:solidFill>
+                <a:latin typeface="Calibri"/>
+              </a:rPr>
+              <a:t>45 s · La frontera</a:t>
+            </a:r>
+          </a:p>
+          <a:p>
+            <a:pPr>
+              <a:spcBef>
+                <a:spcPts val="200"/>
+              </a:spcBef>
+            </a:pPr>
+            <a:r>
+              <a:rPr sz="1300" b="0" i="0">
+                <a:solidFill>
+                  <a:srgbClr val="333333"/>
+                </a:solidFill>
+                <a:latin typeface="Calibri"/>
+              </a:rPr>
+              <a:t>Qué dejaron fuera y por qué. Es la decisión que se discute.</a:t>
+            </a:r>
+          </a:p>
+        </p:txBody>
+      </p:sp>
+      <p:sp>
+        <p:nvSpPr>
+          <p:cNvPr id="14" name="Rounded Rectangle 13"/>
+          <p:cNvSpPr/>
+          <p:nvPr/>
+        </p:nvSpPr>
+        <p:spPr>
+          <a:xfrm>
+            <a:off x="457200" y="3945636"/>
+            <a:ext cx="11277295" cy="1051560"/>
+          </a:xfrm>
+          <a:prstGeom prst="roundRect">
+            <a:avLst>
+              <a:gd name="adj" fmla="val 12000"/>
+            </a:avLst>
+          </a:prstGeom>
+          <a:solidFill>
+            <a:srgbClr val="F2F2F2"/>
+          </a:solidFill>
+          <a:ln>
+            <a:noFill/>
+          </a:ln>
+        </p:spPr>
+        <p:style>
+          <a:lnRef idx="1">
+            <a:schemeClr val="accent1"/>
+          </a:lnRef>
+          <a:fillRef idx="3">
+            <a:schemeClr val="accent1"/>
+          </a:fillRef>
+          <a:effectRef idx="2">
+            <a:schemeClr val="accent1"/>
+          </a:effectRef>
+          <a:fontRef idx="minor">
+            <a:schemeClr val="lt1"/>
+          </a:fontRef>
+        </p:style>
+        <p:txBody>
+          <a:bodyPr rtlCol="0" anchor="ctr"/>
+          <a:lstStyle/>
+          <a:p>
+            <a:pPr algn="ctr"/>
+          </a:p>
+        </p:txBody>
+      </p:sp>
+      <p:sp>
+        <p:nvSpPr>
+          <p:cNvPr id="15" name="Rounded Rectangle 14"/>
+          <p:cNvSpPr/>
+          <p:nvPr/>
+        </p:nvSpPr>
+        <p:spPr>
+          <a:xfrm>
+            <a:off x="594360" y="4251960"/>
+            <a:ext cx="438912" cy="438912"/>
+          </a:xfrm>
+          <a:prstGeom prst="roundRect">
+            <a:avLst>
+              <a:gd name="adj" fmla="val 12000"/>
+            </a:avLst>
+          </a:prstGeom>
+          <a:solidFill>
+            <a:srgbClr val="095292"/>
+          </a:solidFill>
+          <a:ln>
+            <a:noFill/>
+          </a:ln>
+        </p:spPr>
+        <p:style>
+          <a:lnRef idx="1">
+            <a:schemeClr val="accent1"/>
+          </a:lnRef>
+          <a:fillRef idx="3">
+            <a:schemeClr val="accent1"/>
+          </a:fillRef>
+          <a:effectRef idx="2">
+            <a:schemeClr val="accent1"/>
+          </a:effectRef>
+          <a:fontRef idx="minor">
+            <a:schemeClr val="lt1"/>
+          </a:fontRef>
+        </p:style>
+        <p:txBody>
+          <a:bodyPr rtlCol="0" anchor="ctr"/>
+          <a:lstStyle/>
+          <a:p>
+            <a:pPr algn="ctr"/>
+          </a:p>
+        </p:txBody>
+      </p:sp>
+      <p:sp>
+        <p:nvSpPr>
+          <p:cNvPr id="16" name="TextBox 15"/>
+          <p:cNvSpPr txBox="1"/>
+          <p:nvPr/>
+        </p:nvSpPr>
+        <p:spPr>
+          <a:xfrm>
+            <a:off x="594360" y="4251960"/>
+            <a:ext cx="438912" cy="438912"/>
+          </a:xfrm>
+          <a:prstGeom prst="rect">
+            <a:avLst/>
+          </a:prstGeom>
+          <a:noFill/>
+        </p:spPr>
+        <p:txBody>
+          <a:bodyPr wrap="square" anchor="ctr"/>
+          <a:lstStyle/>
+          <a:p>
+            <a:pPr algn="ctr"/>
+            <a:r>
+              <a:rPr sz="1600" b="1" i="0">
+                <a:solidFill>
+                  <a:srgbClr val="FFFFFF"/>
+                </a:solidFill>
+                <a:latin typeface="Calibri"/>
+              </a:rPr>
+              <a:t>3</a:t>
+            </a:r>
+          </a:p>
+        </p:txBody>
+      </p:sp>
+      <p:sp>
+        <p:nvSpPr>
+          <p:cNvPr id="17" name="TextBox 16"/>
+          <p:cNvSpPr txBox="1"/>
+          <p:nvPr/>
+        </p:nvSpPr>
+        <p:spPr>
+          <a:xfrm>
+            <a:off x="1188720" y="4037076"/>
+            <a:ext cx="10271455" cy="886968"/>
+          </a:xfrm>
+          <a:prstGeom prst="rect">
+            <a:avLst/>
+          </a:prstGeom>
+          <a:noFill/>
+        </p:spPr>
+        <p:txBody>
+          <a:bodyPr wrap="square" anchor="ctr"/>
+          <a:lstStyle/>
+          <a:p>
+            <a:r>
+              <a:rPr sz="1500" b="1" i="0">
+                <a:solidFill>
+                  <a:srgbClr val="095292"/>
+                </a:solidFill>
+                <a:latin typeface="Calibri"/>
+              </a:rPr>
+              <a:t>45 s · El actor olvidado</a:t>
+            </a:r>
+          </a:p>
+          <a:p>
+            <a:pPr>
+              <a:spcBef>
+                <a:spcPts val="200"/>
+              </a:spcBef>
+            </a:pPr>
+            <a:r>
+              <a:rPr sz="1300" b="0" i="0">
+                <a:solidFill>
+                  <a:srgbClr val="333333"/>
+                </a:solidFill>
+                <a:latin typeface="Calibri"/>
+              </a:rPr>
+              <a:t>El afectado que no usa el sistema. Quién es y qué pierde.</a:t>
+            </a:r>
+          </a:p>
+        </p:txBody>
+      </p:sp>
+      <p:sp>
+        <p:nvSpPr>
+          <p:cNvPr id="18" name="Rounded Rectangle 17"/>
+          <p:cNvSpPr/>
+          <p:nvPr/>
+        </p:nvSpPr>
+        <p:spPr>
+          <a:xfrm>
+            <a:off x="457200" y="5088636"/>
+            <a:ext cx="11277295" cy="1051560"/>
+          </a:xfrm>
+          <a:prstGeom prst="roundRect">
+            <a:avLst>
+              <a:gd name="adj" fmla="val 12000"/>
+            </a:avLst>
+          </a:prstGeom>
+          <a:solidFill>
+            <a:srgbClr val="E8F4FA"/>
+          </a:solidFill>
+          <a:ln>
+            <a:noFill/>
+          </a:ln>
+        </p:spPr>
+        <p:style>
+          <a:lnRef idx="1">
+            <a:schemeClr val="accent1"/>
+          </a:lnRef>
+          <a:fillRef idx="3">
+            <a:schemeClr val="accent1"/>
+          </a:fillRef>
+          <a:effectRef idx="2">
+            <a:schemeClr val="accent1"/>
+          </a:effectRef>
+          <a:fontRef idx="minor">
+            <a:schemeClr val="lt1"/>
+          </a:fontRef>
+        </p:style>
+        <p:txBody>
+          <a:bodyPr rtlCol="0" anchor="ctr"/>
+          <a:lstStyle/>
+          <a:p>
+            <a:pPr algn="ctr"/>
+          </a:p>
+        </p:txBody>
+      </p:sp>
+      <p:sp>
+        <p:nvSpPr>
+          <p:cNvPr id="19" name="Rounded Rectangle 18"/>
+          <p:cNvSpPr/>
+          <p:nvPr/>
+        </p:nvSpPr>
+        <p:spPr>
+          <a:xfrm>
+            <a:off x="594360" y="5394960"/>
+            <a:ext cx="438912" cy="438912"/>
+          </a:xfrm>
+          <a:prstGeom prst="roundRect">
+            <a:avLst>
+              <a:gd name="adj" fmla="val 12000"/>
+            </a:avLst>
+          </a:prstGeom>
+          <a:solidFill>
+            <a:srgbClr val="095292"/>
+          </a:solidFill>
+          <a:ln>
+            <a:noFill/>
+          </a:ln>
+        </p:spPr>
+        <p:style>
+          <a:lnRef idx="1">
+            <a:schemeClr val="accent1"/>
+          </a:lnRef>
+          <a:fillRef idx="3">
+            <a:schemeClr val="accent1"/>
+          </a:fillRef>
+          <a:effectRef idx="2">
+            <a:schemeClr val="accent1"/>
+          </a:effectRef>
+          <a:fontRef idx="minor">
+            <a:schemeClr val="lt1"/>
+          </a:fontRef>
+        </p:style>
+        <p:txBody>
+          <a:bodyPr rtlCol="0" anchor="ctr"/>
+          <a:lstStyle/>
+          <a:p>
+            <a:pPr algn="ctr"/>
+          </a:p>
+        </p:txBody>
+      </p:sp>
+      <p:sp>
+        <p:nvSpPr>
+          <p:cNvPr id="20" name="TextBox 19"/>
+          <p:cNvSpPr txBox="1"/>
+          <p:nvPr/>
+        </p:nvSpPr>
+        <p:spPr>
+          <a:xfrm>
+            <a:off x="594360" y="5394960"/>
+            <a:ext cx="438912" cy="438912"/>
+          </a:xfrm>
+          <a:prstGeom prst="rect">
+            <a:avLst/>
+          </a:prstGeom>
+          <a:noFill/>
+        </p:spPr>
+        <p:txBody>
+          <a:bodyPr wrap="square" anchor="ctr"/>
+          <a:lstStyle/>
+          <a:p>
+            <a:pPr algn="ctr"/>
+            <a:r>
+              <a:rPr sz="1600" b="1" i="0">
+                <a:solidFill>
+                  <a:srgbClr val="FFFFFF"/>
+                </a:solidFill>
+                <a:latin typeface="Calibri"/>
+              </a:rPr>
+              <a:t>4</a:t>
+            </a:r>
+          </a:p>
+        </p:txBody>
+      </p:sp>
+      <p:sp>
+        <p:nvSpPr>
+          <p:cNvPr id="21" name="TextBox 20"/>
+          <p:cNvSpPr txBox="1"/>
+          <p:nvPr/>
+        </p:nvSpPr>
+        <p:spPr>
+          <a:xfrm>
+            <a:off x="1188720" y="5180076"/>
+            <a:ext cx="10271455" cy="886968"/>
+          </a:xfrm>
+          <a:prstGeom prst="rect">
+            <a:avLst/>
+          </a:prstGeom>
+          <a:noFill/>
+        </p:spPr>
+        <p:txBody>
+          <a:bodyPr wrap="square" anchor="ctr"/>
+          <a:lstStyle/>
+          <a:p>
+            <a:r>
+              <a:rPr sz="1500" b="1" i="0">
+                <a:solidFill>
+                  <a:srgbClr val="095292"/>
+                </a:solidFill>
+                <a:latin typeface="Calibri"/>
+              </a:rPr>
+              <a:t>60 s · Qué se inventó la IA</a:t>
+            </a:r>
+          </a:p>
+          <a:p>
+            <a:pPr>
+              <a:spcBef>
+                <a:spcPts val="200"/>
+              </a:spcBef>
+            </a:pPr>
+            <a:r>
+              <a:rPr sz="1300" b="0" i="0">
+                <a:solidFill>
+                  <a:srgbClr val="333333"/>
+                </a:solidFill>
+                <a:latin typeface="Calibri"/>
+              </a:rPr>
+              <a:t>Las tres correcciones. Es el minuto obligatorio de la exposición.</a:t>
+            </a:r>
+          </a:p>
+        </p:txBody>
+      </p:sp>
+      <p:sp>
+        <p:nvSpPr>
+          <p:cNvPr id="22" name="TextBox 21"/>
+          <p:cNvSpPr txBox="1"/>
+          <p:nvPr/>
+        </p:nvSpPr>
+        <p:spPr>
+          <a:xfrm>
+            <a:off x="11185855" y="6473952"/>
+            <a:ext cx="640080" cy="274320"/>
+          </a:xfrm>
+          <a:prstGeom prst="rect">
+            <a:avLst/>
+          </a:prstGeom>
+          <a:noFill/>
+        </p:spPr>
+        <p:txBody>
+          <a:bodyPr wrap="square">
+            <a:spAutoFit/>
+          </a:bodyPr>
+          <a:lstStyle/>
+          <a:p>
+            <a:pPr algn="r"/>
+            <a:r>
+              <a:rPr sz="1100" b="0" i="0">
+                <a:solidFill>
+                  <a:srgbClr val="666666"/>
+                </a:solidFill>
+                <a:latin typeface="Calibri"/>
+              </a:rPr>
+              <a:t>23</a:t>
+            </a:r>
+          </a:p>
+        </p:txBody>
+      </p:sp>
+    </p:spTree>
+  </p:cSld>
+  <p:clrMapOvr>
+    <a:masterClrMapping/>
+  </p:clrMapOvr>
+</p:sld>
+</file>
+
+<file path=ppt/slides/slide24.xml><?xml version="1.0" encoding="utf-8"?>
+<p:sld xmlns:a="http://schemas.openxmlformats.org/drawingml/2006/main" xmlns:p="http://schemas.openxmlformats.org/presentationml/2006/main" xmlns:r="http://schemas.openxmlformats.org/officeDocument/2006/relationships">
+  <p:cSld>
+    <p:bg>
+      <p:bgPr>
+        <a:solidFill>
+          <a:srgbClr val="FFFFFF"/>
+        </a:solidFill>
+        <a:effectLst/>
+      </p:bgPr>
+    </p:bg>
+    <p:spTree>
+      <p:nvGrpSpPr>
+        <p:cNvPr id="1" name=""/>
+        <p:cNvGrpSpPr/>
+        <p:nvPr/>
+      </p:nvGrpSpPr>
+      <p:grpSpPr/>
+      <p:sp>
+        <p:nvSpPr>
+          <p:cNvPr id="2" name="Rectangle 1"/>
+          <p:cNvSpPr/>
+          <p:nvPr/>
+        </p:nvSpPr>
+        <p:spPr>
+          <a:xfrm>
+            <a:off x="0" y="0"/>
+            <a:ext cx="12191695" cy="960120"/>
+          </a:xfrm>
+          <a:prstGeom prst="rect">
+            <a:avLst/>
+          </a:prstGeom>
+          <a:solidFill>
+            <a:srgbClr val="095292"/>
+          </a:solidFill>
+          <a:ln>
+            <a:noFill/>
+          </a:ln>
+        </p:spPr>
+        <p:style>
+          <a:lnRef idx="1">
+            <a:schemeClr val="accent1"/>
+          </a:lnRef>
+          <a:fillRef idx="3">
+            <a:schemeClr val="accent1"/>
+          </a:fillRef>
+          <a:effectRef idx="2">
+            <a:schemeClr val="accent1"/>
+          </a:effectRef>
+          <a:fontRef idx="minor">
+            <a:schemeClr val="lt1"/>
+          </a:fontRef>
+        </p:style>
+        <p:txBody>
+          <a:bodyPr rtlCol="0" anchor="ctr"/>
+          <a:lstStyle/>
+          <a:p>
+            <a:pPr algn="ctr"/>
+          </a:p>
+        </p:txBody>
+      </p:sp>
+      <p:sp>
+        <p:nvSpPr>
+          <p:cNvPr id="3" name="Rectangle 2"/>
+          <p:cNvSpPr/>
+          <p:nvPr/>
+        </p:nvSpPr>
+        <p:spPr>
+          <a:xfrm>
+            <a:off x="0" y="960120"/>
+            <a:ext cx="12191695" cy="41148"/>
+          </a:xfrm>
+          <a:prstGeom prst="rect">
+            <a:avLst/>
+          </a:prstGeom>
+          <a:solidFill>
+            <a:srgbClr val="FFD000"/>
+          </a:solidFill>
+          <a:ln>
+            <a:noFill/>
+          </a:ln>
+        </p:spPr>
+        <p:style>
+          <a:lnRef idx="1">
+            <a:schemeClr val="accent1"/>
+          </a:lnRef>
+          <a:fillRef idx="3">
+            <a:schemeClr val="accent1"/>
+          </a:fillRef>
+          <a:effectRef idx="2">
+            <a:schemeClr val="accent1"/>
+          </a:effectRef>
+          <a:fontRef idx="minor">
+            <a:schemeClr val="lt1"/>
+          </a:fontRef>
+        </p:style>
+        <p:txBody>
+          <a:bodyPr rtlCol="0" anchor="ctr"/>
+          <a:lstStyle/>
+          <a:p>
+            <a:pPr algn="ctr"/>
+          </a:p>
+        </p:txBody>
+      </p:sp>
+      <p:sp>
+        <p:nvSpPr>
+          <p:cNvPr id="4" name="TextBox 3"/>
+          <p:cNvSpPr txBox="1"/>
+          <p:nvPr/>
+        </p:nvSpPr>
+        <p:spPr>
+          <a:xfrm>
+            <a:off x="457200" y="164592"/>
+            <a:ext cx="11277295" cy="502920"/>
+          </a:xfrm>
+          <a:prstGeom prst="rect">
+            <a:avLst/>
+          </a:prstGeom>
+          <a:noFill/>
+        </p:spPr>
+        <p:txBody>
+          <a:bodyPr wrap="square">
+            <a:spAutoFit/>
+          </a:bodyPr>
+          <a:lstStyle/>
+          <a:p>
+            <a:r>
+              <a:rPr sz="2600" b="1" i="0">
+                <a:solidFill>
+                  <a:srgbClr val="FFFFFF"/>
+                </a:solidFill>
+                <a:latin typeface="Calibri"/>
+              </a:rPr>
+              <a:t>Para la Clase 4</a:t>
+            </a:r>
+          </a:p>
+        </p:txBody>
+      </p:sp>
+      <p:sp>
+        <p:nvSpPr>
+          <p:cNvPr id="5" name="TextBox 4"/>
+          <p:cNvSpPr txBox="1"/>
+          <p:nvPr/>
+        </p:nvSpPr>
+        <p:spPr>
+          <a:xfrm>
+            <a:off x="457200" y="1170432"/>
+            <a:ext cx="11277295" cy="5230368"/>
+          </a:xfrm>
+          <a:prstGeom prst="rect">
+            <a:avLst/>
+          </a:prstGeom>
+          <a:noFill/>
+        </p:spPr>
+        <p:txBody>
+          <a:bodyPr wrap="square">
+            <a:spAutoFit/>
+          </a:bodyPr>
+          <a:lstStyle/>
+          <a:p>
+            <a:pPr>
+              <a:spcAft>
+                <a:spcPts val="800"/>
+              </a:spcAft>
+            </a:pPr>
+            <a:r>
+              <a:rPr sz="2000" b="0" i="0">
+                <a:solidFill>
+                  <a:srgbClr val="333333"/>
+                </a:solidFill>
+                <a:latin typeface="Calibri"/>
+              </a:rPr>
+              <a:t>–   </a:t>
+            </a:r>
+            <a:r>
+              <a:rPr sz="2000" b="1" i="0">
+                <a:solidFill>
+                  <a:srgbClr val="333333"/>
+                </a:solidFill>
+                <a:latin typeface="Calibri"/>
+              </a:rPr>
+              <a:t>Trabajo dirigido:</a:t>
+            </a:r>
+            <a:r>
+              <a:rPr sz="2000" b="0" i="0">
+                <a:solidFill>
+                  <a:srgbClr val="333333"/>
+                </a:solidFill>
+                <a:latin typeface="Calibri"/>
+              </a:rPr>
+              <a:t> Análisis de caso práctico — dejen la ficha del sistema completa en la carpeta del equipo, con el prompt y las correcciones.</a:t>
+            </a:r>
+          </a:p>
+          <a:p>
+            <a:pPr>
+              <a:spcAft>
+                <a:spcPts val="800"/>
+              </a:spcAft>
+            </a:pPr>
+            <a:r>
+              <a:rPr sz="2000" b="0" i="0">
+                <a:solidFill>
+                  <a:srgbClr val="333333"/>
+                </a:solidFill>
+                <a:latin typeface="Calibri"/>
+              </a:rPr>
+              <a:t>–   </a:t>
+            </a:r>
+            <a:r>
+              <a:rPr sz="2000" b="1" i="0">
+                <a:solidFill>
+                  <a:srgbClr val="333333"/>
+                </a:solidFill>
+                <a:latin typeface="Calibri"/>
+              </a:rPr>
+              <a:t>Trabajo independiente:</a:t>
+            </a:r>
+            <a:r>
+              <a:rPr sz="2000" b="0" i="0">
+                <a:solidFill>
+                  <a:srgbClr val="333333"/>
+                </a:solidFill>
+                <a:latin typeface="Calibri"/>
+              </a:rPr>
+              <a:t> Ensayo sobre impacto social: media página sobre a quién le empeora la vida el sistema que analizaron, aunque funcione bien.</a:t>
+            </a:r>
+          </a:p>
+          <a:p>
+            <a:pPr>
+              <a:spcAft>
+                <a:spcPts val="800"/>
+              </a:spcAft>
+            </a:pPr>
+            <a:r>
+              <a:rPr sz="2000" b="0" i="0">
+                <a:solidFill>
+                  <a:srgbClr val="333333"/>
+                </a:solidFill>
+                <a:latin typeface="Calibri"/>
+              </a:rPr>
+              <a:t>–   </a:t>
+            </a:r>
+            <a:r>
+              <a:rPr sz="2000" b="1" i="0">
+                <a:solidFill>
+                  <a:srgbClr val="333333"/>
+                </a:solidFill>
+                <a:latin typeface="Calibri"/>
+              </a:rPr>
+              <a:t>Clase 4 · Principios éticos en la Ingeniería</a:t>
+            </a:r>
+            <a:r>
+              <a:rPr sz="2000" b="0" i="0">
+                <a:solidFill>
+                  <a:srgbClr val="333333"/>
+                </a:solidFill>
+                <a:latin typeface="Calibri"/>
+              </a:rPr>
+              <a:t> — los principios éticos de la profesión, con casos reales donde el software funcionó y aun así el ingeniero hizo algo mal.</a:t>
+            </a:r>
+          </a:p>
+          <a:p>
+            <a:pPr>
+              <a:spcAft>
+                <a:spcPts val="800"/>
+              </a:spcAft>
+            </a:pPr>
+            <a:r>
+              <a:rPr sz="2000" b="0" i="0">
+                <a:solidFill>
+                  <a:srgbClr val="333333"/>
+                </a:solidFill>
+                <a:latin typeface="Calibri"/>
+              </a:rPr>
+              <a:t>–   </a:t>
+            </a:r>
+            <a:r>
+              <a:rPr sz="2000" b="1" i="0">
+                <a:solidFill>
+                  <a:srgbClr val="333333"/>
+                </a:solidFill>
+                <a:latin typeface="Calibri"/>
+              </a:rPr>
+              <a:t>Aviso:</a:t>
+            </a:r>
+            <a:r>
+              <a:rPr sz="2000" b="0" i="0">
+                <a:solidFill>
+                  <a:srgbClr val="333333"/>
+                </a:solidFill>
+                <a:latin typeface="Calibri"/>
+              </a:rPr>
+              <a:t> Traigan identificado el </a:t>
+            </a:r>
+            <a:r>
+              <a:rPr sz="2000" b="1" i="0">
+                <a:solidFill>
+                  <a:srgbClr val="333333"/>
+                </a:solidFill>
+                <a:latin typeface="Calibri"/>
+              </a:rPr>
+              <a:t>actor no-usuario</a:t>
+            </a:r>
+            <a:r>
+              <a:rPr sz="2000" b="0" i="0">
+                <a:solidFill>
+                  <a:srgbClr val="333333"/>
+                </a:solidFill>
+                <a:latin typeface="Calibri"/>
+              </a:rPr>
+              <a:t> de su sistema. La sesión 4 arranca con esa persona y el ensayo de media página es sobre ella.</a:t>
+            </a:r>
+          </a:p>
+          <a:p>
+            <a:pPr>
+              <a:spcAft>
+                <a:spcPts val="800"/>
+              </a:spcAft>
+            </a:pPr>
+            <a:r>
+              <a:rPr sz="2000" b="0" i="0">
+                <a:solidFill>
+                  <a:srgbClr val="333333"/>
+                </a:solidFill>
+                <a:latin typeface="Calibri"/>
+              </a:rPr>
+              <a:t>–   </a:t>
+            </a:r>
+            <a:r>
+              <a:rPr sz="2000" b="1" i="0">
+                <a:solidFill>
+                  <a:srgbClr val="333333"/>
+                </a:solidFill>
+                <a:latin typeface="Calibri"/>
+              </a:rPr>
+              <a:t>Antes de salir:</a:t>
+            </a:r>
+            <a:r>
+              <a:rPr sz="2000" b="0" i="0">
+                <a:solidFill>
+                  <a:srgbClr val="333333"/>
+                </a:solidFill>
+                <a:latin typeface="Calibri"/>
+              </a:rPr>
+              <a:t> el enlace del documento del equipo en el chat, con permiso de lectura para el docente, y el nombre del vocero de hoy.</a:t>
+            </a:r>
+          </a:p>
+        </p:txBody>
+      </p:sp>
+      <p:sp>
+        <p:nvSpPr>
+          <p:cNvPr id="6" name="TextBox 5"/>
+          <p:cNvSpPr txBox="1"/>
+          <p:nvPr/>
+        </p:nvSpPr>
+        <p:spPr>
+          <a:xfrm>
+            <a:off x="11185855" y="6473952"/>
+            <a:ext cx="640080" cy="274320"/>
+          </a:xfrm>
+          <a:prstGeom prst="rect">
+            <a:avLst/>
+          </a:prstGeom>
+          <a:noFill/>
+        </p:spPr>
+        <p:txBody>
+          <a:bodyPr wrap="square">
+            <a:spAutoFit/>
+          </a:bodyPr>
+          <a:lstStyle/>
+          <a:p>
+            <a:pPr algn="r"/>
+            <a:r>
+              <a:rPr sz="1100" b="0" i="0">
+                <a:solidFill>
+                  <a:srgbClr val="666666"/>
+                </a:solidFill>
+                <a:latin typeface="Calibri"/>
+              </a:rPr>
+              <a:t>24</a:t>
+            </a:r>
+          </a:p>
+        </p:txBody>
+      </p:sp>
+    </p:spTree>
+  </p:cSld>
+  <p:clrMapOvr>
+    <a:masterClrMapping/>
+  </p:clrMapOvr>
+</p:sld>
+</file>
+
+<file path=ppt/slides/slide25.xml><?xml version="1.0" encoding="utf-8"?>
 <p:sld xmlns:a="http://schemas.openxmlformats.org/drawingml/2006/main" xmlns:p="http://schemas.openxmlformats.org/presentationml/2006/main" xmlns:r="http://schemas.openxmlformats.org/officeDocument/2006/relationships">
   <p:cSld>
     <p:bg>

--- a/Introduccion a la Ingenieria/Clases/Clase 3 - Fundamentos basicos de la Ingenieria de Sistemas/Presentacion.pptx
+++ b/Introduccion a la Ingenieria/Clases/Clase 3 - Fundamentos basicos de la Ingenieria de Sistemas/Presentacion.pptx
@@ -19,9 +19,6 @@
     <p:sldId id="267" r:id="rId19"/>
     <p:sldId id="268" r:id="rId20"/>
     <p:sldId id="269" r:id="rId21"/>
-    <p:sldId id="270" r:id="rId22"/>
-    <p:sldId id="271" r:id="rId23"/>
-    <p:sldId id="272" r:id="rId24"/>
   </p:sldIdLst>
   <p:sldSz cx="12191695" cy="6858000" type="screen4x3"/>
   <p:notesSz cx="6858000" cy="9144000"/>
@@ -8586,2472 +8583,6 @@
         <p:spPr>
           <a:xfrm>
             <a:off x="0" y="0"/>
-            <a:ext cx="12191695" cy="1170432"/>
-          </a:xfrm>
-          <a:prstGeom prst="rect">
-            <a:avLst/>
-          </a:prstGeom>
-          <a:solidFill>
-            <a:srgbClr val="095292"/>
-          </a:solidFill>
-          <a:ln>
-            <a:noFill/>
-          </a:ln>
-        </p:spPr>
-        <p:style>
-          <a:lnRef idx="1">
-            <a:schemeClr val="accent1"/>
-          </a:lnRef>
-          <a:fillRef idx="3">
-            <a:schemeClr val="accent1"/>
-          </a:fillRef>
-          <a:effectRef idx="2">
-            <a:schemeClr val="accent1"/>
-          </a:effectRef>
-          <a:fontRef idx="minor">
-            <a:schemeClr val="lt1"/>
-          </a:fontRef>
-        </p:style>
-        <p:txBody>
-          <a:bodyPr rtlCol="0" anchor="ctr"/>
-          <a:lstStyle/>
-          <a:p>
-            <a:pPr algn="ctr"/>
-          </a:p>
-        </p:txBody>
-      </p:sp>
-      <p:sp>
-        <p:nvSpPr>
-          <p:cNvPr id="3" name="Rectangle 2"/>
-          <p:cNvSpPr/>
-          <p:nvPr/>
-        </p:nvSpPr>
-        <p:spPr>
-          <a:xfrm>
-            <a:off x="0" y="1170432"/>
-            <a:ext cx="12191695" cy="41148"/>
-          </a:xfrm>
-          <a:prstGeom prst="rect">
-            <a:avLst/>
-          </a:prstGeom>
-          <a:solidFill>
-            <a:srgbClr val="FFD000"/>
-          </a:solidFill>
-          <a:ln>
-            <a:noFill/>
-          </a:ln>
-        </p:spPr>
-        <p:style>
-          <a:lnRef idx="1">
-            <a:schemeClr val="accent1"/>
-          </a:lnRef>
-          <a:fillRef idx="3">
-            <a:schemeClr val="accent1"/>
-          </a:fillRef>
-          <a:effectRef idx="2">
-            <a:schemeClr val="accent1"/>
-          </a:effectRef>
-          <a:fontRef idx="minor">
-            <a:schemeClr val="lt1"/>
-          </a:fontRef>
-        </p:style>
-        <p:txBody>
-          <a:bodyPr rtlCol="0" anchor="ctr"/>
-          <a:lstStyle/>
-          <a:p>
-            <a:pPr algn="ctr"/>
-          </a:p>
-        </p:txBody>
-      </p:sp>
-      <p:sp>
-        <p:nvSpPr>
-          <p:cNvPr id="4" name="TextBox 3"/>
-          <p:cNvSpPr txBox="1"/>
-          <p:nvPr/>
-        </p:nvSpPr>
-        <p:spPr>
-          <a:xfrm>
-            <a:off x="457200" y="164592"/>
-            <a:ext cx="11277295" cy="384048"/>
-          </a:xfrm>
-          <a:prstGeom prst="rect">
-            <a:avLst/>
-          </a:prstGeom>
-          <a:noFill/>
-        </p:spPr>
-        <p:txBody>
-          <a:bodyPr wrap="square">
-            <a:spAutoFit/>
-          </a:bodyPr>
-          <a:lstStyle/>
-          <a:p>
-            <a:r>
-              <a:rPr sz="2600" b="1" i="0">
-                <a:solidFill>
-                  <a:srgbClr val="FFFFFF"/>
-                </a:solidFill>
-                <a:latin typeface="Calibri"/>
-              </a:rPr>
-              <a:t>Taller de hoy: Anatomía del sistema</a:t>
-            </a:r>
-          </a:p>
-        </p:txBody>
-      </p:sp>
-      <p:sp>
-        <p:nvSpPr>
-          <p:cNvPr id="5" name="TextBox 4"/>
-          <p:cNvSpPr txBox="1"/>
-          <p:nvPr/>
-        </p:nvSpPr>
-        <p:spPr>
-          <a:xfrm>
-            <a:off x="457200" y="566928"/>
-            <a:ext cx="11277295" cy="411480"/>
-          </a:xfrm>
-          <a:prstGeom prst="rect">
-            <a:avLst/>
-          </a:prstGeom>
-          <a:noFill/>
-        </p:spPr>
-        <p:txBody>
-          <a:bodyPr wrap="square">
-            <a:spAutoFit/>
-          </a:bodyPr>
-          <a:lstStyle/>
-          <a:p>
-            <a:r>
-              <a:rPr sz="1400" b="0" i="0">
-                <a:solidFill>
-                  <a:srgbClr val="B8D8EE"/>
-                </a:solidFill>
-                <a:latin typeface="Calibri"/>
-              </a:rPr>
-              <a:t>17 min en equipos · cada equipo trabaja su propio problema de la sesión 1 · ficha del sistema + prompt + correcciones</a:t>
-            </a:r>
-          </a:p>
-        </p:txBody>
-      </p:sp>
-      <p:sp>
-        <p:nvSpPr>
-          <p:cNvPr id="6" name="Rounded Rectangle 5"/>
-          <p:cNvSpPr/>
-          <p:nvPr/>
-        </p:nvSpPr>
-        <p:spPr>
-          <a:xfrm>
-            <a:off x="457200" y="1472184"/>
-            <a:ext cx="11277295" cy="566928"/>
-          </a:xfrm>
-          <a:prstGeom prst="roundRect">
-            <a:avLst>
-              <a:gd name="adj" fmla="val 12000"/>
-            </a:avLst>
-          </a:prstGeom>
-          <a:solidFill>
-            <a:srgbClr val="F2F2F2"/>
-          </a:solidFill>
-          <a:ln>
-            <a:noFill/>
-          </a:ln>
-        </p:spPr>
-        <p:style>
-          <a:lnRef idx="1">
-            <a:schemeClr val="accent1"/>
-          </a:lnRef>
-          <a:fillRef idx="3">
-            <a:schemeClr val="accent1"/>
-          </a:fillRef>
-          <a:effectRef idx="2">
-            <a:schemeClr val="accent1"/>
-          </a:effectRef>
-          <a:fontRef idx="minor">
-            <a:schemeClr val="lt1"/>
-          </a:fontRef>
-        </p:style>
-        <p:txBody>
-          <a:bodyPr rtlCol="0" anchor="ctr"/>
-          <a:lstStyle/>
-          <a:p>
-            <a:pPr algn="ctr"/>
-          </a:p>
-        </p:txBody>
-      </p:sp>
-      <p:sp>
-        <p:nvSpPr>
-          <p:cNvPr id="7" name="Rectangle 6"/>
-          <p:cNvSpPr/>
-          <p:nvPr/>
-        </p:nvSpPr>
-        <p:spPr>
-          <a:xfrm>
-            <a:off x="640080" y="1618487"/>
-            <a:ext cx="274320" cy="274320"/>
-          </a:xfrm>
-          <a:prstGeom prst="rect">
-            <a:avLst/>
-          </a:prstGeom>
-          <a:solidFill>
-            <a:srgbClr val="FFFFFF"/>
-          </a:solidFill>
-          <a:ln>
-            <a:solidFill>
-              <a:srgbClr val="333333"/>
-            </a:solidFill>
-          </a:ln>
-        </p:spPr>
-        <p:style>
-          <a:lnRef idx="1">
-            <a:schemeClr val="accent1"/>
-          </a:lnRef>
-          <a:fillRef idx="3">
-            <a:schemeClr val="accent1"/>
-          </a:fillRef>
-          <a:effectRef idx="2">
-            <a:schemeClr val="accent1"/>
-          </a:effectRef>
-          <a:fontRef idx="minor">
-            <a:schemeClr val="lt1"/>
-          </a:fontRef>
-        </p:style>
-        <p:txBody>
-          <a:bodyPr rtlCol="0" anchor="ctr"/>
-          <a:lstStyle/>
-          <a:p>
-            <a:pPr algn="ctr"/>
-          </a:p>
-        </p:txBody>
-      </p:sp>
-      <p:sp>
-        <p:nvSpPr>
-          <p:cNvPr id="8" name="Rectangle 7"/>
-          <p:cNvSpPr/>
-          <p:nvPr/>
-        </p:nvSpPr>
-        <p:spPr>
-          <a:xfrm>
-            <a:off x="640080" y="1618487"/>
-            <a:ext cx="73152" cy="274320"/>
-          </a:xfrm>
-          <a:prstGeom prst="rect">
-            <a:avLst/>
-          </a:prstGeom>
-          <a:solidFill>
-            <a:srgbClr val="269CCB"/>
-          </a:solidFill>
-          <a:ln>
-            <a:noFill/>
-          </a:ln>
-        </p:spPr>
-        <p:style>
-          <a:lnRef idx="1">
-            <a:schemeClr val="accent1"/>
-          </a:lnRef>
-          <a:fillRef idx="3">
-            <a:schemeClr val="accent1"/>
-          </a:fillRef>
-          <a:effectRef idx="2">
-            <a:schemeClr val="accent1"/>
-          </a:effectRef>
-          <a:fontRef idx="minor">
-            <a:schemeClr val="lt1"/>
-          </a:fontRef>
-        </p:style>
-        <p:txBody>
-          <a:bodyPr rtlCol="0" anchor="ctr"/>
-          <a:lstStyle/>
-          <a:p>
-            <a:pPr algn="ctr"/>
-          </a:p>
-        </p:txBody>
-      </p:sp>
-      <p:sp>
-        <p:nvSpPr>
-          <p:cNvPr id="9" name="TextBox 8"/>
-          <p:cNvSpPr txBox="1"/>
-          <p:nvPr/>
-        </p:nvSpPr>
-        <p:spPr>
-          <a:xfrm>
-            <a:off x="1097280" y="1563624"/>
-            <a:ext cx="10362895" cy="402336"/>
-          </a:xfrm>
-          <a:prstGeom prst="rect">
-            <a:avLst/>
-          </a:prstGeom>
-          <a:noFill/>
-        </p:spPr>
-        <p:txBody>
-          <a:bodyPr wrap="square" anchor="ctr"/>
-          <a:lstStyle/>
-          <a:p>
-            <a:r>
-              <a:rPr sz="1500" b="1" i="0">
-                <a:solidFill>
-                  <a:srgbClr val="333333"/>
-                </a:solidFill>
-                <a:latin typeface="Calibri"/>
-              </a:rPr>
-              <a:t>PROPÓSITO Y FRONTERA</a:t>
-            </a:r>
-            <a:r>
-              <a:rPr sz="1500" b="0" i="0">
-                <a:solidFill>
-                  <a:srgbClr val="333333"/>
-                </a:solidFill>
-                <a:latin typeface="Calibri"/>
-              </a:rPr>
-              <a:t> — Para qué existe el sistema, en una frase. Y qué queda </a:t>
-            </a:r>
-            <a:r>
-              <a:rPr sz="1500" b="1" i="0">
-                <a:solidFill>
-                  <a:srgbClr val="333333"/>
-                </a:solidFill>
-                <a:latin typeface="Calibri"/>
-              </a:rPr>
-              <a:t>dentro</a:t>
-            </a:r>
-            <a:r>
-              <a:rPr sz="1500" b="0" i="0">
-                <a:solidFill>
-                  <a:srgbClr val="333333"/>
-                </a:solidFill>
-                <a:latin typeface="Calibri"/>
-              </a:rPr>
-              <a:t> y qué </a:t>
-            </a:r>
-            <a:r>
-              <a:rPr sz="1500" b="1" i="0">
-                <a:solidFill>
-                  <a:srgbClr val="333333"/>
-                </a:solidFill>
-                <a:latin typeface="Calibri"/>
-              </a:rPr>
-              <a:t>fuera</a:t>
-            </a:r>
-            <a:r>
-              <a:rPr sz="1500" b="0" i="0">
-                <a:solidFill>
-                  <a:srgbClr val="333333"/>
-                </a:solidFill>
-                <a:latin typeface="Calibri"/>
-              </a:rPr>
-              <a:t> de él, con la razón de cada exclusión importante.</a:t>
-            </a:r>
-          </a:p>
-        </p:txBody>
-      </p:sp>
-      <p:sp>
-        <p:nvSpPr>
-          <p:cNvPr id="10" name="Rounded Rectangle 9"/>
-          <p:cNvSpPr/>
-          <p:nvPr/>
-        </p:nvSpPr>
-        <p:spPr>
-          <a:xfrm>
-            <a:off x="457200" y="2148839"/>
-            <a:ext cx="11277295" cy="566928"/>
-          </a:xfrm>
-          <a:prstGeom prst="roundRect">
-            <a:avLst>
-              <a:gd name="adj" fmla="val 12000"/>
-            </a:avLst>
-          </a:prstGeom>
-          <a:solidFill>
-            <a:srgbClr val="F2F2F2"/>
-          </a:solidFill>
-          <a:ln>
-            <a:noFill/>
-          </a:ln>
-        </p:spPr>
-        <p:style>
-          <a:lnRef idx="1">
-            <a:schemeClr val="accent1"/>
-          </a:lnRef>
-          <a:fillRef idx="3">
-            <a:schemeClr val="accent1"/>
-          </a:fillRef>
-          <a:effectRef idx="2">
-            <a:schemeClr val="accent1"/>
-          </a:effectRef>
-          <a:fontRef idx="minor">
-            <a:schemeClr val="lt1"/>
-          </a:fontRef>
-        </p:style>
-        <p:txBody>
-          <a:bodyPr rtlCol="0" anchor="ctr"/>
-          <a:lstStyle/>
-          <a:p>
-            <a:pPr algn="ctr"/>
-          </a:p>
-        </p:txBody>
-      </p:sp>
-      <p:sp>
-        <p:nvSpPr>
-          <p:cNvPr id="11" name="Rectangle 10"/>
-          <p:cNvSpPr/>
-          <p:nvPr/>
-        </p:nvSpPr>
-        <p:spPr>
-          <a:xfrm>
-            <a:off x="640080" y="2295144"/>
-            <a:ext cx="274320" cy="274320"/>
-          </a:xfrm>
-          <a:prstGeom prst="rect">
-            <a:avLst/>
-          </a:prstGeom>
-          <a:solidFill>
-            <a:srgbClr val="FFFFFF"/>
-          </a:solidFill>
-          <a:ln>
-            <a:solidFill>
-              <a:srgbClr val="333333"/>
-            </a:solidFill>
-          </a:ln>
-        </p:spPr>
-        <p:style>
-          <a:lnRef idx="1">
-            <a:schemeClr val="accent1"/>
-          </a:lnRef>
-          <a:fillRef idx="3">
-            <a:schemeClr val="accent1"/>
-          </a:fillRef>
-          <a:effectRef idx="2">
-            <a:schemeClr val="accent1"/>
-          </a:effectRef>
-          <a:fontRef idx="minor">
-            <a:schemeClr val="lt1"/>
-          </a:fontRef>
-        </p:style>
-        <p:txBody>
-          <a:bodyPr rtlCol="0" anchor="ctr"/>
-          <a:lstStyle/>
-          <a:p>
-            <a:pPr algn="ctr"/>
-          </a:p>
-        </p:txBody>
-      </p:sp>
-      <p:sp>
-        <p:nvSpPr>
-          <p:cNvPr id="12" name="Rectangle 11"/>
-          <p:cNvSpPr/>
-          <p:nvPr/>
-        </p:nvSpPr>
-        <p:spPr>
-          <a:xfrm>
-            <a:off x="640080" y="2295144"/>
-            <a:ext cx="73152" cy="274320"/>
-          </a:xfrm>
-          <a:prstGeom prst="rect">
-            <a:avLst/>
-          </a:prstGeom>
-          <a:solidFill>
-            <a:srgbClr val="269CCB"/>
-          </a:solidFill>
-          <a:ln>
-            <a:noFill/>
-          </a:ln>
-        </p:spPr>
-        <p:style>
-          <a:lnRef idx="1">
-            <a:schemeClr val="accent1"/>
-          </a:lnRef>
-          <a:fillRef idx="3">
-            <a:schemeClr val="accent1"/>
-          </a:fillRef>
-          <a:effectRef idx="2">
-            <a:schemeClr val="accent1"/>
-          </a:effectRef>
-          <a:fontRef idx="minor">
-            <a:schemeClr val="lt1"/>
-          </a:fontRef>
-        </p:style>
-        <p:txBody>
-          <a:bodyPr rtlCol="0" anchor="ctr"/>
-          <a:lstStyle/>
-          <a:p>
-            <a:pPr algn="ctr"/>
-          </a:p>
-        </p:txBody>
-      </p:sp>
-      <p:sp>
-        <p:nvSpPr>
-          <p:cNvPr id="13" name="TextBox 12"/>
-          <p:cNvSpPr txBox="1"/>
-          <p:nvPr/>
-        </p:nvSpPr>
-        <p:spPr>
-          <a:xfrm>
-            <a:off x="1097280" y="2240279"/>
-            <a:ext cx="10362895" cy="402336"/>
-          </a:xfrm>
-          <a:prstGeom prst="rect">
-            <a:avLst/>
-          </a:prstGeom>
-          <a:noFill/>
-        </p:spPr>
-        <p:txBody>
-          <a:bodyPr wrap="square" anchor="ctr"/>
-          <a:lstStyle/>
-          <a:p>
-            <a:r>
-              <a:rPr sz="1500" b="1" i="0">
-                <a:solidFill>
-                  <a:srgbClr val="333333"/>
-                </a:solidFill>
-                <a:latin typeface="Calibri"/>
-              </a:rPr>
-              <a:t>ENTRADAS, PROCESO Y SALIDAS</a:t>
-            </a:r>
-            <a:r>
-              <a:rPr sz="1500" b="0" i="0">
-                <a:solidFill>
-                  <a:srgbClr val="333333"/>
-                </a:solidFill>
-                <a:latin typeface="Calibri"/>
-              </a:rPr>
-              <a:t> — Qué entra, qué se hace con eso y qué sale. Señalen </a:t>
-            </a:r>
-            <a:r>
-              <a:rPr sz="1500" b="1" i="0">
-                <a:solidFill>
-                  <a:srgbClr val="333333"/>
-                </a:solidFill>
-                <a:latin typeface="Calibri"/>
-              </a:rPr>
-              <a:t>dónde está el software</a:t>
-            </a:r>
-            <a:r>
-              <a:rPr sz="1500" b="0" i="0">
-                <a:solidFill>
-                  <a:srgbClr val="333333"/>
-                </a:solidFill>
-                <a:latin typeface="Calibri"/>
-              </a:rPr>
-              <a:t>, si hay.</a:t>
-            </a:r>
-          </a:p>
-        </p:txBody>
-      </p:sp>
-      <p:sp>
-        <p:nvSpPr>
-          <p:cNvPr id="14" name="Rounded Rectangle 13"/>
-          <p:cNvSpPr/>
-          <p:nvPr/>
-        </p:nvSpPr>
-        <p:spPr>
-          <a:xfrm>
-            <a:off x="457200" y="2825496"/>
-            <a:ext cx="11277295" cy="566928"/>
-          </a:xfrm>
-          <a:prstGeom prst="roundRect">
-            <a:avLst>
-              <a:gd name="adj" fmla="val 12000"/>
-            </a:avLst>
-          </a:prstGeom>
-          <a:solidFill>
-            <a:srgbClr val="F2F2F2"/>
-          </a:solidFill>
-          <a:ln>
-            <a:noFill/>
-          </a:ln>
-        </p:spPr>
-        <p:style>
-          <a:lnRef idx="1">
-            <a:schemeClr val="accent1"/>
-          </a:lnRef>
-          <a:fillRef idx="3">
-            <a:schemeClr val="accent1"/>
-          </a:fillRef>
-          <a:effectRef idx="2">
-            <a:schemeClr val="accent1"/>
-          </a:effectRef>
-          <a:fontRef idx="minor">
-            <a:schemeClr val="lt1"/>
-          </a:fontRef>
-        </p:style>
-        <p:txBody>
-          <a:bodyPr rtlCol="0" anchor="ctr"/>
-          <a:lstStyle/>
-          <a:p>
-            <a:pPr algn="ctr"/>
-          </a:p>
-        </p:txBody>
-      </p:sp>
-      <p:sp>
-        <p:nvSpPr>
-          <p:cNvPr id="15" name="Rectangle 14"/>
-          <p:cNvSpPr/>
-          <p:nvPr/>
-        </p:nvSpPr>
-        <p:spPr>
-          <a:xfrm>
-            <a:off x="640080" y="2971800"/>
-            <a:ext cx="274320" cy="274320"/>
-          </a:xfrm>
-          <a:prstGeom prst="rect">
-            <a:avLst/>
-          </a:prstGeom>
-          <a:solidFill>
-            <a:srgbClr val="FFFFFF"/>
-          </a:solidFill>
-          <a:ln>
-            <a:solidFill>
-              <a:srgbClr val="333333"/>
-            </a:solidFill>
-          </a:ln>
-        </p:spPr>
-        <p:style>
-          <a:lnRef idx="1">
-            <a:schemeClr val="accent1"/>
-          </a:lnRef>
-          <a:fillRef idx="3">
-            <a:schemeClr val="accent1"/>
-          </a:fillRef>
-          <a:effectRef idx="2">
-            <a:schemeClr val="accent1"/>
-          </a:effectRef>
-          <a:fontRef idx="minor">
-            <a:schemeClr val="lt1"/>
-          </a:fontRef>
-        </p:style>
-        <p:txBody>
-          <a:bodyPr rtlCol="0" anchor="ctr"/>
-          <a:lstStyle/>
-          <a:p>
-            <a:pPr algn="ctr"/>
-          </a:p>
-        </p:txBody>
-      </p:sp>
-      <p:sp>
-        <p:nvSpPr>
-          <p:cNvPr id="16" name="Rectangle 15"/>
-          <p:cNvSpPr/>
-          <p:nvPr/>
-        </p:nvSpPr>
-        <p:spPr>
-          <a:xfrm>
-            <a:off x="640080" y="2971800"/>
-            <a:ext cx="73152" cy="274320"/>
-          </a:xfrm>
-          <a:prstGeom prst="rect">
-            <a:avLst/>
-          </a:prstGeom>
-          <a:solidFill>
-            <a:srgbClr val="269CCB"/>
-          </a:solidFill>
-          <a:ln>
-            <a:noFill/>
-          </a:ln>
-        </p:spPr>
-        <p:style>
-          <a:lnRef idx="1">
-            <a:schemeClr val="accent1"/>
-          </a:lnRef>
-          <a:fillRef idx="3">
-            <a:schemeClr val="accent1"/>
-          </a:fillRef>
-          <a:effectRef idx="2">
-            <a:schemeClr val="accent1"/>
-          </a:effectRef>
-          <a:fontRef idx="minor">
-            <a:schemeClr val="lt1"/>
-          </a:fontRef>
-        </p:style>
-        <p:txBody>
-          <a:bodyPr rtlCol="0" anchor="ctr"/>
-          <a:lstStyle/>
-          <a:p>
-            <a:pPr algn="ctr"/>
-          </a:p>
-        </p:txBody>
-      </p:sp>
-      <p:sp>
-        <p:nvSpPr>
-          <p:cNvPr id="17" name="TextBox 16"/>
-          <p:cNvSpPr txBox="1"/>
-          <p:nvPr/>
-        </p:nvSpPr>
-        <p:spPr>
-          <a:xfrm>
-            <a:off x="1097280" y="2916936"/>
-            <a:ext cx="10362895" cy="402336"/>
-          </a:xfrm>
-          <a:prstGeom prst="rect">
-            <a:avLst/>
-          </a:prstGeom>
-          <a:noFill/>
-        </p:spPr>
-        <p:txBody>
-          <a:bodyPr wrap="square" anchor="ctr"/>
-          <a:lstStyle/>
-          <a:p>
-            <a:r>
-              <a:rPr sz="1500" b="1" i="0">
-                <a:solidFill>
-                  <a:srgbClr val="333333"/>
-                </a:solidFill>
-                <a:latin typeface="Calibri"/>
-              </a:rPr>
-              <a:t>LOS ACTORES</a:t>
-            </a:r>
-            <a:r>
-              <a:rPr sz="1500" b="0" i="0">
-                <a:solidFill>
-                  <a:srgbClr val="333333"/>
-                </a:solidFill>
-                <a:latin typeface="Calibri"/>
-              </a:rPr>
-              <a:t> — Todos los afectados, con su rol y qué le importa a cada uno. Incluyan </a:t>
-            </a:r>
-            <a:r>
-              <a:rPr sz="1500" b="1" i="0">
-                <a:solidFill>
-                  <a:srgbClr val="333333"/>
-                </a:solidFill>
-                <a:latin typeface="Calibri"/>
-              </a:rPr>
-              <a:t>al menos uno que no use el sistema pero sí sufra el resultado</a:t>
-            </a:r>
-            <a:r>
-              <a:rPr sz="1500" b="0" i="0">
-                <a:solidFill>
-                  <a:srgbClr val="333333"/>
-                </a:solidFill>
-                <a:latin typeface="Calibri"/>
-              </a:rPr>
-              <a:t>.</a:t>
-            </a:r>
-          </a:p>
-        </p:txBody>
-      </p:sp>
-      <p:sp>
-        <p:nvSpPr>
-          <p:cNvPr id="18" name="Rounded Rectangle 17"/>
-          <p:cNvSpPr/>
-          <p:nvPr/>
-        </p:nvSpPr>
-        <p:spPr>
-          <a:xfrm>
-            <a:off x="457200" y="3502152"/>
-            <a:ext cx="11277295" cy="566928"/>
-          </a:xfrm>
-          <a:prstGeom prst="roundRect">
-            <a:avLst>
-              <a:gd name="adj" fmla="val 12000"/>
-            </a:avLst>
-          </a:prstGeom>
-          <a:solidFill>
-            <a:srgbClr val="F2F2F2"/>
-          </a:solidFill>
-          <a:ln>
-            <a:noFill/>
-          </a:ln>
-        </p:spPr>
-        <p:style>
-          <a:lnRef idx="1">
-            <a:schemeClr val="accent1"/>
-          </a:lnRef>
-          <a:fillRef idx="3">
-            <a:schemeClr val="accent1"/>
-          </a:fillRef>
-          <a:effectRef idx="2">
-            <a:schemeClr val="accent1"/>
-          </a:effectRef>
-          <a:fontRef idx="minor">
-            <a:schemeClr val="lt1"/>
-          </a:fontRef>
-        </p:style>
-        <p:txBody>
-          <a:bodyPr rtlCol="0" anchor="ctr"/>
-          <a:lstStyle/>
-          <a:p>
-            <a:pPr algn="ctr"/>
-          </a:p>
-        </p:txBody>
-      </p:sp>
-      <p:sp>
-        <p:nvSpPr>
-          <p:cNvPr id="19" name="Rectangle 18"/>
-          <p:cNvSpPr/>
-          <p:nvPr/>
-        </p:nvSpPr>
-        <p:spPr>
-          <a:xfrm>
-            <a:off x="640080" y="3648456"/>
-            <a:ext cx="274320" cy="274320"/>
-          </a:xfrm>
-          <a:prstGeom prst="rect">
-            <a:avLst/>
-          </a:prstGeom>
-          <a:solidFill>
-            <a:srgbClr val="FFFFFF"/>
-          </a:solidFill>
-          <a:ln>
-            <a:solidFill>
-              <a:srgbClr val="333333"/>
-            </a:solidFill>
-          </a:ln>
-        </p:spPr>
-        <p:style>
-          <a:lnRef idx="1">
-            <a:schemeClr val="accent1"/>
-          </a:lnRef>
-          <a:fillRef idx="3">
-            <a:schemeClr val="accent1"/>
-          </a:fillRef>
-          <a:effectRef idx="2">
-            <a:schemeClr val="accent1"/>
-          </a:effectRef>
-          <a:fontRef idx="minor">
-            <a:schemeClr val="lt1"/>
-          </a:fontRef>
-        </p:style>
-        <p:txBody>
-          <a:bodyPr rtlCol="0" anchor="ctr"/>
-          <a:lstStyle/>
-          <a:p>
-            <a:pPr algn="ctr"/>
-          </a:p>
-        </p:txBody>
-      </p:sp>
-      <p:sp>
-        <p:nvSpPr>
-          <p:cNvPr id="20" name="Rectangle 19"/>
-          <p:cNvSpPr/>
-          <p:nvPr/>
-        </p:nvSpPr>
-        <p:spPr>
-          <a:xfrm>
-            <a:off x="640080" y="3648456"/>
-            <a:ext cx="73152" cy="274320"/>
-          </a:xfrm>
-          <a:prstGeom prst="rect">
-            <a:avLst/>
-          </a:prstGeom>
-          <a:solidFill>
-            <a:srgbClr val="269CCB"/>
-          </a:solidFill>
-          <a:ln>
-            <a:noFill/>
-          </a:ln>
-        </p:spPr>
-        <p:style>
-          <a:lnRef idx="1">
-            <a:schemeClr val="accent1"/>
-          </a:lnRef>
-          <a:fillRef idx="3">
-            <a:schemeClr val="accent1"/>
-          </a:fillRef>
-          <a:effectRef idx="2">
-            <a:schemeClr val="accent1"/>
-          </a:effectRef>
-          <a:fontRef idx="minor">
-            <a:schemeClr val="lt1"/>
-          </a:fontRef>
-        </p:style>
-        <p:txBody>
-          <a:bodyPr rtlCol="0" anchor="ctr"/>
-          <a:lstStyle/>
-          <a:p>
-            <a:pPr algn="ctr"/>
-          </a:p>
-        </p:txBody>
-      </p:sp>
-      <p:sp>
-        <p:nvSpPr>
-          <p:cNvPr id="21" name="TextBox 20"/>
-          <p:cNvSpPr txBox="1"/>
-          <p:nvPr/>
-        </p:nvSpPr>
-        <p:spPr>
-          <a:xfrm>
-            <a:off x="1097280" y="3593592"/>
-            <a:ext cx="10362895" cy="402336"/>
-          </a:xfrm>
-          <a:prstGeom prst="rect">
-            <a:avLst/>
-          </a:prstGeom>
-          <a:noFill/>
-        </p:spPr>
-        <p:txBody>
-          <a:bodyPr wrap="square" anchor="ctr"/>
-          <a:lstStyle/>
-          <a:p>
-            <a:r>
-              <a:rPr sz="1500" b="1" i="0">
-                <a:solidFill>
-                  <a:srgbClr val="333333"/>
-                </a:solidFill>
-                <a:latin typeface="Calibri"/>
-              </a:rPr>
-              <a:t>LA RETROALIMENTACIÓN</a:t>
-            </a:r>
-            <a:r>
-              <a:rPr sz="1500" b="0" i="0">
-                <a:solidFill>
-                  <a:srgbClr val="333333"/>
-                </a:solidFill>
-                <a:latin typeface="Calibri"/>
-              </a:rPr>
-              <a:t> — ¿Cómo se entera este sistema de que algo salió mal? Si no se entera, escríbanlo: es un hallazgo, no un error suyo.</a:t>
-            </a:r>
-          </a:p>
-        </p:txBody>
-      </p:sp>
-      <p:sp>
-        <p:nvSpPr>
-          <p:cNvPr id="22" name="Rounded Rectangle 21"/>
-          <p:cNvSpPr/>
-          <p:nvPr/>
-        </p:nvSpPr>
-        <p:spPr>
-          <a:xfrm>
-            <a:off x="457200" y="4178808"/>
-            <a:ext cx="11277295" cy="566928"/>
-          </a:xfrm>
-          <a:prstGeom prst="roundRect">
-            <a:avLst>
-              <a:gd name="adj" fmla="val 12000"/>
-            </a:avLst>
-          </a:prstGeom>
-          <a:solidFill>
-            <a:srgbClr val="F2F2F2"/>
-          </a:solidFill>
-          <a:ln>
-            <a:noFill/>
-          </a:ln>
-        </p:spPr>
-        <p:style>
-          <a:lnRef idx="1">
-            <a:schemeClr val="accent1"/>
-          </a:lnRef>
-          <a:fillRef idx="3">
-            <a:schemeClr val="accent1"/>
-          </a:fillRef>
-          <a:effectRef idx="2">
-            <a:schemeClr val="accent1"/>
-          </a:effectRef>
-          <a:fontRef idx="minor">
-            <a:schemeClr val="lt1"/>
-          </a:fontRef>
-        </p:style>
-        <p:txBody>
-          <a:bodyPr rtlCol="0" anchor="ctr"/>
-          <a:lstStyle/>
-          <a:p>
-            <a:pPr algn="ctr"/>
-          </a:p>
-        </p:txBody>
-      </p:sp>
-      <p:sp>
-        <p:nvSpPr>
-          <p:cNvPr id="23" name="Rectangle 22"/>
-          <p:cNvSpPr/>
-          <p:nvPr/>
-        </p:nvSpPr>
-        <p:spPr>
-          <a:xfrm>
-            <a:off x="640080" y="4325112"/>
-            <a:ext cx="274320" cy="274320"/>
-          </a:xfrm>
-          <a:prstGeom prst="rect">
-            <a:avLst/>
-          </a:prstGeom>
-          <a:solidFill>
-            <a:srgbClr val="FFFFFF"/>
-          </a:solidFill>
-          <a:ln>
-            <a:solidFill>
-              <a:srgbClr val="333333"/>
-            </a:solidFill>
-          </a:ln>
-        </p:spPr>
-        <p:style>
-          <a:lnRef idx="1">
-            <a:schemeClr val="accent1"/>
-          </a:lnRef>
-          <a:fillRef idx="3">
-            <a:schemeClr val="accent1"/>
-          </a:fillRef>
-          <a:effectRef idx="2">
-            <a:schemeClr val="accent1"/>
-          </a:effectRef>
-          <a:fontRef idx="minor">
-            <a:schemeClr val="lt1"/>
-          </a:fontRef>
-        </p:style>
-        <p:txBody>
-          <a:bodyPr rtlCol="0" anchor="ctr"/>
-          <a:lstStyle/>
-          <a:p>
-            <a:pPr algn="ctr"/>
-          </a:p>
-        </p:txBody>
-      </p:sp>
-      <p:sp>
-        <p:nvSpPr>
-          <p:cNvPr id="24" name="Rectangle 23"/>
-          <p:cNvSpPr/>
-          <p:nvPr/>
-        </p:nvSpPr>
-        <p:spPr>
-          <a:xfrm>
-            <a:off x="640080" y="4325112"/>
-            <a:ext cx="73152" cy="274320"/>
-          </a:xfrm>
-          <a:prstGeom prst="rect">
-            <a:avLst/>
-          </a:prstGeom>
-          <a:solidFill>
-            <a:srgbClr val="269CCB"/>
-          </a:solidFill>
-          <a:ln>
-            <a:noFill/>
-          </a:ln>
-        </p:spPr>
-        <p:style>
-          <a:lnRef idx="1">
-            <a:schemeClr val="accent1"/>
-          </a:lnRef>
-          <a:fillRef idx="3">
-            <a:schemeClr val="accent1"/>
-          </a:fillRef>
-          <a:effectRef idx="2">
-            <a:schemeClr val="accent1"/>
-          </a:effectRef>
-          <a:fontRef idx="minor">
-            <a:schemeClr val="lt1"/>
-          </a:fontRef>
-        </p:style>
-        <p:txBody>
-          <a:bodyPr rtlCol="0" anchor="ctr"/>
-          <a:lstStyle/>
-          <a:p>
-            <a:pPr algn="ctr"/>
-          </a:p>
-        </p:txBody>
-      </p:sp>
-      <p:sp>
-        <p:nvSpPr>
-          <p:cNvPr id="25" name="TextBox 24"/>
-          <p:cNvSpPr txBox="1"/>
-          <p:nvPr/>
-        </p:nvSpPr>
-        <p:spPr>
-          <a:xfrm>
-            <a:off x="1097280" y="4270248"/>
-            <a:ext cx="10362895" cy="402336"/>
-          </a:xfrm>
-          <a:prstGeom prst="rect">
-            <a:avLst/>
-          </a:prstGeom>
-          <a:noFill/>
-        </p:spPr>
-        <p:txBody>
-          <a:bodyPr wrap="square" anchor="ctr"/>
-          <a:lstStyle/>
-          <a:p>
-            <a:r>
-              <a:rPr sz="1500" b="1" i="0">
-                <a:solidFill>
-                  <a:srgbClr val="333333"/>
-                </a:solidFill>
-                <a:latin typeface="Calibri"/>
-              </a:rPr>
-              <a:t>LA IA: PROMPT Y CORRECCIONES</a:t>
-            </a:r>
-            <a:r>
-              <a:rPr sz="1500" b="0" i="0">
-                <a:solidFill>
-                  <a:srgbClr val="333333"/>
-                </a:solidFill>
-                <a:latin typeface="Calibri"/>
-              </a:rPr>
-              <a:t> — El prompt exacto que usaron, y una lista de </a:t>
-            </a:r>
-            <a:r>
-              <a:rPr sz="1500" b="1" i="0">
-                <a:solidFill>
-                  <a:srgbClr val="333333"/>
-                </a:solidFill>
-                <a:latin typeface="Calibri"/>
-              </a:rPr>
-              <a:t>al menos tres cosas que la IA escribió mal</a:t>
-            </a:r>
-            <a:r>
-              <a:rPr sz="1500" b="0" i="0">
-                <a:solidFill>
-                  <a:srgbClr val="333333"/>
-                </a:solidFill>
-                <a:latin typeface="Calibri"/>
-              </a:rPr>
-              <a:t> y cómo las corrigieron.</a:t>
-            </a:r>
-          </a:p>
-        </p:txBody>
-      </p:sp>
-      <p:sp>
-        <p:nvSpPr>
-          <p:cNvPr id="26" name="TextBox 25"/>
-          <p:cNvSpPr txBox="1"/>
-          <p:nvPr/>
-        </p:nvSpPr>
-        <p:spPr>
-          <a:xfrm>
-            <a:off x="11185855" y="6473952"/>
-            <a:ext cx="640080" cy="274320"/>
-          </a:xfrm>
-          <a:prstGeom prst="rect">
-            <a:avLst/>
-          </a:prstGeom>
-          <a:noFill/>
-        </p:spPr>
-        <p:txBody>
-          <a:bodyPr wrap="square">
-            <a:spAutoFit/>
-          </a:bodyPr>
-          <a:lstStyle/>
-          <a:p>
-            <a:pPr algn="r"/>
-            <a:r>
-              <a:rPr sz="1100" b="0" i="0">
-                <a:solidFill>
-                  <a:srgbClr val="666666"/>
-                </a:solidFill>
-                <a:latin typeface="Calibri"/>
-              </a:rPr>
-              <a:t>14</a:t>
-            </a:r>
-          </a:p>
-        </p:txBody>
-      </p:sp>
-    </p:spTree>
-  </p:cSld>
-  <p:clrMapOvr>
-    <a:masterClrMapping/>
-  </p:clrMapOvr>
-</p:sld>
-</file>
-
-<file path=ppt/slides/slide15.xml><?xml version="1.0" encoding="utf-8"?>
-<p:sld xmlns:a="http://schemas.openxmlformats.org/drawingml/2006/main" xmlns:p="http://schemas.openxmlformats.org/presentationml/2006/main" xmlns:r="http://schemas.openxmlformats.org/officeDocument/2006/relationships">
-  <p:cSld>
-    <p:bg>
-      <p:bgPr>
-        <a:solidFill>
-          <a:srgbClr val="FFFFFF"/>
-        </a:solidFill>
-        <a:effectLst/>
-      </p:bgPr>
-    </p:bg>
-    <p:spTree>
-      <p:nvGrpSpPr>
-        <p:cNvPr id="1" name=""/>
-        <p:cNvGrpSpPr/>
-        <p:nvPr/>
-      </p:nvGrpSpPr>
-      <p:grpSpPr/>
-      <p:sp>
-        <p:nvSpPr>
-          <p:cNvPr id="2" name="Rectangle 1"/>
-          <p:cNvSpPr/>
-          <p:nvPr/>
-        </p:nvSpPr>
-        <p:spPr>
-          <a:xfrm>
-            <a:off x="0" y="0"/>
-            <a:ext cx="12191695" cy="1170432"/>
-          </a:xfrm>
-          <a:prstGeom prst="rect">
-            <a:avLst/>
-          </a:prstGeom>
-          <a:solidFill>
-            <a:srgbClr val="095292"/>
-          </a:solidFill>
-          <a:ln>
-            <a:noFill/>
-          </a:ln>
-        </p:spPr>
-        <p:style>
-          <a:lnRef idx="1">
-            <a:schemeClr val="accent1"/>
-          </a:lnRef>
-          <a:fillRef idx="3">
-            <a:schemeClr val="accent1"/>
-          </a:fillRef>
-          <a:effectRef idx="2">
-            <a:schemeClr val="accent1"/>
-          </a:effectRef>
-          <a:fontRef idx="minor">
-            <a:schemeClr val="lt1"/>
-          </a:fontRef>
-        </p:style>
-        <p:txBody>
-          <a:bodyPr rtlCol="0" anchor="ctr"/>
-          <a:lstStyle/>
-          <a:p>
-            <a:pPr algn="ctr"/>
-          </a:p>
-        </p:txBody>
-      </p:sp>
-      <p:sp>
-        <p:nvSpPr>
-          <p:cNvPr id="3" name="Rectangle 2"/>
-          <p:cNvSpPr/>
-          <p:nvPr/>
-        </p:nvSpPr>
-        <p:spPr>
-          <a:xfrm>
-            <a:off x="0" y="1170432"/>
-            <a:ext cx="12191695" cy="41148"/>
-          </a:xfrm>
-          <a:prstGeom prst="rect">
-            <a:avLst/>
-          </a:prstGeom>
-          <a:solidFill>
-            <a:srgbClr val="FFD000"/>
-          </a:solidFill>
-          <a:ln>
-            <a:noFill/>
-          </a:ln>
-        </p:spPr>
-        <p:style>
-          <a:lnRef idx="1">
-            <a:schemeClr val="accent1"/>
-          </a:lnRef>
-          <a:fillRef idx="3">
-            <a:schemeClr val="accent1"/>
-          </a:fillRef>
-          <a:effectRef idx="2">
-            <a:schemeClr val="accent1"/>
-          </a:effectRef>
-          <a:fontRef idx="minor">
-            <a:schemeClr val="lt1"/>
-          </a:fontRef>
-        </p:style>
-        <p:txBody>
-          <a:bodyPr rtlCol="0" anchor="ctr"/>
-          <a:lstStyle/>
-          <a:p>
-            <a:pPr algn="ctr"/>
-          </a:p>
-        </p:txBody>
-      </p:sp>
-      <p:sp>
-        <p:nvSpPr>
-          <p:cNvPr id="4" name="TextBox 3"/>
-          <p:cNvSpPr txBox="1"/>
-          <p:nvPr/>
-        </p:nvSpPr>
-        <p:spPr>
-          <a:xfrm>
-            <a:off x="457200" y="164592"/>
-            <a:ext cx="11277295" cy="384048"/>
-          </a:xfrm>
-          <a:prstGeom prst="rect">
-            <a:avLst/>
-          </a:prstGeom>
-          <a:noFill/>
-        </p:spPr>
-        <p:txBody>
-          <a:bodyPr wrap="square">
-            <a:spAutoFit/>
-          </a:bodyPr>
-          <a:lstStyle/>
-          <a:p>
-            <a:r>
-              <a:rPr sz="2600" b="1" i="0">
-                <a:solidFill>
-                  <a:srgbClr val="FFFFFF"/>
-                </a:solidFill>
-                <a:latin typeface="Calibri"/>
-              </a:rPr>
-              <a:t>Cómo se expone en 3 minutos</a:t>
-            </a:r>
-          </a:p>
-        </p:txBody>
-      </p:sp>
-      <p:sp>
-        <p:nvSpPr>
-          <p:cNvPr id="5" name="TextBox 4"/>
-          <p:cNvSpPr txBox="1"/>
-          <p:nvPr/>
-        </p:nvSpPr>
-        <p:spPr>
-          <a:xfrm>
-            <a:off x="457200" y="566928"/>
-            <a:ext cx="11277295" cy="411480"/>
-          </a:xfrm>
-          <a:prstGeom prst="rect">
-            <a:avLst/>
-          </a:prstGeom>
-          <a:noFill/>
-        </p:spPr>
-        <p:txBody>
-          <a:bodyPr wrap="square">
-            <a:spAutoFit/>
-          </a:bodyPr>
-          <a:lstStyle/>
-          <a:p>
-            <a:r>
-              <a:rPr sz="1400" b="0" i="0">
-                <a:solidFill>
-                  <a:srgbClr val="B8D8EE"/>
-                </a:solidFill>
-                <a:latin typeface="Calibri"/>
-              </a:rPr>
-              <a:t>Habla el vocero con la pantalla ya compartida · cronómetro en pantalla · se corta al llegar a cero</a:t>
-            </a:r>
-          </a:p>
-        </p:txBody>
-      </p:sp>
-      <p:sp>
-        <p:nvSpPr>
-          <p:cNvPr id="6" name="Rounded Rectangle 5"/>
-          <p:cNvSpPr/>
-          <p:nvPr/>
-        </p:nvSpPr>
-        <p:spPr>
-          <a:xfrm>
-            <a:off x="457200" y="1659636"/>
-            <a:ext cx="11277295" cy="1051560"/>
-          </a:xfrm>
-          <a:prstGeom prst="roundRect">
-            <a:avLst>
-              <a:gd name="adj" fmla="val 12000"/>
-            </a:avLst>
-          </a:prstGeom>
-          <a:solidFill>
-            <a:srgbClr val="F2F2F2"/>
-          </a:solidFill>
-          <a:ln>
-            <a:noFill/>
-          </a:ln>
-        </p:spPr>
-        <p:style>
-          <a:lnRef idx="1">
-            <a:schemeClr val="accent1"/>
-          </a:lnRef>
-          <a:fillRef idx="3">
-            <a:schemeClr val="accent1"/>
-          </a:fillRef>
-          <a:effectRef idx="2">
-            <a:schemeClr val="accent1"/>
-          </a:effectRef>
-          <a:fontRef idx="minor">
-            <a:schemeClr val="lt1"/>
-          </a:fontRef>
-        </p:style>
-        <p:txBody>
-          <a:bodyPr rtlCol="0" anchor="ctr"/>
-          <a:lstStyle/>
-          <a:p>
-            <a:pPr algn="ctr"/>
-          </a:p>
-        </p:txBody>
-      </p:sp>
-      <p:sp>
-        <p:nvSpPr>
-          <p:cNvPr id="7" name="Rounded Rectangle 6"/>
-          <p:cNvSpPr/>
-          <p:nvPr/>
-        </p:nvSpPr>
-        <p:spPr>
-          <a:xfrm>
-            <a:off x="594360" y="1965960"/>
-            <a:ext cx="438912" cy="438912"/>
-          </a:xfrm>
-          <a:prstGeom prst="roundRect">
-            <a:avLst>
-              <a:gd name="adj" fmla="val 12000"/>
-            </a:avLst>
-          </a:prstGeom>
-          <a:solidFill>
-            <a:srgbClr val="095292"/>
-          </a:solidFill>
-          <a:ln>
-            <a:noFill/>
-          </a:ln>
-        </p:spPr>
-        <p:style>
-          <a:lnRef idx="1">
-            <a:schemeClr val="accent1"/>
-          </a:lnRef>
-          <a:fillRef idx="3">
-            <a:schemeClr val="accent1"/>
-          </a:fillRef>
-          <a:effectRef idx="2">
-            <a:schemeClr val="accent1"/>
-          </a:effectRef>
-          <a:fontRef idx="minor">
-            <a:schemeClr val="lt1"/>
-          </a:fontRef>
-        </p:style>
-        <p:txBody>
-          <a:bodyPr rtlCol="0" anchor="ctr"/>
-          <a:lstStyle/>
-          <a:p>
-            <a:pPr algn="ctr"/>
-          </a:p>
-        </p:txBody>
-      </p:sp>
-      <p:sp>
-        <p:nvSpPr>
-          <p:cNvPr id="8" name="TextBox 7"/>
-          <p:cNvSpPr txBox="1"/>
-          <p:nvPr/>
-        </p:nvSpPr>
-        <p:spPr>
-          <a:xfrm>
-            <a:off x="594360" y="1965960"/>
-            <a:ext cx="438912" cy="438912"/>
-          </a:xfrm>
-          <a:prstGeom prst="rect">
-            <a:avLst/>
-          </a:prstGeom>
-          <a:noFill/>
-        </p:spPr>
-        <p:txBody>
-          <a:bodyPr wrap="square" anchor="ctr"/>
-          <a:lstStyle/>
-          <a:p>
-            <a:pPr algn="ctr"/>
-            <a:r>
-              <a:rPr sz="1600" b="1" i="0">
-                <a:solidFill>
-                  <a:srgbClr val="FFFFFF"/>
-                </a:solidFill>
-                <a:latin typeface="Calibri"/>
-              </a:rPr>
-              <a:t>1</a:t>
-            </a:r>
-          </a:p>
-        </p:txBody>
-      </p:sp>
-      <p:sp>
-        <p:nvSpPr>
-          <p:cNvPr id="9" name="TextBox 8"/>
-          <p:cNvSpPr txBox="1"/>
-          <p:nvPr/>
-        </p:nvSpPr>
-        <p:spPr>
-          <a:xfrm>
-            <a:off x="1188720" y="1751076"/>
-            <a:ext cx="10271455" cy="886968"/>
-          </a:xfrm>
-          <a:prstGeom prst="rect">
-            <a:avLst/>
-          </a:prstGeom>
-          <a:noFill/>
-        </p:spPr>
-        <p:txBody>
-          <a:bodyPr wrap="square" anchor="ctr"/>
-          <a:lstStyle/>
-          <a:p>
-            <a:r>
-              <a:rPr sz="1500" b="1" i="0">
-                <a:solidFill>
-                  <a:srgbClr val="095292"/>
-                </a:solidFill>
-                <a:latin typeface="Calibri"/>
-              </a:rPr>
-              <a:t>30 s · El sistema y su propósito</a:t>
-            </a:r>
-          </a:p>
-          <a:p>
-            <a:pPr>
-              <a:spcBef>
-                <a:spcPts val="200"/>
-              </a:spcBef>
-            </a:pPr>
-            <a:r>
-              <a:rPr sz="1300" b="0" i="0">
-                <a:solidFill>
-                  <a:srgbClr val="333333"/>
-                </a:solidFill>
-                <a:latin typeface="Calibri"/>
-              </a:rPr>
-              <a:t>Qué sistema es y para qué existe, en una frase.</a:t>
-            </a:r>
-          </a:p>
-        </p:txBody>
-      </p:sp>
-      <p:sp>
-        <p:nvSpPr>
-          <p:cNvPr id="10" name="Rounded Rectangle 9"/>
-          <p:cNvSpPr/>
-          <p:nvPr/>
-        </p:nvSpPr>
-        <p:spPr>
-          <a:xfrm>
-            <a:off x="457200" y="2802636"/>
-            <a:ext cx="11277295" cy="1051560"/>
-          </a:xfrm>
-          <a:prstGeom prst="roundRect">
-            <a:avLst>
-              <a:gd name="adj" fmla="val 12000"/>
-            </a:avLst>
-          </a:prstGeom>
-          <a:solidFill>
-            <a:srgbClr val="E8F4FA"/>
-          </a:solidFill>
-          <a:ln>
-            <a:noFill/>
-          </a:ln>
-        </p:spPr>
-        <p:style>
-          <a:lnRef idx="1">
-            <a:schemeClr val="accent1"/>
-          </a:lnRef>
-          <a:fillRef idx="3">
-            <a:schemeClr val="accent1"/>
-          </a:fillRef>
-          <a:effectRef idx="2">
-            <a:schemeClr val="accent1"/>
-          </a:effectRef>
-          <a:fontRef idx="minor">
-            <a:schemeClr val="lt1"/>
-          </a:fontRef>
-        </p:style>
-        <p:txBody>
-          <a:bodyPr rtlCol="0" anchor="ctr"/>
-          <a:lstStyle/>
-          <a:p>
-            <a:pPr algn="ctr"/>
-          </a:p>
-        </p:txBody>
-      </p:sp>
-      <p:sp>
-        <p:nvSpPr>
-          <p:cNvPr id="11" name="Rounded Rectangle 10"/>
-          <p:cNvSpPr/>
-          <p:nvPr/>
-        </p:nvSpPr>
-        <p:spPr>
-          <a:xfrm>
-            <a:off x="594360" y="3108960"/>
-            <a:ext cx="438912" cy="438912"/>
-          </a:xfrm>
-          <a:prstGeom prst="roundRect">
-            <a:avLst>
-              <a:gd name="adj" fmla="val 12000"/>
-            </a:avLst>
-          </a:prstGeom>
-          <a:solidFill>
-            <a:srgbClr val="095292"/>
-          </a:solidFill>
-          <a:ln>
-            <a:noFill/>
-          </a:ln>
-        </p:spPr>
-        <p:style>
-          <a:lnRef idx="1">
-            <a:schemeClr val="accent1"/>
-          </a:lnRef>
-          <a:fillRef idx="3">
-            <a:schemeClr val="accent1"/>
-          </a:fillRef>
-          <a:effectRef idx="2">
-            <a:schemeClr val="accent1"/>
-          </a:effectRef>
-          <a:fontRef idx="minor">
-            <a:schemeClr val="lt1"/>
-          </a:fontRef>
-        </p:style>
-        <p:txBody>
-          <a:bodyPr rtlCol="0" anchor="ctr"/>
-          <a:lstStyle/>
-          <a:p>
-            <a:pPr algn="ctr"/>
-          </a:p>
-        </p:txBody>
-      </p:sp>
-      <p:sp>
-        <p:nvSpPr>
-          <p:cNvPr id="12" name="TextBox 11"/>
-          <p:cNvSpPr txBox="1"/>
-          <p:nvPr/>
-        </p:nvSpPr>
-        <p:spPr>
-          <a:xfrm>
-            <a:off x="594360" y="3108960"/>
-            <a:ext cx="438912" cy="438912"/>
-          </a:xfrm>
-          <a:prstGeom prst="rect">
-            <a:avLst/>
-          </a:prstGeom>
-          <a:noFill/>
-        </p:spPr>
-        <p:txBody>
-          <a:bodyPr wrap="square" anchor="ctr"/>
-          <a:lstStyle/>
-          <a:p>
-            <a:pPr algn="ctr"/>
-            <a:r>
-              <a:rPr sz="1600" b="1" i="0">
-                <a:solidFill>
-                  <a:srgbClr val="FFFFFF"/>
-                </a:solidFill>
-                <a:latin typeface="Calibri"/>
-              </a:rPr>
-              <a:t>2</a:t>
-            </a:r>
-          </a:p>
-        </p:txBody>
-      </p:sp>
-      <p:sp>
-        <p:nvSpPr>
-          <p:cNvPr id="13" name="TextBox 12"/>
-          <p:cNvSpPr txBox="1"/>
-          <p:nvPr/>
-        </p:nvSpPr>
-        <p:spPr>
-          <a:xfrm>
-            <a:off x="1188720" y="2894076"/>
-            <a:ext cx="10271455" cy="886968"/>
-          </a:xfrm>
-          <a:prstGeom prst="rect">
-            <a:avLst/>
-          </a:prstGeom>
-          <a:noFill/>
-        </p:spPr>
-        <p:txBody>
-          <a:bodyPr wrap="square" anchor="ctr"/>
-          <a:lstStyle/>
-          <a:p>
-            <a:r>
-              <a:rPr sz="1500" b="1" i="0">
-                <a:solidFill>
-                  <a:srgbClr val="095292"/>
-                </a:solidFill>
-                <a:latin typeface="Calibri"/>
-              </a:rPr>
-              <a:t>45 s · La frontera</a:t>
-            </a:r>
-          </a:p>
-          <a:p>
-            <a:pPr>
-              <a:spcBef>
-                <a:spcPts val="200"/>
-              </a:spcBef>
-            </a:pPr>
-            <a:r>
-              <a:rPr sz="1300" b="0" i="0">
-                <a:solidFill>
-                  <a:srgbClr val="333333"/>
-                </a:solidFill>
-                <a:latin typeface="Calibri"/>
-              </a:rPr>
-              <a:t>Qué dejaron fuera y por qué. Es la decisión que se discute.</a:t>
-            </a:r>
-          </a:p>
-        </p:txBody>
-      </p:sp>
-      <p:sp>
-        <p:nvSpPr>
-          <p:cNvPr id="14" name="Rounded Rectangle 13"/>
-          <p:cNvSpPr/>
-          <p:nvPr/>
-        </p:nvSpPr>
-        <p:spPr>
-          <a:xfrm>
-            <a:off x="457200" y="3945636"/>
-            <a:ext cx="11277295" cy="1051560"/>
-          </a:xfrm>
-          <a:prstGeom prst="roundRect">
-            <a:avLst>
-              <a:gd name="adj" fmla="val 12000"/>
-            </a:avLst>
-          </a:prstGeom>
-          <a:solidFill>
-            <a:srgbClr val="F2F2F2"/>
-          </a:solidFill>
-          <a:ln>
-            <a:noFill/>
-          </a:ln>
-        </p:spPr>
-        <p:style>
-          <a:lnRef idx="1">
-            <a:schemeClr val="accent1"/>
-          </a:lnRef>
-          <a:fillRef idx="3">
-            <a:schemeClr val="accent1"/>
-          </a:fillRef>
-          <a:effectRef idx="2">
-            <a:schemeClr val="accent1"/>
-          </a:effectRef>
-          <a:fontRef idx="minor">
-            <a:schemeClr val="lt1"/>
-          </a:fontRef>
-        </p:style>
-        <p:txBody>
-          <a:bodyPr rtlCol="0" anchor="ctr"/>
-          <a:lstStyle/>
-          <a:p>
-            <a:pPr algn="ctr"/>
-          </a:p>
-        </p:txBody>
-      </p:sp>
-      <p:sp>
-        <p:nvSpPr>
-          <p:cNvPr id="15" name="Rounded Rectangle 14"/>
-          <p:cNvSpPr/>
-          <p:nvPr/>
-        </p:nvSpPr>
-        <p:spPr>
-          <a:xfrm>
-            <a:off x="594360" y="4251960"/>
-            <a:ext cx="438912" cy="438912"/>
-          </a:xfrm>
-          <a:prstGeom prst="roundRect">
-            <a:avLst>
-              <a:gd name="adj" fmla="val 12000"/>
-            </a:avLst>
-          </a:prstGeom>
-          <a:solidFill>
-            <a:srgbClr val="095292"/>
-          </a:solidFill>
-          <a:ln>
-            <a:noFill/>
-          </a:ln>
-        </p:spPr>
-        <p:style>
-          <a:lnRef idx="1">
-            <a:schemeClr val="accent1"/>
-          </a:lnRef>
-          <a:fillRef idx="3">
-            <a:schemeClr val="accent1"/>
-          </a:fillRef>
-          <a:effectRef idx="2">
-            <a:schemeClr val="accent1"/>
-          </a:effectRef>
-          <a:fontRef idx="minor">
-            <a:schemeClr val="lt1"/>
-          </a:fontRef>
-        </p:style>
-        <p:txBody>
-          <a:bodyPr rtlCol="0" anchor="ctr"/>
-          <a:lstStyle/>
-          <a:p>
-            <a:pPr algn="ctr"/>
-          </a:p>
-        </p:txBody>
-      </p:sp>
-      <p:sp>
-        <p:nvSpPr>
-          <p:cNvPr id="16" name="TextBox 15"/>
-          <p:cNvSpPr txBox="1"/>
-          <p:nvPr/>
-        </p:nvSpPr>
-        <p:spPr>
-          <a:xfrm>
-            <a:off x="594360" y="4251960"/>
-            <a:ext cx="438912" cy="438912"/>
-          </a:xfrm>
-          <a:prstGeom prst="rect">
-            <a:avLst/>
-          </a:prstGeom>
-          <a:noFill/>
-        </p:spPr>
-        <p:txBody>
-          <a:bodyPr wrap="square" anchor="ctr"/>
-          <a:lstStyle/>
-          <a:p>
-            <a:pPr algn="ctr"/>
-            <a:r>
-              <a:rPr sz="1600" b="1" i="0">
-                <a:solidFill>
-                  <a:srgbClr val="FFFFFF"/>
-                </a:solidFill>
-                <a:latin typeface="Calibri"/>
-              </a:rPr>
-              <a:t>3</a:t>
-            </a:r>
-          </a:p>
-        </p:txBody>
-      </p:sp>
-      <p:sp>
-        <p:nvSpPr>
-          <p:cNvPr id="17" name="TextBox 16"/>
-          <p:cNvSpPr txBox="1"/>
-          <p:nvPr/>
-        </p:nvSpPr>
-        <p:spPr>
-          <a:xfrm>
-            <a:off x="1188720" y="4037076"/>
-            <a:ext cx="10271455" cy="886968"/>
-          </a:xfrm>
-          <a:prstGeom prst="rect">
-            <a:avLst/>
-          </a:prstGeom>
-          <a:noFill/>
-        </p:spPr>
-        <p:txBody>
-          <a:bodyPr wrap="square" anchor="ctr"/>
-          <a:lstStyle/>
-          <a:p>
-            <a:r>
-              <a:rPr sz="1500" b="1" i="0">
-                <a:solidFill>
-                  <a:srgbClr val="095292"/>
-                </a:solidFill>
-                <a:latin typeface="Calibri"/>
-              </a:rPr>
-              <a:t>45 s · El actor olvidado</a:t>
-            </a:r>
-          </a:p>
-          <a:p>
-            <a:pPr>
-              <a:spcBef>
-                <a:spcPts val="200"/>
-              </a:spcBef>
-            </a:pPr>
-            <a:r>
-              <a:rPr sz="1300" b="0" i="0">
-                <a:solidFill>
-                  <a:srgbClr val="333333"/>
-                </a:solidFill>
-                <a:latin typeface="Calibri"/>
-              </a:rPr>
-              <a:t>El afectado que no usa el sistema. Quién es y qué pierde.</a:t>
-            </a:r>
-          </a:p>
-        </p:txBody>
-      </p:sp>
-      <p:sp>
-        <p:nvSpPr>
-          <p:cNvPr id="18" name="Rounded Rectangle 17"/>
-          <p:cNvSpPr/>
-          <p:nvPr/>
-        </p:nvSpPr>
-        <p:spPr>
-          <a:xfrm>
-            <a:off x="457200" y="5088636"/>
-            <a:ext cx="11277295" cy="1051560"/>
-          </a:xfrm>
-          <a:prstGeom prst="roundRect">
-            <a:avLst>
-              <a:gd name="adj" fmla="val 12000"/>
-            </a:avLst>
-          </a:prstGeom>
-          <a:solidFill>
-            <a:srgbClr val="E8F4FA"/>
-          </a:solidFill>
-          <a:ln>
-            <a:noFill/>
-          </a:ln>
-        </p:spPr>
-        <p:style>
-          <a:lnRef idx="1">
-            <a:schemeClr val="accent1"/>
-          </a:lnRef>
-          <a:fillRef idx="3">
-            <a:schemeClr val="accent1"/>
-          </a:fillRef>
-          <a:effectRef idx="2">
-            <a:schemeClr val="accent1"/>
-          </a:effectRef>
-          <a:fontRef idx="minor">
-            <a:schemeClr val="lt1"/>
-          </a:fontRef>
-        </p:style>
-        <p:txBody>
-          <a:bodyPr rtlCol="0" anchor="ctr"/>
-          <a:lstStyle/>
-          <a:p>
-            <a:pPr algn="ctr"/>
-          </a:p>
-        </p:txBody>
-      </p:sp>
-      <p:sp>
-        <p:nvSpPr>
-          <p:cNvPr id="19" name="Rounded Rectangle 18"/>
-          <p:cNvSpPr/>
-          <p:nvPr/>
-        </p:nvSpPr>
-        <p:spPr>
-          <a:xfrm>
-            <a:off x="594360" y="5394960"/>
-            <a:ext cx="438912" cy="438912"/>
-          </a:xfrm>
-          <a:prstGeom prst="roundRect">
-            <a:avLst>
-              <a:gd name="adj" fmla="val 12000"/>
-            </a:avLst>
-          </a:prstGeom>
-          <a:solidFill>
-            <a:srgbClr val="095292"/>
-          </a:solidFill>
-          <a:ln>
-            <a:noFill/>
-          </a:ln>
-        </p:spPr>
-        <p:style>
-          <a:lnRef idx="1">
-            <a:schemeClr val="accent1"/>
-          </a:lnRef>
-          <a:fillRef idx="3">
-            <a:schemeClr val="accent1"/>
-          </a:fillRef>
-          <a:effectRef idx="2">
-            <a:schemeClr val="accent1"/>
-          </a:effectRef>
-          <a:fontRef idx="minor">
-            <a:schemeClr val="lt1"/>
-          </a:fontRef>
-        </p:style>
-        <p:txBody>
-          <a:bodyPr rtlCol="0" anchor="ctr"/>
-          <a:lstStyle/>
-          <a:p>
-            <a:pPr algn="ctr"/>
-          </a:p>
-        </p:txBody>
-      </p:sp>
-      <p:sp>
-        <p:nvSpPr>
-          <p:cNvPr id="20" name="TextBox 19"/>
-          <p:cNvSpPr txBox="1"/>
-          <p:nvPr/>
-        </p:nvSpPr>
-        <p:spPr>
-          <a:xfrm>
-            <a:off x="594360" y="5394960"/>
-            <a:ext cx="438912" cy="438912"/>
-          </a:xfrm>
-          <a:prstGeom prst="rect">
-            <a:avLst/>
-          </a:prstGeom>
-          <a:noFill/>
-        </p:spPr>
-        <p:txBody>
-          <a:bodyPr wrap="square" anchor="ctr"/>
-          <a:lstStyle/>
-          <a:p>
-            <a:pPr algn="ctr"/>
-            <a:r>
-              <a:rPr sz="1600" b="1" i="0">
-                <a:solidFill>
-                  <a:srgbClr val="FFFFFF"/>
-                </a:solidFill>
-                <a:latin typeface="Calibri"/>
-              </a:rPr>
-              <a:t>4</a:t>
-            </a:r>
-          </a:p>
-        </p:txBody>
-      </p:sp>
-      <p:sp>
-        <p:nvSpPr>
-          <p:cNvPr id="21" name="TextBox 20"/>
-          <p:cNvSpPr txBox="1"/>
-          <p:nvPr/>
-        </p:nvSpPr>
-        <p:spPr>
-          <a:xfrm>
-            <a:off x="1188720" y="5180076"/>
-            <a:ext cx="10271455" cy="886968"/>
-          </a:xfrm>
-          <a:prstGeom prst="rect">
-            <a:avLst/>
-          </a:prstGeom>
-          <a:noFill/>
-        </p:spPr>
-        <p:txBody>
-          <a:bodyPr wrap="square" anchor="ctr"/>
-          <a:lstStyle/>
-          <a:p>
-            <a:r>
-              <a:rPr sz="1500" b="1" i="0">
-                <a:solidFill>
-                  <a:srgbClr val="095292"/>
-                </a:solidFill>
-                <a:latin typeface="Calibri"/>
-              </a:rPr>
-              <a:t>60 s · Qué se inventó la IA</a:t>
-            </a:r>
-          </a:p>
-          <a:p>
-            <a:pPr>
-              <a:spcBef>
-                <a:spcPts val="200"/>
-              </a:spcBef>
-            </a:pPr>
-            <a:r>
-              <a:rPr sz="1300" b="0" i="0">
-                <a:solidFill>
-                  <a:srgbClr val="333333"/>
-                </a:solidFill>
-                <a:latin typeface="Calibri"/>
-              </a:rPr>
-              <a:t>Las tres correcciones. Es el minuto obligatorio de la exposición.</a:t>
-            </a:r>
-          </a:p>
-        </p:txBody>
-      </p:sp>
-      <p:sp>
-        <p:nvSpPr>
-          <p:cNvPr id="22" name="TextBox 21"/>
-          <p:cNvSpPr txBox="1"/>
-          <p:nvPr/>
-        </p:nvSpPr>
-        <p:spPr>
-          <a:xfrm>
-            <a:off x="11185855" y="6473952"/>
-            <a:ext cx="640080" cy="274320"/>
-          </a:xfrm>
-          <a:prstGeom prst="rect">
-            <a:avLst/>
-          </a:prstGeom>
-          <a:noFill/>
-        </p:spPr>
-        <p:txBody>
-          <a:bodyPr wrap="square">
-            <a:spAutoFit/>
-          </a:bodyPr>
-          <a:lstStyle/>
-          <a:p>
-            <a:pPr algn="r"/>
-            <a:r>
-              <a:rPr sz="1100" b="0" i="0">
-                <a:solidFill>
-                  <a:srgbClr val="666666"/>
-                </a:solidFill>
-                <a:latin typeface="Calibri"/>
-              </a:rPr>
-              <a:t>15</a:t>
-            </a:r>
-          </a:p>
-        </p:txBody>
-      </p:sp>
-    </p:spTree>
-  </p:cSld>
-  <p:clrMapOvr>
-    <a:masterClrMapping/>
-  </p:clrMapOvr>
-</p:sld>
-</file>
-
-<file path=ppt/slides/slide16.xml><?xml version="1.0" encoding="utf-8"?>
-<p:sld xmlns:a="http://schemas.openxmlformats.org/drawingml/2006/main" xmlns:p="http://schemas.openxmlformats.org/presentationml/2006/main" xmlns:r="http://schemas.openxmlformats.org/officeDocument/2006/relationships">
-  <p:cSld>
-    <p:bg>
-      <p:bgPr>
-        <a:solidFill>
-          <a:srgbClr val="FFFFFF"/>
-        </a:solidFill>
-        <a:effectLst/>
-      </p:bgPr>
-    </p:bg>
-    <p:spTree>
-      <p:nvGrpSpPr>
-        <p:cNvPr id="1" name=""/>
-        <p:cNvGrpSpPr/>
-        <p:nvPr/>
-      </p:nvGrpSpPr>
-      <p:grpSpPr/>
-      <p:sp>
-        <p:nvSpPr>
-          <p:cNvPr id="2" name="Rectangle 1"/>
-          <p:cNvSpPr/>
-          <p:nvPr/>
-        </p:nvSpPr>
-        <p:spPr>
-          <a:xfrm>
-            <a:off x="0" y="0"/>
-            <a:ext cx="12191695" cy="960120"/>
-          </a:xfrm>
-          <a:prstGeom prst="rect">
-            <a:avLst/>
-          </a:prstGeom>
-          <a:solidFill>
-            <a:srgbClr val="095292"/>
-          </a:solidFill>
-          <a:ln>
-            <a:noFill/>
-          </a:ln>
-        </p:spPr>
-        <p:style>
-          <a:lnRef idx="1">
-            <a:schemeClr val="accent1"/>
-          </a:lnRef>
-          <a:fillRef idx="3">
-            <a:schemeClr val="accent1"/>
-          </a:fillRef>
-          <a:effectRef idx="2">
-            <a:schemeClr val="accent1"/>
-          </a:effectRef>
-          <a:fontRef idx="minor">
-            <a:schemeClr val="lt1"/>
-          </a:fontRef>
-        </p:style>
-        <p:txBody>
-          <a:bodyPr rtlCol="0" anchor="ctr"/>
-          <a:lstStyle/>
-          <a:p>
-            <a:pPr algn="ctr"/>
-          </a:p>
-        </p:txBody>
-      </p:sp>
-      <p:sp>
-        <p:nvSpPr>
-          <p:cNvPr id="3" name="Rectangle 2"/>
-          <p:cNvSpPr/>
-          <p:nvPr/>
-        </p:nvSpPr>
-        <p:spPr>
-          <a:xfrm>
-            <a:off x="0" y="960120"/>
-            <a:ext cx="12191695" cy="41148"/>
-          </a:xfrm>
-          <a:prstGeom prst="rect">
-            <a:avLst/>
-          </a:prstGeom>
-          <a:solidFill>
-            <a:srgbClr val="FFD000"/>
-          </a:solidFill>
-          <a:ln>
-            <a:noFill/>
-          </a:ln>
-        </p:spPr>
-        <p:style>
-          <a:lnRef idx="1">
-            <a:schemeClr val="accent1"/>
-          </a:lnRef>
-          <a:fillRef idx="3">
-            <a:schemeClr val="accent1"/>
-          </a:fillRef>
-          <a:effectRef idx="2">
-            <a:schemeClr val="accent1"/>
-          </a:effectRef>
-          <a:fontRef idx="minor">
-            <a:schemeClr val="lt1"/>
-          </a:fontRef>
-        </p:style>
-        <p:txBody>
-          <a:bodyPr rtlCol="0" anchor="ctr"/>
-          <a:lstStyle/>
-          <a:p>
-            <a:pPr algn="ctr"/>
-          </a:p>
-        </p:txBody>
-      </p:sp>
-      <p:sp>
-        <p:nvSpPr>
-          <p:cNvPr id="4" name="TextBox 3"/>
-          <p:cNvSpPr txBox="1"/>
-          <p:nvPr/>
-        </p:nvSpPr>
-        <p:spPr>
-          <a:xfrm>
-            <a:off x="457200" y="164592"/>
-            <a:ext cx="11277295" cy="502920"/>
-          </a:xfrm>
-          <a:prstGeom prst="rect">
-            <a:avLst/>
-          </a:prstGeom>
-          <a:noFill/>
-        </p:spPr>
-        <p:txBody>
-          <a:bodyPr wrap="square">
-            <a:spAutoFit/>
-          </a:bodyPr>
-          <a:lstStyle/>
-          <a:p>
-            <a:r>
-              <a:rPr sz="2600" b="1" i="0">
-                <a:solidFill>
-                  <a:srgbClr val="FFFFFF"/>
-                </a:solidFill>
-                <a:latin typeface="Calibri"/>
-              </a:rPr>
-              <a:t>Para la Clase 4</a:t>
-            </a:r>
-          </a:p>
-        </p:txBody>
-      </p:sp>
-      <p:sp>
-        <p:nvSpPr>
-          <p:cNvPr id="5" name="TextBox 4"/>
-          <p:cNvSpPr txBox="1"/>
-          <p:nvPr/>
-        </p:nvSpPr>
-        <p:spPr>
-          <a:xfrm>
-            <a:off x="457200" y="1170432"/>
-            <a:ext cx="11277295" cy="5230368"/>
-          </a:xfrm>
-          <a:prstGeom prst="rect">
-            <a:avLst/>
-          </a:prstGeom>
-          <a:noFill/>
-        </p:spPr>
-        <p:txBody>
-          <a:bodyPr wrap="square">
-            <a:spAutoFit/>
-          </a:bodyPr>
-          <a:lstStyle/>
-          <a:p>
-            <a:pPr>
-              <a:spcAft>
-                <a:spcPts val="800"/>
-              </a:spcAft>
-            </a:pPr>
-            <a:r>
-              <a:rPr sz="2000" b="0" i="0">
-                <a:solidFill>
-                  <a:srgbClr val="333333"/>
-                </a:solidFill>
-                <a:latin typeface="Calibri"/>
-              </a:rPr>
-              <a:t>–   </a:t>
-            </a:r>
-            <a:r>
-              <a:rPr sz="2000" b="1" i="0">
-                <a:solidFill>
-                  <a:srgbClr val="333333"/>
-                </a:solidFill>
-                <a:latin typeface="Calibri"/>
-              </a:rPr>
-              <a:t>Trabajo dirigido:</a:t>
-            </a:r>
-            <a:r>
-              <a:rPr sz="2000" b="0" i="0">
-                <a:solidFill>
-                  <a:srgbClr val="333333"/>
-                </a:solidFill>
-                <a:latin typeface="Calibri"/>
-              </a:rPr>
-              <a:t> Análisis de caso práctico — dejen la ficha del sistema completa en la carpeta del equipo, con el prompt y las correcciones.</a:t>
-            </a:r>
-          </a:p>
-          <a:p>
-            <a:pPr>
-              <a:spcAft>
-                <a:spcPts val="800"/>
-              </a:spcAft>
-            </a:pPr>
-            <a:r>
-              <a:rPr sz="2000" b="0" i="0">
-                <a:solidFill>
-                  <a:srgbClr val="333333"/>
-                </a:solidFill>
-                <a:latin typeface="Calibri"/>
-              </a:rPr>
-              <a:t>–   </a:t>
-            </a:r>
-            <a:r>
-              <a:rPr sz="2000" b="1" i="0">
-                <a:solidFill>
-                  <a:srgbClr val="333333"/>
-                </a:solidFill>
-                <a:latin typeface="Calibri"/>
-              </a:rPr>
-              <a:t>Trabajo independiente:</a:t>
-            </a:r>
-            <a:r>
-              <a:rPr sz="2000" b="0" i="0">
-                <a:solidFill>
-                  <a:srgbClr val="333333"/>
-                </a:solidFill>
-                <a:latin typeface="Calibri"/>
-              </a:rPr>
-              <a:t> Ensayo sobre impacto social: media página sobre a quién le empeora la vida el sistema que analizaron, aunque funcione bien.</a:t>
-            </a:r>
-          </a:p>
-          <a:p>
-            <a:pPr>
-              <a:spcAft>
-                <a:spcPts val="800"/>
-              </a:spcAft>
-            </a:pPr>
-            <a:r>
-              <a:rPr sz="2000" b="0" i="0">
-                <a:solidFill>
-                  <a:srgbClr val="333333"/>
-                </a:solidFill>
-                <a:latin typeface="Calibri"/>
-              </a:rPr>
-              <a:t>–   </a:t>
-            </a:r>
-            <a:r>
-              <a:rPr sz="2000" b="1" i="0">
-                <a:solidFill>
-                  <a:srgbClr val="333333"/>
-                </a:solidFill>
-                <a:latin typeface="Calibri"/>
-              </a:rPr>
-              <a:t>Clase 4 · Principios éticos en la Ingeniería</a:t>
-            </a:r>
-            <a:r>
-              <a:rPr sz="2000" b="0" i="0">
-                <a:solidFill>
-                  <a:srgbClr val="333333"/>
-                </a:solidFill>
-                <a:latin typeface="Calibri"/>
-              </a:rPr>
-              <a:t> — los principios éticos de la profesión, con casos reales donde el software funcionó y aun así el ingeniero hizo algo mal.</a:t>
-            </a:r>
-          </a:p>
-          <a:p>
-            <a:pPr>
-              <a:spcAft>
-                <a:spcPts val="800"/>
-              </a:spcAft>
-            </a:pPr>
-            <a:r>
-              <a:rPr sz="2000" b="0" i="0">
-                <a:solidFill>
-                  <a:srgbClr val="333333"/>
-                </a:solidFill>
-                <a:latin typeface="Calibri"/>
-              </a:rPr>
-              <a:t>–   </a:t>
-            </a:r>
-            <a:r>
-              <a:rPr sz="2000" b="1" i="0">
-                <a:solidFill>
-                  <a:srgbClr val="333333"/>
-                </a:solidFill>
-                <a:latin typeface="Calibri"/>
-              </a:rPr>
-              <a:t>Aviso:</a:t>
-            </a:r>
-            <a:r>
-              <a:rPr sz="2000" b="0" i="0">
-                <a:solidFill>
-                  <a:srgbClr val="333333"/>
-                </a:solidFill>
-                <a:latin typeface="Calibri"/>
-              </a:rPr>
-              <a:t> Traigan identificado el </a:t>
-            </a:r>
-            <a:r>
-              <a:rPr sz="2000" b="1" i="0">
-                <a:solidFill>
-                  <a:srgbClr val="333333"/>
-                </a:solidFill>
-                <a:latin typeface="Calibri"/>
-              </a:rPr>
-              <a:t>actor no-usuario</a:t>
-            </a:r>
-            <a:r>
-              <a:rPr sz="2000" b="0" i="0">
-                <a:solidFill>
-                  <a:srgbClr val="333333"/>
-                </a:solidFill>
-                <a:latin typeface="Calibri"/>
-              </a:rPr>
-              <a:t> de su sistema. La sesión 4 arranca con esa persona y el ensayo de media página es sobre ella.</a:t>
-            </a:r>
-          </a:p>
-          <a:p>
-            <a:pPr>
-              <a:spcAft>
-                <a:spcPts val="800"/>
-              </a:spcAft>
-            </a:pPr>
-            <a:r>
-              <a:rPr sz="2000" b="0" i="0">
-                <a:solidFill>
-                  <a:srgbClr val="333333"/>
-                </a:solidFill>
-                <a:latin typeface="Calibri"/>
-              </a:rPr>
-              <a:t>–   </a:t>
-            </a:r>
-            <a:r>
-              <a:rPr sz="2000" b="1" i="0">
-                <a:solidFill>
-                  <a:srgbClr val="333333"/>
-                </a:solidFill>
-                <a:latin typeface="Calibri"/>
-              </a:rPr>
-              <a:t>Antes de salir:</a:t>
-            </a:r>
-            <a:r>
-              <a:rPr sz="2000" b="0" i="0">
-                <a:solidFill>
-                  <a:srgbClr val="333333"/>
-                </a:solidFill>
-                <a:latin typeface="Calibri"/>
-              </a:rPr>
-              <a:t> el enlace del documento del equipo en el chat, con permiso de lectura para el docente, y el nombre del vocero de hoy.</a:t>
-            </a:r>
-          </a:p>
-        </p:txBody>
-      </p:sp>
-      <p:sp>
-        <p:nvSpPr>
-          <p:cNvPr id="6" name="TextBox 5"/>
-          <p:cNvSpPr txBox="1"/>
-          <p:nvPr/>
-        </p:nvSpPr>
-        <p:spPr>
-          <a:xfrm>
-            <a:off x="11185855" y="6473952"/>
-            <a:ext cx="640080" cy="274320"/>
-          </a:xfrm>
-          <a:prstGeom prst="rect">
-            <a:avLst/>
-          </a:prstGeom>
-          <a:noFill/>
-        </p:spPr>
-        <p:txBody>
-          <a:bodyPr wrap="square">
-            <a:spAutoFit/>
-          </a:bodyPr>
-          <a:lstStyle/>
-          <a:p>
-            <a:pPr algn="r"/>
-            <a:r>
-              <a:rPr sz="1100" b="0" i="0">
-                <a:solidFill>
-                  <a:srgbClr val="666666"/>
-                </a:solidFill>
-                <a:latin typeface="Calibri"/>
-              </a:rPr>
-              <a:t>16</a:t>
-            </a:r>
-          </a:p>
-        </p:txBody>
-      </p:sp>
-    </p:spTree>
-  </p:cSld>
-  <p:clrMapOvr>
-    <a:masterClrMapping/>
-  </p:clrMapOvr>
-</p:sld>
-</file>
-
-<file path=ppt/slides/slide17.xml><?xml version="1.0" encoding="utf-8"?>
-<p:sld xmlns:a="http://schemas.openxmlformats.org/drawingml/2006/main" xmlns:p="http://schemas.openxmlformats.org/presentationml/2006/main" xmlns:r="http://schemas.openxmlformats.org/officeDocument/2006/relationships">
-  <p:cSld>
-    <p:bg>
-      <p:bgPr>
-        <a:solidFill>
-          <a:srgbClr val="FFFFFF"/>
-        </a:solidFill>
-        <a:effectLst/>
-      </p:bgPr>
-    </p:bg>
-    <p:spTree>
-      <p:nvGrpSpPr>
-        <p:cNvPr id="1" name=""/>
-        <p:cNvGrpSpPr/>
-        <p:nvPr/>
-      </p:nvGrpSpPr>
-      <p:grpSpPr/>
-      <p:sp>
-        <p:nvSpPr>
-          <p:cNvPr id="2" name="Rectangle 1"/>
-          <p:cNvSpPr/>
-          <p:nvPr/>
-        </p:nvSpPr>
-        <p:spPr>
-          <a:xfrm>
-            <a:off x="0" y="0"/>
             <a:ext cx="12191695" cy="164592"/>
           </a:xfrm>
           <a:prstGeom prst="rect">
@@ -11796,7 +9327,7 @@
                 </a:solidFill>
                 <a:latin typeface="Calibri"/>
               </a:rPr>
-              <a:t>Taller — anatomía de un sistema, con IA y corrección a mano</a:t>
+              <a:t>Práctica en equipos (opcional · la guía está en la carpeta de la clase)</a:t>
             </a:r>
           </a:p>
         </p:txBody>
@@ -11911,7 +9442,7 @@
                 </a:solidFill>
                 <a:latin typeface="Calibri"/>
               </a:rPr>
-              <a:t>5 equipos × 3 min — el sistema y lo que la IA se inventó</a:t>
+              <a:t>Socialización de la práctica, si se hizo</a:t>
             </a:r>
           </a:p>
         </p:txBody>

--- a/Introduccion a la Ingenieria/Clases/Clase 3 - Fundamentos basicos de la Ingenieria de Sistemas/Presentacion.pptx
+++ b/Introduccion a la Ingenieria/Clases/Clase 3 - Fundamentos basicos de la Ingenieria de Sistemas/Presentacion.pptx
@@ -8499,7 +8499,7 @@
                 </a:solidFill>
                 <a:latin typeface="Calibri"/>
               </a:rPr>
-              <a:t>Por eso el entregable de hoy incluye el prompt y la corrección.</a:t>
+              <a:t>Por eso, al usar IA, se guardan el prompt y la corrección.</a:t>
             </a:r>
             <a:r>
               <a:rPr sz="1400" b="0" i="0">
@@ -8508,7 +8508,7 @@
                 </a:solidFill>
                 <a:latin typeface="Calibri"/>
               </a:rPr>
-              <a:t> Se califica lo que ustedes detectaron que estaba mal. Un texto de IA pegado sin correcciones no puntúa, y no por castigo: es que no muestra ningún trabajo de ingeniería.</a:t>
+              <a:t> Lo valioso es lo que ustedes detectaron que estaba mal. Un texto de IA pegado sin correcciones no vale nada, y no por castigo: es que no muestra ningún trabajo de ingeniería.</a:t>
             </a:r>
           </a:p>
         </p:txBody>

--- a/Introduccion a la Ingenieria/Clases/Clase 3 - Fundamentos basicos de la Ingenieria de Sistemas/Presentacion.pptx
+++ b/Introduccion a la Ingenieria/Clases/Clase 3 - Fundamentos basicos de la Ingenieria de Sistemas/Presentacion.pptx
@@ -7026,16 +7026,16 @@
         </p:nvSpPr>
         <p:spPr>
           <a:xfrm>
-            <a:off x="457200" y="1444752"/>
-            <a:ext cx="11277295" cy="908913"/>
+            <a:off x="5934611" y="1399031"/>
+            <a:ext cx="5735574" cy="4617720"/>
           </a:xfrm>
           <a:prstGeom prst="roundRect">
             <a:avLst>
-              <a:gd name="adj" fmla="val 12000"/>
+              <a:gd name="adj" fmla="val 4000"/>
             </a:avLst>
           </a:prstGeom>
           <a:solidFill>
-            <a:srgbClr val="F2F2F2"/>
+            <a:srgbClr val="E8EEF4"/>
           </a:solidFill>
           <a:ln>
             <a:noFill/>
@@ -7063,61 +7063,147 @@
           </a:p>
         </p:txBody>
       </p:sp>
-      <p:sp>
-        <p:nvSpPr>
-          <p:cNvPr id="7" name="Rounded Rectangle 6"/>
-          <p:cNvSpPr/>
-          <p:nvPr/>
-        </p:nvSpPr>
-        <p:spPr>
-          <a:xfrm>
-            <a:off x="594360" y="1679752"/>
-            <a:ext cx="438912" cy="438912"/>
-          </a:xfrm>
-          <a:prstGeom prst="roundRect">
-            <a:avLst>
-              <a:gd name="adj" fmla="val 12000"/>
-            </a:avLst>
-          </a:prstGeom>
-          <a:solidFill>
-            <a:srgbClr val="095292"/>
-          </a:solidFill>
-          <a:ln>
-            <a:noFill/>
-          </a:ln>
-        </p:spPr>
-        <p:style>
-          <a:lnRef idx="1">
-            <a:schemeClr val="accent1"/>
-          </a:lnRef>
-          <a:fillRef idx="3">
-            <a:schemeClr val="accent1"/>
-          </a:fillRef>
-          <a:effectRef idx="2">
-            <a:schemeClr val="accent1"/>
-          </a:effectRef>
-          <a:fontRef idx="minor">
-            <a:schemeClr val="lt1"/>
-          </a:fontRef>
-        </p:style>
-        <p:txBody>
-          <a:bodyPr rtlCol="0" anchor="ctr"/>
+      <p:pic>
+        <p:nvPicPr>
+          <p:cNvPr id="7" name="Picture 6" descr="semaforo-paso1.png"/>
+          <p:cNvPicPr>
+            <a:picLocks noChangeAspect="1"/>
+          </p:cNvPicPr>
+          <p:nvPr/>
+        </p:nvPicPr>
+        <p:blipFill>
+          <a:blip r:embed="rId2"/>
+          <a:stretch>
+            <a:fillRect/>
+          </a:stretch>
+        </p:blipFill>
+        <p:spPr>
+          <a:xfrm>
+            <a:off x="6007763" y="1472184"/>
+            <a:ext cx="5589270" cy="4471416"/>
+          </a:xfrm>
+          <a:prstGeom prst="rect">
+            <a:avLst/>
+          </a:prstGeom>
+        </p:spPr>
+      </p:pic>
+      <p:pic>
+        <p:nvPicPr>
+          <p:cNvPr id="8" name="Picture 7" descr="semaforo-paso2.png"/>
+          <p:cNvPicPr>
+            <a:picLocks noChangeAspect="1"/>
+          </p:cNvPicPr>
+          <p:nvPr/>
+        </p:nvPicPr>
+        <p:blipFill>
+          <a:blip r:embed="rId3"/>
+          <a:stretch>
+            <a:fillRect/>
+          </a:stretch>
+        </p:blipFill>
+        <p:spPr>
+          <a:xfrm>
+            <a:off x="6007763" y="1472184"/>
+            <a:ext cx="5589270" cy="4471416"/>
+          </a:xfrm>
+          <a:prstGeom prst="rect">
+            <a:avLst/>
+          </a:prstGeom>
+        </p:spPr>
+      </p:pic>
+      <p:pic>
+        <p:nvPicPr>
+          <p:cNvPr id="9" name="Picture 8" descr="semaforo-paso3.png"/>
+          <p:cNvPicPr>
+            <a:picLocks noChangeAspect="1"/>
+          </p:cNvPicPr>
+          <p:nvPr/>
+        </p:nvPicPr>
+        <p:blipFill>
+          <a:blip r:embed="rId4"/>
+          <a:stretch>
+            <a:fillRect/>
+          </a:stretch>
+        </p:blipFill>
+        <p:spPr>
+          <a:xfrm>
+            <a:off x="6007763" y="1472184"/>
+            <a:ext cx="5589270" cy="4471416"/>
+          </a:xfrm>
+          <a:prstGeom prst="rect">
+            <a:avLst/>
+          </a:prstGeom>
+        </p:spPr>
+      </p:pic>
+      <p:pic>
+        <p:nvPicPr>
+          <p:cNvPr id="10" name="Picture 9" descr="semaforo-paso4.png"/>
+          <p:cNvPicPr>
+            <a:picLocks noChangeAspect="1"/>
+          </p:cNvPicPr>
+          <p:nvPr/>
+        </p:nvPicPr>
+        <p:blipFill>
+          <a:blip r:embed="rId5"/>
+          <a:stretch>
+            <a:fillRect/>
+          </a:stretch>
+        </p:blipFill>
+        <p:spPr>
+          <a:xfrm>
+            <a:off x="6007763" y="1472184"/>
+            <a:ext cx="5589270" cy="4471416"/>
+          </a:xfrm>
+          <a:prstGeom prst="rect">
+            <a:avLst/>
+          </a:prstGeom>
+        </p:spPr>
+      </p:pic>
+      <p:sp>
+        <p:nvSpPr>
+          <p:cNvPr id="18" name="TextBox 17"/>
+          <p:cNvSpPr txBox="1"/>
+          <p:nvPr/>
+        </p:nvSpPr>
+        <p:spPr>
+          <a:xfrm>
+            <a:off x="5870301" y="5961888"/>
+            <a:ext cx="5864193" cy="320040"/>
+          </a:xfrm>
+          <a:prstGeom prst="rect">
+            <a:avLst/>
+          </a:prstGeom>
+          <a:noFill/>
+        </p:spPr>
+        <p:txBody>
+          <a:bodyPr wrap="square">
+            <a:spAutoFit/>
+          </a:bodyPr>
           <a:lstStyle/>
           <a:p>
             <a:pPr algn="ctr"/>
-          </a:p>
-        </p:txBody>
-      </p:sp>
-      <p:sp>
-        <p:nvSpPr>
-          <p:cNvPr id="8" name="TextBox 7"/>
+            <a:r>
+              <a:rPr sz="1100" b="0" i="1">
+                <a:solidFill>
+                  <a:srgbClr val="666666"/>
+                </a:solidFill>
+                <a:latin typeface="Calibri"/>
+              </a:rPr>
+              <a:t>Clic para avanzar la animación</a:t>
+            </a:r>
+          </a:p>
+        </p:txBody>
+      </p:sp>
+      <p:sp>
+        <p:nvSpPr>
+          <p:cNvPr id="19" name="TextBox 18"/>
           <p:cNvSpPr txBox="1"/>
           <p:nvPr/>
         </p:nvSpPr>
         <p:spPr>
           <a:xfrm>
-            <a:off x="594360" y="1679752"/>
-            <a:ext cx="438912" cy="438912"/>
+            <a:off x="457200" y="1563624"/>
+            <a:ext cx="5093061" cy="4837176"/>
           </a:xfrm>
           <a:prstGeom prst="rect">
             <a:avLst/>
@@ -7125,757 +7211,151 @@
           <a:noFill/>
         </p:spPr>
         <p:txBody>
-          <a:bodyPr wrap="square" anchor="ctr"/>
-          <a:lstStyle/>
-          <a:p>
-            <a:pPr algn="ctr"/>
-            <a:r>
-              <a:rPr sz="1600" b="1" i="0">
-                <a:solidFill>
-                  <a:srgbClr val="FFFFFF"/>
-                </a:solidFill>
-                <a:latin typeface="Calibri"/>
-              </a:rPr>
-              <a:t>1</a:t>
-            </a:r>
-          </a:p>
-        </p:txBody>
-      </p:sp>
-      <p:sp>
-        <p:nvSpPr>
-          <p:cNvPr id="9" name="TextBox 8"/>
-          <p:cNvSpPr txBox="1"/>
-          <p:nvPr/>
-        </p:nvSpPr>
-        <p:spPr>
-          <a:xfrm>
-            <a:off x="1188720" y="1536192"/>
-            <a:ext cx="10271455" cy="744321"/>
-          </a:xfrm>
-          <a:prstGeom prst="rect">
-            <a:avLst/>
-          </a:prstGeom>
-          <a:noFill/>
-        </p:spPr>
-        <p:txBody>
-          <a:bodyPr wrap="square" anchor="ctr"/>
-          <a:lstStyle/>
-          <a:p>
-            <a:r>
-              <a:rPr sz="1500" b="1" i="0">
-                <a:solidFill>
-                  <a:srgbClr val="095292"/>
-                </a:solidFill>
-                <a:latin typeface="Calibri"/>
-              </a:rPr>
-              <a:t>1 · Propósito</a:t>
-            </a:r>
-          </a:p>
+          <a:bodyPr wrap="square">
+            <a:spAutoFit/>
+          </a:bodyPr>
+          <a:lstStyle/>
           <a:p>
             <a:pPr>
-              <a:spcBef>
-                <a:spcPts val="200"/>
-              </a:spcBef>
+              <a:spcAft>
+                <a:spcPts val="800"/>
+              </a:spcAft>
             </a:pPr>
             <a:r>
-              <a:rPr sz="1300" b="0" i="0">
+              <a:rPr sz="2000" b="0" i="0">
                 <a:solidFill>
                   <a:srgbClr val="333333"/>
                 </a:solidFill>
                 <a:latin typeface="Calibri"/>
               </a:rPr>
-              <a:t>Que carros y peatones crucen la esquina sin chocar y sin esperar de más.</a:t>
-            </a:r>
-          </a:p>
-        </p:txBody>
-      </p:sp>
-      <p:sp>
-        <p:nvSpPr>
-          <p:cNvPr id="10" name="Rounded Rectangle 9"/>
-          <p:cNvSpPr/>
-          <p:nvPr/>
-        </p:nvSpPr>
-        <p:spPr>
-          <a:xfrm>
-            <a:off x="457200" y="2445105"/>
-            <a:ext cx="11277295" cy="908913"/>
-          </a:xfrm>
-          <a:prstGeom prst="roundRect">
-            <a:avLst>
-              <a:gd name="adj" fmla="val 12000"/>
-            </a:avLst>
-          </a:prstGeom>
-          <a:solidFill>
-            <a:srgbClr val="E8F4FA"/>
-          </a:solidFill>
-          <a:ln>
-            <a:noFill/>
-          </a:ln>
-        </p:spPr>
-        <p:style>
-          <a:lnRef idx="1">
-            <a:schemeClr val="accent1"/>
-          </a:lnRef>
-          <a:fillRef idx="3">
-            <a:schemeClr val="accent1"/>
-          </a:fillRef>
-          <a:effectRef idx="2">
-            <a:schemeClr val="accent1"/>
-          </a:effectRef>
-          <a:fontRef idx="minor">
-            <a:schemeClr val="lt1"/>
-          </a:fontRef>
-        </p:style>
-        <p:txBody>
-          <a:bodyPr rtlCol="0" anchor="ctr"/>
-          <a:lstStyle/>
-          <a:p>
-            <a:pPr algn="ctr"/>
-          </a:p>
-        </p:txBody>
-      </p:sp>
-      <p:sp>
-        <p:nvSpPr>
-          <p:cNvPr id="11" name="Rounded Rectangle 10"/>
-          <p:cNvSpPr/>
-          <p:nvPr/>
-        </p:nvSpPr>
-        <p:spPr>
-          <a:xfrm>
-            <a:off x="594360" y="2680106"/>
-            <a:ext cx="438912" cy="438912"/>
-          </a:xfrm>
-          <a:prstGeom prst="roundRect">
-            <a:avLst>
-              <a:gd name="adj" fmla="val 12000"/>
-            </a:avLst>
-          </a:prstGeom>
-          <a:solidFill>
-            <a:srgbClr val="095292"/>
-          </a:solidFill>
-          <a:ln>
-            <a:noFill/>
-          </a:ln>
-        </p:spPr>
-        <p:style>
-          <a:lnRef idx="1">
-            <a:schemeClr val="accent1"/>
-          </a:lnRef>
-          <a:fillRef idx="3">
-            <a:schemeClr val="accent1"/>
-          </a:fillRef>
-          <a:effectRef idx="2">
-            <a:schemeClr val="accent1"/>
-          </a:effectRef>
-          <a:fontRef idx="minor">
-            <a:schemeClr val="lt1"/>
-          </a:fontRef>
-        </p:style>
-        <p:txBody>
-          <a:bodyPr rtlCol="0" anchor="ctr"/>
-          <a:lstStyle/>
-          <a:p>
-            <a:pPr algn="ctr"/>
-          </a:p>
-        </p:txBody>
-      </p:sp>
-      <p:sp>
-        <p:nvSpPr>
-          <p:cNvPr id="12" name="TextBox 11"/>
-          <p:cNvSpPr txBox="1"/>
-          <p:nvPr/>
-        </p:nvSpPr>
-        <p:spPr>
-          <a:xfrm>
-            <a:off x="594360" y="2680106"/>
-            <a:ext cx="438912" cy="438912"/>
-          </a:xfrm>
-          <a:prstGeom prst="rect">
-            <a:avLst/>
-          </a:prstGeom>
-          <a:noFill/>
-        </p:spPr>
-        <p:txBody>
-          <a:bodyPr wrap="square" anchor="ctr"/>
-          <a:lstStyle/>
-          <a:p>
-            <a:pPr algn="ctr"/>
-            <a:r>
-              <a:rPr sz="1600" b="1" i="0">
-                <a:solidFill>
-                  <a:srgbClr val="FFFFFF"/>
-                </a:solidFill>
-                <a:latin typeface="Calibri"/>
-              </a:rPr>
-              <a:t>2</a:t>
-            </a:r>
-          </a:p>
-        </p:txBody>
-      </p:sp>
-      <p:sp>
-        <p:nvSpPr>
-          <p:cNvPr id="13" name="TextBox 12"/>
-          <p:cNvSpPr txBox="1"/>
-          <p:nvPr/>
-        </p:nvSpPr>
-        <p:spPr>
-          <a:xfrm>
-            <a:off x="1188720" y="2536545"/>
-            <a:ext cx="10271455" cy="744321"/>
-          </a:xfrm>
-          <a:prstGeom prst="rect">
-            <a:avLst/>
-          </a:prstGeom>
-          <a:noFill/>
-        </p:spPr>
-        <p:txBody>
-          <a:bodyPr wrap="square" anchor="ctr"/>
-          <a:lstStyle/>
-          <a:p>
-            <a:r>
-              <a:rPr sz="1400" b="1" i="0">
-                <a:solidFill>
-                  <a:srgbClr val="095292"/>
-                </a:solidFill>
-                <a:latin typeface="Calibri"/>
-              </a:rPr>
-              <a:t>2 · Frontera</a:t>
+              <a:t>–   </a:t>
+            </a:r>
+            <a:r>
+              <a:rPr sz="2000" b="1" i="0">
+                <a:solidFill>
+                  <a:srgbClr val="333333"/>
+                </a:solidFill>
+                <a:latin typeface="Calibri"/>
+              </a:rPr>
+              <a:t>1 · Propósito:</a:t>
+            </a:r>
+            <a:r>
+              <a:rPr sz="2000" b="0" i="0">
+                <a:solidFill>
+                  <a:srgbClr val="333333"/>
+                </a:solidFill>
+                <a:latin typeface="Calibri"/>
+              </a:rPr>
+              <a:t> Que carros y peatones crucen la esquina sin chocar y sin esperar de más.</a:t>
             </a:r>
           </a:p>
           <a:p>
             <a:pPr>
-              <a:spcBef>
-                <a:spcPts val="200"/>
-              </a:spcBef>
+              <a:spcAft>
+                <a:spcPts val="800"/>
+              </a:spcAft>
             </a:pPr>
             <a:r>
-              <a:rPr sz="1200" b="0" i="0">
+              <a:rPr sz="2000" b="0" i="0">
                 <a:solidFill>
                   <a:srgbClr val="333333"/>
                 </a:solidFill>
                 <a:latin typeface="Calibri"/>
               </a:rPr>
-              <a:t>Dentro: el semáforo, la esquina y quienes la cruzan. Fuera: el resto de la ciudad. Pero si el semáforo de al lado está mal sincronizado, el trancón llega igual.</a:t>
-            </a:r>
-          </a:p>
-        </p:txBody>
-      </p:sp>
-      <p:sp>
-        <p:nvSpPr>
-          <p:cNvPr id="14" name="Rounded Rectangle 13"/>
-          <p:cNvSpPr/>
-          <p:nvPr/>
-        </p:nvSpPr>
-        <p:spPr>
-          <a:xfrm>
-            <a:off x="457200" y="3445459"/>
-            <a:ext cx="11277295" cy="908913"/>
-          </a:xfrm>
-          <a:prstGeom prst="roundRect">
-            <a:avLst>
-              <a:gd name="adj" fmla="val 12000"/>
-            </a:avLst>
-          </a:prstGeom>
-          <a:solidFill>
-            <a:srgbClr val="F2F2F2"/>
-          </a:solidFill>
-          <a:ln>
-            <a:noFill/>
-          </a:ln>
-        </p:spPr>
-        <p:style>
-          <a:lnRef idx="1">
-            <a:schemeClr val="accent1"/>
-          </a:lnRef>
-          <a:fillRef idx="3">
-            <a:schemeClr val="accent1"/>
-          </a:fillRef>
-          <a:effectRef idx="2">
-            <a:schemeClr val="accent1"/>
-          </a:effectRef>
-          <a:fontRef idx="minor">
-            <a:schemeClr val="lt1"/>
-          </a:fontRef>
-        </p:style>
-        <p:txBody>
-          <a:bodyPr rtlCol="0" anchor="ctr"/>
-          <a:lstStyle/>
-          <a:p>
-            <a:pPr algn="ctr"/>
-          </a:p>
-        </p:txBody>
-      </p:sp>
-      <p:sp>
-        <p:nvSpPr>
-          <p:cNvPr id="15" name="Rounded Rectangle 14"/>
-          <p:cNvSpPr/>
-          <p:nvPr/>
-        </p:nvSpPr>
-        <p:spPr>
-          <a:xfrm>
-            <a:off x="594360" y="3680460"/>
-            <a:ext cx="438912" cy="438912"/>
-          </a:xfrm>
-          <a:prstGeom prst="roundRect">
-            <a:avLst>
-              <a:gd name="adj" fmla="val 12000"/>
-            </a:avLst>
-          </a:prstGeom>
-          <a:solidFill>
-            <a:srgbClr val="095292"/>
-          </a:solidFill>
-          <a:ln>
-            <a:noFill/>
-          </a:ln>
-        </p:spPr>
-        <p:style>
-          <a:lnRef idx="1">
-            <a:schemeClr val="accent1"/>
-          </a:lnRef>
-          <a:fillRef idx="3">
-            <a:schemeClr val="accent1"/>
-          </a:fillRef>
-          <a:effectRef idx="2">
-            <a:schemeClr val="accent1"/>
-          </a:effectRef>
-          <a:fontRef idx="minor">
-            <a:schemeClr val="lt1"/>
-          </a:fontRef>
-        </p:style>
-        <p:txBody>
-          <a:bodyPr rtlCol="0" anchor="ctr"/>
-          <a:lstStyle/>
-          <a:p>
-            <a:pPr algn="ctr"/>
-          </a:p>
-        </p:txBody>
-      </p:sp>
-      <p:sp>
-        <p:nvSpPr>
-          <p:cNvPr id="16" name="TextBox 15"/>
-          <p:cNvSpPr txBox="1"/>
-          <p:nvPr/>
-        </p:nvSpPr>
-        <p:spPr>
-          <a:xfrm>
-            <a:off x="594360" y="3680460"/>
-            <a:ext cx="438912" cy="438912"/>
-          </a:xfrm>
-          <a:prstGeom prst="rect">
-            <a:avLst/>
-          </a:prstGeom>
-          <a:noFill/>
-        </p:spPr>
-        <p:txBody>
-          <a:bodyPr wrap="square" anchor="ctr"/>
-          <a:lstStyle/>
-          <a:p>
-            <a:pPr algn="ctr"/>
-            <a:r>
-              <a:rPr sz="1600" b="1" i="0">
-                <a:solidFill>
-                  <a:srgbClr val="FFFFFF"/>
-                </a:solidFill>
-                <a:latin typeface="Calibri"/>
-              </a:rPr>
-              <a:t>3</a:t>
-            </a:r>
-          </a:p>
-        </p:txBody>
-      </p:sp>
-      <p:sp>
-        <p:nvSpPr>
-          <p:cNvPr id="17" name="TextBox 16"/>
-          <p:cNvSpPr txBox="1"/>
-          <p:nvPr/>
-        </p:nvSpPr>
-        <p:spPr>
-          <a:xfrm>
-            <a:off x="1188720" y="3536899"/>
-            <a:ext cx="10271455" cy="744321"/>
-          </a:xfrm>
-          <a:prstGeom prst="rect">
-            <a:avLst/>
-          </a:prstGeom>
-          <a:noFill/>
-        </p:spPr>
-        <p:txBody>
-          <a:bodyPr wrap="square" anchor="ctr"/>
-          <a:lstStyle/>
-          <a:p>
-            <a:r>
-              <a:rPr sz="1500" b="1" i="0">
-                <a:solidFill>
-                  <a:srgbClr val="095292"/>
-                </a:solidFill>
-                <a:latin typeface="Calibri"/>
-              </a:rPr>
-              <a:t>3 · Actores</a:t>
+              <a:t>–   </a:t>
+            </a:r>
+            <a:r>
+              <a:rPr sz="2000" b="1" i="0">
+                <a:solidFill>
+                  <a:srgbClr val="333333"/>
+                </a:solidFill>
+                <a:latin typeface="Calibri"/>
+              </a:rPr>
+              <a:t>2 · Frontera:</a:t>
+            </a:r>
+            <a:r>
+              <a:rPr sz="2000" b="0" i="0">
+                <a:solidFill>
+                  <a:srgbClr val="333333"/>
+                </a:solidFill>
+                <a:latin typeface="Calibri"/>
+              </a:rPr>
+              <a:t> Dentro: el semáforo, la esquina y quienes la cruzan.</a:t>
             </a:r>
           </a:p>
           <a:p>
             <a:pPr>
-              <a:spcBef>
-                <a:spcPts val="200"/>
-              </a:spcBef>
+              <a:spcAft>
+                <a:spcPts val="800"/>
+              </a:spcAft>
             </a:pPr>
             <a:r>
-              <a:rPr sz="1300" b="0" i="0">
+              <a:rPr sz="2000" b="0" i="0">
                 <a:solidFill>
                   <a:srgbClr val="333333"/>
                 </a:solidFill>
                 <a:latin typeface="Calibri"/>
               </a:rPr>
-              <a:t>Conductores, peatones, el agente de tránsito y el vecino que vive en la esquina y aguanta el ruido.</a:t>
-            </a:r>
-          </a:p>
-        </p:txBody>
-      </p:sp>
-      <p:sp>
-        <p:nvSpPr>
-          <p:cNvPr id="18" name="Rounded Rectangle 17"/>
-          <p:cNvSpPr/>
-          <p:nvPr/>
-        </p:nvSpPr>
-        <p:spPr>
-          <a:xfrm>
-            <a:off x="457200" y="4445812"/>
-            <a:ext cx="11277295" cy="908913"/>
-          </a:xfrm>
-          <a:prstGeom prst="roundRect">
-            <a:avLst>
-              <a:gd name="adj" fmla="val 12000"/>
-            </a:avLst>
-          </a:prstGeom>
-          <a:solidFill>
-            <a:srgbClr val="E8F4FA"/>
-          </a:solidFill>
-          <a:ln>
-            <a:noFill/>
-          </a:ln>
-        </p:spPr>
-        <p:style>
-          <a:lnRef idx="1">
-            <a:schemeClr val="accent1"/>
-          </a:lnRef>
-          <a:fillRef idx="3">
-            <a:schemeClr val="accent1"/>
-          </a:fillRef>
-          <a:effectRef idx="2">
-            <a:schemeClr val="accent1"/>
-          </a:effectRef>
-          <a:fontRef idx="minor">
-            <a:schemeClr val="lt1"/>
-          </a:fontRef>
-        </p:style>
-        <p:txBody>
-          <a:bodyPr rtlCol="0" anchor="ctr"/>
-          <a:lstStyle/>
-          <a:p>
-            <a:pPr algn="ctr"/>
-          </a:p>
-        </p:txBody>
-      </p:sp>
-      <p:sp>
-        <p:nvSpPr>
-          <p:cNvPr id="19" name="Rounded Rectangle 18"/>
-          <p:cNvSpPr/>
-          <p:nvPr/>
-        </p:nvSpPr>
-        <p:spPr>
-          <a:xfrm>
-            <a:off x="594360" y="4680813"/>
-            <a:ext cx="438912" cy="438912"/>
-          </a:xfrm>
-          <a:prstGeom prst="roundRect">
-            <a:avLst>
-              <a:gd name="adj" fmla="val 12000"/>
-            </a:avLst>
-          </a:prstGeom>
-          <a:solidFill>
-            <a:srgbClr val="095292"/>
-          </a:solidFill>
-          <a:ln>
-            <a:noFill/>
-          </a:ln>
-        </p:spPr>
-        <p:style>
-          <a:lnRef idx="1">
-            <a:schemeClr val="accent1"/>
-          </a:lnRef>
-          <a:fillRef idx="3">
-            <a:schemeClr val="accent1"/>
-          </a:fillRef>
-          <a:effectRef idx="2">
-            <a:schemeClr val="accent1"/>
-          </a:effectRef>
-          <a:fontRef idx="minor">
-            <a:schemeClr val="lt1"/>
-          </a:fontRef>
-        </p:style>
-        <p:txBody>
-          <a:bodyPr rtlCol="0" anchor="ctr"/>
-          <a:lstStyle/>
-          <a:p>
-            <a:pPr algn="ctr"/>
+              <a:t>–   </a:t>
+            </a:r>
+            <a:r>
+              <a:rPr sz="2000" b="1" i="0">
+                <a:solidFill>
+                  <a:srgbClr val="333333"/>
+                </a:solidFill>
+                <a:latin typeface="Calibri"/>
+              </a:rPr>
+              <a:t>3 · Actores:</a:t>
+            </a:r>
+            <a:r>
+              <a:rPr sz="2000" b="0" i="0">
+                <a:solidFill>
+                  <a:srgbClr val="333333"/>
+                </a:solidFill>
+                <a:latin typeface="Calibri"/>
+              </a:rPr>
+              <a:t> Conductores, peatones, el agente de tránsito y el vecino que vive en la esquina y aguanta el ruido.</a:t>
+            </a:r>
+          </a:p>
+          <a:p>
+            <a:pPr>
+              <a:spcAft>
+                <a:spcPts val="800"/>
+              </a:spcAft>
+            </a:pPr>
+            <a:r>
+              <a:rPr sz="2000" b="0" i="0">
+                <a:solidFill>
+                  <a:srgbClr val="333333"/>
+                </a:solidFill>
+                <a:latin typeface="Calibri"/>
+              </a:rPr>
+              <a:t>–   </a:t>
+            </a:r>
+            <a:r>
+              <a:rPr sz="2000" b="1" i="0">
+                <a:solidFill>
+                  <a:srgbClr val="333333"/>
+                </a:solidFill>
+                <a:latin typeface="Calibri"/>
+              </a:rPr>
+              <a:t>4 · Seguir una entrada:</a:t>
+            </a:r>
+            <a:r>
+              <a:rPr sz="2000" b="0" i="0">
+                <a:solidFill>
+                  <a:srgbClr val="333333"/>
+                </a:solidFill>
+                <a:latin typeface="Calibri"/>
+              </a:rPr>
+              <a:t> Un peatón llega a las 6 p. m. Espera 90 segundos. ¿Es mucho? Depende de cuántos carros pasan.</a:t>
+            </a:r>
           </a:p>
         </p:txBody>
       </p:sp>
       <p:sp>
         <p:nvSpPr>
           <p:cNvPr id="20" name="TextBox 19"/>
-          <p:cNvSpPr txBox="1"/>
-          <p:nvPr/>
-        </p:nvSpPr>
-        <p:spPr>
-          <a:xfrm>
-            <a:off x="594360" y="4680813"/>
-            <a:ext cx="438912" cy="438912"/>
-          </a:xfrm>
-          <a:prstGeom prst="rect">
-            <a:avLst/>
-          </a:prstGeom>
-          <a:noFill/>
-        </p:spPr>
-        <p:txBody>
-          <a:bodyPr wrap="square" anchor="ctr"/>
-          <a:lstStyle/>
-          <a:p>
-            <a:pPr algn="ctr"/>
-            <a:r>
-              <a:rPr sz="1600" b="1" i="0">
-                <a:solidFill>
-                  <a:srgbClr val="FFFFFF"/>
-                </a:solidFill>
-                <a:latin typeface="Calibri"/>
-              </a:rPr>
-              <a:t>4</a:t>
-            </a:r>
-          </a:p>
-        </p:txBody>
-      </p:sp>
-      <p:sp>
-        <p:nvSpPr>
-          <p:cNvPr id="21" name="TextBox 20"/>
-          <p:cNvSpPr txBox="1"/>
-          <p:nvPr/>
-        </p:nvSpPr>
-        <p:spPr>
-          <a:xfrm>
-            <a:off x="1188720" y="4537252"/>
-            <a:ext cx="10271455" cy="744321"/>
-          </a:xfrm>
-          <a:prstGeom prst="rect">
-            <a:avLst/>
-          </a:prstGeom>
-          <a:noFill/>
-        </p:spPr>
-        <p:txBody>
-          <a:bodyPr wrap="square" anchor="ctr"/>
-          <a:lstStyle/>
-          <a:p>
-            <a:r>
-              <a:rPr sz="1500" b="1" i="0">
-                <a:solidFill>
-                  <a:srgbClr val="095292"/>
-                </a:solidFill>
-                <a:latin typeface="Calibri"/>
-              </a:rPr>
-              <a:t>4 · Seguir una entrada</a:t>
-            </a:r>
-          </a:p>
-          <a:p>
-            <a:pPr>
-              <a:spcBef>
-                <a:spcPts val="200"/>
-              </a:spcBef>
-            </a:pPr>
-            <a:r>
-              <a:rPr sz="1300" b="0" i="0">
-                <a:solidFill>
-                  <a:srgbClr val="333333"/>
-                </a:solidFill>
-                <a:latin typeface="Calibri"/>
-              </a:rPr>
-              <a:t>Un peatón llega a las 6 p. m. Espera 90 segundos. ¿Es mucho? Depende de cuántos carros pasan.</a:t>
-            </a:r>
-          </a:p>
-        </p:txBody>
-      </p:sp>
-      <p:sp>
-        <p:nvSpPr>
-          <p:cNvPr id="22" name="Rounded Rectangle 21"/>
-          <p:cNvSpPr/>
-          <p:nvPr/>
-        </p:nvSpPr>
-        <p:spPr>
-          <a:xfrm>
-            <a:off x="457200" y="5446166"/>
-            <a:ext cx="11277295" cy="908913"/>
-          </a:xfrm>
-          <a:prstGeom prst="roundRect">
-            <a:avLst>
-              <a:gd name="adj" fmla="val 12000"/>
-            </a:avLst>
-          </a:prstGeom>
-          <a:solidFill>
-            <a:srgbClr val="F2F2F2"/>
-          </a:solidFill>
-          <a:ln>
-            <a:noFill/>
-          </a:ln>
-        </p:spPr>
-        <p:style>
-          <a:lnRef idx="1">
-            <a:schemeClr val="accent1"/>
-          </a:lnRef>
-          <a:fillRef idx="3">
-            <a:schemeClr val="accent1"/>
-          </a:fillRef>
-          <a:effectRef idx="2">
-            <a:schemeClr val="accent1"/>
-          </a:effectRef>
-          <a:fontRef idx="minor">
-            <a:schemeClr val="lt1"/>
-          </a:fontRef>
-        </p:style>
-        <p:txBody>
-          <a:bodyPr rtlCol="0" anchor="ctr"/>
-          <a:lstStyle/>
-          <a:p>
-            <a:pPr algn="ctr"/>
-          </a:p>
-        </p:txBody>
-      </p:sp>
-      <p:sp>
-        <p:nvSpPr>
-          <p:cNvPr id="23" name="Rounded Rectangle 22"/>
-          <p:cNvSpPr/>
-          <p:nvPr/>
-        </p:nvSpPr>
-        <p:spPr>
-          <a:xfrm>
-            <a:off x="594360" y="5681167"/>
-            <a:ext cx="438912" cy="438912"/>
-          </a:xfrm>
-          <a:prstGeom prst="roundRect">
-            <a:avLst>
-              <a:gd name="adj" fmla="val 12000"/>
-            </a:avLst>
-          </a:prstGeom>
-          <a:solidFill>
-            <a:srgbClr val="095292"/>
-          </a:solidFill>
-          <a:ln>
-            <a:noFill/>
-          </a:ln>
-        </p:spPr>
-        <p:style>
-          <a:lnRef idx="1">
-            <a:schemeClr val="accent1"/>
-          </a:lnRef>
-          <a:fillRef idx="3">
-            <a:schemeClr val="accent1"/>
-          </a:fillRef>
-          <a:effectRef idx="2">
-            <a:schemeClr val="accent1"/>
-          </a:effectRef>
-          <a:fontRef idx="minor">
-            <a:schemeClr val="lt1"/>
-          </a:fontRef>
-        </p:style>
-        <p:txBody>
-          <a:bodyPr rtlCol="0" anchor="ctr"/>
-          <a:lstStyle/>
-          <a:p>
-            <a:pPr algn="ctr"/>
-          </a:p>
-        </p:txBody>
-      </p:sp>
-      <p:sp>
-        <p:nvSpPr>
-          <p:cNvPr id="24" name="TextBox 23"/>
-          <p:cNvSpPr txBox="1"/>
-          <p:nvPr/>
-        </p:nvSpPr>
-        <p:spPr>
-          <a:xfrm>
-            <a:off x="594360" y="5681167"/>
-            <a:ext cx="438912" cy="438912"/>
-          </a:xfrm>
-          <a:prstGeom prst="rect">
-            <a:avLst/>
-          </a:prstGeom>
-          <a:noFill/>
-        </p:spPr>
-        <p:txBody>
-          <a:bodyPr wrap="square" anchor="ctr"/>
-          <a:lstStyle/>
-          <a:p>
-            <a:pPr algn="ctr"/>
-            <a:r>
-              <a:rPr sz="1600" b="1" i="0">
-                <a:solidFill>
-                  <a:srgbClr val="FFFFFF"/>
-                </a:solidFill>
-                <a:latin typeface="Calibri"/>
-              </a:rPr>
-              <a:t>5</a:t>
-            </a:r>
-          </a:p>
-        </p:txBody>
-      </p:sp>
-      <p:sp>
-        <p:nvSpPr>
-          <p:cNvPr id="25" name="TextBox 24"/>
-          <p:cNvSpPr txBox="1"/>
-          <p:nvPr/>
-        </p:nvSpPr>
-        <p:spPr>
-          <a:xfrm>
-            <a:off x="1188720" y="5537606"/>
-            <a:ext cx="10271455" cy="744321"/>
-          </a:xfrm>
-          <a:prstGeom prst="rect">
-            <a:avLst/>
-          </a:prstGeom>
-          <a:noFill/>
-        </p:spPr>
-        <p:txBody>
-          <a:bodyPr wrap="square" anchor="ctr"/>
-          <a:lstStyle/>
-          <a:p>
-            <a:r>
-              <a:rPr sz="1500" b="1" i="0">
-                <a:solidFill>
-                  <a:srgbClr val="095292"/>
-                </a:solidFill>
-                <a:latin typeface="Calibri"/>
-              </a:rPr>
-              <a:t>5 · Retroalimentación</a:t>
-            </a:r>
-          </a:p>
-          <a:p>
-            <a:pPr>
-              <a:spcBef>
-                <a:spcPts val="200"/>
-              </a:spcBef>
-            </a:pPr>
-            <a:r>
-              <a:rPr sz="1300" b="0" i="0">
-                <a:solidFill>
-                  <a:srgbClr val="333333"/>
-                </a:solidFill>
-                <a:latin typeface="Calibri"/>
-              </a:rPr>
-              <a:t>¿Cómo se entera el semáforo de que hay trancón? Casi nunca se entera: repite el mismo ciclo todo el día.</a:t>
-            </a:r>
-          </a:p>
-        </p:txBody>
-      </p:sp>
-      <p:sp>
-        <p:nvSpPr>
-          <p:cNvPr id="26" name="TextBox 25"/>
           <p:cNvSpPr txBox="1"/>
           <p:nvPr/>
         </p:nvSpPr>
@@ -7913,6 +7393,195 @@
   <p:clrMapOvr>
     <a:masterClrMapping/>
   </p:clrMapOvr>
+  <p:timing>
+    <p:tnLst>
+      <p:par>
+        <p:cTn id="1" dur="indefinite" restart="never" nodeType="tmRoot">
+          <p:childTnLst>
+            <p:seq concurrent="1" nextAc="seek">
+              <p:cTn id="2" dur="indefinite" nodeType="mainSeq">
+                <p:childTnLst>
+                  <p:par>
+                    <p:cTn id="3" fill="hold">
+                      <p:stCondLst>
+                        <p:cond delay="indefinite"/>
+                      </p:stCondLst>
+                      <p:childTnLst>
+                        <p:par>
+                          <p:cTn id="4" fill="hold">
+                            <p:stCondLst>
+                              <p:cond delay="0"/>
+                            </p:stCondLst>
+                            <p:childTnLst>
+                              <p:par>
+                                <p:cTn id="5" presetID="10" presetClass="entr" presetSubtype="0" fill="hold" nodeType="clickEffect">
+                                  <p:stCondLst>
+                                    <p:cond delay="0"/>
+                                  </p:stCondLst>
+                                  <p:childTnLst>
+                                    <p:set>
+                                      <p:cBhvr>
+                                        <p:cTn id="6" dur="1" fill="hold">
+                                          <p:stCondLst>
+                                            <p:cond delay="0"/>
+                                          </p:stCondLst>
+                                        </p:cTn>
+                                        <p:tgtEl>
+                                          <p:spTgt spid="8"/>
+                                        </p:tgtEl>
+                                        <p:attrNameLst>
+                                          <p:attrName>style.visibility</p:attrName>
+                                        </p:attrNameLst>
+                                      </p:cBhvr>
+                                      <p:to>
+                                        <p:strVal val="visible"/>
+                                      </p:to>
+                                    </p:set>
+                                    <p:animEffect transition="in" filter="fade">
+                                      <p:cBhvr>
+                                        <p:cTn id="7" dur="450"/>
+                                        <p:tgtEl>
+                                          <p:spTgt spid="8"/>
+                                        </p:tgtEl>
+                                      </p:cBhvr>
+                                    </p:animEffect>
+                                  </p:childTnLst>
+                                </p:cTn>
+                              </p:par>
+                            </p:childTnLst>
+                          </p:cTn>
+                        </p:par>
+                      </p:childTnLst>
+                    </p:cTn>
+                  </p:par>
+                  <p:par>
+                    <p:cTn id="8" fill="hold">
+                      <p:stCondLst>
+                        <p:cond delay="indefinite"/>
+                      </p:stCondLst>
+                      <p:childTnLst>
+                        <p:par>
+                          <p:cTn id="9" fill="hold">
+                            <p:stCondLst>
+                              <p:cond delay="0"/>
+                            </p:stCondLst>
+                            <p:childTnLst>
+                              <p:par>
+                                <p:cTn id="10" presetID="10" presetClass="entr" presetSubtype="0" fill="hold" nodeType="clickEffect">
+                                  <p:stCondLst>
+                                    <p:cond delay="0"/>
+                                  </p:stCondLst>
+                                  <p:childTnLst>
+                                    <p:set>
+                                      <p:cBhvr>
+                                        <p:cTn id="11" dur="1" fill="hold">
+                                          <p:stCondLst>
+                                            <p:cond delay="0"/>
+                                          </p:stCondLst>
+                                        </p:cTn>
+                                        <p:tgtEl>
+                                          <p:spTgt spid="9"/>
+                                        </p:tgtEl>
+                                        <p:attrNameLst>
+                                          <p:attrName>style.visibility</p:attrName>
+                                        </p:attrNameLst>
+                                      </p:cBhvr>
+                                      <p:to>
+                                        <p:strVal val="visible"/>
+                                      </p:to>
+                                    </p:set>
+                                    <p:animEffect transition="in" filter="fade">
+                                      <p:cBhvr>
+                                        <p:cTn id="12" dur="450"/>
+                                        <p:tgtEl>
+                                          <p:spTgt spid="9"/>
+                                        </p:tgtEl>
+                                      </p:cBhvr>
+                                    </p:animEffect>
+                                  </p:childTnLst>
+                                </p:cTn>
+                              </p:par>
+                            </p:childTnLst>
+                          </p:cTn>
+                        </p:par>
+                      </p:childTnLst>
+                    </p:cTn>
+                  </p:par>
+                  <p:par>
+                    <p:cTn id="13" fill="hold">
+                      <p:stCondLst>
+                        <p:cond delay="indefinite"/>
+                      </p:stCondLst>
+                      <p:childTnLst>
+                        <p:par>
+                          <p:cTn id="14" fill="hold">
+                            <p:stCondLst>
+                              <p:cond delay="0"/>
+                            </p:stCondLst>
+                            <p:childTnLst>
+                              <p:par>
+                                <p:cTn id="15" presetID="10" presetClass="entr" presetSubtype="0" fill="hold" nodeType="clickEffect">
+                                  <p:stCondLst>
+                                    <p:cond delay="0"/>
+                                  </p:stCondLst>
+                                  <p:childTnLst>
+                                    <p:set>
+                                      <p:cBhvr>
+                                        <p:cTn id="16" dur="1" fill="hold">
+                                          <p:stCondLst>
+                                            <p:cond delay="0"/>
+                                          </p:stCondLst>
+                                        </p:cTn>
+                                        <p:tgtEl>
+                                          <p:spTgt spid="10"/>
+                                        </p:tgtEl>
+                                        <p:attrNameLst>
+                                          <p:attrName>style.visibility</p:attrName>
+                                        </p:attrNameLst>
+                                      </p:cBhvr>
+                                      <p:to>
+                                        <p:strVal val="visible"/>
+                                      </p:to>
+                                    </p:set>
+                                    <p:animEffect transition="in" filter="fade">
+                                      <p:cBhvr>
+                                        <p:cTn id="17" dur="450"/>
+                                        <p:tgtEl>
+                                          <p:spTgt spid="10"/>
+                                        </p:tgtEl>
+                                      </p:cBhvr>
+                                    </p:animEffect>
+                                  </p:childTnLst>
+                                </p:cTn>
+                              </p:par>
+                            </p:childTnLst>
+                          </p:cTn>
+                        </p:par>
+                      </p:childTnLst>
+                    </p:cTn>
+                  </p:par>
+                </p:childTnLst>
+              </p:cTn>
+              <p:prevCondLst>
+                <p:cond evt="onPrev" delay="0">
+                  <p:tgtEl>
+                    <p:sldTgt/>
+                  </p:tgtEl>
+                </p:cond>
+              </p:prevCondLst>
+              <p:nextCondLst>
+                <p:cond evt="onNext" delay="0">
+                  <p:tgtEl>
+                    <p:sldTgt/>
+                  </p:tgtEl>
+                </p:cond>
+              </p:nextCondLst>
+            </p:seq>
+          </p:childTnLst>
+        </p:cTn>
+      </p:par>
+    </p:tnLst>
+  </p:timing>
 </p:sld>
 </file>
 
@@ -9798,14 +9467,118 @@
       </p:sp>
       <p:sp>
         <p:nvSpPr>
-          <p:cNvPr id="5" name="TextBox 4"/>
+          <p:cNvPr id="5" name="Rounded Rectangle 4"/>
+          <p:cNvSpPr/>
+          <p:nvPr/>
+        </p:nvSpPr>
+        <p:spPr>
+          <a:xfrm>
+            <a:off x="5797149" y="1573813"/>
+            <a:ext cx="6010497" cy="4057845"/>
+          </a:xfrm>
+          <a:prstGeom prst="roundRect">
+            <a:avLst>
+              <a:gd name="adj" fmla="val 4000"/>
+            </a:avLst>
+          </a:prstGeom>
+          <a:solidFill>
+            <a:srgbClr val="E8EEF4"/>
+          </a:solidFill>
+          <a:ln>
+            <a:noFill/>
+          </a:ln>
+        </p:spPr>
+        <p:style>
+          <a:lnRef idx="1">
+            <a:schemeClr val="accent1"/>
+          </a:lnRef>
+          <a:fillRef idx="3">
+            <a:schemeClr val="accent1"/>
+          </a:fillRef>
+          <a:effectRef idx="2">
+            <a:schemeClr val="accent1"/>
+          </a:effectRef>
+          <a:fontRef idx="minor">
+            <a:schemeClr val="lt1"/>
+          </a:fontRef>
+        </p:style>
+        <p:txBody>
+          <a:bodyPr rtlCol="0" anchor="ctr"/>
+          <a:lstStyle/>
+          <a:p>
+            <a:pPr algn="ctr"/>
+          </a:p>
+        </p:txBody>
+      </p:sp>
+      <p:pic>
+        <p:nvPicPr>
+          <p:cNvPr id="6" name="Picture 5" descr="students-learning-laptops-classroom.jpg"/>
+          <p:cNvPicPr>
+            <a:picLocks noChangeAspect="1"/>
+          </p:cNvPicPr>
+          <p:nvPr/>
+        </p:nvPicPr>
+        <p:blipFill>
+          <a:blip r:embed="rId2"/>
+          <a:stretch>
+            <a:fillRect/>
+          </a:stretch>
+        </p:blipFill>
+        <p:spPr>
+          <a:xfrm>
+            <a:off x="5870301" y="1646965"/>
+            <a:ext cx="5864193" cy="3911541"/>
+          </a:xfrm>
+          <a:prstGeom prst="rect">
+            <a:avLst/>
+          </a:prstGeom>
+        </p:spPr>
+      </p:pic>
+      <p:sp>
+        <p:nvSpPr>
+          <p:cNvPr id="7" name="TextBox 6"/>
           <p:cNvSpPr txBox="1"/>
           <p:nvPr/>
         </p:nvSpPr>
         <p:spPr>
           <a:xfrm>
-            <a:off x="457200" y="1170432"/>
-            <a:ext cx="11277295" cy="5230368"/>
+            <a:off x="5870301" y="5961888"/>
+            <a:ext cx="5864193" cy="320040"/>
+          </a:xfrm>
+          <a:prstGeom prst="rect">
+            <a:avLst/>
+          </a:prstGeom>
+          <a:noFill/>
+        </p:spPr>
+        <p:txBody>
+          <a:bodyPr wrap="square">
+            <a:spAutoFit/>
+          </a:bodyPr>
+          <a:lstStyle/>
+          <a:p>
+            <a:pPr algn="ctr"/>
+            <a:r>
+              <a:rPr sz="1100" b="0" i="1">
+                <a:solidFill>
+                  <a:srgbClr val="666666"/>
+                </a:solidFill>
+                <a:latin typeface="Calibri"/>
+              </a:rPr>
+              <a:t>Foto: Mikhail Nilov · Pexels</a:t>
+            </a:r>
+          </a:p>
+        </p:txBody>
+      </p:sp>
+      <p:sp>
+        <p:nvSpPr>
+          <p:cNvPr id="8" name="TextBox 7"/>
+          <p:cNvSpPr txBox="1"/>
+          <p:nvPr/>
+        </p:nvSpPr>
+        <p:spPr>
+          <a:xfrm>
+            <a:off x="457200" y="1353312"/>
+            <a:ext cx="5093061" cy="5047488"/>
           </a:xfrm>
           <a:prstGeom prst="rect">
             <a:avLst/>
@@ -9975,7 +9748,7 @@
       </p:sp>
       <p:sp>
         <p:nvSpPr>
-          <p:cNvPr id="6" name="TextBox 5"/>
+          <p:cNvPr id="9" name="TextBox 8"/>
           <p:cNvSpPr txBox="1"/>
           <p:nvPr/>
         </p:nvSpPr>
@@ -10490,16 +10263,16 @@
         </p:nvSpPr>
         <p:spPr>
           <a:xfrm>
-            <a:off x="457200" y="1444752"/>
-            <a:ext cx="11277295" cy="908913"/>
+            <a:off x="5934611" y="1399031"/>
+            <a:ext cx="5735574" cy="4617720"/>
           </a:xfrm>
           <a:prstGeom prst="roundRect">
             <a:avLst>
-              <a:gd name="adj" fmla="val 12000"/>
+              <a:gd name="adj" fmla="val 4000"/>
             </a:avLst>
           </a:prstGeom>
           <a:solidFill>
-            <a:srgbClr val="F2F2F2"/>
+            <a:srgbClr val="E8EEF4"/>
           </a:solidFill>
           <a:ln>
             <a:noFill/>
@@ -10527,61 +10300,147 @@
           </a:p>
         </p:txBody>
       </p:sp>
-      <p:sp>
-        <p:nvSpPr>
-          <p:cNvPr id="7" name="Rounded Rectangle 6"/>
-          <p:cNvSpPr/>
-          <p:nvPr/>
-        </p:nvSpPr>
-        <p:spPr>
-          <a:xfrm>
-            <a:off x="594360" y="1679752"/>
-            <a:ext cx="438912" cy="438912"/>
-          </a:xfrm>
-          <a:prstGeom prst="roundRect">
-            <a:avLst>
-              <a:gd name="adj" fmla="val 12000"/>
-            </a:avLst>
-          </a:prstGeom>
-          <a:solidFill>
-            <a:srgbClr val="095292"/>
-          </a:solidFill>
-          <a:ln>
-            <a:noFill/>
-          </a:ln>
-        </p:spPr>
-        <p:style>
-          <a:lnRef idx="1">
-            <a:schemeClr val="accent1"/>
-          </a:lnRef>
-          <a:fillRef idx="3">
-            <a:schemeClr val="accent1"/>
-          </a:fillRef>
-          <a:effectRef idx="2">
-            <a:schemeClr val="accent1"/>
-          </a:effectRef>
-          <a:fontRef idx="minor">
-            <a:schemeClr val="lt1"/>
-          </a:fontRef>
-        </p:style>
-        <p:txBody>
-          <a:bodyPr rtlCol="0" anchor="ctr"/>
+      <p:pic>
+        <p:nvPicPr>
+          <p:cNvPr id="7" name="Picture 6" descr="cinco-elementos-paso1.png"/>
+          <p:cNvPicPr>
+            <a:picLocks noChangeAspect="1"/>
+          </p:cNvPicPr>
+          <p:nvPr/>
+        </p:nvPicPr>
+        <p:blipFill>
+          <a:blip r:embed="rId2"/>
+          <a:stretch>
+            <a:fillRect/>
+          </a:stretch>
+        </p:blipFill>
+        <p:spPr>
+          <a:xfrm>
+            <a:off x="6007763" y="1472184"/>
+            <a:ext cx="5589270" cy="4471416"/>
+          </a:xfrm>
+          <a:prstGeom prst="rect">
+            <a:avLst/>
+          </a:prstGeom>
+        </p:spPr>
+      </p:pic>
+      <p:pic>
+        <p:nvPicPr>
+          <p:cNvPr id="8" name="Picture 7" descr="cinco-elementos-paso2.png"/>
+          <p:cNvPicPr>
+            <a:picLocks noChangeAspect="1"/>
+          </p:cNvPicPr>
+          <p:nvPr/>
+        </p:nvPicPr>
+        <p:blipFill>
+          <a:blip r:embed="rId3"/>
+          <a:stretch>
+            <a:fillRect/>
+          </a:stretch>
+        </p:blipFill>
+        <p:spPr>
+          <a:xfrm>
+            <a:off x="6007763" y="1472184"/>
+            <a:ext cx="5589270" cy="4471416"/>
+          </a:xfrm>
+          <a:prstGeom prst="rect">
+            <a:avLst/>
+          </a:prstGeom>
+        </p:spPr>
+      </p:pic>
+      <p:pic>
+        <p:nvPicPr>
+          <p:cNvPr id="9" name="Picture 8" descr="cinco-elementos-paso3.png"/>
+          <p:cNvPicPr>
+            <a:picLocks noChangeAspect="1"/>
+          </p:cNvPicPr>
+          <p:nvPr/>
+        </p:nvPicPr>
+        <p:blipFill>
+          <a:blip r:embed="rId4"/>
+          <a:stretch>
+            <a:fillRect/>
+          </a:stretch>
+        </p:blipFill>
+        <p:spPr>
+          <a:xfrm>
+            <a:off x="6007763" y="1472184"/>
+            <a:ext cx="5589270" cy="4471416"/>
+          </a:xfrm>
+          <a:prstGeom prst="rect">
+            <a:avLst/>
+          </a:prstGeom>
+        </p:spPr>
+      </p:pic>
+      <p:pic>
+        <p:nvPicPr>
+          <p:cNvPr id="10" name="Picture 9" descr="cinco-elementos-paso4.png"/>
+          <p:cNvPicPr>
+            <a:picLocks noChangeAspect="1"/>
+          </p:cNvPicPr>
+          <p:nvPr/>
+        </p:nvPicPr>
+        <p:blipFill>
+          <a:blip r:embed="rId5"/>
+          <a:stretch>
+            <a:fillRect/>
+          </a:stretch>
+        </p:blipFill>
+        <p:spPr>
+          <a:xfrm>
+            <a:off x="6007763" y="1472184"/>
+            <a:ext cx="5589270" cy="4471416"/>
+          </a:xfrm>
+          <a:prstGeom prst="rect">
+            <a:avLst/>
+          </a:prstGeom>
+        </p:spPr>
+      </p:pic>
+      <p:sp>
+        <p:nvSpPr>
+          <p:cNvPr id="18" name="TextBox 17"/>
+          <p:cNvSpPr txBox="1"/>
+          <p:nvPr/>
+        </p:nvSpPr>
+        <p:spPr>
+          <a:xfrm>
+            <a:off x="5870301" y="5961888"/>
+            <a:ext cx="5864193" cy="320040"/>
+          </a:xfrm>
+          <a:prstGeom prst="rect">
+            <a:avLst/>
+          </a:prstGeom>
+          <a:noFill/>
+        </p:spPr>
+        <p:txBody>
+          <a:bodyPr wrap="square">
+            <a:spAutoFit/>
+          </a:bodyPr>
           <a:lstStyle/>
           <a:p>
             <a:pPr algn="ctr"/>
-          </a:p>
-        </p:txBody>
-      </p:sp>
-      <p:sp>
-        <p:nvSpPr>
-          <p:cNvPr id="8" name="TextBox 7"/>
+            <a:r>
+              <a:rPr sz="1100" b="0" i="1">
+                <a:solidFill>
+                  <a:srgbClr val="666666"/>
+                </a:solidFill>
+                <a:latin typeface="Calibri"/>
+              </a:rPr>
+              <a:t>Clic para avanzar la animación</a:t>
+            </a:r>
+          </a:p>
+        </p:txBody>
+      </p:sp>
+      <p:sp>
+        <p:nvSpPr>
+          <p:cNvPr id="19" name="TextBox 18"/>
           <p:cNvSpPr txBox="1"/>
           <p:nvPr/>
         </p:nvSpPr>
         <p:spPr>
           <a:xfrm>
-            <a:off x="594360" y="1679752"/>
-            <a:ext cx="438912" cy="438912"/>
+            <a:off x="457200" y="1563624"/>
+            <a:ext cx="5093061" cy="4837176"/>
           </a:xfrm>
           <a:prstGeom prst="rect">
             <a:avLst/>
@@ -10589,766 +10448,160 @@
           <a:noFill/>
         </p:spPr>
         <p:txBody>
-          <a:bodyPr wrap="square" anchor="ctr"/>
-          <a:lstStyle/>
-          <a:p>
-            <a:pPr algn="ctr"/>
-            <a:r>
-              <a:rPr sz="1600" b="1" i="0">
-                <a:solidFill>
-                  <a:srgbClr val="FFFFFF"/>
-                </a:solidFill>
-                <a:latin typeface="Calibri"/>
-              </a:rPr>
-              <a:t>1</a:t>
-            </a:r>
-          </a:p>
-        </p:txBody>
-      </p:sp>
-      <p:sp>
-        <p:nvSpPr>
-          <p:cNvPr id="9" name="TextBox 8"/>
-          <p:cNvSpPr txBox="1"/>
-          <p:nvPr/>
-        </p:nvSpPr>
-        <p:spPr>
-          <a:xfrm>
-            <a:off x="1188720" y="1536192"/>
-            <a:ext cx="10271455" cy="744321"/>
-          </a:xfrm>
-          <a:prstGeom prst="rect">
-            <a:avLst/>
-          </a:prstGeom>
-          <a:noFill/>
-        </p:spPr>
-        <p:txBody>
-          <a:bodyPr wrap="square" anchor="ctr"/>
-          <a:lstStyle/>
-          <a:p>
-            <a:r>
-              <a:rPr sz="1500" b="1" i="0">
-                <a:solidFill>
-                  <a:srgbClr val="095292"/>
-                </a:solidFill>
-                <a:latin typeface="Calibri"/>
-              </a:rPr>
-              <a:t>ENTRADAS</a:t>
-            </a:r>
-          </a:p>
+          <a:bodyPr wrap="square">
+            <a:spAutoFit/>
+          </a:bodyPr>
+          <a:lstStyle/>
           <a:p>
             <a:pPr>
-              <a:spcBef>
-                <a:spcPts val="200"/>
-              </a:spcBef>
+              <a:spcAft>
+                <a:spcPts val="800"/>
+              </a:spcAft>
             </a:pPr>
             <a:r>
-              <a:rPr sz="1300" b="0" i="0">
+              <a:rPr sz="2000" b="0" i="0">
                 <a:solidFill>
                   <a:srgbClr val="333333"/>
                 </a:solidFill>
                 <a:latin typeface="Calibri"/>
               </a:rPr>
-              <a:t>Lo que llega: datos, dinero, personas, materiales</a:t>
-            </a:r>
-          </a:p>
-        </p:txBody>
-      </p:sp>
-      <p:sp>
-        <p:nvSpPr>
-          <p:cNvPr id="10" name="Rounded Rectangle 9"/>
-          <p:cNvSpPr/>
-          <p:nvPr/>
-        </p:nvSpPr>
-        <p:spPr>
-          <a:xfrm>
-            <a:off x="457200" y="2445105"/>
-            <a:ext cx="11277295" cy="908913"/>
-          </a:xfrm>
-          <a:prstGeom prst="roundRect">
-            <a:avLst>
-              <a:gd name="adj" fmla="val 12000"/>
-            </a:avLst>
-          </a:prstGeom>
-          <a:solidFill>
-            <a:srgbClr val="E8F4FA"/>
-          </a:solidFill>
-          <a:ln>
-            <a:noFill/>
-          </a:ln>
-        </p:spPr>
-        <p:style>
-          <a:lnRef idx="1">
-            <a:schemeClr val="accent1"/>
-          </a:lnRef>
-          <a:fillRef idx="3">
-            <a:schemeClr val="accent1"/>
-          </a:fillRef>
-          <a:effectRef idx="2">
-            <a:schemeClr val="accent1"/>
-          </a:effectRef>
-          <a:fontRef idx="minor">
-            <a:schemeClr val="lt1"/>
-          </a:fontRef>
-        </p:style>
-        <p:txBody>
-          <a:bodyPr rtlCol="0" anchor="ctr"/>
-          <a:lstStyle/>
-          <a:p>
-            <a:pPr algn="ctr"/>
-          </a:p>
-        </p:txBody>
-      </p:sp>
-      <p:sp>
-        <p:nvSpPr>
-          <p:cNvPr id="11" name="Rounded Rectangle 10"/>
-          <p:cNvSpPr/>
-          <p:nvPr/>
-        </p:nvSpPr>
-        <p:spPr>
-          <a:xfrm>
-            <a:off x="594360" y="2680106"/>
-            <a:ext cx="438912" cy="438912"/>
-          </a:xfrm>
-          <a:prstGeom prst="roundRect">
-            <a:avLst>
-              <a:gd name="adj" fmla="val 12000"/>
-            </a:avLst>
-          </a:prstGeom>
-          <a:solidFill>
-            <a:srgbClr val="095292"/>
-          </a:solidFill>
-          <a:ln>
-            <a:noFill/>
-          </a:ln>
-        </p:spPr>
-        <p:style>
-          <a:lnRef idx="1">
-            <a:schemeClr val="accent1"/>
-          </a:lnRef>
-          <a:fillRef idx="3">
-            <a:schemeClr val="accent1"/>
-          </a:fillRef>
-          <a:effectRef idx="2">
-            <a:schemeClr val="accent1"/>
-          </a:effectRef>
-          <a:fontRef idx="minor">
-            <a:schemeClr val="lt1"/>
-          </a:fontRef>
-        </p:style>
-        <p:txBody>
-          <a:bodyPr rtlCol="0" anchor="ctr"/>
-          <a:lstStyle/>
-          <a:p>
-            <a:pPr algn="ctr"/>
-          </a:p>
-        </p:txBody>
-      </p:sp>
-      <p:sp>
-        <p:nvSpPr>
-          <p:cNvPr id="12" name="TextBox 11"/>
-          <p:cNvSpPr txBox="1"/>
-          <p:nvPr/>
-        </p:nvSpPr>
-        <p:spPr>
-          <a:xfrm>
-            <a:off x="594360" y="2680106"/>
-            <a:ext cx="438912" cy="438912"/>
-          </a:xfrm>
-          <a:prstGeom prst="rect">
-            <a:avLst/>
-          </a:prstGeom>
-          <a:noFill/>
-        </p:spPr>
-        <p:txBody>
-          <a:bodyPr wrap="square" anchor="ctr"/>
-          <a:lstStyle/>
-          <a:p>
-            <a:pPr algn="ctr"/>
-            <a:r>
-              <a:rPr sz="1600" b="1" i="0">
-                <a:solidFill>
-                  <a:srgbClr val="FFFFFF"/>
-                </a:solidFill>
-                <a:latin typeface="Calibri"/>
-              </a:rPr>
-              <a:t>2</a:t>
-            </a:r>
-          </a:p>
-        </p:txBody>
-      </p:sp>
-      <p:sp>
-        <p:nvSpPr>
-          <p:cNvPr id="13" name="TextBox 12"/>
-          <p:cNvSpPr txBox="1"/>
-          <p:nvPr/>
-        </p:nvSpPr>
-        <p:spPr>
-          <a:xfrm>
-            <a:off x="1188720" y="2536545"/>
-            <a:ext cx="10271455" cy="744321"/>
-          </a:xfrm>
-          <a:prstGeom prst="rect">
-            <a:avLst/>
-          </a:prstGeom>
-          <a:noFill/>
-        </p:spPr>
-        <p:txBody>
-          <a:bodyPr wrap="square" anchor="ctr"/>
-          <a:lstStyle/>
-          <a:p>
-            <a:r>
-              <a:rPr sz="1500" b="1" i="0">
-                <a:solidFill>
-                  <a:srgbClr val="095292"/>
-                </a:solidFill>
-                <a:latin typeface="Calibri"/>
-              </a:rPr>
-              <a:t>PROCESO</a:t>
+              <a:t>–   </a:t>
+            </a:r>
+            <a:r>
+              <a:rPr sz="2000" b="1" i="0">
+                <a:solidFill>
+                  <a:srgbClr val="333333"/>
+                </a:solidFill>
+                <a:latin typeface="Calibri"/>
+              </a:rPr>
+              <a:t>ENTRADAS:</a:t>
+            </a:r>
+            <a:r>
+              <a:rPr sz="2000" b="0" i="0">
+                <a:solidFill>
+                  <a:srgbClr val="333333"/>
+                </a:solidFill>
+                <a:latin typeface="Calibri"/>
+              </a:rPr>
+              <a:t> Lo que llega: datos, dinero, personas, materiales</a:t>
             </a:r>
           </a:p>
           <a:p>
             <a:pPr>
-              <a:spcBef>
-                <a:spcPts val="200"/>
-              </a:spcBef>
+              <a:spcAft>
+                <a:spcPts val="800"/>
+              </a:spcAft>
             </a:pPr>
             <a:r>
-              <a:rPr sz="1300" b="0" i="0">
+              <a:rPr sz="2000" b="0" i="0">
                 <a:solidFill>
                   <a:srgbClr val="333333"/>
                 </a:solidFill>
                 <a:latin typeface="Calibri"/>
               </a:rPr>
-              <a:t>Lo que se hace con eso. Aquí vive el software, si hay. </a:t>
-            </a:r>
-            <a:r>
-              <a:rPr sz="1300" b="1" i="0">
+              <a:t>–   </a:t>
+            </a:r>
+            <a:r>
+              <a:rPr sz="2000" b="1" i="0">
                 <a:solidFill>
                   <a:srgbClr val="333333"/>
                 </a:solidFill>
                 <a:latin typeface="Calibri"/>
               </a:rPr>
+              <a:t>PROCESO:</a:t>
+            </a:r>
+            <a:r>
+              <a:rPr sz="2000" b="0" i="0">
+                <a:solidFill>
+                  <a:srgbClr val="333333"/>
+                </a:solidFill>
+                <a:latin typeface="Calibri"/>
+              </a:rPr>
+              <a:t> Lo que se hace con eso. Aquí vive el software, si hay. </a:t>
+            </a:r>
+            <a:r>
+              <a:rPr sz="2000" b="1" i="0">
+                <a:solidFill>
+                  <a:srgbClr val="333333"/>
+                </a:solidFill>
+                <a:latin typeface="Calibri"/>
+              </a:rPr>
               <a:t>Casi nunca es todo el sistema</a:t>
             </a:r>
           </a:p>
-        </p:txBody>
-      </p:sp>
-      <p:sp>
-        <p:nvSpPr>
-          <p:cNvPr id="14" name="Rounded Rectangle 13"/>
-          <p:cNvSpPr/>
-          <p:nvPr/>
-        </p:nvSpPr>
-        <p:spPr>
-          <a:xfrm>
-            <a:off x="457200" y="3445459"/>
-            <a:ext cx="11277295" cy="908913"/>
-          </a:xfrm>
-          <a:prstGeom prst="roundRect">
-            <a:avLst>
-              <a:gd name="adj" fmla="val 12000"/>
-            </a:avLst>
-          </a:prstGeom>
-          <a:solidFill>
-            <a:srgbClr val="F2F2F2"/>
-          </a:solidFill>
-          <a:ln>
-            <a:noFill/>
-          </a:ln>
-        </p:spPr>
-        <p:style>
-          <a:lnRef idx="1">
-            <a:schemeClr val="accent1"/>
-          </a:lnRef>
-          <a:fillRef idx="3">
-            <a:schemeClr val="accent1"/>
-          </a:fillRef>
-          <a:effectRef idx="2">
-            <a:schemeClr val="accent1"/>
-          </a:effectRef>
-          <a:fontRef idx="minor">
-            <a:schemeClr val="lt1"/>
-          </a:fontRef>
-        </p:style>
-        <p:txBody>
-          <a:bodyPr rtlCol="0" anchor="ctr"/>
-          <a:lstStyle/>
-          <a:p>
-            <a:pPr algn="ctr"/>
-          </a:p>
-        </p:txBody>
-      </p:sp>
-      <p:sp>
-        <p:nvSpPr>
-          <p:cNvPr id="15" name="Rounded Rectangle 14"/>
-          <p:cNvSpPr/>
-          <p:nvPr/>
-        </p:nvSpPr>
-        <p:spPr>
-          <a:xfrm>
-            <a:off x="594360" y="3680460"/>
-            <a:ext cx="438912" cy="438912"/>
-          </a:xfrm>
-          <a:prstGeom prst="roundRect">
-            <a:avLst>
-              <a:gd name="adj" fmla="val 12000"/>
-            </a:avLst>
-          </a:prstGeom>
-          <a:solidFill>
-            <a:srgbClr val="095292"/>
-          </a:solidFill>
-          <a:ln>
-            <a:noFill/>
-          </a:ln>
-        </p:spPr>
-        <p:style>
-          <a:lnRef idx="1">
-            <a:schemeClr val="accent1"/>
-          </a:lnRef>
-          <a:fillRef idx="3">
-            <a:schemeClr val="accent1"/>
-          </a:fillRef>
-          <a:effectRef idx="2">
-            <a:schemeClr val="accent1"/>
-          </a:effectRef>
-          <a:fontRef idx="minor">
-            <a:schemeClr val="lt1"/>
-          </a:fontRef>
-        </p:style>
-        <p:txBody>
-          <a:bodyPr rtlCol="0" anchor="ctr"/>
-          <a:lstStyle/>
-          <a:p>
-            <a:pPr algn="ctr"/>
-          </a:p>
-        </p:txBody>
-      </p:sp>
-      <p:sp>
-        <p:nvSpPr>
-          <p:cNvPr id="16" name="TextBox 15"/>
-          <p:cNvSpPr txBox="1"/>
-          <p:nvPr/>
-        </p:nvSpPr>
-        <p:spPr>
-          <a:xfrm>
-            <a:off x="594360" y="3680460"/>
-            <a:ext cx="438912" cy="438912"/>
-          </a:xfrm>
-          <a:prstGeom prst="rect">
-            <a:avLst/>
-          </a:prstGeom>
-          <a:noFill/>
-        </p:spPr>
-        <p:txBody>
-          <a:bodyPr wrap="square" anchor="ctr"/>
-          <a:lstStyle/>
-          <a:p>
-            <a:pPr algn="ctr"/>
-            <a:r>
-              <a:rPr sz="1600" b="1" i="0">
-                <a:solidFill>
-                  <a:srgbClr val="FFFFFF"/>
-                </a:solidFill>
-                <a:latin typeface="Calibri"/>
-              </a:rPr>
-              <a:t>3</a:t>
-            </a:r>
-          </a:p>
-        </p:txBody>
-      </p:sp>
-      <p:sp>
-        <p:nvSpPr>
-          <p:cNvPr id="17" name="TextBox 16"/>
-          <p:cNvSpPr txBox="1"/>
-          <p:nvPr/>
-        </p:nvSpPr>
-        <p:spPr>
-          <a:xfrm>
-            <a:off x="1188720" y="3536899"/>
-            <a:ext cx="10271455" cy="744321"/>
-          </a:xfrm>
-          <a:prstGeom prst="rect">
-            <a:avLst/>
-          </a:prstGeom>
-          <a:noFill/>
-        </p:spPr>
-        <p:txBody>
-          <a:bodyPr wrap="square" anchor="ctr"/>
-          <a:lstStyle/>
-          <a:p>
-            <a:r>
-              <a:rPr sz="1500" b="1" i="0">
-                <a:solidFill>
-                  <a:srgbClr val="095292"/>
-                </a:solidFill>
-                <a:latin typeface="Calibri"/>
-              </a:rPr>
-              <a:t>SALIDAS</a:t>
-            </a:r>
-          </a:p>
           <a:p>
             <a:pPr>
-              <a:spcBef>
-                <a:spcPts val="200"/>
-              </a:spcBef>
+              <a:spcAft>
+                <a:spcPts val="800"/>
+              </a:spcAft>
             </a:pPr>
             <a:r>
-              <a:rPr sz="1300" b="0" i="0">
+              <a:rPr sz="2000" b="0" i="0">
                 <a:solidFill>
                   <a:srgbClr val="333333"/>
                 </a:solidFill>
                 <a:latin typeface="Calibri"/>
               </a:rPr>
-              <a:t>Lo que produce: decisiones, documentos, servicio prestado</a:t>
-            </a:r>
-          </a:p>
-        </p:txBody>
-      </p:sp>
-      <p:sp>
-        <p:nvSpPr>
-          <p:cNvPr id="18" name="Rounded Rectangle 17"/>
-          <p:cNvSpPr/>
-          <p:nvPr/>
-        </p:nvSpPr>
-        <p:spPr>
-          <a:xfrm>
-            <a:off x="457200" y="4445812"/>
-            <a:ext cx="11277295" cy="908913"/>
-          </a:xfrm>
-          <a:prstGeom prst="roundRect">
-            <a:avLst>
-              <a:gd name="adj" fmla="val 12000"/>
-            </a:avLst>
-          </a:prstGeom>
-          <a:solidFill>
-            <a:srgbClr val="E8F4FA"/>
-          </a:solidFill>
-          <a:ln>
-            <a:noFill/>
-          </a:ln>
-        </p:spPr>
-        <p:style>
-          <a:lnRef idx="1">
-            <a:schemeClr val="accent1"/>
-          </a:lnRef>
-          <a:fillRef idx="3">
-            <a:schemeClr val="accent1"/>
-          </a:fillRef>
-          <a:effectRef idx="2">
-            <a:schemeClr val="accent1"/>
-          </a:effectRef>
-          <a:fontRef idx="minor">
-            <a:schemeClr val="lt1"/>
-          </a:fontRef>
-        </p:style>
-        <p:txBody>
-          <a:bodyPr rtlCol="0" anchor="ctr"/>
-          <a:lstStyle/>
-          <a:p>
-            <a:pPr algn="ctr"/>
-          </a:p>
-        </p:txBody>
-      </p:sp>
-      <p:sp>
-        <p:nvSpPr>
-          <p:cNvPr id="19" name="Rounded Rectangle 18"/>
-          <p:cNvSpPr/>
-          <p:nvPr/>
-        </p:nvSpPr>
-        <p:spPr>
-          <a:xfrm>
-            <a:off x="594360" y="4680813"/>
-            <a:ext cx="438912" cy="438912"/>
-          </a:xfrm>
-          <a:prstGeom prst="roundRect">
-            <a:avLst>
-              <a:gd name="adj" fmla="val 12000"/>
-            </a:avLst>
-          </a:prstGeom>
-          <a:solidFill>
-            <a:srgbClr val="095292"/>
-          </a:solidFill>
-          <a:ln>
-            <a:noFill/>
-          </a:ln>
-        </p:spPr>
-        <p:style>
-          <a:lnRef idx="1">
-            <a:schemeClr val="accent1"/>
-          </a:lnRef>
-          <a:fillRef idx="3">
-            <a:schemeClr val="accent1"/>
-          </a:fillRef>
-          <a:effectRef idx="2">
-            <a:schemeClr val="accent1"/>
-          </a:effectRef>
-          <a:fontRef idx="minor">
-            <a:schemeClr val="lt1"/>
-          </a:fontRef>
-        </p:style>
-        <p:txBody>
-          <a:bodyPr rtlCol="0" anchor="ctr"/>
-          <a:lstStyle/>
-          <a:p>
-            <a:pPr algn="ctr"/>
+              <a:t>–   </a:t>
+            </a:r>
+            <a:r>
+              <a:rPr sz="2000" b="1" i="0">
+                <a:solidFill>
+                  <a:srgbClr val="333333"/>
+                </a:solidFill>
+                <a:latin typeface="Calibri"/>
+              </a:rPr>
+              <a:t>SALIDAS:</a:t>
+            </a:r>
+            <a:r>
+              <a:rPr sz="2000" b="0" i="0">
+                <a:solidFill>
+                  <a:srgbClr val="333333"/>
+                </a:solidFill>
+                <a:latin typeface="Calibri"/>
+              </a:rPr>
+              <a:t> Lo que produce: decisiones, documentos, servicio prestado</a:t>
+            </a:r>
+          </a:p>
+          <a:p>
+            <a:pPr>
+              <a:spcAft>
+                <a:spcPts val="800"/>
+              </a:spcAft>
+            </a:pPr>
+            <a:r>
+              <a:rPr sz="2000" b="0" i="0">
+                <a:solidFill>
+                  <a:srgbClr val="333333"/>
+                </a:solidFill>
+                <a:latin typeface="Calibri"/>
+              </a:rPr>
+              <a:t>–   </a:t>
+            </a:r>
+            <a:r>
+              <a:rPr sz="2000" b="1" i="0">
+                <a:solidFill>
+                  <a:srgbClr val="333333"/>
+                </a:solidFill>
+                <a:latin typeface="Calibri"/>
+              </a:rPr>
+              <a:t>RETROALIMENTACIÓN:</a:t>
+            </a:r>
+            <a:r>
+              <a:rPr sz="2000" b="0" i="0">
+                <a:solidFill>
+                  <a:srgbClr val="333333"/>
+                </a:solidFill>
+                <a:latin typeface="Calibri"/>
+              </a:rPr>
+              <a:t> La salida vuelve como entrada y corrige el proceso</a:t>
+            </a:r>
           </a:p>
         </p:txBody>
       </p:sp>
       <p:sp>
         <p:nvSpPr>
           <p:cNvPr id="20" name="TextBox 19"/>
-          <p:cNvSpPr txBox="1"/>
-          <p:nvPr/>
-        </p:nvSpPr>
-        <p:spPr>
-          <a:xfrm>
-            <a:off x="594360" y="4680813"/>
-            <a:ext cx="438912" cy="438912"/>
-          </a:xfrm>
-          <a:prstGeom prst="rect">
-            <a:avLst/>
-          </a:prstGeom>
-          <a:noFill/>
-        </p:spPr>
-        <p:txBody>
-          <a:bodyPr wrap="square" anchor="ctr"/>
-          <a:lstStyle/>
-          <a:p>
-            <a:pPr algn="ctr"/>
-            <a:r>
-              <a:rPr sz="1600" b="1" i="0">
-                <a:solidFill>
-                  <a:srgbClr val="FFFFFF"/>
-                </a:solidFill>
-                <a:latin typeface="Calibri"/>
-              </a:rPr>
-              <a:t>4</a:t>
-            </a:r>
-          </a:p>
-        </p:txBody>
-      </p:sp>
-      <p:sp>
-        <p:nvSpPr>
-          <p:cNvPr id="21" name="TextBox 20"/>
-          <p:cNvSpPr txBox="1"/>
-          <p:nvPr/>
-        </p:nvSpPr>
-        <p:spPr>
-          <a:xfrm>
-            <a:off x="1188720" y="4537252"/>
-            <a:ext cx="10271455" cy="744321"/>
-          </a:xfrm>
-          <a:prstGeom prst="rect">
-            <a:avLst/>
-          </a:prstGeom>
-          <a:noFill/>
-        </p:spPr>
-        <p:txBody>
-          <a:bodyPr wrap="square" anchor="ctr"/>
-          <a:lstStyle/>
-          <a:p>
-            <a:r>
-              <a:rPr sz="1500" b="1" i="0">
-                <a:solidFill>
-                  <a:srgbClr val="095292"/>
-                </a:solidFill>
-                <a:latin typeface="Calibri"/>
-              </a:rPr>
-              <a:t>RETROALIMENTACIÓN</a:t>
-            </a:r>
-          </a:p>
-          <a:p>
-            <a:pPr>
-              <a:spcBef>
-                <a:spcPts val="200"/>
-              </a:spcBef>
-            </a:pPr>
-            <a:r>
-              <a:rPr sz="1300" b="0" i="0">
-                <a:solidFill>
-                  <a:srgbClr val="333333"/>
-                </a:solidFill>
-                <a:latin typeface="Calibri"/>
-              </a:rPr>
-              <a:t>La salida vuelve como entrada y corrige el proceso</a:t>
-            </a:r>
-          </a:p>
-        </p:txBody>
-      </p:sp>
-      <p:sp>
-        <p:nvSpPr>
-          <p:cNvPr id="22" name="Rounded Rectangle 21"/>
-          <p:cNvSpPr/>
-          <p:nvPr/>
-        </p:nvSpPr>
-        <p:spPr>
-          <a:xfrm>
-            <a:off x="457200" y="5446166"/>
-            <a:ext cx="11277295" cy="908913"/>
-          </a:xfrm>
-          <a:prstGeom prst="roundRect">
-            <a:avLst>
-              <a:gd name="adj" fmla="val 12000"/>
-            </a:avLst>
-          </a:prstGeom>
-          <a:solidFill>
-            <a:srgbClr val="F2F2F2"/>
-          </a:solidFill>
-          <a:ln>
-            <a:noFill/>
-          </a:ln>
-        </p:spPr>
-        <p:style>
-          <a:lnRef idx="1">
-            <a:schemeClr val="accent1"/>
-          </a:lnRef>
-          <a:fillRef idx="3">
-            <a:schemeClr val="accent1"/>
-          </a:fillRef>
-          <a:effectRef idx="2">
-            <a:schemeClr val="accent1"/>
-          </a:effectRef>
-          <a:fontRef idx="minor">
-            <a:schemeClr val="lt1"/>
-          </a:fontRef>
-        </p:style>
-        <p:txBody>
-          <a:bodyPr rtlCol="0" anchor="ctr"/>
-          <a:lstStyle/>
-          <a:p>
-            <a:pPr algn="ctr"/>
-          </a:p>
-        </p:txBody>
-      </p:sp>
-      <p:sp>
-        <p:nvSpPr>
-          <p:cNvPr id="23" name="Rounded Rectangle 22"/>
-          <p:cNvSpPr/>
-          <p:nvPr/>
-        </p:nvSpPr>
-        <p:spPr>
-          <a:xfrm>
-            <a:off x="594360" y="5681167"/>
-            <a:ext cx="438912" cy="438912"/>
-          </a:xfrm>
-          <a:prstGeom prst="roundRect">
-            <a:avLst>
-              <a:gd name="adj" fmla="val 12000"/>
-            </a:avLst>
-          </a:prstGeom>
-          <a:solidFill>
-            <a:srgbClr val="095292"/>
-          </a:solidFill>
-          <a:ln>
-            <a:noFill/>
-          </a:ln>
-        </p:spPr>
-        <p:style>
-          <a:lnRef idx="1">
-            <a:schemeClr val="accent1"/>
-          </a:lnRef>
-          <a:fillRef idx="3">
-            <a:schemeClr val="accent1"/>
-          </a:fillRef>
-          <a:effectRef idx="2">
-            <a:schemeClr val="accent1"/>
-          </a:effectRef>
-          <a:fontRef idx="minor">
-            <a:schemeClr val="lt1"/>
-          </a:fontRef>
-        </p:style>
-        <p:txBody>
-          <a:bodyPr rtlCol="0" anchor="ctr"/>
-          <a:lstStyle/>
-          <a:p>
-            <a:pPr algn="ctr"/>
-          </a:p>
-        </p:txBody>
-      </p:sp>
-      <p:sp>
-        <p:nvSpPr>
-          <p:cNvPr id="24" name="TextBox 23"/>
-          <p:cNvSpPr txBox="1"/>
-          <p:nvPr/>
-        </p:nvSpPr>
-        <p:spPr>
-          <a:xfrm>
-            <a:off x="594360" y="5681167"/>
-            <a:ext cx="438912" cy="438912"/>
-          </a:xfrm>
-          <a:prstGeom prst="rect">
-            <a:avLst/>
-          </a:prstGeom>
-          <a:noFill/>
-        </p:spPr>
-        <p:txBody>
-          <a:bodyPr wrap="square" anchor="ctr"/>
-          <a:lstStyle/>
-          <a:p>
-            <a:pPr algn="ctr"/>
-            <a:r>
-              <a:rPr sz="1600" b="1" i="0">
-                <a:solidFill>
-                  <a:srgbClr val="FFFFFF"/>
-                </a:solidFill>
-                <a:latin typeface="Calibri"/>
-              </a:rPr>
-              <a:t>5</a:t>
-            </a:r>
-          </a:p>
-        </p:txBody>
-      </p:sp>
-      <p:sp>
-        <p:nvSpPr>
-          <p:cNvPr id="25" name="TextBox 24"/>
-          <p:cNvSpPr txBox="1"/>
-          <p:nvPr/>
-        </p:nvSpPr>
-        <p:spPr>
-          <a:xfrm>
-            <a:off x="1188720" y="5537606"/>
-            <a:ext cx="10271455" cy="744321"/>
-          </a:xfrm>
-          <a:prstGeom prst="rect">
-            <a:avLst/>
-          </a:prstGeom>
-          <a:noFill/>
-        </p:spPr>
-        <p:txBody>
-          <a:bodyPr wrap="square" anchor="ctr"/>
-          <a:lstStyle/>
-          <a:p>
-            <a:r>
-              <a:rPr sz="1500" b="1" i="0">
-                <a:solidFill>
-                  <a:srgbClr val="095292"/>
-                </a:solidFill>
-                <a:latin typeface="Calibri"/>
-              </a:rPr>
-              <a:t>FRONTERA</a:t>
-            </a:r>
-          </a:p>
-          <a:p>
-            <a:pPr>
-              <a:spcBef>
-                <a:spcPts val="200"/>
-              </a:spcBef>
-            </a:pPr>
-            <a:r>
-              <a:rPr sz="1300" b="0" i="0">
-                <a:solidFill>
-                  <a:srgbClr val="333333"/>
-                </a:solidFill>
-                <a:latin typeface="Calibri"/>
-              </a:rPr>
-              <a:t>Qué queda dentro y qué queda fuera. La decisión más difícil, y la toma el ingeniero</a:t>
-            </a:r>
-          </a:p>
-        </p:txBody>
-      </p:sp>
-      <p:sp>
-        <p:nvSpPr>
-          <p:cNvPr id="26" name="TextBox 25"/>
           <p:cNvSpPr txBox="1"/>
           <p:nvPr/>
         </p:nvSpPr>
@@ -11386,6 +10639,195 @@
   <p:clrMapOvr>
     <a:masterClrMapping/>
   </p:clrMapOvr>
+  <p:timing>
+    <p:tnLst>
+      <p:par>
+        <p:cTn id="1" dur="indefinite" restart="never" nodeType="tmRoot">
+          <p:childTnLst>
+            <p:seq concurrent="1" nextAc="seek">
+              <p:cTn id="2" dur="indefinite" nodeType="mainSeq">
+                <p:childTnLst>
+                  <p:par>
+                    <p:cTn id="3" fill="hold">
+                      <p:stCondLst>
+                        <p:cond delay="indefinite"/>
+                      </p:stCondLst>
+                      <p:childTnLst>
+                        <p:par>
+                          <p:cTn id="4" fill="hold">
+                            <p:stCondLst>
+                              <p:cond delay="0"/>
+                            </p:stCondLst>
+                            <p:childTnLst>
+                              <p:par>
+                                <p:cTn id="5" presetID="10" presetClass="entr" presetSubtype="0" fill="hold" nodeType="clickEffect">
+                                  <p:stCondLst>
+                                    <p:cond delay="0"/>
+                                  </p:stCondLst>
+                                  <p:childTnLst>
+                                    <p:set>
+                                      <p:cBhvr>
+                                        <p:cTn id="6" dur="1" fill="hold">
+                                          <p:stCondLst>
+                                            <p:cond delay="0"/>
+                                          </p:stCondLst>
+                                        </p:cTn>
+                                        <p:tgtEl>
+                                          <p:spTgt spid="8"/>
+                                        </p:tgtEl>
+                                        <p:attrNameLst>
+                                          <p:attrName>style.visibility</p:attrName>
+                                        </p:attrNameLst>
+                                      </p:cBhvr>
+                                      <p:to>
+                                        <p:strVal val="visible"/>
+                                      </p:to>
+                                    </p:set>
+                                    <p:animEffect transition="in" filter="fade">
+                                      <p:cBhvr>
+                                        <p:cTn id="7" dur="450"/>
+                                        <p:tgtEl>
+                                          <p:spTgt spid="8"/>
+                                        </p:tgtEl>
+                                      </p:cBhvr>
+                                    </p:animEffect>
+                                  </p:childTnLst>
+                                </p:cTn>
+                              </p:par>
+                            </p:childTnLst>
+                          </p:cTn>
+                        </p:par>
+                      </p:childTnLst>
+                    </p:cTn>
+                  </p:par>
+                  <p:par>
+                    <p:cTn id="8" fill="hold">
+                      <p:stCondLst>
+                        <p:cond delay="indefinite"/>
+                      </p:stCondLst>
+                      <p:childTnLst>
+                        <p:par>
+                          <p:cTn id="9" fill="hold">
+                            <p:stCondLst>
+                              <p:cond delay="0"/>
+                            </p:stCondLst>
+                            <p:childTnLst>
+                              <p:par>
+                                <p:cTn id="10" presetID="10" presetClass="entr" presetSubtype="0" fill="hold" nodeType="clickEffect">
+                                  <p:stCondLst>
+                                    <p:cond delay="0"/>
+                                  </p:stCondLst>
+                                  <p:childTnLst>
+                                    <p:set>
+                                      <p:cBhvr>
+                                        <p:cTn id="11" dur="1" fill="hold">
+                                          <p:stCondLst>
+                                            <p:cond delay="0"/>
+                                          </p:stCondLst>
+                                        </p:cTn>
+                                        <p:tgtEl>
+                                          <p:spTgt spid="9"/>
+                                        </p:tgtEl>
+                                        <p:attrNameLst>
+                                          <p:attrName>style.visibility</p:attrName>
+                                        </p:attrNameLst>
+                                      </p:cBhvr>
+                                      <p:to>
+                                        <p:strVal val="visible"/>
+                                      </p:to>
+                                    </p:set>
+                                    <p:animEffect transition="in" filter="fade">
+                                      <p:cBhvr>
+                                        <p:cTn id="12" dur="450"/>
+                                        <p:tgtEl>
+                                          <p:spTgt spid="9"/>
+                                        </p:tgtEl>
+                                      </p:cBhvr>
+                                    </p:animEffect>
+                                  </p:childTnLst>
+                                </p:cTn>
+                              </p:par>
+                            </p:childTnLst>
+                          </p:cTn>
+                        </p:par>
+                      </p:childTnLst>
+                    </p:cTn>
+                  </p:par>
+                  <p:par>
+                    <p:cTn id="13" fill="hold">
+                      <p:stCondLst>
+                        <p:cond delay="indefinite"/>
+                      </p:stCondLst>
+                      <p:childTnLst>
+                        <p:par>
+                          <p:cTn id="14" fill="hold">
+                            <p:stCondLst>
+                              <p:cond delay="0"/>
+                            </p:stCondLst>
+                            <p:childTnLst>
+                              <p:par>
+                                <p:cTn id="15" presetID="10" presetClass="entr" presetSubtype="0" fill="hold" nodeType="clickEffect">
+                                  <p:stCondLst>
+                                    <p:cond delay="0"/>
+                                  </p:stCondLst>
+                                  <p:childTnLst>
+                                    <p:set>
+                                      <p:cBhvr>
+                                        <p:cTn id="16" dur="1" fill="hold">
+                                          <p:stCondLst>
+                                            <p:cond delay="0"/>
+                                          </p:stCondLst>
+                                        </p:cTn>
+                                        <p:tgtEl>
+                                          <p:spTgt spid="10"/>
+                                        </p:tgtEl>
+                                        <p:attrNameLst>
+                                          <p:attrName>style.visibility</p:attrName>
+                                        </p:attrNameLst>
+                                      </p:cBhvr>
+                                      <p:to>
+                                        <p:strVal val="visible"/>
+                                      </p:to>
+                                    </p:set>
+                                    <p:animEffect transition="in" filter="fade">
+                                      <p:cBhvr>
+                                        <p:cTn id="17" dur="450"/>
+                                        <p:tgtEl>
+                                          <p:spTgt spid="10"/>
+                                        </p:tgtEl>
+                                      </p:cBhvr>
+                                    </p:animEffect>
+                                  </p:childTnLst>
+                                </p:cTn>
+                              </p:par>
+                            </p:childTnLst>
+                          </p:cTn>
+                        </p:par>
+                      </p:childTnLst>
+                    </p:cTn>
+                  </p:par>
+                </p:childTnLst>
+              </p:cTn>
+              <p:prevCondLst>
+                <p:cond evt="onPrev" delay="0">
+                  <p:tgtEl>
+                    <p:sldTgt/>
+                  </p:tgtEl>
+                </p:cond>
+              </p:prevCondLst>
+              <p:nextCondLst>
+                <p:cond evt="onNext" delay="0">
+                  <p:tgtEl>
+                    <p:sldTgt/>
+                  </p:tgtEl>
+                </p:cond>
+              </p:nextCondLst>
+            </p:seq>
+          </p:childTnLst>
+        </p:cTn>
+      </p:par>
+    </p:tnLst>
+  </p:timing>
 </p:sld>
 </file>
 
@@ -13081,9 +12523,57 @@
           </a:p>
         </p:txBody>
       </p:sp>
-      <p:sp>
-        <p:nvSpPr>
-          <p:cNvPr id="13" name="TextBox 12"/>
+      <p:pic>
+        <p:nvPicPr>
+          <p:cNvPr id="13" name="Picture 12" descr="sello_mal.png"/>
+          <p:cNvPicPr>
+            <a:picLocks noChangeAspect="1"/>
+          </p:cNvPicPr>
+          <p:nvPr/>
+        </p:nvPicPr>
+        <p:blipFill>
+          <a:blip r:embed="rId2"/>
+          <a:stretch>
+            <a:fillRect/>
+          </a:stretch>
+        </p:blipFill>
+        <p:spPr>
+          <a:xfrm>
+            <a:off x="566928" y="1316736"/>
+            <a:ext cx="393192" cy="393192"/>
+          </a:xfrm>
+          <a:prstGeom prst="rect">
+            <a:avLst/>
+          </a:prstGeom>
+        </p:spPr>
+      </p:pic>
+      <p:pic>
+        <p:nvPicPr>
+          <p:cNvPr id="14" name="Picture 13" descr="sello_bien.png"/>
+          <p:cNvPicPr>
+            <a:picLocks noChangeAspect="1"/>
+          </p:cNvPicPr>
+          <p:nvPr/>
+        </p:nvPicPr>
+        <p:blipFill>
+          <a:blip r:embed="rId3"/>
+          <a:stretch>
+            <a:fillRect/>
+          </a:stretch>
+        </p:blipFill>
+        <p:spPr>
+          <a:xfrm>
+            <a:off x="6365595" y="1316736"/>
+            <a:ext cx="393192" cy="393192"/>
+          </a:xfrm>
+          <a:prstGeom prst="rect">
+            <a:avLst/>
+          </a:prstGeom>
+        </p:spPr>
+      </p:pic>
+      <p:sp>
+        <p:nvSpPr>
+          <p:cNvPr id="15" name="TextBox 14"/>
           <p:cNvSpPr txBox="1"/>
           <p:nvPr/>
         </p:nvSpPr>
@@ -13264,14 +12754,118 @@
       </p:sp>
       <p:sp>
         <p:nvSpPr>
-          <p:cNvPr id="5" name="TextBox 4"/>
+          <p:cNvPr id="5" name="Rounded Rectangle 4"/>
+          <p:cNvSpPr/>
+          <p:nvPr/>
+        </p:nvSpPr>
+        <p:spPr>
+          <a:xfrm>
+            <a:off x="5797149" y="1573813"/>
+            <a:ext cx="6010497" cy="4057845"/>
+          </a:xfrm>
+          <a:prstGeom prst="roundRect">
+            <a:avLst>
+              <a:gd name="adj" fmla="val 4000"/>
+            </a:avLst>
+          </a:prstGeom>
+          <a:solidFill>
+            <a:srgbClr val="E8EEF4"/>
+          </a:solidFill>
+          <a:ln>
+            <a:noFill/>
+          </a:ln>
+        </p:spPr>
+        <p:style>
+          <a:lnRef idx="1">
+            <a:schemeClr val="accent1"/>
+          </a:lnRef>
+          <a:fillRef idx="3">
+            <a:schemeClr val="accent1"/>
+          </a:fillRef>
+          <a:effectRef idx="2">
+            <a:schemeClr val="accent1"/>
+          </a:effectRef>
+          <a:fontRef idx="minor">
+            <a:schemeClr val="lt1"/>
+          </a:fontRef>
+        </p:style>
+        <p:txBody>
+          <a:bodyPr rtlCol="0" anchor="ctr"/>
+          <a:lstStyle/>
+          <a:p>
+            <a:pPr algn="ctr"/>
+          </a:p>
+        </p:txBody>
+      </p:sp>
+      <p:pic>
+        <p:nvPicPr>
+          <p:cNvPr id="6" name="Picture 5" descr="people-waiting-in-line-queue.jpg"/>
+          <p:cNvPicPr>
+            <a:picLocks noChangeAspect="1"/>
+          </p:cNvPicPr>
+          <p:nvPr/>
+        </p:nvPicPr>
+        <p:blipFill>
+          <a:blip r:embed="rId2"/>
+          <a:stretch>
+            <a:fillRect/>
+          </a:stretch>
+        </p:blipFill>
+        <p:spPr>
+          <a:xfrm>
+            <a:off x="5870301" y="1646965"/>
+            <a:ext cx="5864193" cy="3911541"/>
+          </a:xfrm>
+          <a:prstGeom prst="rect">
+            <a:avLst/>
+          </a:prstGeom>
+        </p:spPr>
+      </p:pic>
+      <p:sp>
+        <p:nvSpPr>
+          <p:cNvPr id="7" name="TextBox 6"/>
           <p:cNvSpPr txBox="1"/>
           <p:nvPr/>
         </p:nvSpPr>
         <p:spPr>
           <a:xfrm>
-            <a:off x="457200" y="1170432"/>
-            <a:ext cx="11277295" cy="5230368"/>
+            <a:off x="5870301" y="5961888"/>
+            <a:ext cx="5864193" cy="320040"/>
+          </a:xfrm>
+          <a:prstGeom prst="rect">
+            <a:avLst/>
+          </a:prstGeom>
+          <a:noFill/>
+        </p:spPr>
+        <p:txBody>
+          <a:bodyPr wrap="square">
+            <a:spAutoFit/>
+          </a:bodyPr>
+          <a:lstStyle/>
+          <a:p>
+            <a:pPr algn="ctr"/>
+            <a:r>
+              <a:rPr sz="1100" b="0" i="1">
+                <a:solidFill>
+                  <a:srgbClr val="666666"/>
+                </a:solidFill>
+                <a:latin typeface="Calibri"/>
+              </a:rPr>
+              <a:t>Foto: Click Jeth · Pexels</a:t>
+            </a:r>
+          </a:p>
+        </p:txBody>
+      </p:sp>
+      <p:sp>
+        <p:nvSpPr>
+          <p:cNvPr id="8" name="TextBox 7"/>
+          <p:cNvSpPr txBox="1"/>
+          <p:nvPr/>
+        </p:nvSpPr>
+        <p:spPr>
+          <a:xfrm>
+            <a:off x="457200" y="1353312"/>
+            <a:ext cx="5093061" cy="5047488"/>
           </a:xfrm>
           <a:prstGeom prst="rect">
             <a:avLst/>
@@ -13419,79 +13013,11 @@
               <a:t>, porque el sistema nuevo le duplica el trabajo.</a:t>
             </a:r>
           </a:p>
-          <a:p>
-            <a:pPr>
-              <a:spcAft>
-                <a:spcPts val="800"/>
-              </a:spcAft>
-            </a:pPr>
-            <a:r>
-              <a:rPr sz="2000" b="0" i="0">
-                <a:solidFill>
-                  <a:srgbClr val="333333"/>
-                </a:solidFill>
-                <a:latin typeface="Calibri"/>
-              </a:rPr>
-              <a:t>–   </a:t>
-            </a:r>
-            <a:r>
-              <a:rPr sz="2000" b="1" i="0">
-                <a:solidFill>
-                  <a:srgbClr val="333333"/>
-                </a:solidFill>
-                <a:latin typeface="Calibri"/>
-              </a:rPr>
-              <a:t>El software funcionó y el problema siguió.</a:t>
-            </a:r>
-            <a:r>
-              <a:rPr sz="2000" b="0" i="0">
-                <a:solidFill>
-                  <a:srgbClr val="333333"/>
-                </a:solidFill>
-                <a:latin typeface="Calibri"/>
-              </a:rPr>
-              <a:t> En este curso, ese proyecto fracasó.</a:t>
-            </a:r>
-          </a:p>
-          <a:p>
-            <a:pPr>
-              <a:spcAft>
-                <a:spcPts val="800"/>
-              </a:spcAft>
-            </a:pPr>
-            <a:r>
-              <a:rPr sz="2000" b="0" i="0">
-                <a:solidFill>
-                  <a:srgbClr val="333333"/>
-                </a:solidFill>
-                <a:latin typeface="Calibri"/>
-              </a:rPr>
-              <a:t>–   Un proyecto se juzga por </a:t>
-            </a:r>
-            <a:r>
-              <a:rPr sz="2000" b="1" i="0">
-                <a:solidFill>
-                  <a:srgbClr val="333333"/>
-                </a:solidFill>
-                <a:latin typeface="Calibri"/>
-              </a:rPr>
-              <a:t>si el problema del entorno se redujo y se puede medir</a:t>
-            </a:r>
-            <a:r>
-              <a:rPr sz="2000" b="0" i="0">
-                <a:solidFill>
-                  <a:srgbClr val="333333"/>
-                </a:solidFill>
-                <a:latin typeface="Calibri"/>
-              </a:rPr>
-              <a:t>, no por si la app funciona.</a:t>
-            </a:r>
-          </a:p>
-        </p:txBody>
-      </p:sp>
-      <p:sp>
-        <p:nvSpPr>
-          <p:cNvPr id="6" name="TextBox 5"/>
+        </p:txBody>
+      </p:sp>
+      <p:sp>
+        <p:nvSpPr>
+          <p:cNvPr id="9" name="TextBox 8"/>
           <p:cNvSpPr txBox="1"/>
           <p:nvPr/>
         </p:nvSpPr>

--- a/Introduccion a la Ingenieria/Clases/Clase 3 - Fundamentos basicos de la Ingenieria de Sistemas/Presentacion.pptx
+++ b/Introduccion a la Ingenieria/Clases/Clase 3 - Fundamentos basicos de la Ingenieria de Sistemas/Presentacion.pptx
@@ -9467,118 +9467,14 @@
       </p:sp>
       <p:sp>
         <p:nvSpPr>
-          <p:cNvPr id="5" name="Rounded Rectangle 4"/>
-          <p:cNvSpPr/>
-          <p:nvPr/>
-        </p:nvSpPr>
-        <p:spPr>
-          <a:xfrm>
-            <a:off x="5797149" y="1573813"/>
-            <a:ext cx="6010497" cy="4057845"/>
-          </a:xfrm>
-          <a:prstGeom prst="roundRect">
-            <a:avLst>
-              <a:gd name="adj" fmla="val 4000"/>
-            </a:avLst>
-          </a:prstGeom>
-          <a:solidFill>
-            <a:srgbClr val="E8EEF4"/>
-          </a:solidFill>
-          <a:ln>
-            <a:noFill/>
-          </a:ln>
-        </p:spPr>
-        <p:style>
-          <a:lnRef idx="1">
-            <a:schemeClr val="accent1"/>
-          </a:lnRef>
-          <a:fillRef idx="3">
-            <a:schemeClr val="accent1"/>
-          </a:fillRef>
-          <a:effectRef idx="2">
-            <a:schemeClr val="accent1"/>
-          </a:effectRef>
-          <a:fontRef idx="minor">
-            <a:schemeClr val="lt1"/>
-          </a:fontRef>
-        </p:style>
-        <p:txBody>
-          <a:bodyPr rtlCol="0" anchor="ctr"/>
-          <a:lstStyle/>
-          <a:p>
-            <a:pPr algn="ctr"/>
-          </a:p>
-        </p:txBody>
-      </p:sp>
-      <p:pic>
-        <p:nvPicPr>
-          <p:cNvPr id="6" name="Picture 5" descr="students-learning-laptops-classroom.jpg"/>
-          <p:cNvPicPr>
-            <a:picLocks noChangeAspect="1"/>
-          </p:cNvPicPr>
-          <p:nvPr/>
-        </p:nvPicPr>
-        <p:blipFill>
-          <a:blip r:embed="rId2"/>
-          <a:stretch>
-            <a:fillRect/>
-          </a:stretch>
-        </p:blipFill>
-        <p:spPr>
-          <a:xfrm>
-            <a:off x="5870301" y="1646965"/>
-            <a:ext cx="5864193" cy="3911541"/>
-          </a:xfrm>
-          <a:prstGeom prst="rect">
-            <a:avLst/>
-          </a:prstGeom>
-        </p:spPr>
-      </p:pic>
-      <p:sp>
-        <p:nvSpPr>
-          <p:cNvPr id="7" name="TextBox 6"/>
+          <p:cNvPr id="5" name="TextBox 4"/>
           <p:cNvSpPr txBox="1"/>
           <p:nvPr/>
         </p:nvSpPr>
         <p:spPr>
           <a:xfrm>
-            <a:off x="5870301" y="5961888"/>
-            <a:ext cx="5864193" cy="320040"/>
-          </a:xfrm>
-          <a:prstGeom prst="rect">
-            <a:avLst/>
-          </a:prstGeom>
-          <a:noFill/>
-        </p:spPr>
-        <p:txBody>
-          <a:bodyPr wrap="square">
-            <a:spAutoFit/>
-          </a:bodyPr>
-          <a:lstStyle/>
-          <a:p>
-            <a:pPr algn="ctr"/>
-            <a:r>
-              <a:rPr sz="1100" b="0" i="1">
-                <a:solidFill>
-                  <a:srgbClr val="666666"/>
-                </a:solidFill>
-                <a:latin typeface="Calibri"/>
-              </a:rPr>
-              <a:t>Foto: Mikhail Nilov · Pexels</a:t>
-            </a:r>
-          </a:p>
-        </p:txBody>
-      </p:sp>
-      <p:sp>
-        <p:nvSpPr>
-          <p:cNvPr id="8" name="TextBox 7"/>
-          <p:cNvSpPr txBox="1"/>
-          <p:nvPr/>
-        </p:nvSpPr>
-        <p:spPr>
-          <a:xfrm>
-            <a:off x="457200" y="1353312"/>
-            <a:ext cx="5093061" cy="5047488"/>
+            <a:off x="457200" y="1170432"/>
+            <a:ext cx="11277295" cy="5230368"/>
           </a:xfrm>
           <a:prstGeom prst="rect">
             <a:avLst/>
@@ -9748,7 +9644,7 @@
       </p:sp>
       <p:sp>
         <p:nvSpPr>
-          <p:cNvPr id="9" name="TextBox 8"/>
+          <p:cNvPr id="6" name="TextBox 5"/>
           <p:cNvSpPr txBox="1"/>
           <p:nvPr/>
         </p:nvSpPr>
@@ -12754,118 +12650,14 @@
       </p:sp>
       <p:sp>
         <p:nvSpPr>
-          <p:cNvPr id="5" name="Rounded Rectangle 4"/>
-          <p:cNvSpPr/>
-          <p:nvPr/>
-        </p:nvSpPr>
-        <p:spPr>
-          <a:xfrm>
-            <a:off x="5797149" y="1573813"/>
-            <a:ext cx="6010497" cy="4057845"/>
-          </a:xfrm>
-          <a:prstGeom prst="roundRect">
-            <a:avLst>
-              <a:gd name="adj" fmla="val 4000"/>
-            </a:avLst>
-          </a:prstGeom>
-          <a:solidFill>
-            <a:srgbClr val="E8EEF4"/>
-          </a:solidFill>
-          <a:ln>
-            <a:noFill/>
-          </a:ln>
-        </p:spPr>
-        <p:style>
-          <a:lnRef idx="1">
-            <a:schemeClr val="accent1"/>
-          </a:lnRef>
-          <a:fillRef idx="3">
-            <a:schemeClr val="accent1"/>
-          </a:fillRef>
-          <a:effectRef idx="2">
-            <a:schemeClr val="accent1"/>
-          </a:effectRef>
-          <a:fontRef idx="minor">
-            <a:schemeClr val="lt1"/>
-          </a:fontRef>
-        </p:style>
-        <p:txBody>
-          <a:bodyPr rtlCol="0" anchor="ctr"/>
-          <a:lstStyle/>
-          <a:p>
-            <a:pPr algn="ctr"/>
-          </a:p>
-        </p:txBody>
-      </p:sp>
-      <p:pic>
-        <p:nvPicPr>
-          <p:cNvPr id="6" name="Picture 5" descr="people-waiting-in-line-queue.jpg"/>
-          <p:cNvPicPr>
-            <a:picLocks noChangeAspect="1"/>
-          </p:cNvPicPr>
-          <p:nvPr/>
-        </p:nvPicPr>
-        <p:blipFill>
-          <a:blip r:embed="rId2"/>
-          <a:stretch>
-            <a:fillRect/>
-          </a:stretch>
-        </p:blipFill>
-        <p:spPr>
-          <a:xfrm>
-            <a:off x="5870301" y="1646965"/>
-            <a:ext cx="5864193" cy="3911541"/>
-          </a:xfrm>
-          <a:prstGeom prst="rect">
-            <a:avLst/>
-          </a:prstGeom>
-        </p:spPr>
-      </p:pic>
-      <p:sp>
-        <p:nvSpPr>
-          <p:cNvPr id="7" name="TextBox 6"/>
+          <p:cNvPr id="5" name="TextBox 4"/>
           <p:cNvSpPr txBox="1"/>
           <p:nvPr/>
         </p:nvSpPr>
         <p:spPr>
           <a:xfrm>
-            <a:off x="5870301" y="5961888"/>
-            <a:ext cx="5864193" cy="320040"/>
-          </a:xfrm>
-          <a:prstGeom prst="rect">
-            <a:avLst/>
-          </a:prstGeom>
-          <a:noFill/>
-        </p:spPr>
-        <p:txBody>
-          <a:bodyPr wrap="square">
-            <a:spAutoFit/>
-          </a:bodyPr>
-          <a:lstStyle/>
-          <a:p>
-            <a:pPr algn="ctr"/>
-            <a:r>
-              <a:rPr sz="1100" b="0" i="1">
-                <a:solidFill>
-                  <a:srgbClr val="666666"/>
-                </a:solidFill>
-                <a:latin typeface="Calibri"/>
-              </a:rPr>
-              <a:t>Foto: Click Jeth · Pexels</a:t>
-            </a:r>
-          </a:p>
-        </p:txBody>
-      </p:sp>
-      <p:sp>
-        <p:nvSpPr>
-          <p:cNvPr id="8" name="TextBox 7"/>
-          <p:cNvSpPr txBox="1"/>
-          <p:nvPr/>
-        </p:nvSpPr>
-        <p:spPr>
-          <a:xfrm>
-            <a:off x="457200" y="1353312"/>
-            <a:ext cx="5093061" cy="5047488"/>
+            <a:off x="457200" y="1170432"/>
+            <a:ext cx="11277295" cy="5230368"/>
           </a:xfrm>
           <a:prstGeom prst="rect">
             <a:avLst/>
@@ -13013,11 +12805,79 @@
               <a:t>, porque el sistema nuevo le duplica el trabajo.</a:t>
             </a:r>
           </a:p>
-        </p:txBody>
-      </p:sp>
-      <p:sp>
-        <p:nvSpPr>
-          <p:cNvPr id="9" name="TextBox 8"/>
+          <a:p>
+            <a:pPr>
+              <a:spcAft>
+                <a:spcPts val="800"/>
+              </a:spcAft>
+            </a:pPr>
+            <a:r>
+              <a:rPr sz="2000" b="0" i="0">
+                <a:solidFill>
+                  <a:srgbClr val="333333"/>
+                </a:solidFill>
+                <a:latin typeface="Calibri"/>
+              </a:rPr>
+              <a:t>–   </a:t>
+            </a:r>
+            <a:r>
+              <a:rPr sz="2000" b="1" i="0">
+                <a:solidFill>
+                  <a:srgbClr val="333333"/>
+                </a:solidFill>
+                <a:latin typeface="Calibri"/>
+              </a:rPr>
+              <a:t>El software funcionó y el problema siguió.</a:t>
+            </a:r>
+            <a:r>
+              <a:rPr sz="2000" b="0" i="0">
+                <a:solidFill>
+                  <a:srgbClr val="333333"/>
+                </a:solidFill>
+                <a:latin typeface="Calibri"/>
+              </a:rPr>
+              <a:t> En este curso, ese proyecto fracasó.</a:t>
+            </a:r>
+          </a:p>
+          <a:p>
+            <a:pPr>
+              <a:spcAft>
+                <a:spcPts val="800"/>
+              </a:spcAft>
+            </a:pPr>
+            <a:r>
+              <a:rPr sz="2000" b="0" i="0">
+                <a:solidFill>
+                  <a:srgbClr val="333333"/>
+                </a:solidFill>
+                <a:latin typeface="Calibri"/>
+              </a:rPr>
+              <a:t>–   Un proyecto se juzga por </a:t>
+            </a:r>
+            <a:r>
+              <a:rPr sz="2000" b="1" i="0">
+                <a:solidFill>
+                  <a:srgbClr val="333333"/>
+                </a:solidFill>
+                <a:latin typeface="Calibri"/>
+              </a:rPr>
+              <a:t>si el problema del entorno se redujo y se puede medir</a:t>
+            </a:r>
+            <a:r>
+              <a:rPr sz="2000" b="0" i="0">
+                <a:solidFill>
+                  <a:srgbClr val="333333"/>
+                </a:solidFill>
+                <a:latin typeface="Calibri"/>
+              </a:rPr>
+              <a:t>, no por si la app funciona.</a:t>
+            </a:r>
+          </a:p>
+        </p:txBody>
+      </p:sp>
+      <p:sp>
+        <p:nvSpPr>
+          <p:cNvPr id="6" name="TextBox 5"/>
           <p:cNvSpPr txBox="1"/>
           <p:nvPr/>
         </p:nvSpPr>

--- a/Introduccion a la Ingenieria/Clases/Clase 3 - Fundamentos basicos de la Ingenieria de Sistemas/Presentacion.pptx
+++ b/Introduccion a la Ingenieria/Clases/Clase 3 - Fundamentos basicos de la Ingenieria de Sistemas/Presentacion.pptx
@@ -677,6 +677,48 @@
         <p:txBody>
           <a:bodyPr/>
           <a:lstStyle/>
+          <a:p>
+            <a:r>
+              <a:t>TEXTO COMPLETO DE LA LÁMINA (se proyecta resumido):</a:t>
+            </a:r>
+          </a:p>
+          <a:p/>
+          <a:p>
+            <a:r>
+              <a:t>Un equipo construye una app de citas impecable: rápida, bonita y sin errores.</a:t>
+            </a:r>
+          </a:p>
+          <a:p/>
+          <a:p>
+            <a:r>
+              <a:t>A las 5 de la mañana la fila de la EPS sigue igual. ¿Por qué?</a:t>
+            </a:r>
+          </a:p>
+          <a:p/>
+          <a:p>
+            <a:r>
+              <a:t>Las personas de la fila no tienen datos en el celular, o no confían en la app.</a:t>
+            </a:r>
+          </a:p>
+          <a:p/>
+          <a:p>
+            <a:r>
+              <a:t>La secretaria sigue anotando en el cuaderno, porque el sistema nuevo le duplica el trabajo.</a:t>
+            </a:r>
+          </a:p>
+          <a:p/>
+          <a:p>
+            <a:r>
+              <a:t>El software funcionó y el problema siguió. En este curso, ese proyecto fracasó.</a:t>
+            </a:r>
+          </a:p>
+          <a:p/>
+          <a:p>
+            <a:r>
+              <a:t>Un proyecto se juzga por si el problema del entorno se redujo y se puede medir, no por si la app funciona.</a:t>
+            </a:r>
+          </a:p>
+          <a:p/>
           <a:p>
             <a:r>
               <a:t>Este es el caso más importante de la clase: deje que el grupo diga por qué creen que la fila no se movió antes de mostrar las razones. Casi siempre aparecen solas.</a:t>
@@ -7159,9 +7201,33 @@
           </a:prstGeom>
         </p:spPr>
       </p:pic>
-      <p:sp>
-        <p:nvSpPr>
-          <p:cNvPr id="18" name="TextBox 17"/>
+      <p:pic>
+        <p:nvPicPr>
+          <p:cNvPr id="11" name="Picture 10" descr="semaforo-paso5.png"/>
+          <p:cNvPicPr>
+            <a:picLocks noChangeAspect="1"/>
+          </p:cNvPicPr>
+          <p:nvPr/>
+        </p:nvPicPr>
+        <p:blipFill>
+          <a:blip r:embed="rId6"/>
+          <a:stretch>
+            <a:fillRect/>
+          </a:stretch>
+        </p:blipFill>
+        <p:spPr>
+          <a:xfrm>
+            <a:off x="6007763" y="1472184"/>
+            <a:ext cx="5589270" cy="4471416"/>
+          </a:xfrm>
+          <a:prstGeom prst="rect">
+            <a:avLst/>
+          </a:prstGeom>
+        </p:spPr>
+      </p:pic>
+      <p:sp>
+        <p:nvSpPr>
+          <p:cNvPr id="23" name="TextBox 22"/>
           <p:cNvSpPr txBox="1"/>
           <p:nvPr/>
         </p:nvSpPr>
@@ -7196,7 +7262,7 @@
       </p:sp>
       <p:sp>
         <p:nvSpPr>
-          <p:cNvPr id="19" name="TextBox 18"/>
+          <p:cNvPr id="24" name="TextBox 23"/>
           <p:cNvSpPr txBox="1"/>
           <p:nvPr/>
         </p:nvSpPr>
@@ -7355,7 +7421,7 @@
       </p:sp>
       <p:sp>
         <p:nvSpPr>
-          <p:cNvPr id="20" name="TextBox 19"/>
+          <p:cNvPr id="25" name="TextBox 24"/>
           <p:cNvSpPr txBox="1"/>
           <p:nvPr/>
         </p:nvSpPr>
@@ -7548,6 +7614,59 @@
                                         <p:cTn id="17" dur="450"/>
                                         <p:tgtEl>
                                           <p:spTgt spid="10"/>
+                                        </p:tgtEl>
+                                      </p:cBhvr>
+                                    </p:animEffect>
+                                  </p:childTnLst>
+                                </p:cTn>
+                              </p:par>
+                            </p:childTnLst>
+                          </p:cTn>
+                        </p:par>
+                      </p:childTnLst>
+                    </p:cTn>
+                  </p:par>
+                  <p:par>
+                    <p:cTn id="18" fill="hold">
+                      <p:stCondLst>
+                        <p:cond delay="indefinite"/>
+                      </p:stCondLst>
+                      <p:childTnLst>
+                        <p:par>
+                          <p:cTn id="19" fill="hold">
+                            <p:stCondLst>
+                              <p:cond delay="0"/>
+                            </p:stCondLst>
+                            <p:childTnLst>
+                              <p:par>
+                                <p:cTn id="20" presetID="10" presetClass="entr" presetSubtype="0" fill="hold" nodeType="clickEffect">
+                                  <p:stCondLst>
+                                    <p:cond delay="0"/>
+                                  </p:stCondLst>
+                                  <p:childTnLst>
+                                    <p:set>
+                                      <p:cBhvr>
+                                        <p:cTn id="21" dur="1" fill="hold">
+                                          <p:stCondLst>
+                                            <p:cond delay="0"/>
+                                          </p:stCondLst>
+                                        </p:cTn>
+                                        <p:tgtEl>
+                                          <p:spTgt spid="11"/>
+                                        </p:tgtEl>
+                                        <p:attrNameLst>
+                                          <p:attrName>style.visibility</p:attrName>
+                                        </p:attrNameLst>
+                                      </p:cBhvr>
+                                      <p:to>
+                                        <p:strVal val="visible"/>
+                                      </p:to>
+                                    </p:set>
+                                    <p:animEffect transition="in" filter="fade">
+                                      <p:cBhvr>
+                                        <p:cTn id="22" dur="450"/>
+                                        <p:tgtEl>
+                                          <p:spTgt spid="11"/>
                                         </p:tgtEl>
                                       </p:cBhvr>
                                     </p:animEffect>
@@ -12650,14 +12769,83 @@
       </p:sp>
       <p:sp>
         <p:nvSpPr>
-          <p:cNvPr id="5" name="TextBox 4"/>
+          <p:cNvPr id="5" name="Rounded Rectangle 4"/>
+          <p:cNvSpPr/>
+          <p:nvPr/>
+        </p:nvSpPr>
+        <p:spPr>
+          <a:xfrm>
+            <a:off x="5797149" y="1343926"/>
+            <a:ext cx="6010497" cy="4837658"/>
+          </a:xfrm>
+          <a:prstGeom prst="roundRect">
+            <a:avLst>
+              <a:gd name="adj" fmla="val 4000"/>
+            </a:avLst>
+          </a:prstGeom>
+          <a:solidFill>
+            <a:srgbClr val="E8EEF4"/>
+          </a:solidFill>
+          <a:ln>
+            <a:noFill/>
+          </a:ln>
+        </p:spPr>
+        <p:style>
+          <a:lnRef idx="1">
+            <a:schemeClr val="accent1"/>
+          </a:lnRef>
+          <a:fillRef idx="3">
+            <a:schemeClr val="accent1"/>
+          </a:fillRef>
+          <a:effectRef idx="2">
+            <a:schemeClr val="accent1"/>
+          </a:effectRef>
+          <a:fontRef idx="minor">
+            <a:schemeClr val="lt1"/>
+          </a:fontRef>
+        </p:style>
+        <p:txBody>
+          <a:bodyPr rtlCol="0" anchor="ctr"/>
+          <a:lstStyle/>
+          <a:p>
+            <a:pPr algn="ctr"/>
+          </a:p>
+        </p:txBody>
+      </p:sp>
+      <p:pic>
+        <p:nvPicPr>
+          <p:cNvPr id="6" name="Picture 5" descr="ilus-app-fila-paso1.png"/>
+          <p:cNvPicPr>
+            <a:picLocks noChangeAspect="1"/>
+          </p:cNvPicPr>
+          <p:nvPr/>
+        </p:nvPicPr>
+        <p:blipFill>
+          <a:blip r:embed="rId2"/>
+          <a:stretch>
+            <a:fillRect/>
+          </a:stretch>
+        </p:blipFill>
+        <p:spPr>
+          <a:xfrm>
+            <a:off x="5870301" y="1417078"/>
+            <a:ext cx="5864193" cy="4691354"/>
+          </a:xfrm>
+          <a:prstGeom prst="rect">
+            <a:avLst/>
+          </a:prstGeom>
+        </p:spPr>
+      </p:pic>
+      <p:sp>
+        <p:nvSpPr>
+          <p:cNvPr id="7" name="TextBox 6"/>
           <p:cNvSpPr txBox="1"/>
           <p:nvPr/>
         </p:nvSpPr>
         <p:spPr>
           <a:xfrm>
-            <a:off x="457200" y="1170432"/>
-            <a:ext cx="11277295" cy="5230368"/>
+            <a:off x="457200" y="1353312"/>
+            <a:ext cx="5093061" cy="5047488"/>
           </a:xfrm>
           <a:prstGeom prst="rect">
             <a:avLst/>
@@ -12805,79 +12993,11 @@
               <a:t>, porque el sistema nuevo le duplica el trabajo.</a:t>
             </a:r>
           </a:p>
-          <a:p>
-            <a:pPr>
-              <a:spcAft>
-                <a:spcPts val="800"/>
-              </a:spcAft>
-            </a:pPr>
-            <a:r>
-              <a:rPr sz="2000" b="0" i="0">
-                <a:solidFill>
-                  <a:srgbClr val="333333"/>
-                </a:solidFill>
-                <a:latin typeface="Calibri"/>
-              </a:rPr>
-              <a:t>–   </a:t>
-            </a:r>
-            <a:r>
-              <a:rPr sz="2000" b="1" i="0">
-                <a:solidFill>
-                  <a:srgbClr val="333333"/>
-                </a:solidFill>
-                <a:latin typeface="Calibri"/>
-              </a:rPr>
-              <a:t>El software funcionó y el problema siguió.</a:t>
-            </a:r>
-            <a:r>
-              <a:rPr sz="2000" b="0" i="0">
-                <a:solidFill>
-                  <a:srgbClr val="333333"/>
-                </a:solidFill>
-                <a:latin typeface="Calibri"/>
-              </a:rPr>
-              <a:t> En este curso, ese proyecto fracasó.</a:t>
-            </a:r>
-          </a:p>
-          <a:p>
-            <a:pPr>
-              <a:spcAft>
-                <a:spcPts val="800"/>
-              </a:spcAft>
-            </a:pPr>
-            <a:r>
-              <a:rPr sz="2000" b="0" i="0">
-                <a:solidFill>
-                  <a:srgbClr val="333333"/>
-                </a:solidFill>
-                <a:latin typeface="Calibri"/>
-              </a:rPr>
-              <a:t>–   Un proyecto se juzga por </a:t>
-            </a:r>
-            <a:r>
-              <a:rPr sz="2000" b="1" i="0">
-                <a:solidFill>
-                  <a:srgbClr val="333333"/>
-                </a:solidFill>
-                <a:latin typeface="Calibri"/>
-              </a:rPr>
-              <a:t>si el problema del entorno se redujo y se puede medir</a:t>
-            </a:r>
-            <a:r>
-              <a:rPr sz="2000" b="0" i="0">
-                <a:solidFill>
-                  <a:srgbClr val="333333"/>
-                </a:solidFill>
-                <a:latin typeface="Calibri"/>
-              </a:rPr>
-              <a:t>, no por si la app funciona.</a:t>
-            </a:r>
-          </a:p>
-        </p:txBody>
-      </p:sp>
-      <p:sp>
-        <p:nvSpPr>
-          <p:cNvPr id="6" name="TextBox 5"/>
+        </p:txBody>
+      </p:sp>
+      <p:sp>
+        <p:nvSpPr>
+          <p:cNvPr id="8" name="TextBox 7"/>
           <p:cNvSpPr txBox="1"/>
           <p:nvPr/>
         </p:nvSpPr>

--- a/Introduccion a la Ingenieria/Clases/Clase 3 - Fundamentos basicos de la Ingenieria de Sistemas/Presentacion.pptx
+++ b/Introduccion a la Ingenieria/Clases/Clase 3 - Fundamentos basicos de la Ingenieria de Sistemas/Presentacion.pptx
@@ -591,7 +591,7 @@
           <a:p/>
           <a:p>
             <a:r>
-              <a:t>Esta es una de las dos sesiones donde el Plan de curso autoriza IA, y conviene encuadrarla bien porque de cómo se haga hoy depende cómo la usen todo el semestre. La postura del curso no es prohibirla ni celebrarla: es usarla y verificarla. El asistente es bueno dándole estructura a algo que el equipo ya entiende, y es bueno sugiriendo actores que se pasaron por alto. Es malo, y de una manera peligrosa, en todo lo local y lo cuantitativo.</a:t>
+              <a:t>Esta es una de las dos sesiones donde el Plan de curso autoriza IA, y conviene presentarla bien porque de cómo se haga hoy depende cómo la usen todo el semestre. La postura del curso no es prohibirla ni celebrarla: es usarla y verificarla. El asistente es bueno dándole estructura a algo que el equipo ya entiende, y es bueno sugiriendo actores que se pasaron por alto. Es malo, y de una manera peligrosa, en todo lo local y lo cuantitativo.</a:t>
             </a:r>
           </a:p>
           <a:p/>
@@ -603,7 +603,7 @@
           <a:p/>
           <a:p>
             <a:r>
-              <a:t>Operativamente: el equipo escribe su prompt, pega la respuesta, y luego marca en el documento cada cosa que cambió y por qué. Tres correcciones bien argumentadas valen más que un texto largo. Y hay una consecuencia útil que conviene decirles: la IA solo se puede verificar si uno sabe del tema, así que la herramienta no reemplaza aprender el contenido, lo hace más necesario. Ese argumento funciona mejor que una prohibición.</a:t>
+              <a:t>En la práctica: el equipo escribe su prompt, pega la respuesta, y luego marca en el documento cada cosa que cambió y por qué. Tres correcciones bien argumentadas valen más que un texto largo. Y hay una consecuencia útil que conviene decirles: la IA solo se puede verificar si uno sabe del tema, así que la herramienta no reemplaza aprender el contenido, lo hace más necesario. Ese argumento funciona mejor que una prohibición.</a:t>
             </a:r>
           </a:p>
           <a:p/>
@@ -1283,7 +1283,7 @@
           <a:p/>
           <a:p>
             <a:r>
-              <a:t>Esta es una de las dos sesiones donde el Plan de curso autoriza IA, y conviene encuadrarla bien porque de cómo se haga hoy depende cómo la usen todo el semestre. La postura del curso no es prohibirla ni celebrarla: es usarla y verificarla. El asistente es bueno dándole estructura a algo que el equipo ya entiende, y es bueno sugiriendo actores que se pasaron por alto. Es malo, y de una manera peligrosa, en todo lo local y lo cuantitativo.</a:t>
+              <a:t>Esta es una de las dos sesiones donde el Plan de curso autoriza IA, y conviene presentarla bien porque de cómo se haga hoy depende cómo la usen todo el semestre. La postura del curso no es prohibirla ni celebrarla: es usarla y verificarla. El asistente es bueno dándole estructura a algo que el equipo ya entiende, y es bueno sugiriendo actores que se pasaron por alto. Es malo, y de una manera peligrosa, en todo lo local y lo cuantitativo.</a:t>
             </a:r>
           </a:p>
           <a:p/>
@@ -1295,7 +1295,7 @@
           <a:p/>
           <a:p>
             <a:r>
-              <a:t>Operativamente: el equipo escribe su prompt, pega la respuesta, y luego marca en el documento cada cosa que cambió y por qué. Tres correcciones bien argumentadas valen más que un texto largo. Y hay una consecuencia útil que conviene decirles: la IA solo se puede verificar si uno sabe del tema, así que la herramienta no reemplaza aprender el contenido, lo hace más necesario. Ese argumento funciona mejor que una prohibición.</a:t>
+              <a:t>En la práctica: el equipo escribe su prompt, pega la respuesta, y luego marca en el documento cada cosa que cambió y por qué. Tres correcciones bien argumentadas valen más que un texto largo. Y hay una consecuencia útil que conviene decirles: la IA solo se puede verificar si uno sabe del tema, así que la herramienta no reemplaza aprender el contenido, lo hace más necesario. Ese argumento funciona mejor que una prohibición.</a:t>
             </a:r>
           </a:p>
           <a:p/>
